--- a/docs/theme-preview/pptx/liquid-glass.pptx
+++ b/docs/theme-preview/pptx/liquid-glass.pptx
@@ -366,7 +366,7 @@
             <a:pPr>
               <a:defRPr sz="1100" b="0" i="0" u="none" strike="noStrike">
                 <a:solidFill>
-                  <a:srgbClr val="F8FAFC"/>
+                  <a:srgbClr val="F8F8F8"/>
                 </a:solidFill>
                 <a:latin typeface="Pretendard"/>
               </a:defRPr>
@@ -418,7 +418,7 @@
             <a:pPr>
               <a:defRPr sz="1100" b="0" i="0" u="none" strike="noStrike">
                 <a:solidFill>
-                  <a:srgbClr val="C8D7EA"/>
+                  <a:srgbClr val="6C6C6C"/>
                 </a:solidFill>
                 <a:latin typeface="Pretendard"/>
               </a:defRPr>
@@ -448,7 +448,7 @@
           <a:pPr>
             <a:defRPr sz="1100">
               <a:solidFill>
-                <a:srgbClr val="C8D7EA"/>
+                <a:srgbClr val="6C6C6C"/>
               </a:solidFill>
               <a:latin typeface="Pretendard"/>
               <a:cs typeface="Pretendard"/>
@@ -626,7 +626,7 @@
             <a:pPr>
               <a:defRPr sz="1100" b="0" i="0" u="none" strike="noStrike">
                 <a:solidFill>
-                  <a:srgbClr val="F8FAFC"/>
+                  <a:srgbClr val="F8F8F8"/>
                 </a:solidFill>
                 <a:latin typeface="Pretendard"/>
               </a:defRPr>
@@ -678,7 +678,7 @@
             <a:pPr>
               <a:defRPr sz="1100" b="0" i="0" u="none" strike="noStrike">
                 <a:solidFill>
-                  <a:srgbClr val="C8D7EA"/>
+                  <a:srgbClr val="6C6C6C"/>
                 </a:solidFill>
                 <a:latin typeface="Pretendard"/>
               </a:defRPr>
@@ -4470,7 +4470,7 @@
             <a:r>
               <a:rPr lang="en-US" sz="3400" b="1" dirty="0">
                 <a:solidFill>
-                  <a:srgbClr val="F8FAFC"/>
+                  <a:srgbClr val="F8F8F8"/>
                 </a:solidFill>
                 <a:latin typeface="Pretendard" pitchFamily="34" charset="0"/>
                 <a:ea typeface="Pretendard" pitchFamily="34" charset="-122"/>
@@ -4529,7 +4529,7 @@
             <a:r>
               <a:rPr lang="en-US" sz="2200" dirty="0">
                 <a:solidFill>
-                  <a:srgbClr val="F8FAFC"/>
+                  <a:srgbClr val="F8F8F8"/>
                 </a:solidFill>
                 <a:latin typeface="Pretendard" pitchFamily="34" charset="0"/>
                 <a:ea typeface="Pretendard" pitchFamily="34" charset="-122"/>
@@ -4588,7 +4588,7 @@
             <a:r>
               <a:rPr lang="en-US" sz="2200" dirty="0">
                 <a:solidFill>
-                  <a:srgbClr val="F8FAFC"/>
+                  <a:srgbClr val="F8F8F8"/>
                 </a:solidFill>
                 <a:latin typeface="Pretendard" pitchFamily="34" charset="0"/>
                 <a:ea typeface="Pretendard" pitchFamily="34" charset="-122"/>
@@ -4993,7 +4993,7 @@
             <a:r>
               <a:rPr lang="en-US" sz="3400" b="1" dirty="0">
                 <a:solidFill>
-                  <a:srgbClr val="F8FAFC"/>
+                  <a:srgbClr val="F8F8F8"/>
                 </a:solidFill>
                 <a:latin typeface="Pretendard" pitchFamily="34" charset="0"/>
                 <a:ea typeface="Pretendard" pitchFamily="34" charset="-122"/>
@@ -5294,7 +5294,7 @@
             <a:r>
               <a:rPr lang="en-US" sz="1600" dirty="0">
                 <a:solidFill>
-                  <a:srgbClr val="F8FAFC"/>
+                  <a:srgbClr val="F8F8F8"/>
                 </a:solidFill>
                 <a:latin typeface="Pretendard" pitchFamily="34" charset="0"/>
                 <a:ea typeface="Pretendard" pitchFamily="34" charset="-122"/>
@@ -5475,7 +5475,7 @@
             <a:r>
               <a:rPr lang="en-US" sz="1600" dirty="0">
                 <a:solidFill>
-                  <a:srgbClr val="F8FAFC"/>
+                  <a:srgbClr val="F8F8F8"/>
                 </a:solidFill>
                 <a:latin typeface="Pretendard" pitchFamily="34" charset="0"/>
                 <a:ea typeface="Pretendard" pitchFamily="34" charset="-122"/>
@@ -5656,7 +5656,7 @@
             <a:r>
               <a:rPr lang="en-US" sz="1600" dirty="0">
                 <a:solidFill>
-                  <a:srgbClr val="F8FAFC"/>
+                  <a:srgbClr val="F8F8F8"/>
                 </a:solidFill>
                 <a:latin typeface="Pretendard" pitchFamily="34" charset="0"/>
                 <a:ea typeface="Pretendard" pitchFamily="34" charset="-122"/>
@@ -5837,7 +5837,7 @@
             <a:r>
               <a:rPr lang="en-US" sz="1600" dirty="0">
                 <a:solidFill>
-                  <a:srgbClr val="F8FAFC"/>
+                  <a:srgbClr val="F8F8F8"/>
                 </a:solidFill>
                 <a:latin typeface="Pretendard" pitchFamily="34" charset="0"/>
                 <a:ea typeface="Pretendard" pitchFamily="34" charset="-122"/>
@@ -6018,7 +6018,7 @@
             <a:r>
               <a:rPr lang="en-US" sz="1600" dirty="0">
                 <a:solidFill>
-                  <a:srgbClr val="F8FAFC"/>
+                  <a:srgbClr val="F8F8F8"/>
                 </a:solidFill>
                 <a:latin typeface="Pretendard" pitchFamily="34" charset="0"/>
                 <a:ea typeface="Pretendard" pitchFamily="34" charset="-122"/>
@@ -6199,7 +6199,7 @@
             <a:r>
               <a:rPr lang="en-US" sz="1600" dirty="0">
                 <a:solidFill>
-                  <a:srgbClr val="F8FAFC"/>
+                  <a:srgbClr val="F8F8F8"/>
                 </a:solidFill>
                 <a:latin typeface="Pretendard" pitchFamily="34" charset="0"/>
                 <a:ea typeface="Pretendard" pitchFamily="34" charset="-122"/>
@@ -6996,7 +6996,7 @@
             <a:r>
               <a:rPr lang="en-US" sz="3400" b="1" dirty="0">
                 <a:solidFill>
-                  <a:srgbClr val="F8FAFC"/>
+                  <a:srgbClr val="F8F8F8"/>
                 </a:solidFill>
                 <a:latin typeface="Pretendard" pitchFamily="34" charset="0"/>
                 <a:ea typeface="Pretendard" pitchFamily="34" charset="-122"/>
@@ -7112,7 +7112,7 @@
             <a:r>
               <a:rPr lang="en-US" sz="2200" dirty="0">
                 <a:solidFill>
-                  <a:srgbClr val="F8FAFC"/>
+                  <a:srgbClr val="F8F8F8"/>
                 </a:solidFill>
                 <a:latin typeface="Pretendard" pitchFamily="34" charset="0"/>
                 <a:ea typeface="Pretendard" pitchFamily="34" charset="-122"/>
@@ -7228,7 +7228,7 @@
             <a:r>
               <a:rPr lang="en-US" sz="2200" dirty="0">
                 <a:solidFill>
-                  <a:srgbClr val="F8FAFC"/>
+                  <a:srgbClr val="F8F8F8"/>
                 </a:solidFill>
                 <a:latin typeface="Pretendard" pitchFamily="34" charset="0"/>
                 <a:ea typeface="Pretendard" pitchFamily="34" charset="-122"/>
@@ -7344,7 +7344,7 @@
             <a:r>
               <a:rPr lang="en-US" sz="2200" dirty="0">
                 <a:solidFill>
-                  <a:srgbClr val="F8FAFC"/>
+                  <a:srgbClr val="F8F8F8"/>
                 </a:solidFill>
                 <a:latin typeface="Pretendard" pitchFamily="34" charset="0"/>
                 <a:ea typeface="Pretendard" pitchFamily="34" charset="-122"/>
@@ -7460,7 +7460,7 @@
             <a:r>
               <a:rPr lang="en-US" sz="2200" dirty="0">
                 <a:solidFill>
-                  <a:srgbClr val="F8FAFC"/>
+                  <a:srgbClr val="F8F8F8"/>
                 </a:solidFill>
                 <a:latin typeface="Pretendard" pitchFamily="34" charset="0"/>
                 <a:ea typeface="Pretendard" pitchFamily="34" charset="-122"/>
@@ -7919,7 +7919,7 @@
             <a:r>
               <a:rPr lang="en-US" sz="3400" b="1" dirty="0">
                 <a:solidFill>
-                  <a:srgbClr val="F8FAFC"/>
+                  <a:srgbClr val="F8F8F8"/>
                 </a:solidFill>
                 <a:latin typeface="Pretendard" pitchFamily="34" charset="0"/>
                 <a:ea typeface="Pretendard" pitchFamily="34" charset="-122"/>
@@ -7978,7 +7978,7 @@
             <a:r>
               <a:rPr lang="en-US" sz="2200" dirty="0">
                 <a:solidFill>
-                  <a:srgbClr val="F8FAFC"/>
+                  <a:srgbClr val="F8F8F8"/>
                 </a:solidFill>
                 <a:latin typeface="Pretendard" pitchFamily="34" charset="0"/>
                 <a:ea typeface="Pretendard" pitchFamily="34" charset="-122"/>
@@ -8037,7 +8037,7 @@
             <a:r>
               <a:rPr lang="en-US" sz="2200" dirty="0">
                 <a:solidFill>
-                  <a:srgbClr val="F8FAFC"/>
+                  <a:srgbClr val="F8F8F8"/>
                 </a:solidFill>
                 <a:latin typeface="Pretendard" pitchFamily="34" charset="0"/>
                 <a:ea typeface="Pretendard" pitchFamily="34" charset="-122"/>
@@ -8513,7 +8513,7 @@
             <a:r>
               <a:rPr lang="en-US" sz="3400" b="1" dirty="0">
                 <a:solidFill>
-                  <a:srgbClr val="F8FAFC"/>
+                  <a:srgbClr val="F8F8F8"/>
                 </a:solidFill>
                 <a:latin typeface="Pretendard" pitchFamily="34" charset="0"/>
                 <a:ea typeface="Pretendard" pitchFamily="34" charset="-122"/>
@@ -8770,7 +8770,7 @@
                       <a:r>
                         <a:rPr lang="en-US" sz="1800" b="1" dirty="0">
                           <a:solidFill>
-                            <a:srgbClr val="F8FAFC"/>
+                            <a:srgbClr val="F8F8F8"/>
                           </a:solidFill>
                           <a:latin typeface="Pretendard" pitchFamily="34" charset="0"/>
                           <a:ea typeface="Pretendard" pitchFamily="34" charset="-122"/>
@@ -8835,7 +8835,7 @@
                       <a:r>
                         <a:rPr lang="en-US" sz="1800" dirty="0">
                           <a:solidFill>
-                            <a:srgbClr val="F8FAFC"/>
+                            <a:srgbClr val="F8F8F8"/>
                           </a:solidFill>
                           <a:latin typeface="Pretendard" pitchFamily="34" charset="0"/>
                           <a:ea typeface="Pretendard" pitchFamily="34" charset="-122"/>
@@ -8900,7 +8900,7 @@
                       <a:r>
                         <a:rPr lang="en-US" sz="1800" dirty="0">
                           <a:solidFill>
-                            <a:srgbClr val="F8FAFC"/>
+                            <a:srgbClr val="F8F8F8"/>
                           </a:solidFill>
                           <a:latin typeface="Pretendard" pitchFamily="34" charset="0"/>
                           <a:ea typeface="Pretendard" pitchFamily="34" charset="-122"/>
@@ -8967,7 +8967,7 @@
                       <a:r>
                         <a:rPr lang="en-US" sz="1800" b="1" dirty="0">
                           <a:solidFill>
-                            <a:srgbClr val="F8FAFC"/>
+                            <a:srgbClr val="F8F8F8"/>
                           </a:solidFill>
                           <a:latin typeface="Pretendard" pitchFamily="34" charset="0"/>
                           <a:ea typeface="Pretendard" pitchFamily="34" charset="-122"/>
@@ -9037,7 +9037,7 @@
                       <a:r>
                         <a:rPr lang="en-US" sz="1800" dirty="0">
                           <a:solidFill>
-                            <a:srgbClr val="F8FAFC"/>
+                            <a:srgbClr val="F8F8F8"/>
                           </a:solidFill>
                           <a:latin typeface="Pretendard" pitchFamily="34" charset="0"/>
                           <a:ea typeface="Pretendard" pitchFamily="34" charset="-122"/>
@@ -9107,7 +9107,7 @@
                       <a:r>
                         <a:rPr lang="en-US" sz="1800" dirty="0">
                           <a:solidFill>
-                            <a:srgbClr val="F8FAFC"/>
+                            <a:srgbClr val="F8F8F8"/>
                           </a:solidFill>
                           <a:latin typeface="Pretendard" pitchFamily="34" charset="0"/>
                           <a:ea typeface="Pretendard" pitchFamily="34" charset="-122"/>
@@ -9179,7 +9179,7 @@
                       <a:r>
                         <a:rPr lang="en-US" sz="1800" b="1" dirty="0">
                           <a:solidFill>
-                            <a:srgbClr val="F8FAFC"/>
+                            <a:srgbClr val="F8F8F8"/>
                           </a:solidFill>
                           <a:latin typeface="Pretendard" pitchFamily="34" charset="0"/>
                           <a:ea typeface="Pretendard" pitchFamily="34" charset="-122"/>
@@ -9244,7 +9244,7 @@
                       <a:r>
                         <a:rPr lang="en-US" sz="1800" dirty="0">
                           <a:solidFill>
-                            <a:srgbClr val="F8FAFC"/>
+                            <a:srgbClr val="F8F8F8"/>
                           </a:solidFill>
                           <a:latin typeface="Pretendard" pitchFamily="34" charset="0"/>
                           <a:ea typeface="Pretendard" pitchFamily="34" charset="-122"/>
@@ -9309,7 +9309,7 @@
                       <a:r>
                         <a:rPr lang="en-US" sz="1800" dirty="0">
                           <a:solidFill>
-                            <a:srgbClr val="F8FAFC"/>
+                            <a:srgbClr val="F8F8F8"/>
                           </a:solidFill>
                           <a:latin typeface="Pretendard" pitchFamily="34" charset="0"/>
                           <a:ea typeface="Pretendard" pitchFamily="34" charset="-122"/>
@@ -9376,7 +9376,7 @@
                       <a:r>
                         <a:rPr lang="en-US" sz="1800" b="1" dirty="0">
                           <a:solidFill>
-                            <a:srgbClr val="F8FAFC"/>
+                            <a:srgbClr val="F8F8F8"/>
                           </a:solidFill>
                           <a:latin typeface="Pretendard" pitchFamily="34" charset="0"/>
                           <a:ea typeface="Pretendard" pitchFamily="34" charset="-122"/>
@@ -9446,7 +9446,7 @@
                       <a:r>
                         <a:rPr lang="en-US" sz="1800" dirty="0">
                           <a:solidFill>
-                            <a:srgbClr val="F8FAFC"/>
+                            <a:srgbClr val="F8F8F8"/>
                           </a:solidFill>
                           <a:latin typeface="Pretendard" pitchFamily="34" charset="0"/>
                           <a:ea typeface="Pretendard" pitchFamily="34" charset="-122"/>
@@ -9516,7 +9516,7 @@
                       <a:r>
                         <a:rPr lang="en-US" sz="1800" dirty="0">
                           <a:solidFill>
-                            <a:srgbClr val="F8FAFC"/>
+                            <a:srgbClr val="F8F8F8"/>
                           </a:solidFill>
                           <a:latin typeface="Pretendard" pitchFamily="34" charset="0"/>
                           <a:ea typeface="Pretendard" pitchFamily="34" charset="-122"/>
@@ -10071,7 +10071,7 @@
             <a:r>
               <a:rPr lang="en-US" sz="3400" b="1" dirty="0">
                 <a:solidFill>
-                  <a:srgbClr val="F8FAFC"/>
+                  <a:srgbClr val="F8F8F8"/>
                 </a:solidFill>
                 <a:latin typeface="Pretendard" pitchFamily="34" charset="0"/>
                 <a:ea typeface="Pretendard" pitchFamily="34" charset="-122"/>
@@ -10130,7 +10130,7 @@
             <a:r>
               <a:rPr lang="en-US" sz="2200" dirty="0">
                 <a:solidFill>
-                  <a:srgbClr val="F8FAFC"/>
+                  <a:srgbClr val="F8F8F8"/>
                 </a:solidFill>
                 <a:latin typeface="Pretendard" pitchFamily="34" charset="0"/>
                 <a:ea typeface="Pretendard" pitchFamily="34" charset="-122"/>
@@ -10170,7 +10170,7 @@
             <a:r>
               <a:rPr lang="en-US" sz="2200" dirty="0">
                 <a:solidFill>
-                  <a:srgbClr val="F8FAFC"/>
+                  <a:srgbClr val="F8F8F8"/>
                 </a:solidFill>
                 <a:latin typeface="Pretendard" pitchFamily="34" charset="0"/>
                 <a:ea typeface="Pretendard" pitchFamily="34" charset="-122"/>
@@ -10210,7 +10210,7 @@
             <a:r>
               <a:rPr lang="en-US" sz="2200" dirty="0">
                 <a:solidFill>
-                  <a:srgbClr val="F8FAFC"/>
+                  <a:srgbClr val="F8F8F8"/>
                 </a:solidFill>
                 <a:latin typeface="Pretendard" pitchFamily="34" charset="0"/>
                 <a:ea typeface="Pretendard" pitchFamily="34" charset="-122"/>
@@ -10702,7 +10702,7 @@
             <a:r>
               <a:rPr lang="en-US" sz="3400" b="1" dirty="0">
                 <a:solidFill>
-                  <a:srgbClr val="F8FAFC"/>
+                  <a:srgbClr val="F8F8F8"/>
                 </a:solidFill>
                 <a:latin typeface="Pretendard" pitchFamily="34" charset="0"/>
                 <a:ea typeface="Pretendard" pitchFamily="34" charset="-122"/>
@@ -10959,7 +10959,7 @@
                       <a:r>
                         <a:rPr lang="en-US" sz="1800" b="1" dirty="0">
                           <a:solidFill>
-                            <a:srgbClr val="F8FAFC"/>
+                            <a:srgbClr val="F8F8F8"/>
                           </a:solidFill>
                           <a:latin typeface="Pretendard" pitchFamily="34" charset="0"/>
                           <a:ea typeface="Pretendard" pitchFamily="34" charset="-122"/>
@@ -11024,7 +11024,7 @@
                       <a:r>
                         <a:rPr lang="en-US" sz="1800" dirty="0">
                           <a:solidFill>
-                            <a:srgbClr val="F8FAFC"/>
+                            <a:srgbClr val="F8F8F8"/>
                           </a:solidFill>
                           <a:latin typeface="Pretendard" pitchFamily="34" charset="0"/>
                           <a:ea typeface="Pretendard" pitchFamily="34" charset="-122"/>
@@ -11089,7 +11089,7 @@
                       <a:r>
                         <a:rPr lang="en-US" sz="1800" dirty="0">
                           <a:solidFill>
-                            <a:srgbClr val="F8FAFC"/>
+                            <a:srgbClr val="F8F8F8"/>
                           </a:solidFill>
                           <a:latin typeface="Pretendard" pitchFamily="34" charset="0"/>
                           <a:ea typeface="Pretendard" pitchFamily="34" charset="-122"/>
@@ -11156,7 +11156,7 @@
                       <a:r>
                         <a:rPr lang="en-US" sz="1800" b="1" dirty="0">
                           <a:solidFill>
-                            <a:srgbClr val="F8FAFC"/>
+                            <a:srgbClr val="F8F8F8"/>
                           </a:solidFill>
                           <a:latin typeface="Pretendard" pitchFamily="34" charset="0"/>
                           <a:ea typeface="Pretendard" pitchFamily="34" charset="-122"/>
@@ -11226,7 +11226,7 @@
                       <a:r>
                         <a:rPr lang="en-US" sz="1800" dirty="0">
                           <a:solidFill>
-                            <a:srgbClr val="F8FAFC"/>
+                            <a:srgbClr val="F8F8F8"/>
                           </a:solidFill>
                           <a:latin typeface="Pretendard" pitchFamily="34" charset="0"/>
                           <a:ea typeface="Pretendard" pitchFamily="34" charset="-122"/>
@@ -11296,7 +11296,7 @@
                       <a:r>
                         <a:rPr lang="en-US" sz="1800" dirty="0">
                           <a:solidFill>
-                            <a:srgbClr val="F8FAFC"/>
+                            <a:srgbClr val="F8F8F8"/>
                           </a:solidFill>
                           <a:latin typeface="Pretendard" pitchFamily="34" charset="0"/>
                           <a:ea typeface="Pretendard" pitchFamily="34" charset="-122"/>
@@ -11368,7 +11368,7 @@
                       <a:r>
                         <a:rPr lang="en-US" sz="1800" b="1" dirty="0">
                           <a:solidFill>
-                            <a:srgbClr val="F8FAFC"/>
+                            <a:srgbClr val="F8F8F8"/>
                           </a:solidFill>
                           <a:latin typeface="Pretendard" pitchFamily="34" charset="0"/>
                           <a:ea typeface="Pretendard" pitchFamily="34" charset="-122"/>
@@ -11433,7 +11433,7 @@
                       <a:r>
                         <a:rPr lang="en-US" sz="1800" dirty="0">
                           <a:solidFill>
-                            <a:srgbClr val="F8FAFC"/>
+                            <a:srgbClr val="F8F8F8"/>
                           </a:solidFill>
                           <a:latin typeface="Pretendard" pitchFamily="34" charset="0"/>
                           <a:ea typeface="Pretendard" pitchFamily="34" charset="-122"/>
@@ -11498,7 +11498,7 @@
                       <a:r>
                         <a:rPr lang="en-US" sz="1800" dirty="0">
                           <a:solidFill>
-                            <a:srgbClr val="F8FAFC"/>
+                            <a:srgbClr val="F8F8F8"/>
                           </a:solidFill>
                           <a:latin typeface="Pretendard" pitchFamily="34" charset="0"/>
                           <a:ea typeface="Pretendard" pitchFamily="34" charset="-122"/>
@@ -12021,7 +12021,7 @@
             <a:r>
               <a:rPr lang="en-US" sz="3400" b="1" dirty="0">
                 <a:solidFill>
-                  <a:srgbClr val="F8FAFC"/>
+                  <a:srgbClr val="F8F8F8"/>
                 </a:solidFill>
                 <a:latin typeface="Pretendard" pitchFamily="34" charset="0"/>
                 <a:ea typeface="Pretendard" pitchFamily="34" charset="-122"/>
@@ -12212,7 +12212,7 @@
             <a:r>
               <a:rPr lang="en-US" sz="3000" b="1" dirty="0">
                 <a:solidFill>
-                  <a:srgbClr val="F8FAFC"/>
+                  <a:srgbClr val="F8F8F8"/>
                 </a:solidFill>
                 <a:latin typeface="Pretendard" pitchFamily="34" charset="0"/>
                 <a:ea typeface="Pretendard" pitchFamily="34" charset="-122"/>
@@ -12254,7 +12254,7 @@
             <a:r>
               <a:rPr lang="en-US" sz="1600" dirty="0">
                 <a:solidFill>
-                  <a:srgbClr val="C8D7EA"/>
+                  <a:srgbClr val="6C6C6C"/>
                 </a:solidFill>
                 <a:latin typeface="Pretendard" pitchFamily="34" charset="0"/>
                 <a:ea typeface="Pretendard" pitchFamily="34" charset="-122"/>
@@ -12325,7 +12325,7 @@
             <a:r>
               <a:rPr lang="en-US" sz="1600" b="1" dirty="0">
                 <a:solidFill>
-                  <a:srgbClr val="F8FAFC"/>
+                  <a:srgbClr val="F8F8F8"/>
                 </a:solidFill>
                 <a:latin typeface="Pretendard" pitchFamily="34" charset="0"/>
                 <a:ea typeface="Pretendard" pitchFamily="34" charset="-122"/>
@@ -12396,7 +12396,7 @@
             <a:r>
               <a:rPr lang="en-US" sz="1600" dirty="0">
                 <a:solidFill>
-                  <a:srgbClr val="C8D7EA"/>
+                  <a:srgbClr val="6C6C6C"/>
                 </a:solidFill>
                 <a:latin typeface="Pretendard" pitchFamily="34" charset="0"/>
                 <a:ea typeface="Pretendard" pitchFamily="34" charset="-122"/>
@@ -12485,7 +12485,7 @@
           <a:noFill/>
           <a:ln w="12700">
             <a:solidFill>
-              <a:srgbClr val="F8FAFC"/>
+              <a:srgbClr val="F8F8F8"/>
             </a:solidFill>
             <a:prstDash val="solid"/>
           </a:ln>
@@ -12598,7 +12598,7 @@
             <a:r>
               <a:rPr lang="en-US" sz="3200" b="1" dirty="0">
                 <a:solidFill>
-                  <a:srgbClr val="F8FAFC"/>
+                  <a:srgbClr val="F8F8F8"/>
                 </a:solidFill>
                 <a:latin typeface="Pretendard" pitchFamily="34" charset="0"/>
                 <a:ea typeface="Pretendard" pitchFamily="34" charset="-122"/>
@@ -12640,7 +12640,7 @@
             <a:r>
               <a:rPr lang="en-US" sz="1700" dirty="0">
                 <a:solidFill>
-                  <a:srgbClr val="C8D7EA"/>
+                  <a:srgbClr val="6C6C6C"/>
                 </a:solidFill>
                 <a:latin typeface="Pretendard" pitchFamily="34" charset="0"/>
                 <a:ea typeface="Pretendard" pitchFamily="34" charset="-122"/>
@@ -12682,7 +12682,7 @@
             <a:r>
               <a:rPr lang="en-US" sz="1400" dirty="0">
                 <a:solidFill>
-                  <a:srgbClr val="C8D7EA"/>
+                  <a:srgbClr val="6C6C6C"/>
                 </a:solidFill>
                 <a:latin typeface="Pretendard" pitchFamily="34" charset="0"/>
                 <a:ea typeface="Pretendard" pitchFamily="34" charset="-122"/>
@@ -12724,7 +12724,7 @@
             <a:r>
               <a:rPr lang="en-US" sz="1400" dirty="0">
                 <a:solidFill>
-                  <a:srgbClr val="C8D7EA"/>
+                  <a:srgbClr val="6C6C6C"/>
                 </a:solidFill>
                 <a:latin typeface="Pretendard" pitchFamily="34" charset="0"/>
                 <a:ea typeface="Pretendard" pitchFamily="34" charset="-122"/>
@@ -13200,7 +13200,7 @@
             <a:r>
               <a:rPr lang="en-US" sz="3400" b="1" dirty="0">
                 <a:solidFill>
-                  <a:srgbClr val="F8FAFC"/>
+                  <a:srgbClr val="F8F8F8"/>
                 </a:solidFill>
                 <a:latin typeface="Pretendard" pitchFamily="34" charset="0"/>
                 <a:ea typeface="Pretendard" pitchFamily="34" charset="-122"/>
@@ -13298,7 +13298,7 @@
             <a:r>
               <a:rPr lang="en-US" sz="1800" b="1" dirty="0">
                 <a:solidFill>
-                  <a:srgbClr val="F8FAFC"/>
+                  <a:srgbClr val="F8F8F8"/>
                 </a:solidFill>
                 <a:latin typeface="Pretendard" pitchFamily="34" charset="0"/>
                 <a:ea typeface="Pretendard" pitchFamily="34" charset="-122"/>
@@ -13440,7 +13440,7 @@
             <a:r>
               <a:rPr lang="en-US" sz="1800" b="1" dirty="0">
                 <a:solidFill>
-                  <a:srgbClr val="F8FAFC"/>
+                  <a:srgbClr val="F8F8F8"/>
                 </a:solidFill>
                 <a:latin typeface="Pretendard" pitchFamily="34" charset="0"/>
                 <a:ea typeface="Pretendard" pitchFamily="34" charset="-122"/>
@@ -13582,7 +13582,7 @@
             <a:r>
               <a:rPr lang="en-US" sz="1800" b="1" dirty="0">
                 <a:solidFill>
-                  <a:srgbClr val="F8FAFC"/>
+                  <a:srgbClr val="F8F8F8"/>
                 </a:solidFill>
                 <a:latin typeface="Pretendard" pitchFamily="34" charset="0"/>
                 <a:ea typeface="Pretendard" pitchFamily="34" charset="-122"/>
@@ -13724,7 +13724,7 @@
             <a:r>
               <a:rPr lang="en-US" sz="1800" b="1" dirty="0">
                 <a:solidFill>
-                  <a:srgbClr val="F8FAFC"/>
+                  <a:srgbClr val="F8F8F8"/>
                 </a:solidFill>
                 <a:latin typeface="Pretendard" pitchFamily="34" charset="0"/>
                 <a:ea typeface="Pretendard" pitchFamily="34" charset="-122"/>
@@ -14568,7 +14568,7 @@
             <a:r>
               <a:rPr lang="en-US" sz="3400" b="1" dirty="0">
                 <a:solidFill>
-                  <a:srgbClr val="F8FAFC"/>
+                  <a:srgbClr val="F8F8F8"/>
                 </a:solidFill>
                 <a:latin typeface="Pretendard" pitchFamily="34" charset="0"/>
                 <a:ea typeface="Pretendard" pitchFamily="34" charset="-122"/>
@@ -14684,7 +14684,7 @@
             <a:r>
               <a:rPr lang="en-US" sz="2200" dirty="0">
                 <a:solidFill>
-                  <a:srgbClr val="F8FAFC"/>
+                  <a:srgbClr val="F8F8F8"/>
                 </a:solidFill>
                 <a:latin typeface="Pretendard" pitchFamily="34" charset="0"/>
                 <a:ea typeface="Pretendard" pitchFamily="34" charset="-122"/>
@@ -14800,7 +14800,7 @@
             <a:r>
               <a:rPr lang="en-US" sz="2200" dirty="0">
                 <a:solidFill>
-                  <a:srgbClr val="F8FAFC"/>
+                  <a:srgbClr val="F8F8F8"/>
                 </a:solidFill>
                 <a:latin typeface="Pretendard" pitchFamily="34" charset="0"/>
                 <a:ea typeface="Pretendard" pitchFamily="34" charset="-122"/>
@@ -14916,7 +14916,7 @@
             <a:r>
               <a:rPr lang="en-US" sz="2200" dirty="0">
                 <a:solidFill>
-                  <a:srgbClr val="F8FAFC"/>
+                  <a:srgbClr val="F8F8F8"/>
                 </a:solidFill>
                 <a:latin typeface="Pretendard" pitchFamily="34" charset="0"/>
                 <a:ea typeface="Pretendard" pitchFamily="34" charset="-122"/>
@@ -15782,7 +15782,7 @@
             <a:r>
               <a:rPr lang="en-US" sz="3800" b="1" dirty="0">
                 <a:solidFill>
-                  <a:srgbClr val="F8FAFC"/>
+                  <a:srgbClr val="F8F8F8"/>
                 </a:solidFill>
                 <a:latin typeface="Pretendard" pitchFamily="34" charset="0"/>
                 <a:ea typeface="Pretendard" pitchFamily="34" charset="-122"/>
@@ -15824,7 +15824,7 @@
             <a:r>
               <a:rPr lang="en-US" sz="1800" dirty="0">
                 <a:solidFill>
-                  <a:srgbClr val="F8FAFC"/>
+                  <a:srgbClr val="F8F8F8"/>
                 </a:solidFill>
                 <a:latin typeface="Pretendard" pitchFamily="34" charset="0"/>
                 <a:ea typeface="Pretendard" pitchFamily="34" charset="-122"/>
@@ -15866,7 +15866,7 @@
             <a:r>
               <a:rPr lang="en-US" sz="1800" dirty="0">
                 <a:solidFill>
-                  <a:srgbClr val="F8FAFC"/>
+                  <a:srgbClr val="F8F8F8"/>
                 </a:solidFill>
                 <a:latin typeface="Pretendard" pitchFamily="34" charset="0"/>
                 <a:ea typeface="Pretendard" pitchFamily="34" charset="-122"/>
@@ -15908,7 +15908,7 @@
             <a:r>
               <a:rPr lang="en-US" sz="1800" dirty="0">
                 <a:solidFill>
-                  <a:srgbClr val="F8FAFC"/>
+                  <a:srgbClr val="F8F8F8"/>
                 </a:solidFill>
                 <a:latin typeface="Pretendard" pitchFamily="34" charset="0"/>
                 <a:ea typeface="Pretendard" pitchFamily="34" charset="-122"/>
@@ -15950,7 +15950,7 @@
             <a:r>
               <a:rPr lang="en-US" sz="1800" dirty="0">
                 <a:solidFill>
-                  <a:srgbClr val="F8FAFC"/>
+                  <a:srgbClr val="F8F8F8"/>
                 </a:solidFill>
                 <a:latin typeface="Pretendard" pitchFamily="34" charset="0"/>
                 <a:ea typeface="Pretendard" pitchFamily="34" charset="-122"/>
@@ -15992,7 +15992,7 @@
             <a:r>
               <a:rPr lang="en-US" sz="1800" dirty="0">
                 <a:solidFill>
-                  <a:srgbClr val="F8FAFC"/>
+                  <a:srgbClr val="F8F8F8"/>
                 </a:solidFill>
                 <a:latin typeface="Pretendard" pitchFamily="34" charset="0"/>
                 <a:ea typeface="Pretendard" pitchFamily="34" charset="-122"/>
@@ -16034,7 +16034,7 @@
             <a:r>
               <a:rPr lang="en-US" sz="1800" dirty="0">
                 <a:solidFill>
-                  <a:srgbClr val="F8FAFC"/>
+                  <a:srgbClr val="F8F8F8"/>
                 </a:solidFill>
                 <a:latin typeface="Pretendard" pitchFamily="34" charset="0"/>
                 <a:ea typeface="Pretendard" pitchFamily="34" charset="-122"/>
@@ -16076,7 +16076,7 @@
             <a:r>
               <a:rPr lang="en-US" sz="1800" dirty="0">
                 <a:solidFill>
-                  <a:srgbClr val="F8FAFC"/>
+                  <a:srgbClr val="F8F8F8"/>
                 </a:solidFill>
                 <a:latin typeface="Pretendard" pitchFamily="34" charset="0"/>
                 <a:ea typeface="Pretendard" pitchFamily="34" charset="-122"/>
@@ -16118,7 +16118,7 @@
             <a:r>
               <a:rPr lang="en-US" sz="1800" dirty="0">
                 <a:solidFill>
-                  <a:srgbClr val="F8FAFC"/>
+                  <a:srgbClr val="F8F8F8"/>
                 </a:solidFill>
                 <a:latin typeface="Pretendard" pitchFamily="34" charset="0"/>
                 <a:ea typeface="Pretendard" pitchFamily="34" charset="-122"/>
@@ -16160,7 +16160,7 @@
             <a:r>
               <a:rPr lang="en-US" sz="1800" dirty="0">
                 <a:solidFill>
-                  <a:srgbClr val="F8FAFC"/>
+                  <a:srgbClr val="F8F8F8"/>
                 </a:solidFill>
                 <a:latin typeface="Pretendard" pitchFamily="34" charset="0"/>
                 <a:ea typeface="Pretendard" pitchFamily="34" charset="-122"/>
@@ -16202,7 +16202,7 @@
             <a:r>
               <a:rPr lang="en-US" sz="1800" dirty="0">
                 <a:solidFill>
-                  <a:srgbClr val="F8FAFC"/>
+                  <a:srgbClr val="F8F8F8"/>
                 </a:solidFill>
                 <a:latin typeface="Pretendard" pitchFamily="34" charset="0"/>
                 <a:ea typeface="Pretendard" pitchFamily="34" charset="-122"/>
@@ -16244,7 +16244,7 @@
             <a:r>
               <a:rPr lang="en-US" sz="1800" dirty="0">
                 <a:solidFill>
-                  <a:srgbClr val="F8FAFC"/>
+                  <a:srgbClr val="F8F8F8"/>
                 </a:solidFill>
                 <a:latin typeface="Pretendard" pitchFamily="34" charset="0"/>
                 <a:ea typeface="Pretendard" pitchFamily="34" charset="-122"/>
@@ -16286,7 +16286,7 @@
             <a:r>
               <a:rPr lang="en-US" sz="1800" dirty="0">
                 <a:solidFill>
-                  <a:srgbClr val="F8FAFC"/>
+                  <a:srgbClr val="F8F8F8"/>
                 </a:solidFill>
                 <a:latin typeface="Pretendard" pitchFamily="34" charset="0"/>
                 <a:ea typeface="Pretendard" pitchFamily="34" charset="-122"/>
@@ -16328,7 +16328,7 @@
             <a:r>
               <a:rPr lang="en-US" sz="1800" dirty="0">
                 <a:solidFill>
-                  <a:srgbClr val="F8FAFC"/>
+                  <a:srgbClr val="F8F8F8"/>
                 </a:solidFill>
                 <a:latin typeface="Pretendard" pitchFamily="34" charset="0"/>
                 <a:ea typeface="Pretendard" pitchFamily="34" charset="-122"/>
@@ -16370,7 +16370,7 @@
             <a:r>
               <a:rPr lang="en-US" sz="1800" dirty="0">
                 <a:solidFill>
-                  <a:srgbClr val="F8FAFC"/>
+                  <a:srgbClr val="F8F8F8"/>
                 </a:solidFill>
                 <a:latin typeface="Pretendard" pitchFamily="34" charset="0"/>
                 <a:ea typeface="Pretendard" pitchFamily="34" charset="-122"/>
@@ -16829,7 +16829,7 @@
             <a:r>
               <a:rPr lang="en-US" sz="3400" b="1" dirty="0">
                 <a:solidFill>
-                  <a:srgbClr val="F8FAFC"/>
+                  <a:srgbClr val="F8F8F8"/>
                 </a:solidFill>
                 <a:latin typeface="Pretendard" pitchFamily="34" charset="0"/>
                 <a:ea typeface="Pretendard" pitchFamily="34" charset="-122"/>
@@ -16888,7 +16888,7 @@
             <a:r>
               <a:rPr lang="en-US" sz="2200" dirty="0">
                 <a:solidFill>
-                  <a:srgbClr val="F8FAFC"/>
+                  <a:srgbClr val="F8F8F8"/>
                 </a:solidFill>
                 <a:latin typeface="Pretendard" pitchFamily="34" charset="0"/>
                 <a:ea typeface="Pretendard" pitchFamily="34" charset="-122"/>
@@ -16947,7 +16947,7 @@
             <a:r>
               <a:rPr lang="en-US" sz="2200" dirty="0">
                 <a:solidFill>
-                  <a:srgbClr val="F8FAFC"/>
+                  <a:srgbClr val="F8F8F8"/>
                 </a:solidFill>
                 <a:latin typeface="Pretendard" pitchFamily="34" charset="0"/>
                 <a:ea typeface="Pretendard" pitchFamily="34" charset="-122"/>
@@ -17744,7 +17744,7 @@
             <a:r>
               <a:rPr lang="en-US" sz="3400" b="1" dirty="0">
                 <a:solidFill>
-                  <a:srgbClr val="F8FAFC"/>
+                  <a:srgbClr val="F8F8F8"/>
                 </a:solidFill>
                 <a:latin typeface="Pretendard" pitchFamily="34" charset="0"/>
                 <a:ea typeface="Pretendard" pitchFamily="34" charset="-122"/>
@@ -17860,7 +17860,7 @@
             <a:r>
               <a:rPr lang="en-US" sz="2200" dirty="0">
                 <a:solidFill>
-                  <a:srgbClr val="F8FAFC"/>
+                  <a:srgbClr val="F8F8F8"/>
                 </a:solidFill>
                 <a:latin typeface="Pretendard" pitchFamily="34" charset="0"/>
                 <a:ea typeface="Pretendard" pitchFamily="34" charset="-122"/>
@@ -17976,7 +17976,7 @@
             <a:r>
               <a:rPr lang="en-US" sz="2200" dirty="0">
                 <a:solidFill>
-                  <a:srgbClr val="F8FAFC"/>
+                  <a:srgbClr val="F8F8F8"/>
                 </a:solidFill>
                 <a:latin typeface="Pretendard" pitchFamily="34" charset="0"/>
                 <a:ea typeface="Pretendard" pitchFamily="34" charset="-122"/>
@@ -18092,7 +18092,7 @@
             <a:r>
               <a:rPr lang="en-US" sz="2200" dirty="0">
                 <a:solidFill>
-                  <a:srgbClr val="F8FAFC"/>
+                  <a:srgbClr val="F8F8F8"/>
                 </a:solidFill>
                 <a:latin typeface="Pretendard" pitchFamily="34" charset="0"/>
                 <a:ea typeface="Pretendard" pitchFamily="34" charset="-122"/>
@@ -18208,7 +18208,7 @@
             <a:r>
               <a:rPr lang="en-US" sz="2200" dirty="0">
                 <a:solidFill>
-                  <a:srgbClr val="F8FAFC"/>
+                  <a:srgbClr val="F8F8F8"/>
                 </a:solidFill>
                 <a:latin typeface="Pretendard" pitchFamily="34" charset="0"/>
                 <a:ea typeface="Pretendard" pitchFamily="34" charset="-122"/>
@@ -19005,7 +19005,7 @@
             <a:r>
               <a:rPr lang="en-US" sz="3400" b="1" dirty="0">
                 <a:solidFill>
-                  <a:srgbClr val="F8FAFC"/>
+                  <a:srgbClr val="F8F8F8"/>
                 </a:solidFill>
                 <a:latin typeface="Pretendard" pitchFamily="34" charset="0"/>
                 <a:ea typeface="Pretendard" pitchFamily="34" charset="-122"/>
@@ -19121,7 +19121,7 @@
             <a:r>
               <a:rPr lang="en-US" sz="2200" dirty="0">
                 <a:solidFill>
-                  <a:srgbClr val="F8FAFC"/>
+                  <a:srgbClr val="F8F8F8"/>
                 </a:solidFill>
                 <a:latin typeface="Pretendard" pitchFamily="34" charset="0"/>
                 <a:ea typeface="Pretendard" pitchFamily="34" charset="-122"/>
@@ -19237,7 +19237,7 @@
             <a:r>
               <a:rPr lang="en-US" sz="2200" dirty="0">
                 <a:solidFill>
-                  <a:srgbClr val="F8FAFC"/>
+                  <a:srgbClr val="F8F8F8"/>
                 </a:solidFill>
                 <a:latin typeface="Pretendard" pitchFamily="34" charset="0"/>
                 <a:ea typeface="Pretendard" pitchFamily="34" charset="-122"/>
@@ -19353,7 +19353,7 @@
             <a:r>
               <a:rPr lang="en-US" sz="2200" dirty="0">
                 <a:solidFill>
-                  <a:srgbClr val="F8FAFC"/>
+                  <a:srgbClr val="F8F8F8"/>
                 </a:solidFill>
                 <a:latin typeface="Pretendard" pitchFamily="34" charset="0"/>
                 <a:ea typeface="Pretendard" pitchFamily="34" charset="-122"/>
@@ -19469,7 +19469,7 @@
             <a:r>
               <a:rPr lang="en-US" sz="2200" dirty="0">
                 <a:solidFill>
-                  <a:srgbClr val="F8FAFC"/>
+                  <a:srgbClr val="F8F8F8"/>
                 </a:solidFill>
                 <a:latin typeface="Pretendard" pitchFamily="34" charset="0"/>
                 <a:ea typeface="Pretendard" pitchFamily="34" charset="-122"/>
@@ -19972,7 +19972,7 @@
             <a:r>
               <a:rPr lang="en-US" sz="3400" b="1" dirty="0">
                 <a:solidFill>
-                  <a:srgbClr val="F8FAFC"/>
+                  <a:srgbClr val="F8F8F8"/>
                 </a:solidFill>
                 <a:latin typeface="Pretendard" pitchFamily="34" charset="0"/>
                 <a:ea typeface="Pretendard" pitchFamily="34" charset="-122"/>
@@ -20031,7 +20031,7 @@
             <a:r>
               <a:rPr lang="en-US" sz="2200" dirty="0">
                 <a:solidFill>
-                  <a:srgbClr val="F8FAFC"/>
+                  <a:srgbClr val="F8F8F8"/>
                 </a:solidFill>
                 <a:latin typeface="Pretendard" pitchFamily="34" charset="0"/>
                 <a:ea typeface="Pretendard" pitchFamily="34" charset="-122"/>
@@ -20071,7 +20071,7 @@
             <a:r>
               <a:rPr lang="en-US" sz="2200" dirty="0">
                 <a:solidFill>
-                  <a:srgbClr val="F8FAFC"/>
+                  <a:srgbClr val="F8F8F8"/>
                 </a:solidFill>
                 <a:latin typeface="Pretendard" pitchFamily="34" charset="0"/>
                 <a:ea typeface="Pretendard" pitchFamily="34" charset="-122"/>
@@ -20111,7 +20111,7 @@
             <a:r>
               <a:rPr lang="en-US" sz="2200" dirty="0">
                 <a:solidFill>
-                  <a:srgbClr val="F8FAFC"/>
+                  <a:srgbClr val="F8F8F8"/>
                 </a:solidFill>
                 <a:latin typeface="Pretendard" pitchFamily="34" charset="0"/>
                 <a:ea typeface="Pretendard" pitchFamily="34" charset="-122"/>
@@ -20786,7 +20786,7 @@
             <a:r>
               <a:rPr lang="en-US" sz="3400" b="1" dirty="0">
                 <a:solidFill>
-                  <a:srgbClr val="F8FAFC"/>
+                  <a:srgbClr val="F8F8F8"/>
                 </a:solidFill>
                 <a:latin typeface="Pretendard" pitchFamily="34" charset="0"/>
                 <a:ea typeface="Pretendard" pitchFamily="34" charset="-122"/>
@@ -20990,7 +20990,7 @@
                       <a:r>
                         <a:rPr lang="en-US" sz="1800" b="1" dirty="0">
                           <a:solidFill>
-                            <a:srgbClr val="F8FAFC"/>
+                            <a:srgbClr val="F8F8F8"/>
                           </a:solidFill>
                           <a:latin typeface="Pretendard" pitchFamily="34" charset="0"/>
                           <a:ea typeface="Pretendard" pitchFamily="34" charset="-122"/>
@@ -21055,7 +21055,7 @@
                       <a:r>
                         <a:rPr lang="en-US" sz="1800" dirty="0">
                           <a:solidFill>
-                            <a:srgbClr val="F8FAFC"/>
+                            <a:srgbClr val="F8F8F8"/>
                           </a:solidFill>
                           <a:latin typeface="Pretendard" pitchFamily="34" charset="0"/>
                           <a:ea typeface="Pretendard" pitchFamily="34" charset="-122"/>
@@ -21122,7 +21122,7 @@
                       <a:r>
                         <a:rPr lang="en-US" sz="1800" b="1" dirty="0">
                           <a:solidFill>
-                            <a:srgbClr val="F8FAFC"/>
+                            <a:srgbClr val="F8F8F8"/>
                           </a:solidFill>
                           <a:latin typeface="Pretendard" pitchFamily="34" charset="0"/>
                           <a:ea typeface="Pretendard" pitchFamily="34" charset="-122"/>
@@ -21192,7 +21192,7 @@
                       <a:r>
                         <a:rPr lang="en-US" sz="1800" dirty="0">
                           <a:solidFill>
-                            <a:srgbClr val="F8FAFC"/>
+                            <a:srgbClr val="F8F8F8"/>
                           </a:solidFill>
                           <a:latin typeface="Pretendard" pitchFamily="34" charset="0"/>
                           <a:ea typeface="Pretendard" pitchFamily="34" charset="-122"/>
@@ -21303,7 +21303,7 @@
             <a:r>
               <a:rPr lang="en-US" sz="1800" dirty="0">
                 <a:solidFill>
-                  <a:srgbClr val="F8FAFC"/>
+                  <a:srgbClr val="F8F8F8"/>
                 </a:solidFill>
                 <a:latin typeface="Pretendard" pitchFamily="34" charset="0"/>
                 <a:ea typeface="Pretendard" pitchFamily="34" charset="-122"/>
@@ -21343,7 +21343,7 @@
             <a:r>
               <a:rPr lang="en-US" sz="1800" dirty="0">
                 <a:solidFill>
-                  <a:srgbClr val="F8FAFC"/>
+                  <a:srgbClr val="F8F8F8"/>
                 </a:solidFill>
                 <a:latin typeface="Pretendard" pitchFamily="34" charset="0"/>
                 <a:ea typeface="Pretendard" pitchFamily="34" charset="-122"/>
@@ -22101,7 +22101,7 @@
             <a:r>
               <a:rPr lang="en-US" sz="3400" b="1" dirty="0">
                 <a:solidFill>
-                  <a:srgbClr val="F8FAFC"/>
+                  <a:srgbClr val="F8F8F8"/>
                 </a:solidFill>
                 <a:latin typeface="Pretendard" pitchFamily="34" charset="0"/>
                 <a:ea typeface="Pretendard" pitchFamily="34" charset="-122"/>
@@ -22217,7 +22217,7 @@
             <a:r>
               <a:rPr lang="en-US" sz="2200" dirty="0">
                 <a:solidFill>
-                  <a:srgbClr val="F8FAFC"/>
+                  <a:srgbClr val="F8F8F8"/>
                 </a:solidFill>
                 <a:latin typeface="Pretendard" pitchFamily="34" charset="0"/>
                 <a:ea typeface="Pretendard" pitchFamily="34" charset="-122"/>
@@ -22333,7 +22333,7 @@
             <a:r>
               <a:rPr lang="en-US" sz="2200" dirty="0">
                 <a:solidFill>
-                  <a:srgbClr val="F8FAFC"/>
+                  <a:srgbClr val="F8F8F8"/>
                 </a:solidFill>
                 <a:latin typeface="Pretendard" pitchFamily="34" charset="0"/>
                 <a:ea typeface="Pretendard" pitchFamily="34" charset="-122"/>
@@ -22449,7 +22449,7 @@
             <a:r>
               <a:rPr lang="en-US" sz="2200" dirty="0">
                 <a:solidFill>
-                  <a:srgbClr val="F8FAFC"/>
+                  <a:srgbClr val="F8F8F8"/>
                 </a:solidFill>
                 <a:latin typeface="Pretendard" pitchFamily="34" charset="0"/>
                 <a:ea typeface="Pretendard" pitchFamily="34" charset="-122"/>
@@ -22935,7 +22935,7 @@
             <a:r>
               <a:rPr lang="en-US" sz="3800" b="1" dirty="0">
                 <a:solidFill>
-                  <a:srgbClr val="F8FAFC"/>
+                  <a:srgbClr val="F8F8F8"/>
                 </a:solidFill>
                 <a:latin typeface="Pretendard" pitchFamily="34" charset="0"/>
                 <a:ea typeface="Pretendard" pitchFamily="34" charset="-122"/>
@@ -22977,7 +22977,7 @@
             <a:r>
               <a:rPr lang="en-US" sz="2200" dirty="0">
                 <a:solidFill>
-                  <a:srgbClr val="F8FAFC"/>
+                  <a:srgbClr val="F8F8F8"/>
                 </a:solidFill>
                 <a:latin typeface="Pretendard" pitchFamily="34" charset="0"/>
                 <a:ea typeface="Pretendard" pitchFamily="34" charset="-122"/>
@@ -23509,7 +23509,7 @@
             <a:r>
               <a:rPr lang="en-US" sz="3400" b="1" dirty="0">
                 <a:solidFill>
-                  <a:srgbClr val="F8FAFC"/>
+                  <a:srgbClr val="F8F8F8"/>
                 </a:solidFill>
                 <a:latin typeface="Pretendard" pitchFamily="34" charset="0"/>
                 <a:ea typeface="Pretendard" pitchFamily="34" charset="-122"/>
@@ -23551,7 +23551,7 @@
             <a:r>
               <a:rPr lang="en-US" sz="2200" b="1" dirty="0">
                 <a:solidFill>
-                  <a:srgbClr val="F8FAFC"/>
+                  <a:srgbClr val="F8F8F8"/>
                 </a:solidFill>
                 <a:latin typeface="Pretendard" pitchFamily="34" charset="0"/>
                 <a:ea typeface="Pretendard" pitchFamily="34" charset="-122"/>
@@ -23610,7 +23610,7 @@
             <a:r>
               <a:rPr lang="en-US" sz="2200" dirty="0">
                 <a:solidFill>
-                  <a:srgbClr val="F8FAFC"/>
+                  <a:srgbClr val="F8F8F8"/>
                 </a:solidFill>
                 <a:latin typeface="Pretendard" pitchFamily="34" charset="0"/>
                 <a:ea typeface="Pretendard" pitchFamily="34" charset="-122"/>
@@ -23650,7 +23650,7 @@
             <a:r>
               <a:rPr lang="en-US" sz="2200" dirty="0">
                 <a:solidFill>
-                  <a:srgbClr val="F8FAFC"/>
+                  <a:srgbClr val="F8F8F8"/>
                 </a:solidFill>
                 <a:latin typeface="Pretendard" pitchFamily="34" charset="0"/>
                 <a:ea typeface="Pretendard" pitchFamily="34" charset="-122"/>
@@ -23690,7 +23690,7 @@
             <a:r>
               <a:rPr lang="en-US" sz="2200" dirty="0">
                 <a:solidFill>
-                  <a:srgbClr val="F8FAFC"/>
+                  <a:srgbClr val="F8F8F8"/>
                 </a:solidFill>
                 <a:latin typeface="Pretendard" pitchFamily="34" charset="0"/>
                 <a:ea typeface="Pretendard" pitchFamily="34" charset="-122"/>
@@ -23730,7 +23730,7 @@
             <a:r>
               <a:rPr lang="en-US" sz="2200" dirty="0">
                 <a:solidFill>
-                  <a:srgbClr val="F8FAFC"/>
+                  <a:srgbClr val="F8F8F8"/>
                 </a:solidFill>
                 <a:latin typeface="Pretendard" pitchFamily="34" charset="0"/>
                 <a:ea typeface="Pretendard" pitchFamily="34" charset="-122"/>
@@ -24458,7 +24458,7 @@
             <a:r>
               <a:rPr lang="en-US" sz="3400" b="1" dirty="0">
                 <a:solidFill>
-                  <a:srgbClr val="F8FAFC"/>
+                  <a:srgbClr val="F8F8F8"/>
                 </a:solidFill>
                 <a:latin typeface="Pretendard" pitchFamily="34" charset="0"/>
                 <a:ea typeface="Pretendard" pitchFamily="34" charset="-122"/>
@@ -24574,7 +24574,7 @@
             <a:r>
               <a:rPr lang="en-US" sz="2200" dirty="0">
                 <a:solidFill>
-                  <a:srgbClr val="F8FAFC"/>
+                  <a:srgbClr val="F8F8F8"/>
                 </a:solidFill>
                 <a:latin typeface="Pretendard" pitchFamily="34" charset="0"/>
                 <a:ea typeface="Pretendard" pitchFamily="34" charset="-122"/>
@@ -24690,7 +24690,7 @@
             <a:r>
               <a:rPr lang="en-US" sz="2200" dirty="0">
                 <a:solidFill>
-                  <a:srgbClr val="F8FAFC"/>
+                  <a:srgbClr val="F8F8F8"/>
                 </a:solidFill>
                 <a:latin typeface="Pretendard" pitchFamily="34" charset="0"/>
                 <a:ea typeface="Pretendard" pitchFamily="34" charset="-122"/>
@@ -24806,7 +24806,7 @@
             <a:r>
               <a:rPr lang="en-US" sz="2200" dirty="0">
                 <a:solidFill>
-                  <a:srgbClr val="F8FAFC"/>
+                  <a:srgbClr val="F8F8F8"/>
                 </a:solidFill>
                 <a:latin typeface="Pretendard" pitchFamily="34" charset="0"/>
                 <a:ea typeface="Pretendard" pitchFamily="34" charset="-122"/>
@@ -25265,7 +25265,7 @@
             <a:r>
               <a:rPr lang="en-US" sz="3400" b="1" dirty="0">
                 <a:solidFill>
-                  <a:srgbClr val="F8FAFC"/>
+                  <a:srgbClr val="F8F8F8"/>
                 </a:solidFill>
                 <a:latin typeface="Pretendard" pitchFamily="34" charset="0"/>
                 <a:ea typeface="Pretendard" pitchFamily="34" charset="-122"/>
@@ -25324,7 +25324,7 @@
             <a:r>
               <a:rPr lang="en-US" sz="2200" dirty="0">
                 <a:solidFill>
-                  <a:srgbClr val="F8FAFC"/>
+                  <a:srgbClr val="F8F8F8"/>
                 </a:solidFill>
                 <a:latin typeface="Pretendard" pitchFamily="34" charset="0"/>
                 <a:ea typeface="Pretendard" pitchFamily="34" charset="-122"/>
@@ -25383,7 +25383,7 @@
             <a:r>
               <a:rPr lang="en-US" sz="2200" dirty="0">
                 <a:solidFill>
-                  <a:srgbClr val="F8FAFC"/>
+                  <a:srgbClr val="F8F8F8"/>
                 </a:solidFill>
                 <a:latin typeface="Pretendard" pitchFamily="34" charset="0"/>
                 <a:ea typeface="Pretendard" pitchFamily="34" charset="-122"/>
@@ -26111,7 +26111,7 @@
             <a:r>
               <a:rPr lang="en-US" sz="3400" b="1" dirty="0">
                 <a:solidFill>
-                  <a:srgbClr val="F8FAFC"/>
+                  <a:srgbClr val="F8F8F8"/>
                 </a:solidFill>
                 <a:latin typeface="Pretendard" pitchFamily="34" charset="0"/>
                 <a:ea typeface="Pretendard" pitchFamily="34" charset="-122"/>
@@ -26227,7 +26227,7 @@
             <a:r>
               <a:rPr lang="en-US" sz="2200" dirty="0">
                 <a:solidFill>
-                  <a:srgbClr val="F8FAFC"/>
+                  <a:srgbClr val="F8F8F8"/>
                 </a:solidFill>
                 <a:latin typeface="Pretendard" pitchFamily="34" charset="0"/>
                 <a:ea typeface="Pretendard" pitchFamily="34" charset="-122"/>
@@ -26343,7 +26343,7 @@
             <a:r>
               <a:rPr lang="en-US" sz="2200" dirty="0">
                 <a:solidFill>
-                  <a:srgbClr val="F8FAFC"/>
+                  <a:srgbClr val="F8F8F8"/>
                 </a:solidFill>
                 <a:latin typeface="Pretendard" pitchFamily="34" charset="0"/>
                 <a:ea typeface="Pretendard" pitchFamily="34" charset="-122"/>
@@ -26459,7 +26459,7 @@
             <a:r>
               <a:rPr lang="en-US" sz="2200" dirty="0">
                 <a:solidFill>
-                  <a:srgbClr val="F8FAFC"/>
+                  <a:srgbClr val="F8F8F8"/>
                 </a:solidFill>
                 <a:latin typeface="Pretendard" pitchFamily="34" charset="0"/>
                 <a:ea typeface="Pretendard" pitchFamily="34" charset="-122"/>
@@ -26918,7 +26918,7 @@
             <a:r>
               <a:rPr lang="en-US" sz="3400" b="1" dirty="0">
                 <a:solidFill>
-                  <a:srgbClr val="F8FAFC"/>
+                  <a:srgbClr val="F8F8F8"/>
                 </a:solidFill>
                 <a:latin typeface="Pretendard" pitchFamily="34" charset="0"/>
                 <a:ea typeface="Pretendard" pitchFamily="34" charset="-122"/>
@@ -26977,7 +26977,7 @@
             <a:r>
               <a:rPr lang="en-US" sz="2200" dirty="0">
                 <a:solidFill>
-                  <a:srgbClr val="F8FAFC"/>
+                  <a:srgbClr val="F8F8F8"/>
                 </a:solidFill>
                 <a:latin typeface="Pretendard" pitchFamily="34" charset="0"/>
                 <a:ea typeface="Pretendard" pitchFamily="34" charset="-122"/>
@@ -27036,7 +27036,7 @@
             <a:r>
               <a:rPr lang="en-US" sz="2200" dirty="0">
                 <a:solidFill>
-                  <a:srgbClr val="F8FAFC"/>
+                  <a:srgbClr val="F8F8F8"/>
                 </a:solidFill>
                 <a:latin typeface="Pretendard" pitchFamily="34" charset="0"/>
                 <a:ea typeface="Pretendard" pitchFamily="34" charset="-122"/>
@@ -27495,7 +27495,7 @@
             <a:r>
               <a:rPr lang="en-US" sz="3400" b="1" dirty="0">
                 <a:solidFill>
-                  <a:srgbClr val="F8FAFC"/>
+                  <a:srgbClr val="F8F8F8"/>
                 </a:solidFill>
                 <a:latin typeface="Pretendard" pitchFamily="34" charset="0"/>
                 <a:ea typeface="Pretendard" pitchFamily="34" charset="-122"/>
@@ -27554,7 +27554,7 @@
             <a:r>
               <a:rPr lang="en-US" sz="2200" dirty="0">
                 <a:solidFill>
-                  <a:srgbClr val="F8FAFC"/>
+                  <a:srgbClr val="F8F8F8"/>
                 </a:solidFill>
                 <a:latin typeface="Pretendard" pitchFamily="34" charset="0"/>
                 <a:ea typeface="Pretendard" pitchFamily="34" charset="-122"/>
@@ -27613,7 +27613,7 @@
             <a:r>
               <a:rPr lang="en-US" sz="2200" dirty="0">
                 <a:solidFill>
-                  <a:srgbClr val="F8FAFC"/>
+                  <a:srgbClr val="F8F8F8"/>
                 </a:solidFill>
                 <a:latin typeface="Pretendard" pitchFamily="34" charset="0"/>
                 <a:ea typeface="Pretendard" pitchFamily="34" charset="-122"/>
@@ -27638,13 +27638,13 @@
   <a:themeElements>
     <a:clrScheme name="Office">
       <a:dk1>
-        <a:srgbClr val="F8FAFC"/>
+        <a:srgbClr val="F8F8F8"/>
       </a:dk1>
       <a:lt1>
         <a:srgbClr val="07111F"/>
       </a:lt1>
       <a:dk2>
-        <a:srgbClr val="C8D7EA"/>
+        <a:srgbClr val="6C6C6C"/>
       </a:dk2>
       <a:lt2>
         <a:srgbClr val="132238"/>
@@ -27659,13 +27659,13 @@
         <a:srgbClr val="7DD3FC"/>
       </a:accent3>
       <a:accent4>
-        <a:srgbClr val="C8D7EA"/>
+        <a:srgbClr val="6C6C6C"/>
       </a:accent4>
       <a:accent5>
         <a:srgbClr val="BAE6FD"/>
       </a:accent5>
       <a:accent6>
-        <a:srgbClr val="F8FAFC"/>
+        <a:srgbClr val="F8F8F8"/>
       </a:accent6>
       <a:hlink>
         <a:srgbClr val="7DD3FC"/>

--- a/docs/theme-preview/pptx/liquid-glass.pptx
+++ b/docs/theme-preview/pptx/liquid-glass.pptx
@@ -3602,6 +3602,49 @@
         </p:nvSpPr>
         <p:spPr>
           <a:xfrm>
+            <a:off x="310896" y="256032"/>
+            <a:ext cx="10893247" cy="5779008"/>
+          </a:xfrm>
+          <a:prstGeom prst="roundRect">
+            <a:avLst>
+              <a:gd name="adj" fmla="val 1899"/>
+            </a:avLst>
+          </a:prstGeom>
+          <a:solidFill>
+            <a:srgbClr val="7DD3FC">
+              <a:alpha val="26000"/>
+            </a:srgbClr>
+          </a:solidFill>
+          <a:ln w="12700">
+            <a:solidFill>
+              <a:srgbClr val="FFFFFF">
+                <a:alpha val="14000"/>
+              </a:srgbClr>
+            </a:solidFill>
+            <a:prstDash val="solid"/>
+          </a:ln>
+          <a:effectLst>
+            <a:outerShdw sx="100000" sy="100000" kx="0" ky="0" algn="bl" rotWithShape="0" blurRad="12700" dist="50800" dir="2700000">
+              <a:srgbClr val="7DD3FC">
+                <a:alpha val="10000"/>
+              </a:srgbClr>
+            </a:outerShdw>
+            <a:glow rad="63500">
+              <a:srgbClr val="7DD3FC">
+                <a:alpha val="23000"/>
+              </a:srgbClr>
+            </a:glow>
+          </a:effectLst>
+        </p:spPr>
+      </p:sp>
+      <p:sp>
+        <p:nvSpPr>
+          <p:cNvPr id="3" name="Shape 1"/>
+          <p:cNvSpPr/>
+          <p:nvPr/>
+        </p:nvSpPr>
+        <p:spPr>
+          <a:xfrm>
             <a:off x="566928" y="475488"/>
             <a:ext cx="11057839" cy="5907024"/>
           </a:xfrm>
@@ -3639,7 +3682,7 @@
       </p:sp>
       <p:sp>
         <p:nvSpPr>
-          <p:cNvPr id="3" name="Shape 1"/>
+          <p:cNvPr id="4" name="Shape 2"/>
           <p:cNvSpPr/>
           <p:nvPr/>
         </p:nvSpPr>
@@ -3668,7 +3711,7 @@
       </p:sp>
       <p:sp>
         <p:nvSpPr>
-          <p:cNvPr id="4" name="Shape 2"/>
+          <p:cNvPr id="5" name="Shape 3"/>
           <p:cNvSpPr/>
           <p:nvPr/>
         </p:nvSpPr>
@@ -3697,7 +3740,7 @@
       </p:sp>
       <p:sp>
         <p:nvSpPr>
-          <p:cNvPr id="5" name="Shape 3"/>
+          <p:cNvPr id="6" name="Shape 4"/>
           <p:cNvSpPr/>
           <p:nvPr/>
         </p:nvSpPr>
@@ -3726,7 +3769,7 @@
       </p:sp>
       <p:sp>
         <p:nvSpPr>
-          <p:cNvPr id="6" name="Shape 4"/>
+          <p:cNvPr id="7" name="Shape 5"/>
           <p:cNvSpPr/>
           <p:nvPr/>
         </p:nvSpPr>
@@ -3751,7 +3794,7 @@
       </p:sp>
       <p:sp>
         <p:nvSpPr>
-          <p:cNvPr id="7" name="Shape 5"/>
+          <p:cNvPr id="8" name="Shape 6"/>
           <p:cNvSpPr/>
           <p:nvPr/>
         </p:nvSpPr>
@@ -3776,7 +3819,94 @@
       </p:sp>
       <p:sp>
         <p:nvSpPr>
-          <p:cNvPr id="8" name="Shape 6"/>
+          <p:cNvPr id="9" name="Shape 7"/>
+          <p:cNvSpPr/>
+          <p:nvPr/>
+        </p:nvSpPr>
+        <p:spPr>
+          <a:xfrm>
+            <a:off x="9631375" y="603504"/>
+            <a:ext cx="1353312" cy="0"/>
+          </a:xfrm>
+          <a:prstGeom prst="line">
+            <a:avLst/>
+          </a:prstGeom>
+          <a:noFill/>
+          <a:ln w="12700">
+            <a:solidFill>
+              <a:srgbClr val="FFFFFF">
+                <a:alpha val="54000"/>
+              </a:srgbClr>
+            </a:solidFill>
+            <a:prstDash val="solid"/>
+          </a:ln>
+        </p:spPr>
+      </p:sp>
+      <p:sp>
+        <p:nvSpPr>
+          <p:cNvPr id="10" name="Shape 8"/>
+          <p:cNvSpPr/>
+          <p:nvPr/>
+        </p:nvSpPr>
+        <p:spPr>
+          <a:xfrm rot="-180000">
+            <a:off x="530352" y="438912"/>
+            <a:ext cx="6583515" cy="146304"/>
+          </a:xfrm>
+          <a:prstGeom prst="roundRect">
+            <a:avLst>
+              <a:gd name="adj" fmla="val 37500"/>
+            </a:avLst>
+          </a:prstGeom>
+          <a:solidFill>
+            <a:srgbClr val="FFFFFF">
+              <a:alpha val="22000"/>
+            </a:srgbClr>
+          </a:solidFill>
+          <a:ln w="12700">
+            <a:solidFill>
+              <a:srgbClr val="FFFFFF">
+                <a:alpha val="0"/>
+              </a:srgbClr>
+            </a:solidFill>
+            <a:prstDash val="solid"/>
+          </a:ln>
+        </p:spPr>
+      </p:sp>
+      <p:sp>
+        <p:nvSpPr>
+          <p:cNvPr id="11" name="Shape 9"/>
+          <p:cNvSpPr/>
+          <p:nvPr/>
+        </p:nvSpPr>
+        <p:spPr>
+          <a:xfrm rot="120000">
+            <a:off x="7558851" y="256032"/>
+            <a:ext cx="3047924" cy="201168"/>
+          </a:xfrm>
+          <a:prstGeom prst="roundRect">
+            <a:avLst>
+              <a:gd name="adj" fmla="val 31818"/>
+            </a:avLst>
+          </a:prstGeom>
+          <a:solidFill>
+            <a:srgbClr val="7DD3FC">
+              <a:alpha val="64000"/>
+            </a:srgbClr>
+          </a:solidFill>
+          <a:ln w="12700">
+            <a:solidFill>
+              <a:srgbClr val="FFFFFF">
+                <a:alpha val="18000"/>
+              </a:srgbClr>
+            </a:solidFill>
+            <a:prstDash val="solid"/>
+          </a:ln>
+        </p:spPr>
+      </p:sp>
+      <p:sp>
+        <p:nvSpPr>
+          <p:cNvPr id="12" name="Shape 10"/>
           <p:cNvSpPr/>
           <p:nvPr/>
         </p:nvSpPr>
@@ -3817,7 +3947,7 @@
       </p:sp>
       <p:sp>
         <p:nvSpPr>
-          <p:cNvPr id="9" name="Shape 7"/>
+          <p:cNvPr id="13" name="Shape 11"/>
           <p:cNvSpPr/>
           <p:nvPr/>
         </p:nvSpPr>
@@ -3846,7 +3976,7 @@
       </p:sp>
       <p:sp>
         <p:nvSpPr>
-          <p:cNvPr id="10" name="Shape 8"/>
+          <p:cNvPr id="14" name="Shape 12"/>
           <p:cNvSpPr/>
           <p:nvPr/>
         </p:nvSpPr>
@@ -3873,7 +4003,7 @@
       </p:sp>
       <p:sp>
         <p:nvSpPr>
-          <p:cNvPr id="11" name="Shape 9"/>
+          <p:cNvPr id="15" name="Shape 13"/>
           <p:cNvSpPr/>
           <p:nvPr/>
         </p:nvSpPr>
@@ -3900,7 +4030,7 @@
       </p:sp>
       <p:sp>
         <p:nvSpPr>
-          <p:cNvPr id="12" name="Shape 10"/>
+          <p:cNvPr id="16" name="Shape 14"/>
           <p:cNvSpPr/>
           <p:nvPr/>
         </p:nvSpPr>
@@ -3927,7 +4057,7 @@
       </p:sp>
       <p:sp>
         <p:nvSpPr>
-          <p:cNvPr id="13" name="Shape 11"/>
+          <p:cNvPr id="17" name="Shape 15"/>
           <p:cNvSpPr/>
           <p:nvPr/>
         </p:nvSpPr>
@@ -3954,7 +4084,7 @@
       </p:sp>
       <p:sp>
         <p:nvSpPr>
-          <p:cNvPr id="14" name="Shape 12"/>
+          <p:cNvPr id="18" name="Shape 16"/>
           <p:cNvSpPr/>
           <p:nvPr/>
         </p:nvSpPr>
@@ -3983,7 +4113,7 @@
       </p:sp>
       <p:sp>
         <p:nvSpPr>
-          <p:cNvPr id="15" name="mdpr:mdpr-design-grammar-b3a462:title:__title:mdpr-design-grammar-b3a462"/>
+          <p:cNvPr id="19" name="mdpr:mdpr-design-grammar-b3a462:title:__title:mdpr-design-grammar-b3a462"/>
           <p:cNvSpPr txBox="1"/>
           <p:nvPr/>
         </p:nvSpPr>
@@ -4063,6 +4193,49 @@
         </p:nvSpPr>
         <p:spPr>
           <a:xfrm>
+            <a:off x="310896" y="256032"/>
+            <a:ext cx="10893247" cy="5779008"/>
+          </a:xfrm>
+          <a:prstGeom prst="roundRect">
+            <a:avLst>
+              <a:gd name="adj" fmla="val 1899"/>
+            </a:avLst>
+          </a:prstGeom>
+          <a:solidFill>
+            <a:srgbClr val="7DD3FC">
+              <a:alpha val="26000"/>
+            </a:srgbClr>
+          </a:solidFill>
+          <a:ln w="12700">
+            <a:solidFill>
+              <a:srgbClr val="FFFFFF">
+                <a:alpha val="14000"/>
+              </a:srgbClr>
+            </a:solidFill>
+            <a:prstDash val="solid"/>
+          </a:ln>
+          <a:effectLst>
+            <a:outerShdw sx="100000" sy="100000" kx="0" ky="0" algn="bl" rotWithShape="0" blurRad="12700" dist="50800" dir="2700000">
+              <a:srgbClr val="7DD3FC">
+                <a:alpha val="10000"/>
+              </a:srgbClr>
+            </a:outerShdw>
+            <a:glow rad="63500">
+              <a:srgbClr val="7DD3FC">
+                <a:alpha val="23000"/>
+              </a:srgbClr>
+            </a:glow>
+          </a:effectLst>
+        </p:spPr>
+      </p:sp>
+      <p:sp>
+        <p:nvSpPr>
+          <p:cNvPr id="3" name="Shape 1"/>
+          <p:cNvSpPr/>
+          <p:nvPr/>
+        </p:nvSpPr>
+        <p:spPr>
+          <a:xfrm>
             <a:off x="566928" y="475488"/>
             <a:ext cx="11057839" cy="5907024"/>
           </a:xfrm>
@@ -4100,7 +4273,7 @@
       </p:sp>
       <p:sp>
         <p:nvSpPr>
-          <p:cNvPr id="3" name="Shape 1"/>
+          <p:cNvPr id="4" name="Shape 2"/>
           <p:cNvSpPr/>
           <p:nvPr/>
         </p:nvSpPr>
@@ -4129,7 +4302,7 @@
       </p:sp>
       <p:sp>
         <p:nvSpPr>
-          <p:cNvPr id="4" name="Shape 2"/>
+          <p:cNvPr id="5" name="Shape 3"/>
           <p:cNvSpPr/>
           <p:nvPr/>
         </p:nvSpPr>
@@ -4158,7 +4331,7 @@
       </p:sp>
       <p:sp>
         <p:nvSpPr>
-          <p:cNvPr id="5" name="Shape 3"/>
+          <p:cNvPr id="6" name="Shape 4"/>
           <p:cNvSpPr/>
           <p:nvPr/>
         </p:nvSpPr>
@@ -4187,7 +4360,7 @@
       </p:sp>
       <p:sp>
         <p:nvSpPr>
-          <p:cNvPr id="6" name="Shape 4"/>
+          <p:cNvPr id="7" name="Shape 5"/>
           <p:cNvSpPr/>
           <p:nvPr/>
         </p:nvSpPr>
@@ -4212,7 +4385,7 @@
       </p:sp>
       <p:sp>
         <p:nvSpPr>
-          <p:cNvPr id="7" name="Shape 5"/>
+          <p:cNvPr id="8" name="Shape 6"/>
           <p:cNvSpPr/>
           <p:nvPr/>
         </p:nvSpPr>
@@ -4237,7 +4410,94 @@
       </p:sp>
       <p:sp>
         <p:nvSpPr>
-          <p:cNvPr id="8" name="Shape 6"/>
+          <p:cNvPr id="9" name="Shape 7"/>
+          <p:cNvSpPr/>
+          <p:nvPr/>
+        </p:nvSpPr>
+        <p:spPr>
+          <a:xfrm>
+            <a:off x="9631375" y="603504"/>
+            <a:ext cx="1353312" cy="0"/>
+          </a:xfrm>
+          <a:prstGeom prst="line">
+            <a:avLst/>
+          </a:prstGeom>
+          <a:noFill/>
+          <a:ln w="12700">
+            <a:solidFill>
+              <a:srgbClr val="FFFFFF">
+                <a:alpha val="54000"/>
+              </a:srgbClr>
+            </a:solidFill>
+            <a:prstDash val="solid"/>
+          </a:ln>
+        </p:spPr>
+      </p:sp>
+      <p:sp>
+        <p:nvSpPr>
+          <p:cNvPr id="10" name="Shape 8"/>
+          <p:cNvSpPr/>
+          <p:nvPr/>
+        </p:nvSpPr>
+        <p:spPr>
+          <a:xfrm rot="-180000">
+            <a:off x="530352" y="438912"/>
+            <a:ext cx="6583515" cy="146304"/>
+          </a:xfrm>
+          <a:prstGeom prst="roundRect">
+            <a:avLst>
+              <a:gd name="adj" fmla="val 37500"/>
+            </a:avLst>
+          </a:prstGeom>
+          <a:solidFill>
+            <a:srgbClr val="FFFFFF">
+              <a:alpha val="22000"/>
+            </a:srgbClr>
+          </a:solidFill>
+          <a:ln w="12700">
+            <a:solidFill>
+              <a:srgbClr val="FFFFFF">
+                <a:alpha val="0"/>
+              </a:srgbClr>
+            </a:solidFill>
+            <a:prstDash val="solid"/>
+          </a:ln>
+        </p:spPr>
+      </p:sp>
+      <p:sp>
+        <p:nvSpPr>
+          <p:cNvPr id="11" name="Shape 9"/>
+          <p:cNvSpPr/>
+          <p:nvPr/>
+        </p:nvSpPr>
+        <p:spPr>
+          <a:xfrm rot="120000">
+            <a:off x="7558851" y="256032"/>
+            <a:ext cx="3047924" cy="201168"/>
+          </a:xfrm>
+          <a:prstGeom prst="roundRect">
+            <a:avLst>
+              <a:gd name="adj" fmla="val 31818"/>
+            </a:avLst>
+          </a:prstGeom>
+          <a:solidFill>
+            <a:srgbClr val="7DD3FC">
+              <a:alpha val="64000"/>
+            </a:srgbClr>
+          </a:solidFill>
+          <a:ln w="12700">
+            <a:solidFill>
+              <a:srgbClr val="FFFFFF">
+                <a:alpha val="18000"/>
+              </a:srgbClr>
+            </a:solidFill>
+            <a:prstDash val="solid"/>
+          </a:ln>
+        </p:spPr>
+      </p:sp>
+      <p:sp>
+        <p:nvSpPr>
+          <p:cNvPr id="12" name="Shape 10"/>
           <p:cNvSpPr/>
           <p:nvPr/>
         </p:nvSpPr>
@@ -4278,7 +4538,7 @@
       </p:sp>
       <p:sp>
         <p:nvSpPr>
-          <p:cNvPr id="9" name="Shape 7"/>
+          <p:cNvPr id="13" name="Shape 11"/>
           <p:cNvSpPr/>
           <p:nvPr/>
         </p:nvSpPr>
@@ -4307,7 +4567,7 @@
       </p:sp>
       <p:sp>
         <p:nvSpPr>
-          <p:cNvPr id="10" name="Shape 8"/>
+          <p:cNvPr id="14" name="Shape 12"/>
           <p:cNvSpPr/>
           <p:nvPr/>
         </p:nvSpPr>
@@ -4334,7 +4594,7 @@
       </p:sp>
       <p:sp>
         <p:nvSpPr>
-          <p:cNvPr id="11" name="Shape 9"/>
+          <p:cNvPr id="15" name="Shape 13"/>
           <p:cNvSpPr/>
           <p:nvPr/>
         </p:nvSpPr>
@@ -4361,7 +4621,7 @@
       </p:sp>
       <p:sp>
         <p:nvSpPr>
-          <p:cNvPr id="12" name="Shape 10"/>
+          <p:cNvPr id="16" name="Shape 14"/>
           <p:cNvSpPr/>
           <p:nvPr/>
         </p:nvSpPr>
@@ -4388,7 +4648,7 @@
       </p:sp>
       <p:sp>
         <p:nvSpPr>
-          <p:cNvPr id="13" name="Shape 11"/>
+          <p:cNvPr id="17" name="Shape 15"/>
           <p:cNvSpPr/>
           <p:nvPr/>
         </p:nvSpPr>
@@ -4415,7 +4675,7 @@
       </p:sp>
       <p:sp>
         <p:nvSpPr>
-          <p:cNvPr id="14" name="Shape 12"/>
+          <p:cNvPr id="18" name="Shape 16"/>
           <p:cNvSpPr/>
           <p:nvPr/>
         </p:nvSpPr>
@@ -4442,7 +4702,7 @@
       </p:sp>
       <p:sp>
         <p:nvSpPr>
-          <p:cNvPr id="15" name="mdpr:2-2-a9df10:title:__title:2-2-a9df10"/>
+          <p:cNvPr id="19" name="mdpr:2-2-a9df10:title:__title:2-2-a9df10"/>
           <p:cNvSpPr txBox="1"/>
           <p:nvPr/>
         </p:nvSpPr>
@@ -4484,7 +4744,7 @@
       </p:sp>
       <p:sp>
         <p:nvSpPr>
-          <p:cNvPr id="16" name="mdpr:2-2-a9df10:left:block-10-chunk-2"/>
+          <p:cNvPr id="20" name="mdpr:2-2-a9df10:left:block-10-chunk-2"/>
           <p:cNvSpPr txBox="1"/>
           <p:nvPr/>
         </p:nvSpPr>
@@ -4543,7 +4803,7 @@
       </p:sp>
       <p:sp>
         <p:nvSpPr>
-          <p:cNvPr id="17" name="mdpr:2-2-a9df10:right:block-10-chunk-2"/>
+          <p:cNvPr id="21" name="mdpr:2-2-a9df10:right:block-10-chunk-2"/>
           <p:cNvSpPr txBox="1"/>
           <p:nvPr/>
         </p:nvSpPr>
@@ -4640,6 +4900,49 @@
         </p:nvSpPr>
         <p:spPr>
           <a:xfrm>
+            <a:off x="310896" y="256032"/>
+            <a:ext cx="10893247" cy="5779008"/>
+          </a:xfrm>
+          <a:prstGeom prst="roundRect">
+            <a:avLst>
+              <a:gd name="adj" fmla="val 1899"/>
+            </a:avLst>
+          </a:prstGeom>
+          <a:solidFill>
+            <a:srgbClr val="7DD3FC">
+              <a:alpha val="26000"/>
+            </a:srgbClr>
+          </a:solidFill>
+          <a:ln w="12700">
+            <a:solidFill>
+              <a:srgbClr val="FFFFFF">
+                <a:alpha val="14000"/>
+              </a:srgbClr>
+            </a:solidFill>
+            <a:prstDash val="solid"/>
+          </a:ln>
+          <a:effectLst>
+            <a:outerShdw sx="100000" sy="100000" kx="0" ky="0" algn="bl" rotWithShape="0" blurRad="12700" dist="50800" dir="2700000">
+              <a:srgbClr val="7DD3FC">
+                <a:alpha val="10000"/>
+              </a:srgbClr>
+            </a:outerShdw>
+            <a:glow rad="63500">
+              <a:srgbClr val="7DD3FC">
+                <a:alpha val="23000"/>
+              </a:srgbClr>
+            </a:glow>
+          </a:effectLst>
+        </p:spPr>
+      </p:sp>
+      <p:sp>
+        <p:nvSpPr>
+          <p:cNvPr id="3" name="Shape 1"/>
+          <p:cNvSpPr/>
+          <p:nvPr/>
+        </p:nvSpPr>
+        <p:spPr>
+          <a:xfrm>
             <a:off x="566928" y="475488"/>
             <a:ext cx="11057839" cy="5907024"/>
           </a:xfrm>
@@ -4677,7 +4980,7 @@
       </p:sp>
       <p:sp>
         <p:nvSpPr>
-          <p:cNvPr id="3" name="Shape 1"/>
+          <p:cNvPr id="4" name="Shape 2"/>
           <p:cNvSpPr/>
           <p:nvPr/>
         </p:nvSpPr>
@@ -4706,7 +5009,7 @@
       </p:sp>
       <p:sp>
         <p:nvSpPr>
-          <p:cNvPr id="4" name="Shape 2"/>
+          <p:cNvPr id="5" name="Shape 3"/>
           <p:cNvSpPr/>
           <p:nvPr/>
         </p:nvSpPr>
@@ -4735,7 +5038,7 @@
       </p:sp>
       <p:sp>
         <p:nvSpPr>
-          <p:cNvPr id="5" name="Shape 3"/>
+          <p:cNvPr id="6" name="Shape 4"/>
           <p:cNvSpPr/>
           <p:nvPr/>
         </p:nvSpPr>
@@ -4764,7 +5067,7 @@
       </p:sp>
       <p:sp>
         <p:nvSpPr>
-          <p:cNvPr id="6" name="Shape 4"/>
+          <p:cNvPr id="7" name="Shape 5"/>
           <p:cNvSpPr/>
           <p:nvPr/>
         </p:nvSpPr>
@@ -4789,7 +5092,7 @@
       </p:sp>
       <p:sp>
         <p:nvSpPr>
-          <p:cNvPr id="7" name="Shape 5"/>
+          <p:cNvPr id="8" name="Shape 6"/>
           <p:cNvSpPr/>
           <p:nvPr/>
         </p:nvSpPr>
@@ -4814,7 +5117,94 @@
       </p:sp>
       <p:sp>
         <p:nvSpPr>
-          <p:cNvPr id="8" name="Shape 6"/>
+          <p:cNvPr id="9" name="Shape 7"/>
+          <p:cNvSpPr/>
+          <p:nvPr/>
+        </p:nvSpPr>
+        <p:spPr>
+          <a:xfrm>
+            <a:off x="9631375" y="603504"/>
+            <a:ext cx="1353312" cy="0"/>
+          </a:xfrm>
+          <a:prstGeom prst="line">
+            <a:avLst/>
+          </a:prstGeom>
+          <a:noFill/>
+          <a:ln w="12700">
+            <a:solidFill>
+              <a:srgbClr val="FFFFFF">
+                <a:alpha val="54000"/>
+              </a:srgbClr>
+            </a:solidFill>
+            <a:prstDash val="solid"/>
+          </a:ln>
+        </p:spPr>
+      </p:sp>
+      <p:sp>
+        <p:nvSpPr>
+          <p:cNvPr id="10" name="Shape 8"/>
+          <p:cNvSpPr/>
+          <p:nvPr/>
+        </p:nvSpPr>
+        <p:spPr>
+          <a:xfrm rot="-180000">
+            <a:off x="530352" y="438912"/>
+            <a:ext cx="6583515" cy="146304"/>
+          </a:xfrm>
+          <a:prstGeom prst="roundRect">
+            <a:avLst>
+              <a:gd name="adj" fmla="val 37500"/>
+            </a:avLst>
+          </a:prstGeom>
+          <a:solidFill>
+            <a:srgbClr val="FFFFFF">
+              <a:alpha val="22000"/>
+            </a:srgbClr>
+          </a:solidFill>
+          <a:ln w="12700">
+            <a:solidFill>
+              <a:srgbClr val="FFFFFF">
+                <a:alpha val="0"/>
+              </a:srgbClr>
+            </a:solidFill>
+            <a:prstDash val="solid"/>
+          </a:ln>
+        </p:spPr>
+      </p:sp>
+      <p:sp>
+        <p:nvSpPr>
+          <p:cNvPr id="11" name="Shape 9"/>
+          <p:cNvSpPr/>
+          <p:nvPr/>
+        </p:nvSpPr>
+        <p:spPr>
+          <a:xfrm rot="120000">
+            <a:off x="7558851" y="256032"/>
+            <a:ext cx="3047924" cy="201168"/>
+          </a:xfrm>
+          <a:prstGeom prst="roundRect">
+            <a:avLst>
+              <a:gd name="adj" fmla="val 31818"/>
+            </a:avLst>
+          </a:prstGeom>
+          <a:solidFill>
+            <a:srgbClr val="7DD3FC">
+              <a:alpha val="64000"/>
+            </a:srgbClr>
+          </a:solidFill>
+          <a:ln w="12700">
+            <a:solidFill>
+              <a:srgbClr val="FFFFFF">
+                <a:alpha val="18000"/>
+              </a:srgbClr>
+            </a:solidFill>
+            <a:prstDash val="solid"/>
+          </a:ln>
+        </p:spPr>
+      </p:sp>
+      <p:sp>
+        <p:nvSpPr>
+          <p:cNvPr id="12" name="Shape 10"/>
           <p:cNvSpPr/>
           <p:nvPr/>
         </p:nvSpPr>
@@ -4855,7 +5245,7 @@
       </p:sp>
       <p:sp>
         <p:nvSpPr>
-          <p:cNvPr id="9" name="Shape 7"/>
+          <p:cNvPr id="13" name="Shape 11"/>
           <p:cNvSpPr/>
           <p:nvPr/>
         </p:nvSpPr>
@@ -4884,7 +5274,7 @@
       </p:sp>
       <p:sp>
         <p:nvSpPr>
-          <p:cNvPr id="10" name="Shape 8"/>
+          <p:cNvPr id="14" name="Shape 12"/>
           <p:cNvSpPr/>
           <p:nvPr/>
         </p:nvSpPr>
@@ -4911,7 +5301,7 @@
       </p:sp>
       <p:sp>
         <p:nvSpPr>
-          <p:cNvPr id="11" name="Shape 9"/>
+          <p:cNvPr id="15" name="Shape 13"/>
           <p:cNvSpPr/>
           <p:nvPr/>
         </p:nvSpPr>
@@ -4938,7 +5328,7 @@
       </p:sp>
       <p:sp>
         <p:nvSpPr>
-          <p:cNvPr id="12" name="Shape 10"/>
+          <p:cNvPr id="16" name="Shape 14"/>
           <p:cNvSpPr/>
           <p:nvPr/>
         </p:nvSpPr>
@@ -4965,7 +5355,7 @@
       </p:sp>
       <p:sp>
         <p:nvSpPr>
-          <p:cNvPr id="13" name="mdpr:pipeline-diagram-51792c:title:__title:pipeline-diagram-51792c"/>
+          <p:cNvPr id="17" name="mdpr:pipeline-diagram-51792c:title:__title:pipeline-diagram-51792c"/>
           <p:cNvSpPr txBox="1"/>
           <p:nvPr/>
         </p:nvSpPr>
@@ -5007,7 +5397,7 @@
       </p:sp>
       <p:sp>
         <p:nvSpPr>
-          <p:cNvPr id="14" name="Shape 12"/>
+          <p:cNvPr id="18" name="Shape 16"/>
           <p:cNvSpPr/>
           <p:nvPr/>
         </p:nvSpPr>
@@ -5031,7 +5421,7 @@
       </p:sp>
       <p:sp>
         <p:nvSpPr>
-          <p:cNvPr id="15" name="Shape 13"/>
+          <p:cNvPr id="19" name="Shape 17"/>
           <p:cNvSpPr/>
           <p:nvPr/>
         </p:nvSpPr>
@@ -5055,7 +5445,7 @@
       </p:sp>
       <p:sp>
         <p:nvSpPr>
-          <p:cNvPr id="16" name="Shape 14"/>
+          <p:cNvPr id="20" name="Shape 18"/>
           <p:cNvSpPr/>
           <p:nvPr/>
         </p:nvSpPr>
@@ -5079,7 +5469,7 @@
       </p:sp>
       <p:sp>
         <p:nvSpPr>
-          <p:cNvPr id="17" name="Shape 15"/>
+          <p:cNvPr id="21" name="Shape 19"/>
           <p:cNvSpPr/>
           <p:nvPr/>
         </p:nvSpPr>
@@ -5103,7 +5493,7 @@
       </p:sp>
       <p:sp>
         <p:nvSpPr>
-          <p:cNvPr id="18" name="Shape 16"/>
+          <p:cNvPr id="22" name="Shape 20"/>
           <p:cNvSpPr/>
           <p:nvPr/>
         </p:nvSpPr>
@@ -5127,7 +5517,7 @@
       </p:sp>
       <p:sp>
         <p:nvSpPr>
-          <p:cNvPr id="19" name="Shape 17"/>
+          <p:cNvPr id="23" name="Shape 21"/>
           <p:cNvSpPr/>
           <p:nvPr/>
         </p:nvSpPr>
@@ -5166,7 +5556,7 @@
       </p:sp>
       <p:sp>
         <p:nvSpPr>
-          <p:cNvPr id="20" name="Shape 18"/>
+          <p:cNvPr id="24" name="Shape 22"/>
           <p:cNvSpPr/>
           <p:nvPr/>
         </p:nvSpPr>
@@ -5193,7 +5583,7 @@
       </p:sp>
       <p:sp>
         <p:nvSpPr>
-          <p:cNvPr id="21" name="Shape 19"/>
+          <p:cNvPr id="25" name="Shape 23"/>
           <p:cNvSpPr/>
           <p:nvPr/>
         </p:nvSpPr>
@@ -5220,7 +5610,7 @@
       </p:sp>
       <p:sp>
         <p:nvSpPr>
-          <p:cNvPr id="22" name="Text 20"/>
+          <p:cNvPr id="26" name="Text 24"/>
           <p:cNvSpPr txBox="1"/>
           <p:nvPr/>
         </p:nvSpPr>
@@ -5264,7 +5654,7 @@
       </p:sp>
       <p:sp>
         <p:nvSpPr>
-          <p:cNvPr id="23" name="Text 21"/>
+          <p:cNvPr id="27" name="Text 25"/>
           <p:cNvSpPr txBox="1"/>
           <p:nvPr/>
         </p:nvSpPr>
@@ -5308,7 +5698,7 @@
       </p:sp>
       <p:sp>
         <p:nvSpPr>
-          <p:cNvPr id="24" name="Shape 22"/>
+          <p:cNvPr id="28" name="Shape 26"/>
           <p:cNvSpPr/>
           <p:nvPr/>
         </p:nvSpPr>
@@ -5347,7 +5737,7 @@
       </p:sp>
       <p:sp>
         <p:nvSpPr>
-          <p:cNvPr id="25" name="Shape 23"/>
+          <p:cNvPr id="29" name="Shape 27"/>
           <p:cNvSpPr/>
           <p:nvPr/>
         </p:nvSpPr>
@@ -5374,7 +5764,7 @@
       </p:sp>
       <p:sp>
         <p:nvSpPr>
-          <p:cNvPr id="26" name="Shape 24"/>
+          <p:cNvPr id="30" name="Shape 28"/>
           <p:cNvSpPr/>
           <p:nvPr/>
         </p:nvSpPr>
@@ -5401,7 +5791,7 @@
       </p:sp>
       <p:sp>
         <p:nvSpPr>
-          <p:cNvPr id="27" name="Text 25"/>
+          <p:cNvPr id="31" name="Text 29"/>
           <p:cNvSpPr txBox="1"/>
           <p:nvPr/>
         </p:nvSpPr>
@@ -5445,7 +5835,7 @@
       </p:sp>
       <p:sp>
         <p:nvSpPr>
-          <p:cNvPr id="28" name="Text 26"/>
+          <p:cNvPr id="32" name="Text 30"/>
           <p:cNvSpPr txBox="1"/>
           <p:nvPr/>
         </p:nvSpPr>
@@ -5489,7 +5879,7 @@
       </p:sp>
       <p:sp>
         <p:nvSpPr>
-          <p:cNvPr id="29" name="Shape 27"/>
+          <p:cNvPr id="33" name="Shape 31"/>
           <p:cNvSpPr/>
           <p:nvPr/>
         </p:nvSpPr>
@@ -5528,7 +5918,7 @@
       </p:sp>
       <p:sp>
         <p:nvSpPr>
-          <p:cNvPr id="30" name="Shape 28"/>
+          <p:cNvPr id="34" name="Shape 32"/>
           <p:cNvSpPr/>
           <p:nvPr/>
         </p:nvSpPr>
@@ -5555,7 +5945,7 @@
       </p:sp>
       <p:sp>
         <p:nvSpPr>
-          <p:cNvPr id="31" name="Shape 29"/>
+          <p:cNvPr id="35" name="Shape 33"/>
           <p:cNvSpPr/>
           <p:nvPr/>
         </p:nvSpPr>
@@ -5582,7 +5972,7 @@
       </p:sp>
       <p:sp>
         <p:nvSpPr>
-          <p:cNvPr id="32" name="Text 30"/>
+          <p:cNvPr id="36" name="Text 34"/>
           <p:cNvSpPr txBox="1"/>
           <p:nvPr/>
         </p:nvSpPr>
@@ -5626,7 +6016,7 @@
       </p:sp>
       <p:sp>
         <p:nvSpPr>
-          <p:cNvPr id="33" name="Text 31"/>
+          <p:cNvPr id="37" name="Text 35"/>
           <p:cNvSpPr txBox="1"/>
           <p:nvPr/>
         </p:nvSpPr>
@@ -5670,7 +6060,7 @@
       </p:sp>
       <p:sp>
         <p:nvSpPr>
-          <p:cNvPr id="34" name="Shape 32"/>
+          <p:cNvPr id="38" name="Shape 36"/>
           <p:cNvSpPr/>
           <p:nvPr/>
         </p:nvSpPr>
@@ -5709,7 +6099,7 @@
       </p:sp>
       <p:sp>
         <p:nvSpPr>
-          <p:cNvPr id="35" name="Shape 33"/>
+          <p:cNvPr id="39" name="Shape 37"/>
           <p:cNvSpPr/>
           <p:nvPr/>
         </p:nvSpPr>
@@ -5736,7 +6126,7 @@
       </p:sp>
       <p:sp>
         <p:nvSpPr>
-          <p:cNvPr id="36" name="Shape 34"/>
+          <p:cNvPr id="40" name="Shape 38"/>
           <p:cNvSpPr/>
           <p:nvPr/>
         </p:nvSpPr>
@@ -5763,7 +6153,7 @@
       </p:sp>
       <p:sp>
         <p:nvSpPr>
-          <p:cNvPr id="37" name="Text 35"/>
+          <p:cNvPr id="41" name="Text 39"/>
           <p:cNvSpPr txBox="1"/>
           <p:nvPr/>
         </p:nvSpPr>
@@ -5807,7 +6197,7 @@
       </p:sp>
       <p:sp>
         <p:nvSpPr>
-          <p:cNvPr id="38" name="Text 36"/>
+          <p:cNvPr id="42" name="Text 40"/>
           <p:cNvSpPr txBox="1"/>
           <p:nvPr/>
         </p:nvSpPr>
@@ -5851,7 +6241,7 @@
       </p:sp>
       <p:sp>
         <p:nvSpPr>
-          <p:cNvPr id="39" name="Shape 37"/>
+          <p:cNvPr id="43" name="Shape 41"/>
           <p:cNvSpPr/>
           <p:nvPr/>
         </p:nvSpPr>
@@ -5890,7 +6280,7 @@
       </p:sp>
       <p:sp>
         <p:nvSpPr>
-          <p:cNvPr id="40" name="Shape 38"/>
+          <p:cNvPr id="44" name="Shape 42"/>
           <p:cNvSpPr/>
           <p:nvPr/>
         </p:nvSpPr>
@@ -5917,7 +6307,7 @@
       </p:sp>
       <p:sp>
         <p:nvSpPr>
-          <p:cNvPr id="41" name="Shape 39"/>
+          <p:cNvPr id="45" name="Shape 43"/>
           <p:cNvSpPr/>
           <p:nvPr/>
         </p:nvSpPr>
@@ -5944,7 +6334,7 @@
       </p:sp>
       <p:sp>
         <p:nvSpPr>
-          <p:cNvPr id="42" name="Text 40"/>
+          <p:cNvPr id="46" name="Text 44"/>
           <p:cNvSpPr txBox="1"/>
           <p:nvPr/>
         </p:nvSpPr>
@@ -5988,7 +6378,7 @@
       </p:sp>
       <p:sp>
         <p:nvSpPr>
-          <p:cNvPr id="43" name="Text 41"/>
+          <p:cNvPr id="47" name="Text 45"/>
           <p:cNvSpPr txBox="1"/>
           <p:nvPr/>
         </p:nvSpPr>
@@ -6032,7 +6422,7 @@
       </p:sp>
       <p:sp>
         <p:nvSpPr>
-          <p:cNvPr id="44" name="Shape 42"/>
+          <p:cNvPr id="48" name="Shape 46"/>
           <p:cNvSpPr/>
           <p:nvPr/>
         </p:nvSpPr>
@@ -6071,7 +6461,7 @@
       </p:sp>
       <p:sp>
         <p:nvSpPr>
-          <p:cNvPr id="45" name="Shape 43"/>
+          <p:cNvPr id="49" name="Shape 47"/>
           <p:cNvSpPr/>
           <p:nvPr/>
         </p:nvSpPr>
@@ -6098,7 +6488,7 @@
       </p:sp>
       <p:sp>
         <p:nvSpPr>
-          <p:cNvPr id="46" name="Shape 44"/>
+          <p:cNvPr id="50" name="Shape 48"/>
           <p:cNvSpPr/>
           <p:nvPr/>
         </p:nvSpPr>
@@ -6125,7 +6515,7 @@
       </p:sp>
       <p:sp>
         <p:nvSpPr>
-          <p:cNvPr id="47" name="Text 45"/>
+          <p:cNvPr id="51" name="Text 49"/>
           <p:cNvSpPr txBox="1"/>
           <p:nvPr/>
         </p:nvSpPr>
@@ -6169,7 +6559,7 @@
       </p:sp>
       <p:sp>
         <p:nvSpPr>
-          <p:cNvPr id="48" name="Text 46"/>
+          <p:cNvPr id="52" name="Text 50"/>
           <p:cNvSpPr txBox="1"/>
           <p:nvPr/>
         </p:nvSpPr>
@@ -6251,6 +6641,49 @@
         </p:nvSpPr>
         <p:spPr>
           <a:xfrm>
+            <a:off x="310896" y="256032"/>
+            <a:ext cx="10893247" cy="5779008"/>
+          </a:xfrm>
+          <a:prstGeom prst="roundRect">
+            <a:avLst>
+              <a:gd name="adj" fmla="val 1899"/>
+            </a:avLst>
+          </a:prstGeom>
+          <a:solidFill>
+            <a:srgbClr val="7DD3FC">
+              <a:alpha val="26000"/>
+            </a:srgbClr>
+          </a:solidFill>
+          <a:ln w="12700">
+            <a:solidFill>
+              <a:srgbClr val="FFFFFF">
+                <a:alpha val="14000"/>
+              </a:srgbClr>
+            </a:solidFill>
+            <a:prstDash val="solid"/>
+          </a:ln>
+          <a:effectLst>
+            <a:outerShdw sx="100000" sy="100000" kx="0" ky="0" algn="bl" rotWithShape="0" blurRad="12700" dist="50800" dir="2700000">
+              <a:srgbClr val="7DD3FC">
+                <a:alpha val="10000"/>
+              </a:srgbClr>
+            </a:outerShdw>
+            <a:glow rad="63500">
+              <a:srgbClr val="7DD3FC">
+                <a:alpha val="23000"/>
+              </a:srgbClr>
+            </a:glow>
+          </a:effectLst>
+        </p:spPr>
+      </p:sp>
+      <p:sp>
+        <p:nvSpPr>
+          <p:cNvPr id="3" name="Shape 1"/>
+          <p:cNvSpPr/>
+          <p:nvPr/>
+        </p:nvSpPr>
+        <p:spPr>
+          <a:xfrm>
             <a:off x="566928" y="475488"/>
             <a:ext cx="11057839" cy="5907024"/>
           </a:xfrm>
@@ -6288,7 +6721,7 @@
       </p:sp>
       <p:sp>
         <p:nvSpPr>
-          <p:cNvPr id="3" name="Shape 1"/>
+          <p:cNvPr id="4" name="Shape 2"/>
           <p:cNvSpPr/>
           <p:nvPr/>
         </p:nvSpPr>
@@ -6317,7 +6750,7 @@
       </p:sp>
       <p:sp>
         <p:nvSpPr>
-          <p:cNvPr id="4" name="Shape 2"/>
+          <p:cNvPr id="5" name="Shape 3"/>
           <p:cNvSpPr/>
           <p:nvPr/>
         </p:nvSpPr>
@@ -6346,7 +6779,7 @@
       </p:sp>
       <p:sp>
         <p:nvSpPr>
-          <p:cNvPr id="5" name="Shape 3"/>
+          <p:cNvPr id="6" name="Shape 4"/>
           <p:cNvSpPr/>
           <p:nvPr/>
         </p:nvSpPr>
@@ -6375,7 +6808,7 @@
       </p:sp>
       <p:sp>
         <p:nvSpPr>
-          <p:cNvPr id="6" name="Shape 4"/>
+          <p:cNvPr id="7" name="Shape 5"/>
           <p:cNvSpPr/>
           <p:nvPr/>
         </p:nvSpPr>
@@ -6400,7 +6833,7 @@
       </p:sp>
       <p:sp>
         <p:nvSpPr>
-          <p:cNvPr id="7" name="Shape 5"/>
+          <p:cNvPr id="8" name="Shape 6"/>
           <p:cNvSpPr/>
           <p:nvPr/>
         </p:nvSpPr>
@@ -6425,7 +6858,94 @@
       </p:sp>
       <p:sp>
         <p:nvSpPr>
-          <p:cNvPr id="8" name="Shape 6"/>
+          <p:cNvPr id="9" name="Shape 7"/>
+          <p:cNvSpPr/>
+          <p:nvPr/>
+        </p:nvSpPr>
+        <p:spPr>
+          <a:xfrm>
+            <a:off x="9631375" y="603504"/>
+            <a:ext cx="1353312" cy="0"/>
+          </a:xfrm>
+          <a:prstGeom prst="line">
+            <a:avLst/>
+          </a:prstGeom>
+          <a:noFill/>
+          <a:ln w="12700">
+            <a:solidFill>
+              <a:srgbClr val="FFFFFF">
+                <a:alpha val="54000"/>
+              </a:srgbClr>
+            </a:solidFill>
+            <a:prstDash val="solid"/>
+          </a:ln>
+        </p:spPr>
+      </p:sp>
+      <p:sp>
+        <p:nvSpPr>
+          <p:cNvPr id="10" name="Shape 8"/>
+          <p:cNvSpPr/>
+          <p:nvPr/>
+        </p:nvSpPr>
+        <p:spPr>
+          <a:xfrm rot="-180000">
+            <a:off x="530352" y="438912"/>
+            <a:ext cx="6583515" cy="146304"/>
+          </a:xfrm>
+          <a:prstGeom prst="roundRect">
+            <a:avLst>
+              <a:gd name="adj" fmla="val 37500"/>
+            </a:avLst>
+          </a:prstGeom>
+          <a:solidFill>
+            <a:srgbClr val="FFFFFF">
+              <a:alpha val="22000"/>
+            </a:srgbClr>
+          </a:solidFill>
+          <a:ln w="12700">
+            <a:solidFill>
+              <a:srgbClr val="FFFFFF">
+                <a:alpha val="0"/>
+              </a:srgbClr>
+            </a:solidFill>
+            <a:prstDash val="solid"/>
+          </a:ln>
+        </p:spPr>
+      </p:sp>
+      <p:sp>
+        <p:nvSpPr>
+          <p:cNvPr id="11" name="Shape 9"/>
+          <p:cNvSpPr/>
+          <p:nvPr/>
+        </p:nvSpPr>
+        <p:spPr>
+          <a:xfrm rot="120000">
+            <a:off x="7558851" y="256032"/>
+            <a:ext cx="3047924" cy="201168"/>
+          </a:xfrm>
+          <a:prstGeom prst="roundRect">
+            <a:avLst>
+              <a:gd name="adj" fmla="val 31818"/>
+            </a:avLst>
+          </a:prstGeom>
+          <a:solidFill>
+            <a:srgbClr val="7DD3FC">
+              <a:alpha val="64000"/>
+            </a:srgbClr>
+          </a:solidFill>
+          <a:ln w="12700">
+            <a:solidFill>
+              <a:srgbClr val="FFFFFF">
+                <a:alpha val="18000"/>
+              </a:srgbClr>
+            </a:solidFill>
+            <a:prstDash val="solid"/>
+          </a:ln>
+        </p:spPr>
+      </p:sp>
+      <p:sp>
+        <p:nvSpPr>
+          <p:cNvPr id="12" name="Shape 10"/>
           <p:cNvSpPr/>
           <p:nvPr/>
         </p:nvSpPr>
@@ -6466,7 +6986,7 @@
       </p:sp>
       <p:sp>
         <p:nvSpPr>
-          <p:cNvPr id="9" name="Shape 7"/>
+          <p:cNvPr id="13" name="Shape 11"/>
           <p:cNvSpPr/>
           <p:nvPr/>
         </p:nvSpPr>
@@ -6495,7 +7015,7 @@
       </p:sp>
       <p:sp>
         <p:nvSpPr>
-          <p:cNvPr id="10" name="Shape 8"/>
+          <p:cNvPr id="14" name="Shape 12"/>
           <p:cNvSpPr/>
           <p:nvPr/>
         </p:nvSpPr>
@@ -6522,7 +7042,7 @@
       </p:sp>
       <p:sp>
         <p:nvSpPr>
-          <p:cNvPr id="11" name="Shape 9"/>
+          <p:cNvPr id="15" name="Shape 13"/>
           <p:cNvSpPr/>
           <p:nvPr/>
         </p:nvSpPr>
@@ -6549,7 +7069,7 @@
       </p:sp>
       <p:sp>
         <p:nvSpPr>
-          <p:cNvPr id="12" name="Shape 10"/>
+          <p:cNvPr id="16" name="Shape 14"/>
           <p:cNvSpPr/>
           <p:nvPr/>
         </p:nvSpPr>
@@ -6576,7 +7096,7 @@
       </p:sp>
       <p:pic>
         <p:nvPicPr>
-          <p:cNvPr id="13" name="Image 0" descr="preencoded.png">    </p:cNvPr>
+          <p:cNvPr id="17" name="Image 0" descr="preencoded.png">    </p:cNvPr>
           <p:cNvPicPr>
             <a:picLocks noChangeAspect="1"/>
           </p:cNvPicPr>
@@ -6606,7 +7126,7 @@
       </p:pic>
       <p:sp>
         <p:nvSpPr>
-          <p:cNvPr id="14" name="Shape 11"/>
+          <p:cNvPr id="18" name="Shape 15"/>
           <p:cNvSpPr/>
           <p:nvPr/>
         </p:nvSpPr>
@@ -6647,7 +7167,7 @@
       </p:sp>
       <p:pic>
         <p:nvPicPr>
-          <p:cNvPr id="15" name="Image 1" descr="preencoded.png">    </p:cNvPr>
+          <p:cNvPr id="19" name="Image 1" descr="preencoded.png">    </p:cNvPr>
           <p:cNvPicPr>
             <a:picLocks noChangeAspect="1"/>
           </p:cNvPicPr>
@@ -6677,7 +7197,7 @@
       </p:pic>
       <p:sp>
         <p:nvSpPr>
-          <p:cNvPr id="16" name="Shape 12"/>
+          <p:cNvPr id="20" name="Shape 16"/>
           <p:cNvSpPr/>
           <p:nvPr/>
         </p:nvSpPr>
@@ -6718,7 +7238,7 @@
       </p:sp>
       <p:pic>
         <p:nvPicPr>
-          <p:cNvPr id="17" name="Image 2" descr="preencoded.png">    </p:cNvPr>
+          <p:cNvPr id="21" name="Image 2" descr="preencoded.png">    </p:cNvPr>
           <p:cNvPicPr>
             <a:picLocks noChangeAspect="1"/>
           </p:cNvPicPr>
@@ -6748,7 +7268,7 @@
       </p:pic>
       <p:sp>
         <p:nvSpPr>
-          <p:cNvPr id="18" name="Shape 13"/>
+          <p:cNvPr id="22" name="Shape 17"/>
           <p:cNvSpPr/>
           <p:nvPr/>
         </p:nvSpPr>
@@ -6789,7 +7309,7 @@
       </p:sp>
       <p:pic>
         <p:nvPicPr>
-          <p:cNvPr id="19" name="Image 3" descr="preencoded.png">    </p:cNvPr>
+          <p:cNvPr id="23" name="Image 3" descr="preencoded.png">    </p:cNvPr>
           <p:cNvPicPr>
             <a:picLocks noChangeAspect="1"/>
           </p:cNvPicPr>
@@ -6819,7 +7339,7 @@
       </p:pic>
       <p:sp>
         <p:nvSpPr>
-          <p:cNvPr id="20" name="Shape 14"/>
+          <p:cNvPr id="24" name="Shape 18"/>
           <p:cNvSpPr/>
           <p:nvPr/>
         </p:nvSpPr>
@@ -6860,7 +7380,7 @@
       </p:sp>
       <p:sp>
         <p:nvSpPr>
-          <p:cNvPr id="21" name="Shape 15"/>
+          <p:cNvPr id="25" name="Shape 19"/>
           <p:cNvSpPr/>
           <p:nvPr/>
         </p:nvSpPr>
@@ -6887,7 +7407,7 @@
       </p:sp>
       <p:sp>
         <p:nvSpPr>
-          <p:cNvPr id="22" name="Shape 16"/>
+          <p:cNvPr id="26" name="Shape 20"/>
           <p:cNvSpPr/>
           <p:nvPr/>
         </p:nvSpPr>
@@ -6914,7 +7434,7 @@
       </p:sp>
       <p:sp>
         <p:nvSpPr>
-          <p:cNvPr id="23" name="Shape 17"/>
+          <p:cNvPr id="27" name="Shape 21"/>
           <p:cNvSpPr/>
           <p:nvPr/>
         </p:nvSpPr>
@@ -6941,7 +7461,7 @@
       </p:sp>
       <p:sp>
         <p:nvSpPr>
-          <p:cNvPr id="24" name="Shape 18"/>
+          <p:cNvPr id="28" name="Shape 22"/>
           <p:cNvSpPr/>
           <p:nvPr/>
         </p:nvSpPr>
@@ -6968,7 +7488,7 @@
       </p:sp>
       <p:sp>
         <p:nvSpPr>
-          <p:cNvPr id="25" name="mdpr:1-2-e3669a:title:__title:1-2-e3669a"/>
+          <p:cNvPr id="29" name="mdpr:1-2-e3669a:title:__title:1-2-e3669a"/>
           <p:cNvSpPr txBox="1"/>
           <p:nvPr/>
         </p:nvSpPr>
@@ -7010,7 +7530,7 @@
       </p:sp>
       <p:sp>
         <p:nvSpPr>
-          <p:cNvPr id="26" name="Shape 20"/>
+          <p:cNvPr id="30" name="Shape 24"/>
           <p:cNvSpPr/>
           <p:nvPr/>
         </p:nvSpPr>
@@ -7037,7 +7557,7 @@
       </p:sp>
       <p:pic>
         <p:nvPicPr>
-          <p:cNvPr id="27" name="Image 4" descr="article icon from tabler-icons (MIT)">    </p:cNvPr>
+          <p:cNvPr id="31" name="Image 4" descr="article icon from tabler-icons (MIT)">    </p:cNvPr>
           <p:cNvPicPr>
             <a:picLocks noChangeAspect="1"/>
           </p:cNvPicPr>
@@ -7067,7 +7587,7 @@
       </p:pic>
       <p:sp>
         <p:nvSpPr>
-          <p:cNvPr id="28" name="mdpr:1-2-e3669a:item-1:block-15-chunk-1"/>
+          <p:cNvPr id="32" name="mdpr:1-2-e3669a:item-1:block-15-chunk-1"/>
           <p:cNvSpPr txBox="1"/>
           <p:nvPr/>
         </p:nvSpPr>
@@ -7126,7 +7646,7 @@
       </p:sp>
       <p:sp>
         <p:nvSpPr>
-          <p:cNvPr id="29" name="Shape 22"/>
+          <p:cNvPr id="33" name="Shape 26"/>
           <p:cNvSpPr/>
           <p:nvPr/>
         </p:nvSpPr>
@@ -7153,7 +7673,7 @@
       </p:sp>
       <p:pic>
         <p:nvPicPr>
-          <p:cNvPr id="30" name="Image 5" descr="table icon from tabler-icons (MIT)">    </p:cNvPr>
+          <p:cNvPr id="34" name="Image 5" descr="table icon from tabler-icons (MIT)">    </p:cNvPr>
           <p:cNvPicPr>
             <a:picLocks noChangeAspect="1"/>
           </p:cNvPicPr>
@@ -7183,7 +7703,7 @@
       </p:pic>
       <p:sp>
         <p:nvSpPr>
-          <p:cNvPr id="31" name="mdpr:1-2-e3669a:item-2:block-15-chunk-1"/>
+          <p:cNvPr id="35" name="mdpr:1-2-e3669a:item-2:block-15-chunk-1"/>
           <p:cNvSpPr txBox="1"/>
           <p:nvPr/>
         </p:nvSpPr>
@@ -7242,7 +7762,7 @@
       </p:sp>
       <p:sp>
         <p:nvSpPr>
-          <p:cNvPr id="32" name="Shape 24"/>
+          <p:cNvPr id="36" name="Shape 28"/>
           <p:cNvSpPr/>
           <p:nvPr/>
         </p:nvSpPr>
@@ -7269,7 +7789,7 @@
       </p:sp>
       <p:pic>
         <p:nvPicPr>
-          <p:cNvPr id="33" name="Image 6" descr="chart icon from tabler-icons (MIT)">    </p:cNvPr>
+          <p:cNvPr id="37" name="Image 6" descr="chart icon from tabler-icons (MIT)">    </p:cNvPr>
           <p:cNvPicPr>
             <a:picLocks noChangeAspect="1"/>
           </p:cNvPicPr>
@@ -7299,7 +7819,7 @@
       </p:pic>
       <p:sp>
         <p:nvSpPr>
-          <p:cNvPr id="34" name="mdpr:1-2-e3669a:item-3:block-15-chunk-1"/>
+          <p:cNvPr id="38" name="mdpr:1-2-e3669a:item-3:block-15-chunk-1"/>
           <p:cNvSpPr txBox="1"/>
           <p:nvPr/>
         </p:nvSpPr>
@@ -7358,7 +7878,7 @@
       </p:sp>
       <p:sp>
         <p:nvSpPr>
-          <p:cNvPr id="35" name="Shape 26"/>
+          <p:cNvPr id="39" name="Shape 30"/>
           <p:cNvSpPr/>
           <p:nvPr/>
         </p:nvSpPr>
@@ -7385,7 +7905,7 @@
       </p:sp>
       <p:pic>
         <p:nvPicPr>
-          <p:cNvPr id="36" name="Image 7" descr="flow icon from tabler-icons (MIT)">    </p:cNvPr>
+          <p:cNvPr id="40" name="Image 7" descr="flow icon from tabler-icons (MIT)">    </p:cNvPr>
           <p:cNvPicPr>
             <a:picLocks noChangeAspect="1"/>
           </p:cNvPicPr>
@@ -7415,7 +7935,7 @@
       </p:pic>
       <p:sp>
         <p:nvSpPr>
-          <p:cNvPr id="37" name="mdpr:1-2-e3669a:item-4:block-15-chunk-1"/>
+          <p:cNvPr id="41" name="mdpr:1-2-e3669a:item-4:block-15-chunk-1"/>
           <p:cNvSpPr txBox="1"/>
           <p:nvPr/>
         </p:nvSpPr>
@@ -7512,6 +8032,49 @@
         </p:nvSpPr>
         <p:spPr>
           <a:xfrm>
+            <a:off x="310896" y="256032"/>
+            <a:ext cx="10893247" cy="5779008"/>
+          </a:xfrm>
+          <a:prstGeom prst="roundRect">
+            <a:avLst>
+              <a:gd name="adj" fmla="val 1899"/>
+            </a:avLst>
+          </a:prstGeom>
+          <a:solidFill>
+            <a:srgbClr val="7DD3FC">
+              <a:alpha val="26000"/>
+            </a:srgbClr>
+          </a:solidFill>
+          <a:ln w="12700">
+            <a:solidFill>
+              <a:srgbClr val="FFFFFF">
+                <a:alpha val="14000"/>
+              </a:srgbClr>
+            </a:solidFill>
+            <a:prstDash val="solid"/>
+          </a:ln>
+          <a:effectLst>
+            <a:outerShdw sx="100000" sy="100000" kx="0" ky="0" algn="bl" rotWithShape="0" blurRad="12700" dist="50800" dir="2700000">
+              <a:srgbClr val="7DD3FC">
+                <a:alpha val="10000"/>
+              </a:srgbClr>
+            </a:outerShdw>
+            <a:glow rad="63500">
+              <a:srgbClr val="7DD3FC">
+                <a:alpha val="23000"/>
+              </a:srgbClr>
+            </a:glow>
+          </a:effectLst>
+        </p:spPr>
+      </p:sp>
+      <p:sp>
+        <p:nvSpPr>
+          <p:cNvPr id="3" name="Shape 1"/>
+          <p:cNvSpPr/>
+          <p:nvPr/>
+        </p:nvSpPr>
+        <p:spPr>
+          <a:xfrm>
             <a:off x="566928" y="475488"/>
             <a:ext cx="11057839" cy="5907024"/>
           </a:xfrm>
@@ -7549,7 +8112,7 @@
       </p:sp>
       <p:sp>
         <p:nvSpPr>
-          <p:cNvPr id="3" name="Shape 1"/>
+          <p:cNvPr id="4" name="Shape 2"/>
           <p:cNvSpPr/>
           <p:nvPr/>
         </p:nvSpPr>
@@ -7578,7 +8141,7 @@
       </p:sp>
       <p:sp>
         <p:nvSpPr>
-          <p:cNvPr id="4" name="Shape 2"/>
+          <p:cNvPr id="5" name="Shape 3"/>
           <p:cNvSpPr/>
           <p:nvPr/>
         </p:nvSpPr>
@@ -7607,7 +8170,7 @@
       </p:sp>
       <p:sp>
         <p:nvSpPr>
-          <p:cNvPr id="5" name="Shape 3"/>
+          <p:cNvPr id="6" name="Shape 4"/>
           <p:cNvSpPr/>
           <p:nvPr/>
         </p:nvSpPr>
@@ -7636,7 +8199,7 @@
       </p:sp>
       <p:sp>
         <p:nvSpPr>
-          <p:cNvPr id="6" name="Shape 4"/>
+          <p:cNvPr id="7" name="Shape 5"/>
           <p:cNvSpPr/>
           <p:nvPr/>
         </p:nvSpPr>
@@ -7661,7 +8224,7 @@
       </p:sp>
       <p:sp>
         <p:nvSpPr>
-          <p:cNvPr id="7" name="Shape 5"/>
+          <p:cNvPr id="8" name="Shape 6"/>
           <p:cNvSpPr/>
           <p:nvPr/>
         </p:nvSpPr>
@@ -7686,7 +8249,94 @@
       </p:sp>
       <p:sp>
         <p:nvSpPr>
-          <p:cNvPr id="8" name="Shape 6"/>
+          <p:cNvPr id="9" name="Shape 7"/>
+          <p:cNvSpPr/>
+          <p:nvPr/>
+        </p:nvSpPr>
+        <p:spPr>
+          <a:xfrm>
+            <a:off x="9631375" y="603504"/>
+            <a:ext cx="1353312" cy="0"/>
+          </a:xfrm>
+          <a:prstGeom prst="line">
+            <a:avLst/>
+          </a:prstGeom>
+          <a:noFill/>
+          <a:ln w="12700">
+            <a:solidFill>
+              <a:srgbClr val="FFFFFF">
+                <a:alpha val="54000"/>
+              </a:srgbClr>
+            </a:solidFill>
+            <a:prstDash val="solid"/>
+          </a:ln>
+        </p:spPr>
+      </p:sp>
+      <p:sp>
+        <p:nvSpPr>
+          <p:cNvPr id="10" name="Shape 8"/>
+          <p:cNvSpPr/>
+          <p:nvPr/>
+        </p:nvSpPr>
+        <p:spPr>
+          <a:xfrm rot="-180000">
+            <a:off x="530352" y="438912"/>
+            <a:ext cx="6583515" cy="146304"/>
+          </a:xfrm>
+          <a:prstGeom prst="roundRect">
+            <a:avLst>
+              <a:gd name="adj" fmla="val 37500"/>
+            </a:avLst>
+          </a:prstGeom>
+          <a:solidFill>
+            <a:srgbClr val="FFFFFF">
+              <a:alpha val="22000"/>
+            </a:srgbClr>
+          </a:solidFill>
+          <a:ln w="12700">
+            <a:solidFill>
+              <a:srgbClr val="FFFFFF">
+                <a:alpha val="0"/>
+              </a:srgbClr>
+            </a:solidFill>
+            <a:prstDash val="solid"/>
+          </a:ln>
+        </p:spPr>
+      </p:sp>
+      <p:sp>
+        <p:nvSpPr>
+          <p:cNvPr id="11" name="Shape 9"/>
+          <p:cNvSpPr/>
+          <p:nvPr/>
+        </p:nvSpPr>
+        <p:spPr>
+          <a:xfrm rot="120000">
+            <a:off x="7558851" y="256032"/>
+            <a:ext cx="3047924" cy="201168"/>
+          </a:xfrm>
+          <a:prstGeom prst="roundRect">
+            <a:avLst>
+              <a:gd name="adj" fmla="val 31818"/>
+            </a:avLst>
+          </a:prstGeom>
+          <a:solidFill>
+            <a:srgbClr val="7DD3FC">
+              <a:alpha val="64000"/>
+            </a:srgbClr>
+          </a:solidFill>
+          <a:ln w="12700">
+            <a:solidFill>
+              <a:srgbClr val="FFFFFF">
+                <a:alpha val="18000"/>
+              </a:srgbClr>
+            </a:solidFill>
+            <a:prstDash val="solid"/>
+          </a:ln>
+        </p:spPr>
+      </p:sp>
+      <p:sp>
+        <p:nvSpPr>
+          <p:cNvPr id="12" name="Shape 10"/>
           <p:cNvSpPr/>
           <p:nvPr/>
         </p:nvSpPr>
@@ -7727,7 +8377,7 @@
       </p:sp>
       <p:sp>
         <p:nvSpPr>
-          <p:cNvPr id="9" name="Shape 7"/>
+          <p:cNvPr id="13" name="Shape 11"/>
           <p:cNvSpPr/>
           <p:nvPr/>
         </p:nvSpPr>
@@ -7756,7 +8406,7 @@
       </p:sp>
       <p:sp>
         <p:nvSpPr>
-          <p:cNvPr id="10" name="Shape 8"/>
+          <p:cNvPr id="14" name="Shape 12"/>
           <p:cNvSpPr/>
           <p:nvPr/>
         </p:nvSpPr>
@@ -7783,7 +8433,7 @@
       </p:sp>
       <p:sp>
         <p:nvSpPr>
-          <p:cNvPr id="11" name="Shape 9"/>
+          <p:cNvPr id="15" name="Shape 13"/>
           <p:cNvSpPr/>
           <p:nvPr/>
         </p:nvSpPr>
@@ -7810,7 +8460,7 @@
       </p:sp>
       <p:sp>
         <p:nvSpPr>
-          <p:cNvPr id="12" name="Shape 10"/>
+          <p:cNvPr id="16" name="Shape 14"/>
           <p:cNvSpPr/>
           <p:nvPr/>
         </p:nvSpPr>
@@ -7837,7 +8487,7 @@
       </p:sp>
       <p:sp>
         <p:nvSpPr>
-          <p:cNvPr id="13" name="Shape 11"/>
+          <p:cNvPr id="17" name="Shape 15"/>
           <p:cNvSpPr/>
           <p:nvPr/>
         </p:nvSpPr>
@@ -7864,7 +8514,7 @@
       </p:sp>
       <p:sp>
         <p:nvSpPr>
-          <p:cNvPr id="14" name="Shape 12"/>
+          <p:cNvPr id="18" name="Shape 16"/>
           <p:cNvSpPr/>
           <p:nvPr/>
         </p:nvSpPr>
@@ -7891,7 +8541,7 @@
       </p:sp>
       <p:sp>
         <p:nvSpPr>
-          <p:cNvPr id="15" name="mdpr:2-2-c23e9b:title:__title:2-2-c23e9b"/>
+          <p:cNvPr id="19" name="mdpr:2-2-c23e9b:title:__title:2-2-c23e9b"/>
           <p:cNvSpPr txBox="1"/>
           <p:nvPr/>
         </p:nvSpPr>
@@ -7933,7 +8583,7 @@
       </p:sp>
       <p:sp>
         <p:nvSpPr>
-          <p:cNvPr id="16" name="mdpr:2-2-c23e9b:left:block-15-chunk-2"/>
+          <p:cNvPr id="20" name="mdpr:2-2-c23e9b:left:block-15-chunk-2"/>
           <p:cNvSpPr txBox="1"/>
           <p:nvPr/>
         </p:nvSpPr>
@@ -7992,7 +8642,7 @@
       </p:sp>
       <p:sp>
         <p:nvSpPr>
-          <p:cNvPr id="17" name="mdpr:2-2-c23e9b:right:block-15-chunk-2"/>
+          <p:cNvPr id="21" name="mdpr:2-2-c23e9b:right:block-15-chunk-2"/>
           <p:cNvSpPr txBox="1"/>
           <p:nvPr/>
         </p:nvSpPr>
@@ -8089,6 +8739,49 @@
         </p:nvSpPr>
         <p:spPr>
           <a:xfrm>
+            <a:off x="310896" y="256032"/>
+            <a:ext cx="10893247" cy="5779008"/>
+          </a:xfrm>
+          <a:prstGeom prst="roundRect">
+            <a:avLst>
+              <a:gd name="adj" fmla="val 1899"/>
+            </a:avLst>
+          </a:prstGeom>
+          <a:solidFill>
+            <a:srgbClr val="7DD3FC">
+              <a:alpha val="26000"/>
+            </a:srgbClr>
+          </a:solidFill>
+          <a:ln w="12700">
+            <a:solidFill>
+              <a:srgbClr val="FFFFFF">
+                <a:alpha val="14000"/>
+              </a:srgbClr>
+            </a:solidFill>
+            <a:prstDash val="solid"/>
+          </a:ln>
+          <a:effectLst>
+            <a:outerShdw sx="100000" sy="100000" kx="0" ky="0" algn="bl" rotWithShape="0" blurRad="12700" dist="50800" dir="2700000">
+              <a:srgbClr val="7DD3FC">
+                <a:alpha val="10000"/>
+              </a:srgbClr>
+            </a:outerShdw>
+            <a:glow rad="63500">
+              <a:srgbClr val="7DD3FC">
+                <a:alpha val="23000"/>
+              </a:srgbClr>
+            </a:glow>
+          </a:effectLst>
+        </p:spPr>
+      </p:sp>
+      <p:sp>
+        <p:nvSpPr>
+          <p:cNvPr id="3" name="Shape 1"/>
+          <p:cNvSpPr/>
+          <p:nvPr/>
+        </p:nvSpPr>
+        <p:spPr>
+          <a:xfrm>
             <a:off x="566928" y="475488"/>
             <a:ext cx="11057839" cy="5907024"/>
           </a:xfrm>
@@ -8126,7 +8819,7 @@
       </p:sp>
       <p:sp>
         <p:nvSpPr>
-          <p:cNvPr id="3" name="Shape 1"/>
+          <p:cNvPr id="4" name="Shape 2"/>
           <p:cNvSpPr/>
           <p:nvPr/>
         </p:nvSpPr>
@@ -8155,7 +8848,7 @@
       </p:sp>
       <p:sp>
         <p:nvSpPr>
-          <p:cNvPr id="4" name="Shape 2"/>
+          <p:cNvPr id="5" name="Shape 3"/>
           <p:cNvSpPr/>
           <p:nvPr/>
         </p:nvSpPr>
@@ -8184,7 +8877,7 @@
       </p:sp>
       <p:sp>
         <p:nvSpPr>
-          <p:cNvPr id="5" name="Shape 3"/>
+          <p:cNvPr id="6" name="Shape 4"/>
           <p:cNvSpPr/>
           <p:nvPr/>
         </p:nvSpPr>
@@ -8213,7 +8906,7 @@
       </p:sp>
       <p:sp>
         <p:nvSpPr>
-          <p:cNvPr id="6" name="Shape 4"/>
+          <p:cNvPr id="7" name="Shape 5"/>
           <p:cNvSpPr/>
           <p:nvPr/>
         </p:nvSpPr>
@@ -8238,7 +8931,7 @@
       </p:sp>
       <p:sp>
         <p:nvSpPr>
-          <p:cNvPr id="7" name="Shape 5"/>
+          <p:cNvPr id="8" name="Shape 6"/>
           <p:cNvSpPr/>
           <p:nvPr/>
         </p:nvSpPr>
@@ -8263,7 +8956,94 @@
       </p:sp>
       <p:sp>
         <p:nvSpPr>
-          <p:cNvPr id="8" name="Shape 6"/>
+          <p:cNvPr id="9" name="Shape 7"/>
+          <p:cNvSpPr/>
+          <p:nvPr/>
+        </p:nvSpPr>
+        <p:spPr>
+          <a:xfrm>
+            <a:off x="9631375" y="603504"/>
+            <a:ext cx="1353312" cy="0"/>
+          </a:xfrm>
+          <a:prstGeom prst="line">
+            <a:avLst/>
+          </a:prstGeom>
+          <a:noFill/>
+          <a:ln w="12700">
+            <a:solidFill>
+              <a:srgbClr val="FFFFFF">
+                <a:alpha val="54000"/>
+              </a:srgbClr>
+            </a:solidFill>
+            <a:prstDash val="solid"/>
+          </a:ln>
+        </p:spPr>
+      </p:sp>
+      <p:sp>
+        <p:nvSpPr>
+          <p:cNvPr id="10" name="Shape 8"/>
+          <p:cNvSpPr/>
+          <p:nvPr/>
+        </p:nvSpPr>
+        <p:spPr>
+          <a:xfrm rot="-180000">
+            <a:off x="530352" y="438912"/>
+            <a:ext cx="6583515" cy="146304"/>
+          </a:xfrm>
+          <a:prstGeom prst="roundRect">
+            <a:avLst>
+              <a:gd name="adj" fmla="val 37500"/>
+            </a:avLst>
+          </a:prstGeom>
+          <a:solidFill>
+            <a:srgbClr val="FFFFFF">
+              <a:alpha val="22000"/>
+            </a:srgbClr>
+          </a:solidFill>
+          <a:ln w="12700">
+            <a:solidFill>
+              <a:srgbClr val="FFFFFF">
+                <a:alpha val="0"/>
+              </a:srgbClr>
+            </a:solidFill>
+            <a:prstDash val="solid"/>
+          </a:ln>
+        </p:spPr>
+      </p:sp>
+      <p:sp>
+        <p:nvSpPr>
+          <p:cNvPr id="11" name="Shape 9"/>
+          <p:cNvSpPr/>
+          <p:nvPr/>
+        </p:nvSpPr>
+        <p:spPr>
+          <a:xfrm rot="120000">
+            <a:off x="7558851" y="256032"/>
+            <a:ext cx="3047924" cy="201168"/>
+          </a:xfrm>
+          <a:prstGeom prst="roundRect">
+            <a:avLst>
+              <a:gd name="adj" fmla="val 31818"/>
+            </a:avLst>
+          </a:prstGeom>
+          <a:solidFill>
+            <a:srgbClr val="7DD3FC">
+              <a:alpha val="64000"/>
+            </a:srgbClr>
+          </a:solidFill>
+          <a:ln w="12700">
+            <a:solidFill>
+              <a:srgbClr val="FFFFFF">
+                <a:alpha val="18000"/>
+              </a:srgbClr>
+            </a:solidFill>
+            <a:prstDash val="solid"/>
+          </a:ln>
+        </p:spPr>
+      </p:sp>
+      <p:sp>
+        <p:nvSpPr>
+          <p:cNvPr id="12" name="Shape 10"/>
           <p:cNvSpPr/>
           <p:nvPr/>
         </p:nvSpPr>
@@ -8304,7 +9084,7 @@
       </p:sp>
       <p:sp>
         <p:nvSpPr>
-          <p:cNvPr id="9" name="Shape 7"/>
+          <p:cNvPr id="13" name="Shape 11"/>
           <p:cNvSpPr/>
           <p:nvPr/>
         </p:nvSpPr>
@@ -8333,7 +9113,7 @@
       </p:sp>
       <p:sp>
         <p:nvSpPr>
-          <p:cNvPr id="10" name="Shape 8"/>
+          <p:cNvPr id="14" name="Shape 12"/>
           <p:cNvSpPr/>
           <p:nvPr/>
         </p:nvSpPr>
@@ -8360,7 +9140,7 @@
       </p:sp>
       <p:sp>
         <p:nvSpPr>
-          <p:cNvPr id="11" name="Shape 9"/>
+          <p:cNvPr id="15" name="Shape 13"/>
           <p:cNvSpPr/>
           <p:nvPr/>
         </p:nvSpPr>
@@ -8387,7 +9167,7 @@
       </p:sp>
       <p:sp>
         <p:nvSpPr>
-          <p:cNvPr id="12" name="Shape 10"/>
+          <p:cNvPr id="16" name="Shape 14"/>
           <p:cNvSpPr/>
           <p:nvPr/>
         </p:nvSpPr>
@@ -8414,7 +9194,7 @@
       </p:sp>
       <p:pic>
         <p:nvPicPr>
-          <p:cNvPr id="13" name="Image 0" descr="preencoded.png">    </p:cNvPr>
+          <p:cNvPr id="17" name="Image 0" descr="preencoded.png">    </p:cNvPr>
           <p:cNvPicPr>
             <a:picLocks noChangeAspect="1"/>
           </p:cNvPicPr>
@@ -8444,7 +9224,7 @@
       </p:pic>
       <p:sp>
         <p:nvSpPr>
-          <p:cNvPr id="14" name="Shape 11"/>
+          <p:cNvPr id="18" name="Shape 15"/>
           <p:cNvSpPr/>
           <p:nvPr/>
         </p:nvSpPr>
@@ -8485,7 +9265,7 @@
       </p:sp>
       <p:sp>
         <p:nvSpPr>
-          <p:cNvPr id="15" name="mdpr:table-coherence-2f9a7b:title:__title:table-coherence-2f9a7b"/>
+          <p:cNvPr id="19" name="mdpr:table-coherence-2f9a7b:title:__title:table-coherence-2f9a7b"/>
           <p:cNvSpPr txBox="1"/>
           <p:nvPr/>
         </p:nvSpPr>
@@ -9620,6 +10400,49 @@
         </p:nvSpPr>
         <p:spPr>
           <a:xfrm>
+            <a:off x="310896" y="256032"/>
+            <a:ext cx="10893247" cy="5779008"/>
+          </a:xfrm>
+          <a:prstGeom prst="roundRect">
+            <a:avLst>
+              <a:gd name="adj" fmla="val 1899"/>
+            </a:avLst>
+          </a:prstGeom>
+          <a:solidFill>
+            <a:srgbClr val="7DD3FC">
+              <a:alpha val="26000"/>
+            </a:srgbClr>
+          </a:solidFill>
+          <a:ln w="12700">
+            <a:solidFill>
+              <a:srgbClr val="FFFFFF">
+                <a:alpha val="14000"/>
+              </a:srgbClr>
+            </a:solidFill>
+            <a:prstDash val="solid"/>
+          </a:ln>
+          <a:effectLst>
+            <a:outerShdw sx="100000" sy="100000" kx="0" ky="0" algn="bl" rotWithShape="0" blurRad="12700" dist="50800" dir="2700000">
+              <a:srgbClr val="7DD3FC">
+                <a:alpha val="10000"/>
+              </a:srgbClr>
+            </a:outerShdw>
+            <a:glow rad="63500">
+              <a:srgbClr val="7DD3FC">
+                <a:alpha val="23000"/>
+              </a:srgbClr>
+            </a:glow>
+          </a:effectLst>
+        </p:spPr>
+      </p:sp>
+      <p:sp>
+        <p:nvSpPr>
+          <p:cNvPr id="3" name="Shape 1"/>
+          <p:cNvSpPr/>
+          <p:nvPr/>
+        </p:nvSpPr>
+        <p:spPr>
+          <a:xfrm>
             <a:off x="566928" y="475488"/>
             <a:ext cx="11057839" cy="5907024"/>
           </a:xfrm>
@@ -9657,7 +10480,7 @@
       </p:sp>
       <p:sp>
         <p:nvSpPr>
-          <p:cNvPr id="3" name="Shape 1"/>
+          <p:cNvPr id="4" name="Shape 2"/>
           <p:cNvSpPr/>
           <p:nvPr/>
         </p:nvSpPr>
@@ -9686,7 +10509,7 @@
       </p:sp>
       <p:sp>
         <p:nvSpPr>
-          <p:cNvPr id="4" name="Shape 2"/>
+          <p:cNvPr id="5" name="Shape 3"/>
           <p:cNvSpPr/>
           <p:nvPr/>
         </p:nvSpPr>
@@ -9715,7 +10538,7 @@
       </p:sp>
       <p:sp>
         <p:nvSpPr>
-          <p:cNvPr id="5" name="Shape 3"/>
+          <p:cNvPr id="6" name="Shape 4"/>
           <p:cNvSpPr/>
           <p:nvPr/>
         </p:nvSpPr>
@@ -9744,7 +10567,7 @@
       </p:sp>
       <p:sp>
         <p:nvSpPr>
-          <p:cNvPr id="6" name="Shape 4"/>
+          <p:cNvPr id="7" name="Shape 5"/>
           <p:cNvSpPr/>
           <p:nvPr/>
         </p:nvSpPr>
@@ -9769,7 +10592,7 @@
       </p:sp>
       <p:sp>
         <p:nvSpPr>
-          <p:cNvPr id="7" name="Shape 5"/>
+          <p:cNvPr id="8" name="Shape 6"/>
           <p:cNvSpPr/>
           <p:nvPr/>
         </p:nvSpPr>
@@ -9794,7 +10617,94 @@
       </p:sp>
       <p:sp>
         <p:nvSpPr>
-          <p:cNvPr id="8" name="Shape 6"/>
+          <p:cNvPr id="9" name="Shape 7"/>
+          <p:cNvSpPr/>
+          <p:nvPr/>
+        </p:nvSpPr>
+        <p:spPr>
+          <a:xfrm>
+            <a:off x="9631375" y="603504"/>
+            <a:ext cx="1353312" cy="0"/>
+          </a:xfrm>
+          <a:prstGeom prst="line">
+            <a:avLst/>
+          </a:prstGeom>
+          <a:noFill/>
+          <a:ln w="12700">
+            <a:solidFill>
+              <a:srgbClr val="FFFFFF">
+                <a:alpha val="54000"/>
+              </a:srgbClr>
+            </a:solidFill>
+            <a:prstDash val="solid"/>
+          </a:ln>
+        </p:spPr>
+      </p:sp>
+      <p:sp>
+        <p:nvSpPr>
+          <p:cNvPr id="10" name="Shape 8"/>
+          <p:cNvSpPr/>
+          <p:nvPr/>
+        </p:nvSpPr>
+        <p:spPr>
+          <a:xfrm rot="-180000">
+            <a:off x="530352" y="438912"/>
+            <a:ext cx="6583515" cy="146304"/>
+          </a:xfrm>
+          <a:prstGeom prst="roundRect">
+            <a:avLst>
+              <a:gd name="adj" fmla="val 37500"/>
+            </a:avLst>
+          </a:prstGeom>
+          <a:solidFill>
+            <a:srgbClr val="FFFFFF">
+              <a:alpha val="22000"/>
+            </a:srgbClr>
+          </a:solidFill>
+          <a:ln w="12700">
+            <a:solidFill>
+              <a:srgbClr val="FFFFFF">
+                <a:alpha val="0"/>
+              </a:srgbClr>
+            </a:solidFill>
+            <a:prstDash val="solid"/>
+          </a:ln>
+        </p:spPr>
+      </p:sp>
+      <p:sp>
+        <p:nvSpPr>
+          <p:cNvPr id="11" name="Shape 9"/>
+          <p:cNvSpPr/>
+          <p:nvPr/>
+        </p:nvSpPr>
+        <p:spPr>
+          <a:xfrm rot="120000">
+            <a:off x="7558851" y="256032"/>
+            <a:ext cx="3047924" cy="201168"/>
+          </a:xfrm>
+          <a:prstGeom prst="roundRect">
+            <a:avLst>
+              <a:gd name="adj" fmla="val 31818"/>
+            </a:avLst>
+          </a:prstGeom>
+          <a:solidFill>
+            <a:srgbClr val="7DD3FC">
+              <a:alpha val="64000"/>
+            </a:srgbClr>
+          </a:solidFill>
+          <a:ln w="12700">
+            <a:solidFill>
+              <a:srgbClr val="FFFFFF">
+                <a:alpha val="18000"/>
+              </a:srgbClr>
+            </a:solidFill>
+            <a:prstDash val="solid"/>
+          </a:ln>
+        </p:spPr>
+      </p:sp>
+      <p:sp>
+        <p:nvSpPr>
+          <p:cNvPr id="12" name="Shape 10"/>
           <p:cNvSpPr/>
           <p:nvPr/>
         </p:nvSpPr>
@@ -9835,7 +10745,7 @@
       </p:sp>
       <p:sp>
         <p:nvSpPr>
-          <p:cNvPr id="9" name="Shape 7"/>
+          <p:cNvPr id="13" name="Shape 11"/>
           <p:cNvSpPr/>
           <p:nvPr/>
         </p:nvSpPr>
@@ -9864,7 +10774,7 @@
       </p:sp>
       <p:sp>
         <p:nvSpPr>
-          <p:cNvPr id="10" name="Shape 8"/>
+          <p:cNvPr id="14" name="Shape 12"/>
           <p:cNvSpPr/>
           <p:nvPr/>
         </p:nvSpPr>
@@ -9891,7 +10801,7 @@
       </p:sp>
       <p:sp>
         <p:nvSpPr>
-          <p:cNvPr id="11" name="Shape 9"/>
+          <p:cNvPr id="15" name="Shape 13"/>
           <p:cNvSpPr/>
           <p:nvPr/>
         </p:nvSpPr>
@@ -9918,7 +10828,7 @@
       </p:sp>
       <p:sp>
         <p:nvSpPr>
-          <p:cNvPr id="12" name="Shape 10"/>
+          <p:cNvPr id="16" name="Shape 14"/>
           <p:cNvSpPr/>
           <p:nvPr/>
         </p:nvSpPr>
@@ -9945,7 +10855,7 @@
       </p:sp>
       <p:pic>
         <p:nvPicPr>
-          <p:cNvPr id="13" name="Image 0" descr="preencoded.png">    </p:cNvPr>
+          <p:cNvPr id="17" name="Image 0" descr="preencoded.png">    </p:cNvPr>
           <p:cNvPicPr>
             <a:picLocks noChangeAspect="1"/>
           </p:cNvPicPr>
@@ -9975,7 +10885,7 @@
       </p:pic>
       <p:sp>
         <p:nvSpPr>
-          <p:cNvPr id="14" name="Shape 11"/>
+          <p:cNvPr id="18" name="Shape 15"/>
           <p:cNvSpPr/>
           <p:nvPr/>
         </p:nvSpPr>
@@ -10016,7 +10926,7 @@
       </p:sp>
       <p:sp>
         <p:nvSpPr>
-          <p:cNvPr id="15" name="Shape 12"/>
+          <p:cNvPr id="19" name="Shape 16"/>
           <p:cNvSpPr/>
           <p:nvPr/>
         </p:nvSpPr>
@@ -10043,7 +10953,7 @@
       </p:sp>
       <p:sp>
         <p:nvSpPr>
-          <p:cNvPr id="16" name="mdpr:1-2-2ff3f0:title:__title:1-2-2ff3f0"/>
+          <p:cNvPr id="20" name="mdpr:1-2-2ff3f0:title:__title:1-2-2ff3f0"/>
           <p:cNvSpPr txBox="1"/>
           <p:nvPr/>
         </p:nvSpPr>
@@ -10085,7 +10995,7 @@
       </p:sp>
       <p:sp>
         <p:nvSpPr>
-          <p:cNvPr id="17" name="mdpr:1-2-2ff3f0:body:block-19"/>
+          <p:cNvPr id="21" name="mdpr:1-2-2ff3f0:body:block-19"/>
           <p:cNvSpPr txBox="1"/>
           <p:nvPr/>
         </p:nvSpPr>
@@ -10224,7 +11134,7 @@
       </p:sp>
       <p:graphicFrame>
         <p:nvGraphicFramePr>
-          <p:cNvPr id="18" name="Chart 0" descr=""/>
+          <p:cNvPr id="22" name="Chart 0" descr=""/>
           <p:cNvGraphicFramePr/>
           <p:nvPr/>
         </p:nvGraphicFramePr>
@@ -10278,6 +11188,49 @@
         </p:nvSpPr>
         <p:spPr>
           <a:xfrm>
+            <a:off x="310896" y="256032"/>
+            <a:ext cx="10893247" cy="5779008"/>
+          </a:xfrm>
+          <a:prstGeom prst="roundRect">
+            <a:avLst>
+              <a:gd name="adj" fmla="val 1899"/>
+            </a:avLst>
+          </a:prstGeom>
+          <a:solidFill>
+            <a:srgbClr val="7DD3FC">
+              <a:alpha val="26000"/>
+            </a:srgbClr>
+          </a:solidFill>
+          <a:ln w="12700">
+            <a:solidFill>
+              <a:srgbClr val="FFFFFF">
+                <a:alpha val="14000"/>
+              </a:srgbClr>
+            </a:solidFill>
+            <a:prstDash val="solid"/>
+          </a:ln>
+          <a:effectLst>
+            <a:outerShdw sx="100000" sy="100000" kx="0" ky="0" algn="bl" rotWithShape="0" blurRad="12700" dist="50800" dir="2700000">
+              <a:srgbClr val="7DD3FC">
+                <a:alpha val="10000"/>
+              </a:srgbClr>
+            </a:outerShdw>
+            <a:glow rad="63500">
+              <a:srgbClr val="7DD3FC">
+                <a:alpha val="23000"/>
+              </a:srgbClr>
+            </a:glow>
+          </a:effectLst>
+        </p:spPr>
+      </p:sp>
+      <p:sp>
+        <p:nvSpPr>
+          <p:cNvPr id="3" name="Shape 1"/>
+          <p:cNvSpPr/>
+          <p:nvPr/>
+        </p:nvSpPr>
+        <p:spPr>
+          <a:xfrm>
             <a:off x="566928" y="475488"/>
             <a:ext cx="11057839" cy="5907024"/>
           </a:xfrm>
@@ -10315,7 +11268,7 @@
       </p:sp>
       <p:sp>
         <p:nvSpPr>
-          <p:cNvPr id="3" name="Shape 1"/>
+          <p:cNvPr id="4" name="Shape 2"/>
           <p:cNvSpPr/>
           <p:nvPr/>
         </p:nvSpPr>
@@ -10344,7 +11297,7 @@
       </p:sp>
       <p:sp>
         <p:nvSpPr>
-          <p:cNvPr id="4" name="Shape 2"/>
+          <p:cNvPr id="5" name="Shape 3"/>
           <p:cNvSpPr/>
           <p:nvPr/>
         </p:nvSpPr>
@@ -10373,7 +11326,7 @@
       </p:sp>
       <p:sp>
         <p:nvSpPr>
-          <p:cNvPr id="5" name="Shape 3"/>
+          <p:cNvPr id="6" name="Shape 4"/>
           <p:cNvSpPr/>
           <p:nvPr/>
         </p:nvSpPr>
@@ -10402,7 +11355,7 @@
       </p:sp>
       <p:sp>
         <p:nvSpPr>
-          <p:cNvPr id="6" name="Shape 4"/>
+          <p:cNvPr id="7" name="Shape 5"/>
           <p:cNvSpPr/>
           <p:nvPr/>
         </p:nvSpPr>
@@ -10427,7 +11380,7 @@
       </p:sp>
       <p:sp>
         <p:nvSpPr>
-          <p:cNvPr id="7" name="Shape 5"/>
+          <p:cNvPr id="8" name="Shape 6"/>
           <p:cNvSpPr/>
           <p:nvPr/>
         </p:nvSpPr>
@@ -10452,7 +11405,94 @@
       </p:sp>
       <p:sp>
         <p:nvSpPr>
-          <p:cNvPr id="8" name="Shape 6"/>
+          <p:cNvPr id="9" name="Shape 7"/>
+          <p:cNvSpPr/>
+          <p:nvPr/>
+        </p:nvSpPr>
+        <p:spPr>
+          <a:xfrm>
+            <a:off x="9631375" y="603504"/>
+            <a:ext cx="1353312" cy="0"/>
+          </a:xfrm>
+          <a:prstGeom prst="line">
+            <a:avLst/>
+          </a:prstGeom>
+          <a:noFill/>
+          <a:ln w="12700">
+            <a:solidFill>
+              <a:srgbClr val="FFFFFF">
+                <a:alpha val="54000"/>
+              </a:srgbClr>
+            </a:solidFill>
+            <a:prstDash val="solid"/>
+          </a:ln>
+        </p:spPr>
+      </p:sp>
+      <p:sp>
+        <p:nvSpPr>
+          <p:cNvPr id="10" name="Shape 8"/>
+          <p:cNvSpPr/>
+          <p:nvPr/>
+        </p:nvSpPr>
+        <p:spPr>
+          <a:xfrm rot="-180000">
+            <a:off x="530352" y="438912"/>
+            <a:ext cx="6583515" cy="146304"/>
+          </a:xfrm>
+          <a:prstGeom prst="roundRect">
+            <a:avLst>
+              <a:gd name="adj" fmla="val 37500"/>
+            </a:avLst>
+          </a:prstGeom>
+          <a:solidFill>
+            <a:srgbClr val="FFFFFF">
+              <a:alpha val="22000"/>
+            </a:srgbClr>
+          </a:solidFill>
+          <a:ln w="12700">
+            <a:solidFill>
+              <a:srgbClr val="FFFFFF">
+                <a:alpha val="0"/>
+              </a:srgbClr>
+            </a:solidFill>
+            <a:prstDash val="solid"/>
+          </a:ln>
+        </p:spPr>
+      </p:sp>
+      <p:sp>
+        <p:nvSpPr>
+          <p:cNvPr id="11" name="Shape 9"/>
+          <p:cNvSpPr/>
+          <p:nvPr/>
+        </p:nvSpPr>
+        <p:spPr>
+          <a:xfrm rot="120000">
+            <a:off x="7558851" y="256032"/>
+            <a:ext cx="3047924" cy="201168"/>
+          </a:xfrm>
+          <a:prstGeom prst="roundRect">
+            <a:avLst>
+              <a:gd name="adj" fmla="val 31818"/>
+            </a:avLst>
+          </a:prstGeom>
+          <a:solidFill>
+            <a:srgbClr val="7DD3FC">
+              <a:alpha val="64000"/>
+            </a:srgbClr>
+          </a:solidFill>
+          <a:ln w="12700">
+            <a:solidFill>
+              <a:srgbClr val="FFFFFF">
+                <a:alpha val="18000"/>
+              </a:srgbClr>
+            </a:solidFill>
+            <a:prstDash val="solid"/>
+          </a:ln>
+        </p:spPr>
+      </p:sp>
+      <p:sp>
+        <p:nvSpPr>
+          <p:cNvPr id="12" name="Shape 10"/>
           <p:cNvSpPr/>
           <p:nvPr/>
         </p:nvSpPr>
@@ -10493,7 +11533,7 @@
       </p:sp>
       <p:sp>
         <p:nvSpPr>
-          <p:cNvPr id="9" name="Shape 7"/>
+          <p:cNvPr id="13" name="Shape 11"/>
           <p:cNvSpPr/>
           <p:nvPr/>
         </p:nvSpPr>
@@ -10522,7 +11562,7 @@
       </p:sp>
       <p:sp>
         <p:nvSpPr>
-          <p:cNvPr id="10" name="Shape 8"/>
+          <p:cNvPr id="14" name="Shape 12"/>
           <p:cNvSpPr/>
           <p:nvPr/>
         </p:nvSpPr>
@@ -10549,7 +11589,7 @@
       </p:sp>
       <p:sp>
         <p:nvSpPr>
-          <p:cNvPr id="11" name="Shape 9"/>
+          <p:cNvPr id="15" name="Shape 13"/>
           <p:cNvSpPr/>
           <p:nvPr/>
         </p:nvSpPr>
@@ -10576,7 +11616,7 @@
       </p:sp>
       <p:sp>
         <p:nvSpPr>
-          <p:cNvPr id="12" name="Shape 10"/>
+          <p:cNvPr id="16" name="Shape 14"/>
           <p:cNvSpPr/>
           <p:nvPr/>
         </p:nvSpPr>
@@ -10603,7 +11643,7 @@
       </p:sp>
       <p:pic>
         <p:nvPicPr>
-          <p:cNvPr id="13" name="Image 0" descr="preencoded.png">    </p:cNvPr>
+          <p:cNvPr id="17" name="Image 0" descr="preencoded.png">    </p:cNvPr>
           <p:cNvPicPr>
             <a:picLocks noChangeAspect="1"/>
           </p:cNvPicPr>
@@ -10633,7 +11673,7 @@
       </p:pic>
       <p:sp>
         <p:nvSpPr>
-          <p:cNvPr id="14" name="Shape 11"/>
+          <p:cNvPr id="18" name="Shape 15"/>
           <p:cNvSpPr/>
           <p:nvPr/>
         </p:nvSpPr>
@@ -10674,7 +11714,7 @@
       </p:sp>
       <p:sp>
         <p:nvSpPr>
-          <p:cNvPr id="15" name="mdpr:2-2-542095:title:__title:2-2-542095"/>
+          <p:cNvPr id="19" name="mdpr:2-2-542095:title:__title:2-2-542095"/>
           <p:cNvSpPr txBox="1"/>
           <p:nvPr/>
         </p:nvSpPr>
@@ -11597,6 +12637,49 @@
         </p:nvSpPr>
         <p:spPr>
           <a:xfrm>
+            <a:off x="310896" y="256032"/>
+            <a:ext cx="10893247" cy="5779008"/>
+          </a:xfrm>
+          <a:prstGeom prst="roundRect">
+            <a:avLst>
+              <a:gd name="adj" fmla="val 1899"/>
+            </a:avLst>
+          </a:prstGeom>
+          <a:solidFill>
+            <a:srgbClr val="7DD3FC">
+              <a:alpha val="26000"/>
+            </a:srgbClr>
+          </a:solidFill>
+          <a:ln w="12700">
+            <a:solidFill>
+              <a:srgbClr val="FFFFFF">
+                <a:alpha val="14000"/>
+              </a:srgbClr>
+            </a:solidFill>
+            <a:prstDash val="solid"/>
+          </a:ln>
+          <a:effectLst>
+            <a:outerShdw sx="100000" sy="100000" kx="0" ky="0" algn="bl" rotWithShape="0" blurRad="12700" dist="50800" dir="2700000">
+              <a:srgbClr val="7DD3FC">
+                <a:alpha val="10000"/>
+              </a:srgbClr>
+            </a:outerShdw>
+            <a:glow rad="63500">
+              <a:srgbClr val="7DD3FC">
+                <a:alpha val="23000"/>
+              </a:srgbClr>
+            </a:glow>
+          </a:effectLst>
+        </p:spPr>
+      </p:sp>
+      <p:sp>
+        <p:nvSpPr>
+          <p:cNvPr id="3" name="Shape 1"/>
+          <p:cNvSpPr/>
+          <p:nvPr/>
+        </p:nvSpPr>
+        <p:spPr>
+          <a:xfrm>
             <a:off x="566928" y="475488"/>
             <a:ext cx="11057839" cy="5907024"/>
           </a:xfrm>
@@ -11634,7 +12717,7 @@
       </p:sp>
       <p:sp>
         <p:nvSpPr>
-          <p:cNvPr id="3" name="Shape 1"/>
+          <p:cNvPr id="4" name="Shape 2"/>
           <p:cNvSpPr/>
           <p:nvPr/>
         </p:nvSpPr>
@@ -11663,7 +12746,7 @@
       </p:sp>
       <p:sp>
         <p:nvSpPr>
-          <p:cNvPr id="4" name="Shape 2"/>
+          <p:cNvPr id="5" name="Shape 3"/>
           <p:cNvSpPr/>
           <p:nvPr/>
         </p:nvSpPr>
@@ -11692,7 +12775,7 @@
       </p:sp>
       <p:sp>
         <p:nvSpPr>
-          <p:cNvPr id="5" name="Shape 3"/>
+          <p:cNvPr id="6" name="Shape 4"/>
           <p:cNvSpPr/>
           <p:nvPr/>
         </p:nvSpPr>
@@ -11721,7 +12804,7 @@
       </p:sp>
       <p:sp>
         <p:nvSpPr>
-          <p:cNvPr id="6" name="Shape 4"/>
+          <p:cNvPr id="7" name="Shape 5"/>
           <p:cNvSpPr/>
           <p:nvPr/>
         </p:nvSpPr>
@@ -11746,7 +12829,7 @@
       </p:sp>
       <p:sp>
         <p:nvSpPr>
-          <p:cNvPr id="7" name="Shape 5"/>
+          <p:cNvPr id="8" name="Shape 6"/>
           <p:cNvSpPr/>
           <p:nvPr/>
         </p:nvSpPr>
@@ -11771,7 +12854,94 @@
       </p:sp>
       <p:sp>
         <p:nvSpPr>
-          <p:cNvPr id="8" name="Shape 6"/>
+          <p:cNvPr id="9" name="Shape 7"/>
+          <p:cNvSpPr/>
+          <p:nvPr/>
+        </p:nvSpPr>
+        <p:spPr>
+          <a:xfrm>
+            <a:off x="9631375" y="603504"/>
+            <a:ext cx="1353312" cy="0"/>
+          </a:xfrm>
+          <a:prstGeom prst="line">
+            <a:avLst/>
+          </a:prstGeom>
+          <a:noFill/>
+          <a:ln w="12700">
+            <a:solidFill>
+              <a:srgbClr val="FFFFFF">
+                <a:alpha val="54000"/>
+              </a:srgbClr>
+            </a:solidFill>
+            <a:prstDash val="solid"/>
+          </a:ln>
+        </p:spPr>
+      </p:sp>
+      <p:sp>
+        <p:nvSpPr>
+          <p:cNvPr id="10" name="Shape 8"/>
+          <p:cNvSpPr/>
+          <p:nvPr/>
+        </p:nvSpPr>
+        <p:spPr>
+          <a:xfrm rot="-180000">
+            <a:off x="530352" y="438912"/>
+            <a:ext cx="6583515" cy="146304"/>
+          </a:xfrm>
+          <a:prstGeom prst="roundRect">
+            <a:avLst>
+              <a:gd name="adj" fmla="val 37500"/>
+            </a:avLst>
+          </a:prstGeom>
+          <a:solidFill>
+            <a:srgbClr val="FFFFFF">
+              <a:alpha val="22000"/>
+            </a:srgbClr>
+          </a:solidFill>
+          <a:ln w="12700">
+            <a:solidFill>
+              <a:srgbClr val="FFFFFF">
+                <a:alpha val="0"/>
+              </a:srgbClr>
+            </a:solidFill>
+            <a:prstDash val="solid"/>
+          </a:ln>
+        </p:spPr>
+      </p:sp>
+      <p:sp>
+        <p:nvSpPr>
+          <p:cNvPr id="11" name="Shape 9"/>
+          <p:cNvSpPr/>
+          <p:nvPr/>
+        </p:nvSpPr>
+        <p:spPr>
+          <a:xfrm rot="120000">
+            <a:off x="7558851" y="256032"/>
+            <a:ext cx="3047924" cy="201168"/>
+          </a:xfrm>
+          <a:prstGeom prst="roundRect">
+            <a:avLst>
+              <a:gd name="adj" fmla="val 31818"/>
+            </a:avLst>
+          </a:prstGeom>
+          <a:solidFill>
+            <a:srgbClr val="7DD3FC">
+              <a:alpha val="64000"/>
+            </a:srgbClr>
+          </a:solidFill>
+          <a:ln w="12700">
+            <a:solidFill>
+              <a:srgbClr val="FFFFFF">
+                <a:alpha val="18000"/>
+              </a:srgbClr>
+            </a:solidFill>
+            <a:prstDash val="solid"/>
+          </a:ln>
+        </p:spPr>
+      </p:sp>
+      <p:sp>
+        <p:nvSpPr>
+          <p:cNvPr id="12" name="Shape 10"/>
           <p:cNvSpPr/>
           <p:nvPr/>
         </p:nvSpPr>
@@ -11812,7 +12982,7 @@
       </p:sp>
       <p:sp>
         <p:nvSpPr>
-          <p:cNvPr id="9" name="Shape 7"/>
+          <p:cNvPr id="13" name="Shape 11"/>
           <p:cNvSpPr/>
           <p:nvPr/>
         </p:nvSpPr>
@@ -11841,7 +13011,7 @@
       </p:sp>
       <p:sp>
         <p:nvSpPr>
-          <p:cNvPr id="10" name="Shape 8"/>
+          <p:cNvPr id="14" name="Shape 12"/>
           <p:cNvSpPr/>
           <p:nvPr/>
         </p:nvSpPr>
@@ -11868,7 +13038,7 @@
       </p:sp>
       <p:sp>
         <p:nvSpPr>
-          <p:cNvPr id="11" name="Shape 9"/>
+          <p:cNvPr id="15" name="Shape 13"/>
           <p:cNvSpPr/>
           <p:nvPr/>
         </p:nvSpPr>
@@ -11895,7 +13065,7 @@
       </p:sp>
       <p:sp>
         <p:nvSpPr>
-          <p:cNvPr id="12" name="Shape 10"/>
+          <p:cNvPr id="16" name="Shape 14"/>
           <p:cNvSpPr/>
           <p:nvPr/>
         </p:nvSpPr>
@@ -11922,7 +13092,7 @@
       </p:sp>
       <p:pic>
         <p:nvPicPr>
-          <p:cNvPr id="13" name="Image 0" descr="preencoded.png">    </p:cNvPr>
+          <p:cNvPr id="17" name="Image 0" descr="preencoded.png">    </p:cNvPr>
           <p:cNvPicPr>
             <a:picLocks noChangeAspect="1"/>
           </p:cNvPicPr>
@@ -11952,7 +13122,7 @@
       </p:pic>
       <p:sp>
         <p:nvSpPr>
-          <p:cNvPr id="14" name="Shape 11"/>
+          <p:cNvPr id="18" name="Shape 15"/>
           <p:cNvSpPr/>
           <p:nvPr/>
         </p:nvSpPr>
@@ -11993,7 +13163,7 @@
       </p:sp>
       <p:sp>
         <p:nvSpPr>
-          <p:cNvPr id="15" name="mdpr:1-2-b8955f:title:__title:1-2-b8955f"/>
+          <p:cNvPr id="19" name="mdpr:1-2-b8955f:title:__title:1-2-b8955f"/>
           <p:cNvSpPr txBox="1"/>
           <p:nvPr/>
         </p:nvSpPr>
@@ -12035,7 +13205,7 @@
       </p:sp>
       <p:sp>
         <p:nvSpPr>
-          <p:cNvPr id="16" name="Shape 13"/>
+          <p:cNvPr id="20" name="Shape 17"/>
           <p:cNvSpPr/>
           <p:nvPr/>
         </p:nvSpPr>
@@ -12068,7 +13238,7 @@
       </p:sp>
       <p:sp>
         <p:nvSpPr>
-          <p:cNvPr id="17" name="Shape 14"/>
+          <p:cNvPr id="21" name="Shape 18"/>
           <p:cNvSpPr/>
           <p:nvPr/>
         </p:nvSpPr>
@@ -12099,7 +13269,7 @@
       </p:sp>
       <p:sp>
         <p:nvSpPr>
-          <p:cNvPr id="18" name="Shape 15"/>
+          <p:cNvPr id="22" name="Shape 19"/>
           <p:cNvSpPr/>
           <p:nvPr/>
         </p:nvSpPr>
@@ -12130,7 +13300,7 @@
       </p:sp>
       <p:sp>
         <p:nvSpPr>
-          <p:cNvPr id="19" name="Shape 16"/>
+          <p:cNvPr id="23" name="Shape 20"/>
           <p:cNvSpPr/>
           <p:nvPr/>
         </p:nvSpPr>
@@ -12155,7 +13325,7 @@
       </p:sp>
       <p:sp>
         <p:nvSpPr>
-          <p:cNvPr id="20" name="Shape 17"/>
+          <p:cNvPr id="24" name="Shape 21"/>
           <p:cNvSpPr/>
           <p:nvPr/>
         </p:nvSpPr>
@@ -12182,7 +13352,7 @@
       </p:sp>
       <p:sp>
         <p:nvSpPr>
-          <p:cNvPr id="21" name="Text 18"/>
+          <p:cNvPr id="25" name="Text 22"/>
           <p:cNvSpPr txBox="1"/>
           <p:nvPr/>
         </p:nvSpPr>
@@ -12226,7 +13396,7 @@
       </p:sp>
       <p:sp>
         <p:nvSpPr>
-          <p:cNvPr id="22" name="Text 19"/>
+          <p:cNvPr id="26" name="Text 23"/>
           <p:cNvSpPr txBox="1"/>
           <p:nvPr/>
         </p:nvSpPr>
@@ -12268,7 +13438,7 @@
       </p:sp>
       <p:sp>
         <p:nvSpPr>
-          <p:cNvPr id="23" name="Shape 20"/>
+          <p:cNvPr id="27" name="Shape 24"/>
           <p:cNvSpPr/>
           <p:nvPr/>
         </p:nvSpPr>
@@ -12295,7 +13465,7 @@
       </p:sp>
       <p:sp>
         <p:nvSpPr>
-          <p:cNvPr id="24" name="Text 21"/>
+          <p:cNvPr id="28" name="Text 25"/>
           <p:cNvSpPr txBox="1"/>
           <p:nvPr/>
         </p:nvSpPr>
@@ -12339,7 +13509,7 @@
       </p:sp>
       <p:sp>
         <p:nvSpPr>
-          <p:cNvPr id="25" name="Shape 22"/>
+          <p:cNvPr id="29" name="Shape 26"/>
           <p:cNvSpPr/>
           <p:nvPr/>
         </p:nvSpPr>
@@ -12366,7 +13536,7 @@
       </p:sp>
       <p:sp>
         <p:nvSpPr>
-          <p:cNvPr id="26" name="Text 23"/>
+          <p:cNvPr id="30" name="Text 27"/>
           <p:cNvSpPr txBox="1"/>
           <p:nvPr/>
         </p:nvSpPr>
@@ -12410,7 +13580,7 @@
       </p:sp>
       <p:sp>
         <p:nvSpPr>
-          <p:cNvPr id="27" name="Shape 24"/>
+          <p:cNvPr id="31" name="Shape 28"/>
           <p:cNvSpPr/>
           <p:nvPr/>
         </p:nvSpPr>
@@ -12441,7 +13611,7 @@
       </p:sp>
       <p:sp>
         <p:nvSpPr>
-          <p:cNvPr id="28" name="Shape 25"/>
+          <p:cNvPr id="32" name="Shape 29"/>
           <p:cNvSpPr/>
           <p:nvPr/>
         </p:nvSpPr>
@@ -12470,7 +13640,7 @@
       </p:sp>
       <p:sp>
         <p:nvSpPr>
-          <p:cNvPr id="29" name="Shape 26"/>
+          <p:cNvPr id="33" name="Shape 30"/>
           <p:cNvSpPr/>
           <p:nvPr/>
         </p:nvSpPr>
@@ -12493,7 +13663,7 @@
       </p:sp>
       <p:sp>
         <p:nvSpPr>
-          <p:cNvPr id="30" name="Shape 27"/>
+          <p:cNvPr id="34" name="Shape 31"/>
           <p:cNvSpPr/>
           <p:nvPr/>
         </p:nvSpPr>
@@ -12518,7 +13688,7 @@
       </p:sp>
       <p:sp>
         <p:nvSpPr>
-          <p:cNvPr id="31" name="Shape 28"/>
+          <p:cNvPr id="35" name="Shape 32"/>
           <p:cNvSpPr/>
           <p:nvPr/>
         </p:nvSpPr>
@@ -12543,7 +13713,7 @@
       </p:sp>
       <p:sp>
         <p:nvSpPr>
-          <p:cNvPr id="32" name="Shape 29"/>
+          <p:cNvPr id="36" name="Shape 33"/>
           <p:cNvSpPr/>
           <p:nvPr/>
         </p:nvSpPr>
@@ -12568,7 +13738,7 @@
       </p:sp>
       <p:sp>
         <p:nvSpPr>
-          <p:cNvPr id="33" name="Text 30"/>
+          <p:cNvPr id="37" name="Text 34"/>
           <p:cNvSpPr txBox="1"/>
           <p:nvPr/>
         </p:nvSpPr>
@@ -12612,7 +13782,7 @@
       </p:sp>
       <p:sp>
         <p:nvSpPr>
-          <p:cNvPr id="34" name="Text 31"/>
+          <p:cNvPr id="38" name="Text 35"/>
           <p:cNvSpPr txBox="1"/>
           <p:nvPr/>
         </p:nvSpPr>
@@ -12654,7 +13824,7 @@
       </p:sp>
       <p:sp>
         <p:nvSpPr>
-          <p:cNvPr id="35" name="Text 32"/>
+          <p:cNvPr id="39" name="Text 36"/>
           <p:cNvSpPr txBox="1"/>
           <p:nvPr/>
         </p:nvSpPr>
@@ -12696,7 +13866,7 @@
       </p:sp>
       <p:sp>
         <p:nvSpPr>
-          <p:cNvPr id="36" name="Text 33"/>
+          <p:cNvPr id="40" name="Text 37"/>
           <p:cNvSpPr txBox="1"/>
           <p:nvPr/>
         </p:nvSpPr>
@@ -12776,6 +13946,49 @@
         </p:nvSpPr>
         <p:spPr>
           <a:xfrm>
+            <a:off x="310896" y="256032"/>
+            <a:ext cx="10893247" cy="5779008"/>
+          </a:xfrm>
+          <a:prstGeom prst="roundRect">
+            <a:avLst>
+              <a:gd name="adj" fmla="val 1899"/>
+            </a:avLst>
+          </a:prstGeom>
+          <a:solidFill>
+            <a:srgbClr val="7DD3FC">
+              <a:alpha val="26000"/>
+            </a:srgbClr>
+          </a:solidFill>
+          <a:ln w="12700">
+            <a:solidFill>
+              <a:srgbClr val="FFFFFF">
+                <a:alpha val="14000"/>
+              </a:srgbClr>
+            </a:solidFill>
+            <a:prstDash val="solid"/>
+          </a:ln>
+          <a:effectLst>
+            <a:outerShdw sx="100000" sy="100000" kx="0" ky="0" algn="bl" rotWithShape="0" blurRad="12700" dist="50800" dir="2700000">
+              <a:srgbClr val="7DD3FC">
+                <a:alpha val="10000"/>
+              </a:srgbClr>
+            </a:outerShdw>
+            <a:glow rad="63500">
+              <a:srgbClr val="7DD3FC">
+                <a:alpha val="23000"/>
+              </a:srgbClr>
+            </a:glow>
+          </a:effectLst>
+        </p:spPr>
+      </p:sp>
+      <p:sp>
+        <p:nvSpPr>
+          <p:cNvPr id="3" name="Shape 1"/>
+          <p:cNvSpPr/>
+          <p:nvPr/>
+        </p:nvSpPr>
+        <p:spPr>
+          <a:xfrm>
             <a:off x="566928" y="475488"/>
             <a:ext cx="11057839" cy="5907024"/>
           </a:xfrm>
@@ -12813,7 +14026,7 @@
       </p:sp>
       <p:sp>
         <p:nvSpPr>
-          <p:cNvPr id="3" name="Shape 1"/>
+          <p:cNvPr id="4" name="Shape 2"/>
           <p:cNvSpPr/>
           <p:nvPr/>
         </p:nvSpPr>
@@ -12842,7 +14055,7 @@
       </p:sp>
       <p:sp>
         <p:nvSpPr>
-          <p:cNvPr id="4" name="Shape 2"/>
+          <p:cNvPr id="5" name="Shape 3"/>
           <p:cNvSpPr/>
           <p:nvPr/>
         </p:nvSpPr>
@@ -12871,7 +14084,7 @@
       </p:sp>
       <p:sp>
         <p:nvSpPr>
-          <p:cNvPr id="5" name="Shape 3"/>
+          <p:cNvPr id="6" name="Shape 4"/>
           <p:cNvSpPr/>
           <p:nvPr/>
         </p:nvSpPr>
@@ -12900,7 +14113,7 @@
       </p:sp>
       <p:sp>
         <p:nvSpPr>
-          <p:cNvPr id="6" name="Shape 4"/>
+          <p:cNvPr id="7" name="Shape 5"/>
           <p:cNvSpPr/>
           <p:nvPr/>
         </p:nvSpPr>
@@ -12925,7 +14138,7 @@
       </p:sp>
       <p:sp>
         <p:nvSpPr>
-          <p:cNvPr id="7" name="Shape 5"/>
+          <p:cNvPr id="8" name="Shape 6"/>
           <p:cNvSpPr/>
           <p:nvPr/>
         </p:nvSpPr>
@@ -12950,7 +14163,94 @@
       </p:sp>
       <p:sp>
         <p:nvSpPr>
-          <p:cNvPr id="8" name="Shape 6"/>
+          <p:cNvPr id="9" name="Shape 7"/>
+          <p:cNvSpPr/>
+          <p:nvPr/>
+        </p:nvSpPr>
+        <p:spPr>
+          <a:xfrm>
+            <a:off x="9631375" y="603504"/>
+            <a:ext cx="1353312" cy="0"/>
+          </a:xfrm>
+          <a:prstGeom prst="line">
+            <a:avLst/>
+          </a:prstGeom>
+          <a:noFill/>
+          <a:ln w="12700">
+            <a:solidFill>
+              <a:srgbClr val="FFFFFF">
+                <a:alpha val="54000"/>
+              </a:srgbClr>
+            </a:solidFill>
+            <a:prstDash val="solid"/>
+          </a:ln>
+        </p:spPr>
+      </p:sp>
+      <p:sp>
+        <p:nvSpPr>
+          <p:cNvPr id="10" name="Shape 8"/>
+          <p:cNvSpPr/>
+          <p:nvPr/>
+        </p:nvSpPr>
+        <p:spPr>
+          <a:xfrm rot="-180000">
+            <a:off x="530352" y="438912"/>
+            <a:ext cx="6583515" cy="146304"/>
+          </a:xfrm>
+          <a:prstGeom prst="roundRect">
+            <a:avLst>
+              <a:gd name="adj" fmla="val 37500"/>
+            </a:avLst>
+          </a:prstGeom>
+          <a:solidFill>
+            <a:srgbClr val="FFFFFF">
+              <a:alpha val="22000"/>
+            </a:srgbClr>
+          </a:solidFill>
+          <a:ln w="12700">
+            <a:solidFill>
+              <a:srgbClr val="FFFFFF">
+                <a:alpha val="0"/>
+              </a:srgbClr>
+            </a:solidFill>
+            <a:prstDash val="solid"/>
+          </a:ln>
+        </p:spPr>
+      </p:sp>
+      <p:sp>
+        <p:nvSpPr>
+          <p:cNvPr id="11" name="Shape 9"/>
+          <p:cNvSpPr/>
+          <p:nvPr/>
+        </p:nvSpPr>
+        <p:spPr>
+          <a:xfrm rot="120000">
+            <a:off x="7558851" y="256032"/>
+            <a:ext cx="3047924" cy="201168"/>
+          </a:xfrm>
+          <a:prstGeom prst="roundRect">
+            <a:avLst>
+              <a:gd name="adj" fmla="val 31818"/>
+            </a:avLst>
+          </a:prstGeom>
+          <a:solidFill>
+            <a:srgbClr val="7DD3FC">
+              <a:alpha val="64000"/>
+            </a:srgbClr>
+          </a:solidFill>
+          <a:ln w="12700">
+            <a:solidFill>
+              <a:srgbClr val="FFFFFF">
+                <a:alpha val="18000"/>
+              </a:srgbClr>
+            </a:solidFill>
+            <a:prstDash val="solid"/>
+          </a:ln>
+        </p:spPr>
+      </p:sp>
+      <p:sp>
+        <p:nvSpPr>
+          <p:cNvPr id="12" name="Shape 10"/>
           <p:cNvSpPr/>
           <p:nvPr/>
         </p:nvSpPr>
@@ -12991,7 +14291,7 @@
       </p:sp>
       <p:sp>
         <p:nvSpPr>
-          <p:cNvPr id="9" name="Shape 7"/>
+          <p:cNvPr id="13" name="Shape 11"/>
           <p:cNvSpPr/>
           <p:nvPr/>
         </p:nvSpPr>
@@ -13020,7 +14320,7 @@
       </p:sp>
       <p:sp>
         <p:nvSpPr>
-          <p:cNvPr id="10" name="Shape 8"/>
+          <p:cNvPr id="14" name="Shape 12"/>
           <p:cNvSpPr/>
           <p:nvPr/>
         </p:nvSpPr>
@@ -13047,7 +14347,7 @@
       </p:sp>
       <p:sp>
         <p:nvSpPr>
-          <p:cNvPr id="11" name="Shape 9"/>
+          <p:cNvPr id="15" name="Shape 13"/>
           <p:cNvSpPr/>
           <p:nvPr/>
         </p:nvSpPr>
@@ -13074,7 +14374,7 @@
       </p:sp>
       <p:sp>
         <p:nvSpPr>
-          <p:cNvPr id="12" name="Shape 10"/>
+          <p:cNvPr id="16" name="Shape 14"/>
           <p:cNvSpPr/>
           <p:nvPr/>
         </p:nvSpPr>
@@ -13101,7 +14401,7 @@
       </p:sp>
       <p:pic>
         <p:nvPicPr>
-          <p:cNvPr id="13" name="Image 0" descr="preencoded.png">    </p:cNvPr>
+          <p:cNvPr id="17" name="Image 0" descr="preencoded.png">    </p:cNvPr>
           <p:cNvPicPr>
             <a:picLocks noChangeAspect="1"/>
           </p:cNvPicPr>
@@ -13131,7 +14431,7 @@
       </p:pic>
       <p:sp>
         <p:nvSpPr>
-          <p:cNvPr id="14" name="Shape 11"/>
+          <p:cNvPr id="18" name="Shape 15"/>
           <p:cNvSpPr/>
           <p:nvPr/>
         </p:nvSpPr>
@@ -13172,7 +14472,7 @@
       </p:sp>
       <p:sp>
         <p:nvSpPr>
-          <p:cNvPr id="15" name="mdpr:2-2-4dc4c1:title:__title:2-2-4dc4c1"/>
+          <p:cNvPr id="19" name="mdpr:2-2-4dc4c1:title:__title:2-2-4dc4c1"/>
           <p:cNvSpPr txBox="1"/>
           <p:nvPr/>
         </p:nvSpPr>
@@ -13214,7 +14514,7 @@
       </p:sp>
       <p:sp>
         <p:nvSpPr>
-          <p:cNvPr id="16" name="Shape 13"/>
+          <p:cNvPr id="20" name="Shape 17"/>
           <p:cNvSpPr/>
           <p:nvPr/>
         </p:nvSpPr>
@@ -13241,7 +14541,7 @@
       </p:sp>
       <p:sp>
         <p:nvSpPr>
-          <p:cNvPr id="17" name="Shape 14"/>
+          <p:cNvPr id="21" name="Shape 18"/>
           <p:cNvSpPr/>
           <p:nvPr/>
         </p:nvSpPr>
@@ -13268,7 +14568,7 @@
       </p:sp>
       <p:sp>
         <p:nvSpPr>
-          <p:cNvPr id="18" name="Text 15"/>
+          <p:cNvPr id="22" name="Text 19"/>
           <p:cNvSpPr txBox="1"/>
           <p:nvPr/>
         </p:nvSpPr>
@@ -13312,7 +14612,7 @@
       </p:sp>
       <p:sp>
         <p:nvSpPr>
-          <p:cNvPr id="19" name="Text 16"/>
+          <p:cNvPr id="23" name="Text 20"/>
           <p:cNvSpPr txBox="1"/>
           <p:nvPr/>
         </p:nvSpPr>
@@ -13356,7 +14656,7 @@
       </p:sp>
       <p:sp>
         <p:nvSpPr>
-          <p:cNvPr id="20" name="Shape 17"/>
+          <p:cNvPr id="24" name="Shape 21"/>
           <p:cNvSpPr/>
           <p:nvPr/>
         </p:nvSpPr>
@@ -13383,7 +14683,7 @@
       </p:sp>
       <p:sp>
         <p:nvSpPr>
-          <p:cNvPr id="21" name="Shape 18"/>
+          <p:cNvPr id="25" name="Shape 22"/>
           <p:cNvSpPr/>
           <p:nvPr/>
         </p:nvSpPr>
@@ -13410,7 +14710,7 @@
       </p:sp>
       <p:sp>
         <p:nvSpPr>
-          <p:cNvPr id="22" name="Text 19"/>
+          <p:cNvPr id="26" name="Text 23"/>
           <p:cNvSpPr txBox="1"/>
           <p:nvPr/>
         </p:nvSpPr>
@@ -13454,7 +14754,7 @@
       </p:sp>
       <p:sp>
         <p:nvSpPr>
-          <p:cNvPr id="23" name="Text 20"/>
+          <p:cNvPr id="27" name="Text 24"/>
           <p:cNvSpPr txBox="1"/>
           <p:nvPr/>
         </p:nvSpPr>
@@ -13498,7 +14798,7 @@
       </p:sp>
       <p:sp>
         <p:nvSpPr>
-          <p:cNvPr id="24" name="Shape 21"/>
+          <p:cNvPr id="28" name="Shape 25"/>
           <p:cNvSpPr/>
           <p:nvPr/>
         </p:nvSpPr>
@@ -13525,7 +14825,7 @@
       </p:sp>
       <p:sp>
         <p:nvSpPr>
-          <p:cNvPr id="25" name="Shape 22"/>
+          <p:cNvPr id="29" name="Shape 26"/>
           <p:cNvSpPr/>
           <p:nvPr/>
         </p:nvSpPr>
@@ -13552,7 +14852,7 @@
       </p:sp>
       <p:sp>
         <p:nvSpPr>
-          <p:cNvPr id="26" name="Text 23"/>
+          <p:cNvPr id="30" name="Text 27"/>
           <p:cNvSpPr txBox="1"/>
           <p:nvPr/>
         </p:nvSpPr>
@@ -13596,7 +14896,7 @@
       </p:sp>
       <p:sp>
         <p:nvSpPr>
-          <p:cNvPr id="27" name="Text 24"/>
+          <p:cNvPr id="31" name="Text 28"/>
           <p:cNvSpPr txBox="1"/>
           <p:nvPr/>
         </p:nvSpPr>
@@ -13640,7 +14940,7 @@
       </p:sp>
       <p:sp>
         <p:nvSpPr>
-          <p:cNvPr id="28" name="Shape 25"/>
+          <p:cNvPr id="32" name="Shape 29"/>
           <p:cNvSpPr/>
           <p:nvPr/>
         </p:nvSpPr>
@@ -13667,7 +14967,7 @@
       </p:sp>
       <p:sp>
         <p:nvSpPr>
-          <p:cNvPr id="29" name="Shape 26"/>
+          <p:cNvPr id="33" name="Shape 30"/>
           <p:cNvSpPr/>
           <p:nvPr/>
         </p:nvSpPr>
@@ -13694,7 +14994,7 @@
       </p:sp>
       <p:sp>
         <p:nvSpPr>
-          <p:cNvPr id="30" name="Text 27"/>
+          <p:cNvPr id="34" name="Text 31"/>
           <p:cNvSpPr txBox="1"/>
           <p:nvPr/>
         </p:nvSpPr>
@@ -13738,7 +15038,7 @@
       </p:sp>
       <p:sp>
         <p:nvSpPr>
-          <p:cNvPr id="31" name="Text 28"/>
+          <p:cNvPr id="35" name="Text 32"/>
           <p:cNvSpPr txBox="1"/>
           <p:nvPr/>
         </p:nvSpPr>
@@ -13782,7 +15082,7 @@
       </p:sp>
       <p:sp>
         <p:nvSpPr>
-          <p:cNvPr id="32" name="Shape 29"/>
+          <p:cNvPr id="36" name="Shape 33"/>
           <p:cNvSpPr/>
           <p:nvPr/>
         </p:nvSpPr>
@@ -13806,7 +15106,7 @@
       </p:sp>
       <p:sp>
         <p:nvSpPr>
-          <p:cNvPr id="33" name="Shape 30"/>
+          <p:cNvPr id="37" name="Shape 34"/>
           <p:cNvSpPr/>
           <p:nvPr/>
         </p:nvSpPr>
@@ -13830,7 +15130,7 @@
       </p:sp>
       <p:sp>
         <p:nvSpPr>
-          <p:cNvPr id="34" name="Shape 31"/>
+          <p:cNvPr id="38" name="Shape 35"/>
           <p:cNvSpPr/>
           <p:nvPr/>
         </p:nvSpPr>
@@ -13892,6 +15192,49 @@
         </p:nvSpPr>
         <p:spPr>
           <a:xfrm>
+            <a:off x="310896" y="256032"/>
+            <a:ext cx="10893247" cy="5779008"/>
+          </a:xfrm>
+          <a:prstGeom prst="roundRect">
+            <a:avLst>
+              <a:gd name="adj" fmla="val 1899"/>
+            </a:avLst>
+          </a:prstGeom>
+          <a:solidFill>
+            <a:srgbClr val="7DD3FC">
+              <a:alpha val="26000"/>
+            </a:srgbClr>
+          </a:solidFill>
+          <a:ln w="12700">
+            <a:solidFill>
+              <a:srgbClr val="FFFFFF">
+                <a:alpha val="14000"/>
+              </a:srgbClr>
+            </a:solidFill>
+            <a:prstDash val="solid"/>
+          </a:ln>
+          <a:effectLst>
+            <a:outerShdw sx="100000" sy="100000" kx="0" ky="0" algn="bl" rotWithShape="0" blurRad="12700" dist="50800" dir="2700000">
+              <a:srgbClr val="7DD3FC">
+                <a:alpha val="10000"/>
+              </a:srgbClr>
+            </a:outerShdw>
+            <a:glow rad="63500">
+              <a:srgbClr val="7DD3FC">
+                <a:alpha val="23000"/>
+              </a:srgbClr>
+            </a:glow>
+          </a:effectLst>
+        </p:spPr>
+      </p:sp>
+      <p:sp>
+        <p:nvSpPr>
+          <p:cNvPr id="3" name="Shape 1"/>
+          <p:cNvSpPr/>
+          <p:nvPr/>
+        </p:nvSpPr>
+        <p:spPr>
+          <a:xfrm>
             <a:off x="566928" y="475488"/>
             <a:ext cx="11057839" cy="5907024"/>
           </a:xfrm>
@@ -13929,7 +15272,7 @@
       </p:sp>
       <p:sp>
         <p:nvSpPr>
-          <p:cNvPr id="3" name="Shape 1"/>
+          <p:cNvPr id="4" name="Shape 2"/>
           <p:cNvSpPr/>
           <p:nvPr/>
         </p:nvSpPr>
@@ -13958,7 +15301,7 @@
       </p:sp>
       <p:sp>
         <p:nvSpPr>
-          <p:cNvPr id="4" name="Shape 2"/>
+          <p:cNvPr id="5" name="Shape 3"/>
           <p:cNvSpPr/>
           <p:nvPr/>
         </p:nvSpPr>
@@ -13987,7 +15330,7 @@
       </p:sp>
       <p:sp>
         <p:nvSpPr>
-          <p:cNvPr id="5" name="Shape 3"/>
+          <p:cNvPr id="6" name="Shape 4"/>
           <p:cNvSpPr/>
           <p:nvPr/>
         </p:nvSpPr>
@@ -14016,7 +15359,7 @@
       </p:sp>
       <p:sp>
         <p:nvSpPr>
-          <p:cNvPr id="6" name="Shape 4"/>
+          <p:cNvPr id="7" name="Shape 5"/>
           <p:cNvSpPr/>
           <p:nvPr/>
         </p:nvSpPr>
@@ -14041,7 +15384,7 @@
       </p:sp>
       <p:sp>
         <p:nvSpPr>
-          <p:cNvPr id="7" name="Shape 5"/>
+          <p:cNvPr id="8" name="Shape 6"/>
           <p:cNvSpPr/>
           <p:nvPr/>
         </p:nvSpPr>
@@ -14066,7 +15409,94 @@
       </p:sp>
       <p:sp>
         <p:nvSpPr>
-          <p:cNvPr id="8" name="Shape 6"/>
+          <p:cNvPr id="9" name="Shape 7"/>
+          <p:cNvSpPr/>
+          <p:nvPr/>
+        </p:nvSpPr>
+        <p:spPr>
+          <a:xfrm>
+            <a:off x="9631375" y="603504"/>
+            <a:ext cx="1353312" cy="0"/>
+          </a:xfrm>
+          <a:prstGeom prst="line">
+            <a:avLst/>
+          </a:prstGeom>
+          <a:noFill/>
+          <a:ln w="12700">
+            <a:solidFill>
+              <a:srgbClr val="FFFFFF">
+                <a:alpha val="54000"/>
+              </a:srgbClr>
+            </a:solidFill>
+            <a:prstDash val="solid"/>
+          </a:ln>
+        </p:spPr>
+      </p:sp>
+      <p:sp>
+        <p:nvSpPr>
+          <p:cNvPr id="10" name="Shape 8"/>
+          <p:cNvSpPr/>
+          <p:nvPr/>
+        </p:nvSpPr>
+        <p:spPr>
+          <a:xfrm rot="-180000">
+            <a:off x="530352" y="438912"/>
+            <a:ext cx="6583515" cy="146304"/>
+          </a:xfrm>
+          <a:prstGeom prst="roundRect">
+            <a:avLst>
+              <a:gd name="adj" fmla="val 37500"/>
+            </a:avLst>
+          </a:prstGeom>
+          <a:solidFill>
+            <a:srgbClr val="FFFFFF">
+              <a:alpha val="22000"/>
+            </a:srgbClr>
+          </a:solidFill>
+          <a:ln w="12700">
+            <a:solidFill>
+              <a:srgbClr val="FFFFFF">
+                <a:alpha val="0"/>
+              </a:srgbClr>
+            </a:solidFill>
+            <a:prstDash val="solid"/>
+          </a:ln>
+        </p:spPr>
+      </p:sp>
+      <p:sp>
+        <p:nvSpPr>
+          <p:cNvPr id="11" name="Shape 9"/>
+          <p:cNvSpPr/>
+          <p:nvPr/>
+        </p:nvSpPr>
+        <p:spPr>
+          <a:xfrm rot="120000">
+            <a:off x="7558851" y="256032"/>
+            <a:ext cx="3047924" cy="201168"/>
+          </a:xfrm>
+          <a:prstGeom prst="roundRect">
+            <a:avLst>
+              <a:gd name="adj" fmla="val 31818"/>
+            </a:avLst>
+          </a:prstGeom>
+          <a:solidFill>
+            <a:srgbClr val="7DD3FC">
+              <a:alpha val="64000"/>
+            </a:srgbClr>
+          </a:solidFill>
+          <a:ln w="12700">
+            <a:solidFill>
+              <a:srgbClr val="FFFFFF">
+                <a:alpha val="18000"/>
+              </a:srgbClr>
+            </a:solidFill>
+            <a:prstDash val="solid"/>
+          </a:ln>
+        </p:spPr>
+      </p:sp>
+      <p:sp>
+        <p:nvSpPr>
+          <p:cNvPr id="12" name="Shape 10"/>
           <p:cNvSpPr/>
           <p:nvPr/>
         </p:nvSpPr>
@@ -14107,7 +15537,7 @@
       </p:sp>
       <p:sp>
         <p:nvSpPr>
-          <p:cNvPr id="9" name="Shape 7"/>
+          <p:cNvPr id="13" name="Shape 11"/>
           <p:cNvSpPr/>
           <p:nvPr/>
         </p:nvSpPr>
@@ -14136,7 +15566,7 @@
       </p:sp>
       <p:sp>
         <p:nvSpPr>
-          <p:cNvPr id="10" name="Shape 8"/>
+          <p:cNvPr id="14" name="Shape 12"/>
           <p:cNvSpPr/>
           <p:nvPr/>
         </p:nvSpPr>
@@ -14163,7 +15593,7 @@
       </p:sp>
       <p:sp>
         <p:nvSpPr>
-          <p:cNvPr id="11" name="Shape 9"/>
+          <p:cNvPr id="15" name="Shape 13"/>
           <p:cNvSpPr/>
           <p:nvPr/>
         </p:nvSpPr>
@@ -14190,7 +15620,7 @@
       </p:sp>
       <p:sp>
         <p:nvSpPr>
-          <p:cNvPr id="12" name="Shape 10"/>
+          <p:cNvPr id="16" name="Shape 14"/>
           <p:cNvSpPr/>
           <p:nvPr/>
         </p:nvSpPr>
@@ -14217,7 +15647,7 @@
       </p:sp>
       <p:pic>
         <p:nvPicPr>
-          <p:cNvPr id="13" name="Image 0" descr="preencoded.png">    </p:cNvPr>
+          <p:cNvPr id="17" name="Image 0" descr="preencoded.png">    </p:cNvPr>
           <p:cNvPicPr>
             <a:picLocks noChangeAspect="1"/>
           </p:cNvPicPr>
@@ -14247,7 +15677,7 @@
       </p:pic>
       <p:sp>
         <p:nvSpPr>
-          <p:cNvPr id="14" name="Shape 11"/>
+          <p:cNvPr id="18" name="Shape 15"/>
           <p:cNvSpPr/>
           <p:nvPr/>
         </p:nvSpPr>
@@ -14288,7 +15718,7 @@
       </p:sp>
       <p:pic>
         <p:nvPicPr>
-          <p:cNvPr id="15" name="Image 1" descr="preencoded.png">    </p:cNvPr>
+          <p:cNvPr id="19" name="Image 1" descr="preencoded.png">    </p:cNvPr>
           <p:cNvPicPr>
             <a:picLocks noChangeAspect="1"/>
           </p:cNvPicPr>
@@ -14318,7 +15748,7 @@
       </p:pic>
       <p:sp>
         <p:nvSpPr>
-          <p:cNvPr id="16" name="Shape 12"/>
+          <p:cNvPr id="20" name="Shape 16"/>
           <p:cNvSpPr/>
           <p:nvPr/>
         </p:nvSpPr>
@@ -14359,7 +15789,7 @@
       </p:sp>
       <p:pic>
         <p:nvPicPr>
-          <p:cNvPr id="17" name="Image 2" descr="preencoded.png">    </p:cNvPr>
+          <p:cNvPr id="21" name="Image 2" descr="preencoded.png">    </p:cNvPr>
           <p:cNvPicPr>
             <a:picLocks noChangeAspect="1"/>
           </p:cNvPicPr>
@@ -14389,7 +15819,7 @@
       </p:pic>
       <p:sp>
         <p:nvSpPr>
-          <p:cNvPr id="18" name="Shape 13"/>
+          <p:cNvPr id="22" name="Shape 17"/>
           <p:cNvSpPr/>
           <p:nvPr/>
         </p:nvSpPr>
@@ -14430,7 +15860,7 @@
       </p:sp>
       <p:sp>
         <p:nvSpPr>
-          <p:cNvPr id="19" name="Shape 14"/>
+          <p:cNvPr id="23" name="Shape 18"/>
           <p:cNvSpPr/>
           <p:nvPr/>
         </p:nvSpPr>
@@ -14459,7 +15889,7 @@
       </p:sp>
       <p:sp>
         <p:nvSpPr>
-          <p:cNvPr id="20" name="Shape 15"/>
+          <p:cNvPr id="24" name="Shape 19"/>
           <p:cNvSpPr/>
           <p:nvPr/>
         </p:nvSpPr>
@@ -14486,7 +15916,7 @@
       </p:sp>
       <p:sp>
         <p:nvSpPr>
-          <p:cNvPr id="21" name="Shape 16"/>
+          <p:cNvPr id="25" name="Shape 20"/>
           <p:cNvSpPr/>
           <p:nvPr/>
         </p:nvSpPr>
@@ -14513,7 +15943,7 @@
       </p:sp>
       <p:sp>
         <p:nvSpPr>
-          <p:cNvPr id="22" name="Shape 17"/>
+          <p:cNvPr id="26" name="Shape 21"/>
           <p:cNvSpPr/>
           <p:nvPr/>
         </p:nvSpPr>
@@ -14540,7 +15970,7 @@
       </p:sp>
       <p:sp>
         <p:nvSpPr>
-          <p:cNvPr id="23" name="mdpr:1-2-ea42c8:title:__title:1-2-ea42c8"/>
+          <p:cNvPr id="27" name="mdpr:1-2-ea42c8:title:__title:1-2-ea42c8"/>
           <p:cNvSpPr txBox="1"/>
           <p:nvPr/>
         </p:nvSpPr>
@@ -14582,7 +16012,7 @@
       </p:sp>
       <p:sp>
         <p:nvSpPr>
-          <p:cNvPr id="24" name="Shape 19"/>
+          <p:cNvPr id="28" name="Shape 23"/>
           <p:cNvSpPr/>
           <p:nvPr/>
         </p:nvSpPr>
@@ -14609,7 +16039,7 @@
       </p:sp>
       <p:pic>
         <p:nvPicPr>
-          <p:cNvPr id="25" name="Image 3" descr="article icon from tabler-icons (MIT)">    </p:cNvPr>
+          <p:cNvPr id="29" name="Image 3" descr="article icon from tabler-icons (MIT)">    </p:cNvPr>
           <p:cNvPicPr>
             <a:picLocks noChangeAspect="1"/>
           </p:cNvPicPr>
@@ -14639,7 +16069,7 @@
       </p:pic>
       <p:sp>
         <p:nvSpPr>
-          <p:cNvPr id="26" name="mdpr:1-2-ea42c8:item-1:block-27-chunk-1"/>
+          <p:cNvPr id="30" name="mdpr:1-2-ea42c8:item-1:block-27-chunk-1"/>
           <p:cNvSpPr txBox="1"/>
           <p:nvPr/>
         </p:nvSpPr>
@@ -14698,7 +16128,7 @@
       </p:sp>
       <p:sp>
         <p:nvSpPr>
-          <p:cNvPr id="27" name="Shape 21"/>
+          <p:cNvPr id="31" name="Shape 25"/>
           <p:cNvSpPr/>
           <p:nvPr/>
         </p:nvSpPr>
@@ -14725,7 +16155,7 @@
       </p:sp>
       <p:pic>
         <p:nvPicPr>
-          <p:cNvPr id="28" name="Image 4" descr="article icon from tabler-icons (MIT)">    </p:cNvPr>
+          <p:cNvPr id="32" name="Image 4" descr="article icon from tabler-icons (MIT)">    </p:cNvPr>
           <p:cNvPicPr>
             <a:picLocks noChangeAspect="1"/>
           </p:cNvPicPr>
@@ -14755,7 +16185,7 @@
       </p:pic>
       <p:sp>
         <p:nvSpPr>
-          <p:cNvPr id="29" name="mdpr:1-2-ea42c8:item-2:block-27-chunk-1"/>
+          <p:cNvPr id="33" name="mdpr:1-2-ea42c8:item-2:block-27-chunk-1"/>
           <p:cNvSpPr txBox="1"/>
           <p:nvPr/>
         </p:nvSpPr>
@@ -14814,7 +16244,7 @@
       </p:sp>
       <p:sp>
         <p:nvSpPr>
-          <p:cNvPr id="30" name="Shape 23"/>
+          <p:cNvPr id="34" name="Shape 27"/>
           <p:cNvSpPr/>
           <p:nvPr/>
         </p:nvSpPr>
@@ -14841,7 +16271,7 @@
       </p:sp>
       <p:pic>
         <p:nvPicPr>
-          <p:cNvPr id="31" name="Image 5" descr="article icon from tabler-icons (MIT)">    </p:cNvPr>
+          <p:cNvPr id="35" name="Image 5" descr="article icon from tabler-icons (MIT)">    </p:cNvPr>
           <p:cNvPicPr>
             <a:picLocks noChangeAspect="1"/>
           </p:cNvPicPr>
@@ -14871,7 +16301,7 @@
       </p:pic>
       <p:sp>
         <p:nvSpPr>
-          <p:cNvPr id="32" name="mdpr:1-2-ea42c8:item-3:block-27-chunk-1"/>
+          <p:cNvPr id="36" name="mdpr:1-2-ea42c8:item-3:block-27-chunk-1"/>
           <p:cNvSpPr txBox="1"/>
           <p:nvPr/>
         </p:nvSpPr>
@@ -14968,6 +16398,49 @@
         </p:nvSpPr>
         <p:spPr>
           <a:xfrm>
+            <a:off x="310896" y="256032"/>
+            <a:ext cx="10893247" cy="5779008"/>
+          </a:xfrm>
+          <a:prstGeom prst="roundRect">
+            <a:avLst>
+              <a:gd name="adj" fmla="val 1899"/>
+            </a:avLst>
+          </a:prstGeom>
+          <a:solidFill>
+            <a:srgbClr val="7DD3FC">
+              <a:alpha val="26000"/>
+            </a:srgbClr>
+          </a:solidFill>
+          <a:ln w="12700">
+            <a:solidFill>
+              <a:srgbClr val="FFFFFF">
+                <a:alpha val="14000"/>
+              </a:srgbClr>
+            </a:solidFill>
+            <a:prstDash val="solid"/>
+          </a:ln>
+          <a:effectLst>
+            <a:outerShdw sx="100000" sy="100000" kx="0" ky="0" algn="bl" rotWithShape="0" blurRad="12700" dist="50800" dir="2700000">
+              <a:srgbClr val="7DD3FC">
+                <a:alpha val="10000"/>
+              </a:srgbClr>
+            </a:outerShdw>
+            <a:glow rad="63500">
+              <a:srgbClr val="7DD3FC">
+                <a:alpha val="23000"/>
+              </a:srgbClr>
+            </a:glow>
+          </a:effectLst>
+        </p:spPr>
+      </p:sp>
+      <p:sp>
+        <p:nvSpPr>
+          <p:cNvPr id="3" name="Shape 1"/>
+          <p:cNvSpPr/>
+          <p:nvPr/>
+        </p:nvSpPr>
+        <p:spPr>
+          <a:xfrm>
             <a:off x="566928" y="475488"/>
             <a:ext cx="11057839" cy="5907024"/>
           </a:xfrm>
@@ -15005,7 +16478,7 @@
       </p:sp>
       <p:sp>
         <p:nvSpPr>
-          <p:cNvPr id="3" name="Shape 1"/>
+          <p:cNvPr id="4" name="Shape 2"/>
           <p:cNvSpPr/>
           <p:nvPr/>
         </p:nvSpPr>
@@ -15034,7 +16507,7 @@
       </p:sp>
       <p:sp>
         <p:nvSpPr>
-          <p:cNvPr id="4" name="Shape 2"/>
+          <p:cNvPr id="5" name="Shape 3"/>
           <p:cNvSpPr/>
           <p:nvPr/>
         </p:nvSpPr>
@@ -15063,7 +16536,7 @@
       </p:sp>
       <p:sp>
         <p:nvSpPr>
-          <p:cNvPr id="5" name="Shape 3"/>
+          <p:cNvPr id="6" name="Shape 4"/>
           <p:cNvSpPr/>
           <p:nvPr/>
         </p:nvSpPr>
@@ -15092,7 +16565,7 @@
       </p:sp>
       <p:sp>
         <p:nvSpPr>
-          <p:cNvPr id="6" name="Shape 4"/>
+          <p:cNvPr id="7" name="Shape 5"/>
           <p:cNvSpPr/>
           <p:nvPr/>
         </p:nvSpPr>
@@ -15117,7 +16590,7 @@
       </p:sp>
       <p:sp>
         <p:nvSpPr>
-          <p:cNvPr id="7" name="Shape 5"/>
+          <p:cNvPr id="8" name="Shape 6"/>
           <p:cNvSpPr/>
           <p:nvPr/>
         </p:nvSpPr>
@@ -15142,7 +16615,94 @@
       </p:sp>
       <p:sp>
         <p:nvSpPr>
-          <p:cNvPr id="8" name="Shape 6"/>
+          <p:cNvPr id="9" name="Shape 7"/>
+          <p:cNvSpPr/>
+          <p:nvPr/>
+        </p:nvSpPr>
+        <p:spPr>
+          <a:xfrm>
+            <a:off x="9631375" y="603504"/>
+            <a:ext cx="1353312" cy="0"/>
+          </a:xfrm>
+          <a:prstGeom prst="line">
+            <a:avLst/>
+          </a:prstGeom>
+          <a:noFill/>
+          <a:ln w="12700">
+            <a:solidFill>
+              <a:srgbClr val="FFFFFF">
+                <a:alpha val="54000"/>
+              </a:srgbClr>
+            </a:solidFill>
+            <a:prstDash val="solid"/>
+          </a:ln>
+        </p:spPr>
+      </p:sp>
+      <p:sp>
+        <p:nvSpPr>
+          <p:cNvPr id="10" name="Shape 8"/>
+          <p:cNvSpPr/>
+          <p:nvPr/>
+        </p:nvSpPr>
+        <p:spPr>
+          <a:xfrm rot="-180000">
+            <a:off x="530352" y="438912"/>
+            <a:ext cx="6583515" cy="146304"/>
+          </a:xfrm>
+          <a:prstGeom prst="roundRect">
+            <a:avLst>
+              <a:gd name="adj" fmla="val 37500"/>
+            </a:avLst>
+          </a:prstGeom>
+          <a:solidFill>
+            <a:srgbClr val="FFFFFF">
+              <a:alpha val="22000"/>
+            </a:srgbClr>
+          </a:solidFill>
+          <a:ln w="12700">
+            <a:solidFill>
+              <a:srgbClr val="FFFFFF">
+                <a:alpha val="0"/>
+              </a:srgbClr>
+            </a:solidFill>
+            <a:prstDash val="solid"/>
+          </a:ln>
+        </p:spPr>
+      </p:sp>
+      <p:sp>
+        <p:nvSpPr>
+          <p:cNvPr id="11" name="Shape 9"/>
+          <p:cNvSpPr/>
+          <p:nvPr/>
+        </p:nvSpPr>
+        <p:spPr>
+          <a:xfrm rot="120000">
+            <a:off x="7558851" y="256032"/>
+            <a:ext cx="3047924" cy="201168"/>
+          </a:xfrm>
+          <a:prstGeom prst="roundRect">
+            <a:avLst>
+              <a:gd name="adj" fmla="val 31818"/>
+            </a:avLst>
+          </a:prstGeom>
+          <a:solidFill>
+            <a:srgbClr val="7DD3FC">
+              <a:alpha val="64000"/>
+            </a:srgbClr>
+          </a:solidFill>
+          <a:ln w="12700">
+            <a:solidFill>
+              <a:srgbClr val="FFFFFF">
+                <a:alpha val="18000"/>
+              </a:srgbClr>
+            </a:solidFill>
+            <a:prstDash val="solid"/>
+          </a:ln>
+        </p:spPr>
+      </p:sp>
+      <p:sp>
+        <p:nvSpPr>
+          <p:cNvPr id="12" name="Shape 10"/>
           <p:cNvSpPr/>
           <p:nvPr/>
         </p:nvSpPr>
@@ -15183,7 +16743,7 @@
       </p:sp>
       <p:sp>
         <p:nvSpPr>
-          <p:cNvPr id="9" name="Shape 7"/>
+          <p:cNvPr id="13" name="Shape 11"/>
           <p:cNvSpPr/>
           <p:nvPr/>
         </p:nvSpPr>
@@ -15212,7 +16772,7 @@
       </p:sp>
       <p:sp>
         <p:nvSpPr>
-          <p:cNvPr id="10" name="Shape 8"/>
+          <p:cNvPr id="14" name="Shape 12"/>
           <p:cNvSpPr/>
           <p:nvPr/>
         </p:nvSpPr>
@@ -15239,7 +16799,7 @@
       </p:sp>
       <p:sp>
         <p:nvSpPr>
-          <p:cNvPr id="11" name="Shape 9"/>
+          <p:cNvPr id="15" name="Shape 13"/>
           <p:cNvSpPr/>
           <p:nvPr/>
         </p:nvSpPr>
@@ -15266,7 +16826,7 @@
       </p:sp>
       <p:sp>
         <p:nvSpPr>
-          <p:cNvPr id="12" name="Shape 10"/>
+          <p:cNvPr id="16" name="Shape 14"/>
           <p:cNvSpPr/>
           <p:nvPr/>
         </p:nvSpPr>
@@ -15293,7 +16853,7 @@
       </p:sp>
       <p:sp>
         <p:nvSpPr>
-          <p:cNvPr id="13" name="Shape 11"/>
+          <p:cNvPr id="17" name="Shape 15"/>
           <p:cNvSpPr/>
           <p:nvPr/>
         </p:nvSpPr>
@@ -15320,7 +16880,7 @@
       </p:sp>
       <p:sp>
         <p:nvSpPr>
-          <p:cNvPr id="14" name="Shape 12"/>
+          <p:cNvPr id="18" name="Shape 16"/>
           <p:cNvSpPr/>
           <p:nvPr/>
         </p:nvSpPr>
@@ -15347,7 +16907,7 @@
       </p:sp>
       <p:sp>
         <p:nvSpPr>
-          <p:cNvPr id="15" name="Shape 13"/>
+          <p:cNvPr id="19" name="Shape 17"/>
           <p:cNvSpPr/>
           <p:nvPr/>
         </p:nvSpPr>
@@ -15376,7 +16936,7 @@
       </p:sp>
       <p:sp>
         <p:nvSpPr>
-          <p:cNvPr id="16" name="Shape 14"/>
+          <p:cNvPr id="20" name="Shape 18"/>
           <p:cNvSpPr/>
           <p:nvPr/>
         </p:nvSpPr>
@@ -15403,7 +16963,7 @@
       </p:sp>
       <p:sp>
         <p:nvSpPr>
-          <p:cNvPr id="17" name="Shape 15"/>
+          <p:cNvPr id="21" name="Shape 19"/>
           <p:cNvSpPr/>
           <p:nvPr/>
         </p:nvSpPr>
@@ -15430,7 +16990,7 @@
       </p:sp>
       <p:sp>
         <p:nvSpPr>
-          <p:cNvPr id="18" name="Shape 16"/>
+          <p:cNvPr id="22" name="Shape 20"/>
           <p:cNvSpPr/>
           <p:nvPr/>
         </p:nvSpPr>
@@ -15457,7 +17017,7 @@
       </p:sp>
       <p:sp>
         <p:nvSpPr>
-          <p:cNvPr id="19" name="Shape 17"/>
+          <p:cNvPr id="23" name="Shape 21"/>
           <p:cNvSpPr/>
           <p:nvPr/>
         </p:nvSpPr>
@@ -15484,7 +17044,7 @@
       </p:sp>
       <p:sp>
         <p:nvSpPr>
-          <p:cNvPr id="20" name="Shape 18"/>
+          <p:cNvPr id="24" name="Shape 22"/>
           <p:cNvSpPr/>
           <p:nvPr/>
         </p:nvSpPr>
@@ -15511,7 +17071,7 @@
       </p:sp>
       <p:sp>
         <p:nvSpPr>
-          <p:cNvPr id="21" name="Shape 19"/>
+          <p:cNvPr id="25" name="Shape 23"/>
           <p:cNvSpPr/>
           <p:nvPr/>
         </p:nvSpPr>
@@ -15538,7 +17098,7 @@
       </p:sp>
       <p:sp>
         <p:nvSpPr>
-          <p:cNvPr id="22" name="Shape 20"/>
+          <p:cNvPr id="26" name="Shape 24"/>
           <p:cNvSpPr/>
           <p:nvPr/>
         </p:nvSpPr>
@@ -15565,7 +17125,7 @@
       </p:sp>
       <p:sp>
         <p:nvSpPr>
-          <p:cNvPr id="23" name="Shape 21"/>
+          <p:cNvPr id="27" name="Shape 25"/>
           <p:cNvSpPr/>
           <p:nvPr/>
         </p:nvSpPr>
@@ -15592,7 +17152,7 @@
       </p:sp>
       <p:sp>
         <p:nvSpPr>
-          <p:cNvPr id="24" name="Shape 22"/>
+          <p:cNvPr id="28" name="Shape 26"/>
           <p:cNvSpPr/>
           <p:nvPr/>
         </p:nvSpPr>
@@ -15619,7 +17179,7 @@
       </p:sp>
       <p:sp>
         <p:nvSpPr>
-          <p:cNvPr id="25" name="Shape 23"/>
+          <p:cNvPr id="29" name="Shape 27"/>
           <p:cNvSpPr/>
           <p:nvPr/>
         </p:nvSpPr>
@@ -15646,7 +17206,7 @@
       </p:sp>
       <p:sp>
         <p:nvSpPr>
-          <p:cNvPr id="26" name="Shape 24"/>
+          <p:cNvPr id="30" name="Shape 28"/>
           <p:cNvSpPr/>
           <p:nvPr/>
         </p:nvSpPr>
@@ -15673,7 +17233,7 @@
       </p:sp>
       <p:sp>
         <p:nvSpPr>
-          <p:cNvPr id="27" name="Shape 25"/>
+          <p:cNvPr id="31" name="Shape 29"/>
           <p:cNvSpPr/>
           <p:nvPr/>
         </p:nvSpPr>
@@ -15700,7 +17260,7 @@
       </p:sp>
       <p:sp>
         <p:nvSpPr>
-          <p:cNvPr id="28" name="Shape 26"/>
+          <p:cNvPr id="32" name="Shape 30"/>
           <p:cNvSpPr/>
           <p:nvPr/>
         </p:nvSpPr>
@@ -15727,7 +17287,7 @@
       </p:sp>
       <p:sp>
         <p:nvSpPr>
-          <p:cNvPr id="29" name="Shape 27"/>
+          <p:cNvPr id="33" name="Shape 31"/>
           <p:cNvSpPr/>
           <p:nvPr/>
         </p:nvSpPr>
@@ -15754,7 +17314,7 @@
       </p:sp>
       <p:sp>
         <p:nvSpPr>
-          <p:cNvPr id="30" name="mdpr:1-2-0772f8:title:__title:1-2-0772f8"/>
+          <p:cNvPr id="34" name="mdpr:1-2-0772f8:title:__title:1-2-0772f8"/>
           <p:cNvSpPr txBox="1"/>
           <p:nvPr/>
         </p:nvSpPr>
@@ -15796,7 +17356,7 @@
       </p:sp>
       <p:sp>
         <p:nvSpPr>
-          <p:cNvPr id="31" name="mdpr:1-2-0772f8:toc-item-1:toc-item-1"/>
+          <p:cNvPr id="35" name="mdpr:1-2-0772f8:toc-item-1:toc-item-1"/>
           <p:cNvSpPr txBox="1"/>
           <p:nvPr/>
         </p:nvSpPr>
@@ -15838,7 +17398,7 @@
       </p:sp>
       <p:sp>
         <p:nvSpPr>
-          <p:cNvPr id="32" name="mdpr:1-2-0772f8:toc-item-2:toc-item-2"/>
+          <p:cNvPr id="36" name="mdpr:1-2-0772f8:toc-item-2:toc-item-2"/>
           <p:cNvSpPr txBox="1"/>
           <p:nvPr/>
         </p:nvSpPr>
@@ -15880,7 +17440,7 @@
       </p:sp>
       <p:sp>
         <p:nvSpPr>
-          <p:cNvPr id="33" name="mdpr:1-2-0772f8:toc-item-3:toc-item-3"/>
+          <p:cNvPr id="37" name="mdpr:1-2-0772f8:toc-item-3:toc-item-3"/>
           <p:cNvSpPr txBox="1"/>
           <p:nvPr/>
         </p:nvSpPr>
@@ -15922,7 +17482,7 @@
       </p:sp>
       <p:sp>
         <p:nvSpPr>
-          <p:cNvPr id="34" name="mdpr:1-2-0772f8:toc-item-4:toc-item-4"/>
+          <p:cNvPr id="38" name="mdpr:1-2-0772f8:toc-item-4:toc-item-4"/>
           <p:cNvSpPr txBox="1"/>
           <p:nvPr/>
         </p:nvSpPr>
@@ -15964,7 +17524,7 @@
       </p:sp>
       <p:sp>
         <p:nvSpPr>
-          <p:cNvPr id="35" name="mdpr:1-2-0772f8:toc-item-5:toc-item-5"/>
+          <p:cNvPr id="39" name="mdpr:1-2-0772f8:toc-item-5:toc-item-5"/>
           <p:cNvSpPr txBox="1"/>
           <p:nvPr/>
         </p:nvSpPr>
@@ -16006,7 +17566,7 @@
       </p:sp>
       <p:sp>
         <p:nvSpPr>
-          <p:cNvPr id="36" name="mdpr:1-2-0772f8:toc-item-6:toc-item-6"/>
+          <p:cNvPr id="40" name="mdpr:1-2-0772f8:toc-item-6:toc-item-6"/>
           <p:cNvSpPr txBox="1"/>
           <p:nvPr/>
         </p:nvSpPr>
@@ -16048,7 +17608,7 @@
       </p:sp>
       <p:sp>
         <p:nvSpPr>
-          <p:cNvPr id="37" name="mdpr:1-2-0772f8:toc-item-7:toc-item-7"/>
+          <p:cNvPr id="41" name="mdpr:1-2-0772f8:toc-item-7:toc-item-7"/>
           <p:cNvSpPr txBox="1"/>
           <p:nvPr/>
         </p:nvSpPr>
@@ -16090,7 +17650,7 @@
       </p:sp>
       <p:sp>
         <p:nvSpPr>
-          <p:cNvPr id="38" name="mdpr:1-2-0772f8:toc-item-8:toc-item-8"/>
+          <p:cNvPr id="42" name="mdpr:1-2-0772f8:toc-item-8:toc-item-8"/>
           <p:cNvSpPr txBox="1"/>
           <p:nvPr/>
         </p:nvSpPr>
@@ -16132,7 +17692,7 @@
       </p:sp>
       <p:sp>
         <p:nvSpPr>
-          <p:cNvPr id="39" name="mdpr:1-2-0772f8:toc-item-9:toc-item-9"/>
+          <p:cNvPr id="43" name="mdpr:1-2-0772f8:toc-item-9:toc-item-9"/>
           <p:cNvSpPr txBox="1"/>
           <p:nvPr/>
         </p:nvSpPr>
@@ -16174,7 +17734,7 @@
       </p:sp>
       <p:sp>
         <p:nvSpPr>
-          <p:cNvPr id="40" name="mdpr:1-2-0772f8:toc-item-10:toc-item-10"/>
+          <p:cNvPr id="44" name="mdpr:1-2-0772f8:toc-item-10:toc-item-10"/>
           <p:cNvSpPr txBox="1"/>
           <p:nvPr/>
         </p:nvSpPr>
@@ -16216,7 +17776,7 @@
       </p:sp>
       <p:sp>
         <p:nvSpPr>
-          <p:cNvPr id="41" name="mdpr:1-2-0772f8:toc-item-11:toc-item-11"/>
+          <p:cNvPr id="45" name="mdpr:1-2-0772f8:toc-item-11:toc-item-11"/>
           <p:cNvSpPr txBox="1"/>
           <p:nvPr/>
         </p:nvSpPr>
@@ -16258,7 +17818,7 @@
       </p:sp>
       <p:sp>
         <p:nvSpPr>
-          <p:cNvPr id="42" name="mdpr:1-2-0772f8:toc-item-12:toc-item-12"/>
+          <p:cNvPr id="46" name="mdpr:1-2-0772f8:toc-item-12:toc-item-12"/>
           <p:cNvSpPr txBox="1"/>
           <p:nvPr/>
         </p:nvSpPr>
@@ -16300,7 +17860,7 @@
       </p:sp>
       <p:sp>
         <p:nvSpPr>
-          <p:cNvPr id="43" name="mdpr:1-2-0772f8:toc-item-13:toc-item-13"/>
+          <p:cNvPr id="47" name="mdpr:1-2-0772f8:toc-item-13:toc-item-13"/>
           <p:cNvSpPr txBox="1"/>
           <p:nvPr/>
         </p:nvSpPr>
@@ -16342,7 +17902,7 @@
       </p:sp>
       <p:sp>
         <p:nvSpPr>
-          <p:cNvPr id="44" name="mdpr:1-2-0772f8:toc-item-14:toc-item-14"/>
+          <p:cNvPr id="48" name="mdpr:1-2-0772f8:toc-item-14:toc-item-14"/>
           <p:cNvSpPr txBox="1"/>
           <p:nvPr/>
         </p:nvSpPr>
@@ -16422,6 +17982,49 @@
         </p:nvSpPr>
         <p:spPr>
           <a:xfrm>
+            <a:off x="310896" y="256032"/>
+            <a:ext cx="10893247" cy="5779008"/>
+          </a:xfrm>
+          <a:prstGeom prst="roundRect">
+            <a:avLst>
+              <a:gd name="adj" fmla="val 1899"/>
+            </a:avLst>
+          </a:prstGeom>
+          <a:solidFill>
+            <a:srgbClr val="7DD3FC">
+              <a:alpha val="26000"/>
+            </a:srgbClr>
+          </a:solidFill>
+          <a:ln w="12700">
+            <a:solidFill>
+              <a:srgbClr val="FFFFFF">
+                <a:alpha val="14000"/>
+              </a:srgbClr>
+            </a:solidFill>
+            <a:prstDash val="solid"/>
+          </a:ln>
+          <a:effectLst>
+            <a:outerShdw sx="100000" sy="100000" kx="0" ky="0" algn="bl" rotWithShape="0" blurRad="12700" dist="50800" dir="2700000">
+              <a:srgbClr val="7DD3FC">
+                <a:alpha val="10000"/>
+              </a:srgbClr>
+            </a:outerShdw>
+            <a:glow rad="63500">
+              <a:srgbClr val="7DD3FC">
+                <a:alpha val="23000"/>
+              </a:srgbClr>
+            </a:glow>
+          </a:effectLst>
+        </p:spPr>
+      </p:sp>
+      <p:sp>
+        <p:nvSpPr>
+          <p:cNvPr id="3" name="Shape 1"/>
+          <p:cNvSpPr/>
+          <p:nvPr/>
+        </p:nvSpPr>
+        <p:spPr>
+          <a:xfrm>
             <a:off x="566928" y="475488"/>
             <a:ext cx="11057839" cy="5907024"/>
           </a:xfrm>
@@ -16459,7 +18062,7 @@
       </p:sp>
       <p:sp>
         <p:nvSpPr>
-          <p:cNvPr id="3" name="Shape 1"/>
+          <p:cNvPr id="4" name="Shape 2"/>
           <p:cNvSpPr/>
           <p:nvPr/>
         </p:nvSpPr>
@@ -16488,7 +18091,7 @@
       </p:sp>
       <p:sp>
         <p:nvSpPr>
-          <p:cNvPr id="4" name="Shape 2"/>
+          <p:cNvPr id="5" name="Shape 3"/>
           <p:cNvSpPr/>
           <p:nvPr/>
         </p:nvSpPr>
@@ -16517,7 +18120,7 @@
       </p:sp>
       <p:sp>
         <p:nvSpPr>
-          <p:cNvPr id="5" name="Shape 3"/>
+          <p:cNvPr id="6" name="Shape 4"/>
           <p:cNvSpPr/>
           <p:nvPr/>
         </p:nvSpPr>
@@ -16546,7 +18149,7 @@
       </p:sp>
       <p:sp>
         <p:nvSpPr>
-          <p:cNvPr id="6" name="Shape 4"/>
+          <p:cNvPr id="7" name="Shape 5"/>
           <p:cNvSpPr/>
           <p:nvPr/>
         </p:nvSpPr>
@@ -16571,7 +18174,7 @@
       </p:sp>
       <p:sp>
         <p:nvSpPr>
-          <p:cNvPr id="7" name="Shape 5"/>
+          <p:cNvPr id="8" name="Shape 6"/>
           <p:cNvSpPr/>
           <p:nvPr/>
         </p:nvSpPr>
@@ -16596,7 +18199,94 @@
       </p:sp>
       <p:sp>
         <p:nvSpPr>
-          <p:cNvPr id="8" name="Shape 6"/>
+          <p:cNvPr id="9" name="Shape 7"/>
+          <p:cNvSpPr/>
+          <p:nvPr/>
+        </p:nvSpPr>
+        <p:spPr>
+          <a:xfrm>
+            <a:off x="9631375" y="603504"/>
+            <a:ext cx="1353312" cy="0"/>
+          </a:xfrm>
+          <a:prstGeom prst="line">
+            <a:avLst/>
+          </a:prstGeom>
+          <a:noFill/>
+          <a:ln w="12700">
+            <a:solidFill>
+              <a:srgbClr val="FFFFFF">
+                <a:alpha val="54000"/>
+              </a:srgbClr>
+            </a:solidFill>
+            <a:prstDash val="solid"/>
+          </a:ln>
+        </p:spPr>
+      </p:sp>
+      <p:sp>
+        <p:nvSpPr>
+          <p:cNvPr id="10" name="Shape 8"/>
+          <p:cNvSpPr/>
+          <p:nvPr/>
+        </p:nvSpPr>
+        <p:spPr>
+          <a:xfrm rot="-180000">
+            <a:off x="530352" y="438912"/>
+            <a:ext cx="6583515" cy="146304"/>
+          </a:xfrm>
+          <a:prstGeom prst="roundRect">
+            <a:avLst>
+              <a:gd name="adj" fmla="val 37500"/>
+            </a:avLst>
+          </a:prstGeom>
+          <a:solidFill>
+            <a:srgbClr val="FFFFFF">
+              <a:alpha val="22000"/>
+            </a:srgbClr>
+          </a:solidFill>
+          <a:ln w="12700">
+            <a:solidFill>
+              <a:srgbClr val="FFFFFF">
+                <a:alpha val="0"/>
+              </a:srgbClr>
+            </a:solidFill>
+            <a:prstDash val="solid"/>
+          </a:ln>
+        </p:spPr>
+      </p:sp>
+      <p:sp>
+        <p:nvSpPr>
+          <p:cNvPr id="11" name="Shape 9"/>
+          <p:cNvSpPr/>
+          <p:nvPr/>
+        </p:nvSpPr>
+        <p:spPr>
+          <a:xfrm rot="120000">
+            <a:off x="7558851" y="256032"/>
+            <a:ext cx="3047924" cy="201168"/>
+          </a:xfrm>
+          <a:prstGeom prst="roundRect">
+            <a:avLst>
+              <a:gd name="adj" fmla="val 31818"/>
+            </a:avLst>
+          </a:prstGeom>
+          <a:solidFill>
+            <a:srgbClr val="7DD3FC">
+              <a:alpha val="64000"/>
+            </a:srgbClr>
+          </a:solidFill>
+          <a:ln w="12700">
+            <a:solidFill>
+              <a:srgbClr val="FFFFFF">
+                <a:alpha val="18000"/>
+              </a:srgbClr>
+            </a:solidFill>
+            <a:prstDash val="solid"/>
+          </a:ln>
+        </p:spPr>
+      </p:sp>
+      <p:sp>
+        <p:nvSpPr>
+          <p:cNvPr id="12" name="Shape 10"/>
           <p:cNvSpPr/>
           <p:nvPr/>
         </p:nvSpPr>
@@ -16637,7 +18327,7 @@
       </p:sp>
       <p:sp>
         <p:nvSpPr>
-          <p:cNvPr id="9" name="Shape 7"/>
+          <p:cNvPr id="13" name="Shape 11"/>
           <p:cNvSpPr/>
           <p:nvPr/>
         </p:nvSpPr>
@@ -16666,7 +18356,7 @@
       </p:sp>
       <p:sp>
         <p:nvSpPr>
-          <p:cNvPr id="10" name="Shape 8"/>
+          <p:cNvPr id="14" name="Shape 12"/>
           <p:cNvSpPr/>
           <p:nvPr/>
         </p:nvSpPr>
@@ -16693,7 +18383,7 @@
       </p:sp>
       <p:sp>
         <p:nvSpPr>
-          <p:cNvPr id="11" name="Shape 9"/>
+          <p:cNvPr id="15" name="Shape 13"/>
           <p:cNvSpPr/>
           <p:nvPr/>
         </p:nvSpPr>
@@ -16720,7 +18410,7 @@
       </p:sp>
       <p:sp>
         <p:nvSpPr>
-          <p:cNvPr id="12" name="Shape 10"/>
+          <p:cNvPr id="16" name="Shape 14"/>
           <p:cNvSpPr/>
           <p:nvPr/>
         </p:nvSpPr>
@@ -16747,7 +18437,7 @@
       </p:sp>
       <p:sp>
         <p:nvSpPr>
-          <p:cNvPr id="13" name="Shape 11"/>
+          <p:cNvPr id="17" name="Shape 15"/>
           <p:cNvSpPr/>
           <p:nvPr/>
         </p:nvSpPr>
@@ -16774,7 +18464,7 @@
       </p:sp>
       <p:sp>
         <p:nvSpPr>
-          <p:cNvPr id="14" name="Shape 12"/>
+          <p:cNvPr id="18" name="Shape 16"/>
           <p:cNvSpPr/>
           <p:nvPr/>
         </p:nvSpPr>
@@ -16801,7 +18491,7 @@
       </p:sp>
       <p:sp>
         <p:nvSpPr>
-          <p:cNvPr id="15" name="mdpr:2-2-4f71ba:title:__title:2-2-4f71ba"/>
+          <p:cNvPr id="19" name="mdpr:2-2-4f71ba:title:__title:2-2-4f71ba"/>
           <p:cNvSpPr txBox="1"/>
           <p:nvPr/>
         </p:nvSpPr>
@@ -16843,7 +18533,7 @@
       </p:sp>
       <p:sp>
         <p:nvSpPr>
-          <p:cNvPr id="16" name="mdpr:2-2-4f71ba:left:block-27-chunk-2"/>
+          <p:cNvPr id="20" name="mdpr:2-2-4f71ba:left:block-27-chunk-2"/>
           <p:cNvSpPr txBox="1"/>
           <p:nvPr/>
         </p:nvSpPr>
@@ -16902,7 +18592,7 @@
       </p:sp>
       <p:sp>
         <p:nvSpPr>
-          <p:cNvPr id="17" name="mdpr:2-2-4f71ba:right:block-27-chunk-2"/>
+          <p:cNvPr id="21" name="mdpr:2-2-4f71ba:right:block-27-chunk-2"/>
           <p:cNvSpPr txBox="1"/>
           <p:nvPr/>
         </p:nvSpPr>
@@ -16999,6 +18689,49 @@
         </p:nvSpPr>
         <p:spPr>
           <a:xfrm>
+            <a:off x="310896" y="256032"/>
+            <a:ext cx="10893247" cy="5779008"/>
+          </a:xfrm>
+          <a:prstGeom prst="roundRect">
+            <a:avLst>
+              <a:gd name="adj" fmla="val 1899"/>
+            </a:avLst>
+          </a:prstGeom>
+          <a:solidFill>
+            <a:srgbClr val="7DD3FC">
+              <a:alpha val="26000"/>
+            </a:srgbClr>
+          </a:solidFill>
+          <a:ln w="12700">
+            <a:solidFill>
+              <a:srgbClr val="FFFFFF">
+                <a:alpha val="14000"/>
+              </a:srgbClr>
+            </a:solidFill>
+            <a:prstDash val="solid"/>
+          </a:ln>
+          <a:effectLst>
+            <a:outerShdw sx="100000" sy="100000" kx="0" ky="0" algn="bl" rotWithShape="0" blurRad="12700" dist="50800" dir="2700000">
+              <a:srgbClr val="7DD3FC">
+                <a:alpha val="10000"/>
+              </a:srgbClr>
+            </a:outerShdw>
+            <a:glow rad="63500">
+              <a:srgbClr val="7DD3FC">
+                <a:alpha val="23000"/>
+              </a:srgbClr>
+            </a:glow>
+          </a:effectLst>
+        </p:spPr>
+      </p:sp>
+      <p:sp>
+        <p:nvSpPr>
+          <p:cNvPr id="3" name="Shape 1"/>
+          <p:cNvSpPr/>
+          <p:nvPr/>
+        </p:nvSpPr>
+        <p:spPr>
+          <a:xfrm>
             <a:off x="566928" y="475488"/>
             <a:ext cx="11057839" cy="5907024"/>
           </a:xfrm>
@@ -17036,7 +18769,7 @@
       </p:sp>
       <p:sp>
         <p:nvSpPr>
-          <p:cNvPr id="3" name="Shape 1"/>
+          <p:cNvPr id="4" name="Shape 2"/>
           <p:cNvSpPr/>
           <p:nvPr/>
         </p:nvSpPr>
@@ -17065,7 +18798,7 @@
       </p:sp>
       <p:sp>
         <p:nvSpPr>
-          <p:cNvPr id="4" name="Shape 2"/>
+          <p:cNvPr id="5" name="Shape 3"/>
           <p:cNvSpPr/>
           <p:nvPr/>
         </p:nvSpPr>
@@ -17094,7 +18827,7 @@
       </p:sp>
       <p:sp>
         <p:nvSpPr>
-          <p:cNvPr id="5" name="Shape 3"/>
+          <p:cNvPr id="6" name="Shape 4"/>
           <p:cNvSpPr/>
           <p:nvPr/>
         </p:nvSpPr>
@@ -17123,7 +18856,7 @@
       </p:sp>
       <p:sp>
         <p:nvSpPr>
-          <p:cNvPr id="6" name="Shape 4"/>
+          <p:cNvPr id="7" name="Shape 5"/>
           <p:cNvSpPr/>
           <p:nvPr/>
         </p:nvSpPr>
@@ -17148,7 +18881,7 @@
       </p:sp>
       <p:sp>
         <p:nvSpPr>
-          <p:cNvPr id="7" name="Shape 5"/>
+          <p:cNvPr id="8" name="Shape 6"/>
           <p:cNvSpPr/>
           <p:nvPr/>
         </p:nvSpPr>
@@ -17173,7 +18906,94 @@
       </p:sp>
       <p:sp>
         <p:nvSpPr>
-          <p:cNvPr id="8" name="Shape 6"/>
+          <p:cNvPr id="9" name="Shape 7"/>
+          <p:cNvSpPr/>
+          <p:nvPr/>
+        </p:nvSpPr>
+        <p:spPr>
+          <a:xfrm>
+            <a:off x="9631375" y="603504"/>
+            <a:ext cx="1353312" cy="0"/>
+          </a:xfrm>
+          <a:prstGeom prst="line">
+            <a:avLst/>
+          </a:prstGeom>
+          <a:noFill/>
+          <a:ln w="12700">
+            <a:solidFill>
+              <a:srgbClr val="FFFFFF">
+                <a:alpha val="54000"/>
+              </a:srgbClr>
+            </a:solidFill>
+            <a:prstDash val="solid"/>
+          </a:ln>
+        </p:spPr>
+      </p:sp>
+      <p:sp>
+        <p:nvSpPr>
+          <p:cNvPr id="10" name="Shape 8"/>
+          <p:cNvSpPr/>
+          <p:nvPr/>
+        </p:nvSpPr>
+        <p:spPr>
+          <a:xfrm rot="-180000">
+            <a:off x="530352" y="438912"/>
+            <a:ext cx="6583515" cy="146304"/>
+          </a:xfrm>
+          <a:prstGeom prst="roundRect">
+            <a:avLst>
+              <a:gd name="adj" fmla="val 37500"/>
+            </a:avLst>
+          </a:prstGeom>
+          <a:solidFill>
+            <a:srgbClr val="FFFFFF">
+              <a:alpha val="22000"/>
+            </a:srgbClr>
+          </a:solidFill>
+          <a:ln w="12700">
+            <a:solidFill>
+              <a:srgbClr val="FFFFFF">
+                <a:alpha val="0"/>
+              </a:srgbClr>
+            </a:solidFill>
+            <a:prstDash val="solid"/>
+          </a:ln>
+        </p:spPr>
+      </p:sp>
+      <p:sp>
+        <p:nvSpPr>
+          <p:cNvPr id="11" name="Shape 9"/>
+          <p:cNvSpPr/>
+          <p:nvPr/>
+        </p:nvSpPr>
+        <p:spPr>
+          <a:xfrm rot="120000">
+            <a:off x="7558851" y="256032"/>
+            <a:ext cx="3047924" cy="201168"/>
+          </a:xfrm>
+          <a:prstGeom prst="roundRect">
+            <a:avLst>
+              <a:gd name="adj" fmla="val 31818"/>
+            </a:avLst>
+          </a:prstGeom>
+          <a:solidFill>
+            <a:srgbClr val="7DD3FC">
+              <a:alpha val="64000"/>
+            </a:srgbClr>
+          </a:solidFill>
+          <a:ln w="12700">
+            <a:solidFill>
+              <a:srgbClr val="FFFFFF">
+                <a:alpha val="18000"/>
+              </a:srgbClr>
+            </a:solidFill>
+            <a:prstDash val="solid"/>
+          </a:ln>
+        </p:spPr>
+      </p:sp>
+      <p:sp>
+        <p:nvSpPr>
+          <p:cNvPr id="12" name="Shape 10"/>
           <p:cNvSpPr/>
           <p:nvPr/>
         </p:nvSpPr>
@@ -17214,7 +19034,7 @@
       </p:sp>
       <p:sp>
         <p:nvSpPr>
-          <p:cNvPr id="9" name="Shape 7"/>
+          <p:cNvPr id="13" name="Shape 11"/>
           <p:cNvSpPr/>
           <p:nvPr/>
         </p:nvSpPr>
@@ -17243,7 +19063,7 @@
       </p:sp>
       <p:sp>
         <p:nvSpPr>
-          <p:cNvPr id="10" name="Shape 8"/>
+          <p:cNvPr id="14" name="Shape 12"/>
           <p:cNvSpPr/>
           <p:nvPr/>
         </p:nvSpPr>
@@ -17270,7 +19090,7 @@
       </p:sp>
       <p:sp>
         <p:nvSpPr>
-          <p:cNvPr id="11" name="Shape 9"/>
+          <p:cNvPr id="15" name="Shape 13"/>
           <p:cNvSpPr/>
           <p:nvPr/>
         </p:nvSpPr>
@@ -17297,7 +19117,7 @@
       </p:sp>
       <p:sp>
         <p:nvSpPr>
-          <p:cNvPr id="12" name="Shape 10"/>
+          <p:cNvPr id="16" name="Shape 14"/>
           <p:cNvSpPr/>
           <p:nvPr/>
         </p:nvSpPr>
@@ -17324,7 +19144,7 @@
       </p:sp>
       <p:pic>
         <p:nvPicPr>
-          <p:cNvPr id="13" name="Image 0" descr="preencoded.png">    </p:cNvPr>
+          <p:cNvPr id="17" name="Image 0" descr="preencoded.png">    </p:cNvPr>
           <p:cNvPicPr>
             <a:picLocks noChangeAspect="1"/>
           </p:cNvPicPr>
@@ -17354,7 +19174,7 @@
       </p:pic>
       <p:sp>
         <p:nvSpPr>
-          <p:cNvPr id="14" name="Shape 11"/>
+          <p:cNvPr id="18" name="Shape 15"/>
           <p:cNvSpPr/>
           <p:nvPr/>
         </p:nvSpPr>
@@ -17395,7 +19215,7 @@
       </p:sp>
       <p:pic>
         <p:nvPicPr>
-          <p:cNvPr id="15" name="Image 1" descr="preencoded.png">    </p:cNvPr>
+          <p:cNvPr id="19" name="Image 1" descr="preencoded.png">    </p:cNvPr>
           <p:cNvPicPr>
             <a:picLocks noChangeAspect="1"/>
           </p:cNvPicPr>
@@ -17425,7 +19245,7 @@
       </p:pic>
       <p:sp>
         <p:nvSpPr>
-          <p:cNvPr id="16" name="Shape 12"/>
+          <p:cNvPr id="20" name="Shape 16"/>
           <p:cNvSpPr/>
           <p:nvPr/>
         </p:nvSpPr>
@@ -17466,7 +19286,7 @@
       </p:sp>
       <p:pic>
         <p:nvPicPr>
-          <p:cNvPr id="17" name="Image 2" descr="preencoded.png">    </p:cNvPr>
+          <p:cNvPr id="21" name="Image 2" descr="preencoded.png">    </p:cNvPr>
           <p:cNvPicPr>
             <a:picLocks noChangeAspect="1"/>
           </p:cNvPicPr>
@@ -17496,7 +19316,7 @@
       </p:pic>
       <p:sp>
         <p:nvSpPr>
-          <p:cNvPr id="18" name="Shape 13"/>
+          <p:cNvPr id="22" name="Shape 17"/>
           <p:cNvSpPr/>
           <p:nvPr/>
         </p:nvSpPr>
@@ -17537,7 +19357,7 @@
       </p:sp>
       <p:pic>
         <p:nvPicPr>
-          <p:cNvPr id="19" name="Image 3" descr="preencoded.png">    </p:cNvPr>
+          <p:cNvPr id="23" name="Image 3" descr="preencoded.png">    </p:cNvPr>
           <p:cNvPicPr>
             <a:picLocks noChangeAspect="1"/>
           </p:cNvPicPr>
@@ -17567,7 +19387,7 @@
       </p:pic>
       <p:sp>
         <p:nvSpPr>
-          <p:cNvPr id="20" name="Shape 14"/>
+          <p:cNvPr id="24" name="Shape 18"/>
           <p:cNvSpPr/>
           <p:nvPr/>
         </p:nvSpPr>
@@ -17608,7 +19428,7 @@
       </p:sp>
       <p:sp>
         <p:nvSpPr>
-          <p:cNvPr id="21" name="Shape 15"/>
+          <p:cNvPr id="25" name="Shape 19"/>
           <p:cNvSpPr/>
           <p:nvPr/>
         </p:nvSpPr>
@@ -17635,7 +19455,7 @@
       </p:sp>
       <p:sp>
         <p:nvSpPr>
-          <p:cNvPr id="22" name="Shape 16"/>
+          <p:cNvPr id="26" name="Shape 20"/>
           <p:cNvSpPr/>
           <p:nvPr/>
         </p:nvSpPr>
@@ -17662,7 +19482,7 @@
       </p:sp>
       <p:sp>
         <p:nvSpPr>
-          <p:cNvPr id="23" name="Shape 17"/>
+          <p:cNvPr id="27" name="Shape 21"/>
           <p:cNvSpPr/>
           <p:nvPr/>
         </p:nvSpPr>
@@ -17689,7 +19509,7 @@
       </p:sp>
       <p:sp>
         <p:nvSpPr>
-          <p:cNvPr id="24" name="Shape 18"/>
+          <p:cNvPr id="28" name="Shape 22"/>
           <p:cNvSpPr/>
           <p:nvPr/>
         </p:nvSpPr>
@@ -17716,7 +19536,7 @@
       </p:sp>
       <p:sp>
         <p:nvSpPr>
-          <p:cNvPr id="25" name="mdpr:icon-and-text-aside-8429fc:title:__title:icon-and-text-aside-8429fc"/>
+          <p:cNvPr id="29" name="mdpr:icon-and-text-aside-8429fc:title:__title:icon-and-text-aside-8429fc"/>
           <p:cNvSpPr txBox="1"/>
           <p:nvPr/>
         </p:nvSpPr>
@@ -17758,7 +19578,7 @@
       </p:sp>
       <p:sp>
         <p:nvSpPr>
-          <p:cNvPr id="26" name="Shape 20"/>
+          <p:cNvPr id="30" name="Shape 24"/>
           <p:cNvSpPr/>
           <p:nvPr/>
         </p:nvSpPr>
@@ -17785,7 +19605,7 @@
       </p:sp>
       <p:pic>
         <p:nvPicPr>
-          <p:cNvPr id="27" name="Image 4" descr="article icon from tabler-icons (MIT)">    </p:cNvPr>
+          <p:cNvPr id="31" name="Image 4" descr="article icon from tabler-icons (MIT)">    </p:cNvPr>
           <p:cNvPicPr>
             <a:picLocks noChangeAspect="1"/>
           </p:cNvPicPr>
@@ -17815,7 +19635,7 @@
       </p:pic>
       <p:sp>
         <p:nvSpPr>
-          <p:cNvPr id="28" name="mdpr:icon-and-text-aside-8429fc:item-1:block-29"/>
+          <p:cNvPr id="32" name="mdpr:icon-and-text-aside-8429fc:item-1:block-29"/>
           <p:cNvSpPr txBox="1"/>
           <p:nvPr/>
         </p:nvSpPr>
@@ -17874,7 +19694,7 @@
       </p:sp>
       <p:sp>
         <p:nvSpPr>
-          <p:cNvPr id="29" name="Shape 22"/>
+          <p:cNvPr id="33" name="Shape 26"/>
           <p:cNvSpPr/>
           <p:nvPr/>
         </p:nvSpPr>
@@ -17901,7 +19721,7 @@
       </p:sp>
       <p:pic>
         <p:nvPicPr>
-          <p:cNvPr id="30" name="Image 5" descr="article icon from tabler-icons (MIT)">    </p:cNvPr>
+          <p:cNvPr id="34" name="Image 5" descr="article icon from tabler-icons (MIT)">    </p:cNvPr>
           <p:cNvPicPr>
             <a:picLocks noChangeAspect="1"/>
           </p:cNvPicPr>
@@ -17931,7 +19751,7 @@
       </p:pic>
       <p:sp>
         <p:nvSpPr>
-          <p:cNvPr id="31" name="mdpr:icon-and-text-aside-8429fc:item-2:block-29"/>
+          <p:cNvPr id="35" name="mdpr:icon-and-text-aside-8429fc:item-2:block-29"/>
           <p:cNvSpPr txBox="1"/>
           <p:nvPr/>
         </p:nvSpPr>
@@ -17990,7 +19810,7 @@
       </p:sp>
       <p:sp>
         <p:nvSpPr>
-          <p:cNvPr id="32" name="Shape 24"/>
+          <p:cNvPr id="36" name="Shape 28"/>
           <p:cNvSpPr/>
           <p:nvPr/>
         </p:nvSpPr>
@@ -18017,7 +19837,7 @@
       </p:sp>
       <p:pic>
         <p:nvPicPr>
-          <p:cNvPr id="33" name="Image 6" descr="article icon from tabler-icons (MIT)">    </p:cNvPr>
+          <p:cNvPr id="37" name="Image 6" descr="article icon from tabler-icons (MIT)">    </p:cNvPr>
           <p:cNvPicPr>
             <a:picLocks noChangeAspect="1"/>
           </p:cNvPicPr>
@@ -18047,7 +19867,7 @@
       </p:pic>
       <p:sp>
         <p:nvSpPr>
-          <p:cNvPr id="34" name="mdpr:icon-and-text-aside-8429fc:item-3:block-29"/>
+          <p:cNvPr id="38" name="mdpr:icon-and-text-aside-8429fc:item-3:block-29"/>
           <p:cNvSpPr txBox="1"/>
           <p:nvPr/>
         </p:nvSpPr>
@@ -18106,7 +19926,7 @@
       </p:sp>
       <p:sp>
         <p:nvSpPr>
-          <p:cNvPr id="35" name="Shape 26"/>
+          <p:cNvPr id="39" name="Shape 30"/>
           <p:cNvSpPr/>
           <p:nvPr/>
         </p:nvSpPr>
@@ -18133,7 +19953,7 @@
       </p:sp>
       <p:pic>
         <p:nvPicPr>
-          <p:cNvPr id="36" name="Image 7" descr="table icon from tabler-icons (MIT)">    </p:cNvPr>
+          <p:cNvPr id="40" name="Image 7" descr="table icon from tabler-icons (MIT)">    </p:cNvPr>
           <p:cNvPicPr>
             <a:picLocks noChangeAspect="1"/>
           </p:cNvPicPr>
@@ -18163,7 +19983,7 @@
       </p:pic>
       <p:sp>
         <p:nvSpPr>
-          <p:cNvPr id="37" name="mdpr:icon-and-text-aside-8429fc:item-4:block-29"/>
+          <p:cNvPr id="41" name="mdpr:icon-and-text-aside-8429fc:item-4:block-29"/>
           <p:cNvSpPr txBox="1"/>
           <p:nvPr/>
         </p:nvSpPr>
@@ -18260,6 +20080,49 @@
         </p:nvSpPr>
         <p:spPr>
           <a:xfrm>
+            <a:off x="310896" y="256032"/>
+            <a:ext cx="10893247" cy="5779008"/>
+          </a:xfrm>
+          <a:prstGeom prst="roundRect">
+            <a:avLst>
+              <a:gd name="adj" fmla="val 1899"/>
+            </a:avLst>
+          </a:prstGeom>
+          <a:solidFill>
+            <a:srgbClr val="7DD3FC">
+              <a:alpha val="26000"/>
+            </a:srgbClr>
+          </a:solidFill>
+          <a:ln w="12700">
+            <a:solidFill>
+              <a:srgbClr val="FFFFFF">
+                <a:alpha val="14000"/>
+              </a:srgbClr>
+            </a:solidFill>
+            <a:prstDash val="solid"/>
+          </a:ln>
+          <a:effectLst>
+            <a:outerShdw sx="100000" sy="100000" kx="0" ky="0" algn="bl" rotWithShape="0" blurRad="12700" dist="50800" dir="2700000">
+              <a:srgbClr val="7DD3FC">
+                <a:alpha val="10000"/>
+              </a:srgbClr>
+            </a:outerShdw>
+            <a:glow rad="63500">
+              <a:srgbClr val="7DD3FC">
+                <a:alpha val="23000"/>
+              </a:srgbClr>
+            </a:glow>
+          </a:effectLst>
+        </p:spPr>
+      </p:sp>
+      <p:sp>
+        <p:nvSpPr>
+          <p:cNvPr id="3" name="Shape 1"/>
+          <p:cNvSpPr/>
+          <p:nvPr/>
+        </p:nvSpPr>
+        <p:spPr>
+          <a:xfrm>
             <a:off x="566928" y="475488"/>
             <a:ext cx="11057839" cy="5907024"/>
           </a:xfrm>
@@ -18297,7 +20160,7 @@
       </p:sp>
       <p:sp>
         <p:nvSpPr>
-          <p:cNvPr id="3" name="Shape 1"/>
+          <p:cNvPr id="4" name="Shape 2"/>
           <p:cNvSpPr/>
           <p:nvPr/>
         </p:nvSpPr>
@@ -18326,7 +20189,7 @@
       </p:sp>
       <p:sp>
         <p:nvSpPr>
-          <p:cNvPr id="4" name="Shape 2"/>
+          <p:cNvPr id="5" name="Shape 3"/>
           <p:cNvSpPr/>
           <p:nvPr/>
         </p:nvSpPr>
@@ -18355,7 +20218,7 @@
       </p:sp>
       <p:sp>
         <p:nvSpPr>
-          <p:cNvPr id="5" name="Shape 3"/>
+          <p:cNvPr id="6" name="Shape 4"/>
           <p:cNvSpPr/>
           <p:nvPr/>
         </p:nvSpPr>
@@ -18384,7 +20247,7 @@
       </p:sp>
       <p:sp>
         <p:nvSpPr>
-          <p:cNvPr id="6" name="Shape 4"/>
+          <p:cNvPr id="7" name="Shape 5"/>
           <p:cNvSpPr/>
           <p:nvPr/>
         </p:nvSpPr>
@@ -18409,7 +20272,7 @@
       </p:sp>
       <p:sp>
         <p:nvSpPr>
-          <p:cNvPr id="7" name="Shape 5"/>
+          <p:cNvPr id="8" name="Shape 6"/>
           <p:cNvSpPr/>
           <p:nvPr/>
         </p:nvSpPr>
@@ -18434,7 +20297,94 @@
       </p:sp>
       <p:sp>
         <p:nvSpPr>
-          <p:cNvPr id="8" name="Shape 6"/>
+          <p:cNvPr id="9" name="Shape 7"/>
+          <p:cNvSpPr/>
+          <p:nvPr/>
+        </p:nvSpPr>
+        <p:spPr>
+          <a:xfrm>
+            <a:off x="9631375" y="603504"/>
+            <a:ext cx="1353312" cy="0"/>
+          </a:xfrm>
+          <a:prstGeom prst="line">
+            <a:avLst/>
+          </a:prstGeom>
+          <a:noFill/>
+          <a:ln w="12700">
+            <a:solidFill>
+              <a:srgbClr val="FFFFFF">
+                <a:alpha val="54000"/>
+              </a:srgbClr>
+            </a:solidFill>
+            <a:prstDash val="solid"/>
+          </a:ln>
+        </p:spPr>
+      </p:sp>
+      <p:sp>
+        <p:nvSpPr>
+          <p:cNvPr id="10" name="Shape 8"/>
+          <p:cNvSpPr/>
+          <p:nvPr/>
+        </p:nvSpPr>
+        <p:spPr>
+          <a:xfrm rot="-180000">
+            <a:off x="530352" y="438912"/>
+            <a:ext cx="6583515" cy="146304"/>
+          </a:xfrm>
+          <a:prstGeom prst="roundRect">
+            <a:avLst>
+              <a:gd name="adj" fmla="val 37500"/>
+            </a:avLst>
+          </a:prstGeom>
+          <a:solidFill>
+            <a:srgbClr val="FFFFFF">
+              <a:alpha val="22000"/>
+            </a:srgbClr>
+          </a:solidFill>
+          <a:ln w="12700">
+            <a:solidFill>
+              <a:srgbClr val="FFFFFF">
+                <a:alpha val="0"/>
+              </a:srgbClr>
+            </a:solidFill>
+            <a:prstDash val="solid"/>
+          </a:ln>
+        </p:spPr>
+      </p:sp>
+      <p:sp>
+        <p:nvSpPr>
+          <p:cNvPr id="11" name="Shape 9"/>
+          <p:cNvSpPr/>
+          <p:nvPr/>
+        </p:nvSpPr>
+        <p:spPr>
+          <a:xfrm rot="120000">
+            <a:off x="7558851" y="256032"/>
+            <a:ext cx="3047924" cy="201168"/>
+          </a:xfrm>
+          <a:prstGeom prst="roundRect">
+            <a:avLst>
+              <a:gd name="adj" fmla="val 31818"/>
+            </a:avLst>
+          </a:prstGeom>
+          <a:solidFill>
+            <a:srgbClr val="7DD3FC">
+              <a:alpha val="64000"/>
+            </a:srgbClr>
+          </a:solidFill>
+          <a:ln w="12700">
+            <a:solidFill>
+              <a:srgbClr val="FFFFFF">
+                <a:alpha val="18000"/>
+              </a:srgbClr>
+            </a:solidFill>
+            <a:prstDash val="solid"/>
+          </a:ln>
+        </p:spPr>
+      </p:sp>
+      <p:sp>
+        <p:nvSpPr>
+          <p:cNvPr id="12" name="Shape 10"/>
           <p:cNvSpPr/>
           <p:nvPr/>
         </p:nvSpPr>
@@ -18475,7 +20425,7 @@
       </p:sp>
       <p:sp>
         <p:nvSpPr>
-          <p:cNvPr id="9" name="Shape 7"/>
+          <p:cNvPr id="13" name="Shape 11"/>
           <p:cNvSpPr/>
           <p:nvPr/>
         </p:nvSpPr>
@@ -18504,7 +20454,7 @@
       </p:sp>
       <p:sp>
         <p:nvSpPr>
-          <p:cNvPr id="10" name="Shape 8"/>
+          <p:cNvPr id="14" name="Shape 12"/>
           <p:cNvSpPr/>
           <p:nvPr/>
         </p:nvSpPr>
@@ -18531,7 +20481,7 @@
       </p:sp>
       <p:sp>
         <p:nvSpPr>
-          <p:cNvPr id="11" name="Shape 9"/>
+          <p:cNvPr id="15" name="Shape 13"/>
           <p:cNvSpPr/>
           <p:nvPr/>
         </p:nvSpPr>
@@ -18558,7 +20508,7 @@
       </p:sp>
       <p:sp>
         <p:nvSpPr>
-          <p:cNvPr id="12" name="Shape 10"/>
+          <p:cNvPr id="16" name="Shape 14"/>
           <p:cNvSpPr/>
           <p:nvPr/>
         </p:nvSpPr>
@@ -18585,7 +20535,7 @@
       </p:sp>
       <p:pic>
         <p:nvPicPr>
-          <p:cNvPr id="13" name="Image 0" descr="preencoded.png">    </p:cNvPr>
+          <p:cNvPr id="17" name="Image 0" descr="preencoded.png">    </p:cNvPr>
           <p:cNvPicPr>
             <a:picLocks noChangeAspect="1"/>
           </p:cNvPicPr>
@@ -18615,7 +20565,7 @@
       </p:pic>
       <p:sp>
         <p:nvSpPr>
-          <p:cNvPr id="14" name="Shape 11"/>
+          <p:cNvPr id="18" name="Shape 15"/>
           <p:cNvSpPr/>
           <p:nvPr/>
         </p:nvSpPr>
@@ -18656,7 +20606,7 @@
       </p:sp>
       <p:pic>
         <p:nvPicPr>
-          <p:cNvPr id="15" name="Image 1" descr="preencoded.png">    </p:cNvPr>
+          <p:cNvPr id="19" name="Image 1" descr="preencoded.png">    </p:cNvPr>
           <p:cNvPicPr>
             <a:picLocks noChangeAspect="1"/>
           </p:cNvPicPr>
@@ -18686,7 +20636,7 @@
       </p:pic>
       <p:sp>
         <p:nvSpPr>
-          <p:cNvPr id="16" name="Shape 12"/>
+          <p:cNvPr id="20" name="Shape 16"/>
           <p:cNvSpPr/>
           <p:nvPr/>
         </p:nvSpPr>
@@ -18727,7 +20677,7 @@
       </p:sp>
       <p:pic>
         <p:nvPicPr>
-          <p:cNvPr id="17" name="Image 2" descr="preencoded.png">    </p:cNvPr>
+          <p:cNvPr id="21" name="Image 2" descr="preencoded.png">    </p:cNvPr>
           <p:cNvPicPr>
             <a:picLocks noChangeAspect="1"/>
           </p:cNvPicPr>
@@ -18757,7 +20707,7 @@
       </p:pic>
       <p:sp>
         <p:nvSpPr>
-          <p:cNvPr id="18" name="Shape 13"/>
+          <p:cNvPr id="22" name="Shape 17"/>
           <p:cNvSpPr/>
           <p:nvPr/>
         </p:nvSpPr>
@@ -18798,7 +20748,7 @@
       </p:sp>
       <p:pic>
         <p:nvPicPr>
-          <p:cNvPr id="19" name="Image 3" descr="preencoded.png">    </p:cNvPr>
+          <p:cNvPr id="23" name="Image 3" descr="preencoded.png">    </p:cNvPr>
           <p:cNvPicPr>
             <a:picLocks noChangeAspect="1"/>
           </p:cNvPicPr>
@@ -18828,7 +20778,7 @@
       </p:pic>
       <p:sp>
         <p:nvSpPr>
-          <p:cNvPr id="20" name="Shape 14"/>
+          <p:cNvPr id="24" name="Shape 18"/>
           <p:cNvSpPr/>
           <p:nvPr/>
         </p:nvSpPr>
@@ -18869,7 +20819,7 @@
       </p:sp>
       <p:sp>
         <p:nvSpPr>
-          <p:cNvPr id="21" name="Shape 15"/>
+          <p:cNvPr id="25" name="Shape 19"/>
           <p:cNvSpPr/>
           <p:nvPr/>
         </p:nvSpPr>
@@ -18896,7 +20846,7 @@
       </p:sp>
       <p:sp>
         <p:nvSpPr>
-          <p:cNvPr id="22" name="Shape 16"/>
+          <p:cNvPr id="26" name="Shape 20"/>
           <p:cNvSpPr/>
           <p:nvPr/>
         </p:nvSpPr>
@@ -18923,7 +20873,7 @@
       </p:sp>
       <p:sp>
         <p:nvSpPr>
-          <p:cNvPr id="23" name="Shape 17"/>
+          <p:cNvPr id="27" name="Shape 21"/>
           <p:cNvSpPr/>
           <p:nvPr/>
         </p:nvSpPr>
@@ -18950,7 +20900,7 @@
       </p:sp>
       <p:sp>
         <p:nvSpPr>
-          <p:cNvPr id="24" name="Shape 18"/>
+          <p:cNvPr id="28" name="Shape 22"/>
           <p:cNvSpPr/>
           <p:nvPr/>
         </p:nvSpPr>
@@ -18977,7 +20927,7 @@
       </p:sp>
       <p:sp>
         <p:nvSpPr>
-          <p:cNvPr id="25" name="mdpr:overflow-guard-f8d03e:title:__title:overflow-guard-f8d03e"/>
+          <p:cNvPr id="29" name="mdpr:overflow-guard-f8d03e:title:__title:overflow-guard-f8d03e"/>
           <p:cNvSpPr txBox="1"/>
           <p:nvPr/>
         </p:nvSpPr>
@@ -19019,7 +20969,7 @@
       </p:sp>
       <p:sp>
         <p:nvSpPr>
-          <p:cNvPr id="26" name="Shape 20"/>
+          <p:cNvPr id="30" name="Shape 24"/>
           <p:cNvSpPr/>
           <p:nvPr/>
         </p:nvSpPr>
@@ -19046,7 +20996,7 @@
       </p:sp>
       <p:pic>
         <p:nvPicPr>
-          <p:cNvPr id="27" name="Image 4" descr="verified icon from tabler-icons (MIT)">    </p:cNvPr>
+          <p:cNvPr id="31" name="Image 4" descr="verified icon from tabler-icons (MIT)">    </p:cNvPr>
           <p:cNvPicPr>
             <a:picLocks noChangeAspect="1"/>
           </p:cNvPicPr>
@@ -19076,7 +21026,7 @@
       </p:pic>
       <p:sp>
         <p:nvSpPr>
-          <p:cNvPr id="28" name="mdpr:overflow-guard-f8d03e:item-1:block-31"/>
+          <p:cNvPr id="32" name="mdpr:overflow-guard-f8d03e:item-1:block-31"/>
           <p:cNvSpPr txBox="1"/>
           <p:nvPr/>
         </p:nvSpPr>
@@ -19135,7 +21085,7 @@
       </p:sp>
       <p:sp>
         <p:nvSpPr>
-          <p:cNvPr id="29" name="Shape 22"/>
+          <p:cNvPr id="33" name="Shape 26"/>
           <p:cNvSpPr/>
           <p:nvPr/>
         </p:nvSpPr>
@@ -19162,7 +21112,7 @@
       </p:sp>
       <p:pic>
         <p:nvPicPr>
-          <p:cNvPr id="30" name="Image 5" descr="table icon from tabler-icons (MIT)">    </p:cNvPr>
+          <p:cNvPr id="34" name="Image 5" descr="table icon from tabler-icons (MIT)">    </p:cNvPr>
           <p:cNvPicPr>
             <a:picLocks noChangeAspect="1"/>
           </p:cNvPicPr>
@@ -19192,7 +21142,7 @@
       </p:pic>
       <p:sp>
         <p:nvSpPr>
-          <p:cNvPr id="31" name="mdpr:overflow-guard-f8d03e:item-2:block-31"/>
+          <p:cNvPr id="35" name="mdpr:overflow-guard-f8d03e:item-2:block-31"/>
           <p:cNvSpPr txBox="1"/>
           <p:nvPr/>
         </p:nvSpPr>
@@ -19251,7 +21201,7 @@
       </p:sp>
       <p:sp>
         <p:nvSpPr>
-          <p:cNvPr id="32" name="Shape 24"/>
+          <p:cNvPr id="36" name="Shape 28"/>
           <p:cNvSpPr/>
           <p:nvPr/>
         </p:nvSpPr>
@@ -19278,7 +21228,7 @@
       </p:sp>
       <p:pic>
         <p:nvPicPr>
-          <p:cNvPr id="33" name="Image 6" descr="article icon from tabler-icons (MIT)">    </p:cNvPr>
+          <p:cNvPr id="37" name="Image 6" descr="article icon from tabler-icons (MIT)">    </p:cNvPr>
           <p:cNvPicPr>
             <a:picLocks noChangeAspect="1"/>
           </p:cNvPicPr>
@@ -19308,7 +21258,7 @@
       </p:pic>
       <p:sp>
         <p:nvSpPr>
-          <p:cNvPr id="34" name="mdpr:overflow-guard-f8d03e:item-3:block-31"/>
+          <p:cNvPr id="38" name="mdpr:overflow-guard-f8d03e:item-3:block-31"/>
           <p:cNvSpPr txBox="1"/>
           <p:nvPr/>
         </p:nvSpPr>
@@ -19367,7 +21317,7 @@
       </p:sp>
       <p:sp>
         <p:nvSpPr>
-          <p:cNvPr id="35" name="Shape 26"/>
+          <p:cNvPr id="39" name="Shape 30"/>
           <p:cNvSpPr/>
           <p:nvPr/>
         </p:nvSpPr>
@@ -19394,7 +21344,7 @@
       </p:sp>
       <p:pic>
         <p:nvPicPr>
-          <p:cNvPr id="36" name="Image 7" descr="article icon from tabler-icons (MIT)">    </p:cNvPr>
+          <p:cNvPr id="40" name="Image 7" descr="article icon from tabler-icons (MIT)">    </p:cNvPr>
           <p:cNvPicPr>
             <a:picLocks noChangeAspect="1"/>
           </p:cNvPicPr>
@@ -19424,7 +21374,7 @@
       </p:pic>
       <p:sp>
         <p:nvSpPr>
-          <p:cNvPr id="37" name="mdpr:overflow-guard-f8d03e:item-4:block-31"/>
+          <p:cNvPr id="41" name="mdpr:overflow-guard-f8d03e:item-4:block-31"/>
           <p:cNvSpPr txBox="1"/>
           <p:nvPr/>
         </p:nvSpPr>
@@ -19521,6 +21471,49 @@
         </p:nvSpPr>
         <p:spPr>
           <a:xfrm>
+            <a:off x="310896" y="256032"/>
+            <a:ext cx="10893247" cy="5779008"/>
+          </a:xfrm>
+          <a:prstGeom prst="roundRect">
+            <a:avLst>
+              <a:gd name="adj" fmla="val 1899"/>
+            </a:avLst>
+          </a:prstGeom>
+          <a:solidFill>
+            <a:srgbClr val="7DD3FC">
+              <a:alpha val="26000"/>
+            </a:srgbClr>
+          </a:solidFill>
+          <a:ln w="12700">
+            <a:solidFill>
+              <a:srgbClr val="FFFFFF">
+                <a:alpha val="14000"/>
+              </a:srgbClr>
+            </a:solidFill>
+            <a:prstDash val="solid"/>
+          </a:ln>
+          <a:effectLst>
+            <a:outerShdw sx="100000" sy="100000" kx="0" ky="0" algn="bl" rotWithShape="0" blurRad="12700" dist="50800" dir="2700000">
+              <a:srgbClr val="7DD3FC">
+                <a:alpha val="10000"/>
+              </a:srgbClr>
+            </a:outerShdw>
+            <a:glow rad="63500">
+              <a:srgbClr val="7DD3FC">
+                <a:alpha val="23000"/>
+              </a:srgbClr>
+            </a:glow>
+          </a:effectLst>
+        </p:spPr>
+      </p:sp>
+      <p:sp>
+        <p:nvSpPr>
+          <p:cNvPr id="3" name="Shape 1"/>
+          <p:cNvSpPr/>
+          <p:nvPr/>
+        </p:nvSpPr>
+        <p:spPr>
+          <a:xfrm>
             <a:off x="566928" y="475488"/>
             <a:ext cx="11057839" cy="5907024"/>
           </a:xfrm>
@@ -19558,7 +21551,7 @@
       </p:sp>
       <p:sp>
         <p:nvSpPr>
-          <p:cNvPr id="3" name="Shape 1"/>
+          <p:cNvPr id="4" name="Shape 2"/>
           <p:cNvSpPr/>
           <p:nvPr/>
         </p:nvSpPr>
@@ -19587,7 +21580,7 @@
       </p:sp>
       <p:sp>
         <p:nvSpPr>
-          <p:cNvPr id="4" name="Shape 2"/>
+          <p:cNvPr id="5" name="Shape 3"/>
           <p:cNvSpPr/>
           <p:nvPr/>
         </p:nvSpPr>
@@ -19616,7 +21609,7 @@
       </p:sp>
       <p:sp>
         <p:nvSpPr>
-          <p:cNvPr id="5" name="Shape 3"/>
+          <p:cNvPr id="6" name="Shape 4"/>
           <p:cNvSpPr/>
           <p:nvPr/>
         </p:nvSpPr>
@@ -19645,7 +21638,7 @@
       </p:sp>
       <p:sp>
         <p:nvSpPr>
-          <p:cNvPr id="6" name="Shape 4"/>
+          <p:cNvPr id="7" name="Shape 5"/>
           <p:cNvSpPr/>
           <p:nvPr/>
         </p:nvSpPr>
@@ -19670,7 +21663,7 @@
       </p:sp>
       <p:sp>
         <p:nvSpPr>
-          <p:cNvPr id="7" name="Shape 5"/>
+          <p:cNvPr id="8" name="Shape 6"/>
           <p:cNvSpPr/>
           <p:nvPr/>
         </p:nvSpPr>
@@ -19695,7 +21688,94 @@
       </p:sp>
       <p:sp>
         <p:nvSpPr>
-          <p:cNvPr id="8" name="Shape 6"/>
+          <p:cNvPr id="9" name="Shape 7"/>
+          <p:cNvSpPr/>
+          <p:nvPr/>
+        </p:nvSpPr>
+        <p:spPr>
+          <a:xfrm>
+            <a:off x="9631375" y="603504"/>
+            <a:ext cx="1353312" cy="0"/>
+          </a:xfrm>
+          <a:prstGeom prst="line">
+            <a:avLst/>
+          </a:prstGeom>
+          <a:noFill/>
+          <a:ln w="12700">
+            <a:solidFill>
+              <a:srgbClr val="FFFFFF">
+                <a:alpha val="54000"/>
+              </a:srgbClr>
+            </a:solidFill>
+            <a:prstDash val="solid"/>
+          </a:ln>
+        </p:spPr>
+      </p:sp>
+      <p:sp>
+        <p:nvSpPr>
+          <p:cNvPr id="10" name="Shape 8"/>
+          <p:cNvSpPr/>
+          <p:nvPr/>
+        </p:nvSpPr>
+        <p:spPr>
+          <a:xfrm rot="-180000">
+            <a:off x="530352" y="438912"/>
+            <a:ext cx="6583515" cy="146304"/>
+          </a:xfrm>
+          <a:prstGeom prst="roundRect">
+            <a:avLst>
+              <a:gd name="adj" fmla="val 37500"/>
+            </a:avLst>
+          </a:prstGeom>
+          <a:solidFill>
+            <a:srgbClr val="FFFFFF">
+              <a:alpha val="22000"/>
+            </a:srgbClr>
+          </a:solidFill>
+          <a:ln w="12700">
+            <a:solidFill>
+              <a:srgbClr val="FFFFFF">
+                <a:alpha val="0"/>
+              </a:srgbClr>
+            </a:solidFill>
+            <a:prstDash val="solid"/>
+          </a:ln>
+        </p:spPr>
+      </p:sp>
+      <p:sp>
+        <p:nvSpPr>
+          <p:cNvPr id="11" name="Shape 9"/>
+          <p:cNvSpPr/>
+          <p:nvPr/>
+        </p:nvSpPr>
+        <p:spPr>
+          <a:xfrm rot="120000">
+            <a:off x="7558851" y="256032"/>
+            <a:ext cx="3047924" cy="201168"/>
+          </a:xfrm>
+          <a:prstGeom prst="roundRect">
+            <a:avLst>
+              <a:gd name="adj" fmla="val 31818"/>
+            </a:avLst>
+          </a:prstGeom>
+          <a:solidFill>
+            <a:srgbClr val="7DD3FC">
+              <a:alpha val="64000"/>
+            </a:srgbClr>
+          </a:solidFill>
+          <a:ln w="12700">
+            <a:solidFill>
+              <a:srgbClr val="FFFFFF">
+                <a:alpha val="18000"/>
+              </a:srgbClr>
+            </a:solidFill>
+            <a:prstDash val="solid"/>
+          </a:ln>
+        </p:spPr>
+      </p:sp>
+      <p:sp>
+        <p:nvSpPr>
+          <p:cNvPr id="12" name="Shape 10"/>
           <p:cNvSpPr/>
           <p:nvPr/>
         </p:nvSpPr>
@@ -19736,7 +21816,7 @@
       </p:sp>
       <p:sp>
         <p:nvSpPr>
-          <p:cNvPr id="9" name="Shape 7"/>
+          <p:cNvPr id="13" name="Shape 11"/>
           <p:cNvSpPr/>
           <p:nvPr/>
         </p:nvSpPr>
@@ -19765,7 +21845,7 @@
       </p:sp>
       <p:sp>
         <p:nvSpPr>
-          <p:cNvPr id="10" name="Shape 8"/>
+          <p:cNvPr id="14" name="Shape 12"/>
           <p:cNvSpPr/>
           <p:nvPr/>
         </p:nvSpPr>
@@ -19792,7 +21872,7 @@
       </p:sp>
       <p:sp>
         <p:nvSpPr>
-          <p:cNvPr id="11" name="Shape 9"/>
+          <p:cNvPr id="15" name="Shape 13"/>
           <p:cNvSpPr/>
           <p:nvPr/>
         </p:nvSpPr>
@@ -19819,7 +21899,7 @@
       </p:sp>
       <p:sp>
         <p:nvSpPr>
-          <p:cNvPr id="12" name="Shape 10"/>
+          <p:cNvPr id="16" name="Shape 14"/>
           <p:cNvSpPr/>
           <p:nvPr/>
         </p:nvSpPr>
@@ -19846,7 +21926,7 @@
       </p:sp>
       <p:pic>
         <p:nvPicPr>
-          <p:cNvPr id="13" name="Image 0" descr="preencoded.png">    </p:cNvPr>
+          <p:cNvPr id="17" name="Image 0" descr="preencoded.png">    </p:cNvPr>
           <p:cNvPicPr>
             <a:picLocks noChangeAspect="1"/>
           </p:cNvPicPr>
@@ -19876,7 +21956,7 @@
       </p:pic>
       <p:sp>
         <p:nvSpPr>
-          <p:cNvPr id="14" name="Shape 11"/>
+          <p:cNvPr id="18" name="Shape 15"/>
           <p:cNvSpPr/>
           <p:nvPr/>
         </p:nvSpPr>
@@ -19917,7 +21997,7 @@
       </p:sp>
       <p:sp>
         <p:nvSpPr>
-          <p:cNvPr id="15" name="Shape 12"/>
+          <p:cNvPr id="19" name="Shape 16"/>
           <p:cNvSpPr/>
           <p:nvPr/>
         </p:nvSpPr>
@@ -19944,7 +22024,7 @@
       </p:sp>
       <p:sp>
         <p:nvSpPr>
-          <p:cNvPr id="16" name="mdpr:image-safe-frame-d4d6a4:title:__title:image-safe-frame-d4d6a4"/>
+          <p:cNvPr id="20" name="mdpr:image-safe-frame-d4d6a4:title:__title:image-safe-frame-d4d6a4"/>
           <p:cNvSpPr txBox="1"/>
           <p:nvPr/>
         </p:nvSpPr>
@@ -19986,7 +22066,7 @@
       </p:sp>
       <p:sp>
         <p:nvSpPr>
-          <p:cNvPr id="17" name="mdpr:image-safe-frame-d4d6a4:body:block-33-block-33-block-33"/>
+          <p:cNvPr id="21" name="mdpr:image-safe-frame-d4d6a4:body:block-33-block-33-block-33"/>
           <p:cNvSpPr txBox="1"/>
           <p:nvPr/>
         </p:nvSpPr>
@@ -20125,7 +22205,7 @@
       </p:sp>
       <p:pic>
         <p:nvPicPr>
-          <p:cNvPr id="18" name="mdpr:image-safe-frame-d4d6a4:image-1:block-34" descr="{&quot;mdpr&quot;:{&quot;slideId&quot;:&quot;image-safe-frame-d4d6a4&quot;,&quot;layoutSlideId&quot;:&quot;layout-image-safe-frame-d4d6a4&quot;,&quot;regionId&quot;:&quot;image-1&quot;,&quot;blockIds&quot;:[&quot;block-34&quot;],&quot;objectKind&quot;:&quot;native-image&quot;,&quot;role&quot;:&quot;image&quot;,&quot;editable&quot;:false}}">    </p:cNvPr>
+          <p:cNvPr id="22" name="mdpr:image-safe-frame-d4d6a4:image-1:block-34" descr="{&quot;mdpr&quot;:{&quot;slideId&quot;:&quot;image-safe-frame-d4d6a4&quot;,&quot;layoutSlideId&quot;:&quot;layout-image-safe-frame-d4d6a4&quot;,&quot;regionId&quot;:&quot;image-1&quot;,&quot;blockIds&quot;:[&quot;block-34&quot;],&quot;objectKind&quot;:&quot;native-image&quot;,&quot;role&quot;:&quot;image&quot;,&quot;editable&quot;:false}}">    </p:cNvPr>
           <p:cNvPicPr>
             <a:picLocks noChangeAspect="1"/>
           </p:cNvPicPr>
@@ -20193,6 +22273,49 @@
         </p:nvSpPr>
         <p:spPr>
           <a:xfrm>
+            <a:off x="310896" y="256032"/>
+            <a:ext cx="10893247" cy="5779008"/>
+          </a:xfrm>
+          <a:prstGeom prst="roundRect">
+            <a:avLst>
+              <a:gd name="adj" fmla="val 1899"/>
+            </a:avLst>
+          </a:prstGeom>
+          <a:solidFill>
+            <a:srgbClr val="7DD3FC">
+              <a:alpha val="26000"/>
+            </a:srgbClr>
+          </a:solidFill>
+          <a:ln w="12700">
+            <a:solidFill>
+              <a:srgbClr val="FFFFFF">
+                <a:alpha val="14000"/>
+              </a:srgbClr>
+            </a:solidFill>
+            <a:prstDash val="solid"/>
+          </a:ln>
+          <a:effectLst>
+            <a:outerShdw sx="100000" sy="100000" kx="0" ky="0" algn="bl" rotWithShape="0" blurRad="12700" dist="50800" dir="2700000">
+              <a:srgbClr val="7DD3FC">
+                <a:alpha val="10000"/>
+              </a:srgbClr>
+            </a:outerShdw>
+            <a:glow rad="63500">
+              <a:srgbClr val="7DD3FC">
+                <a:alpha val="23000"/>
+              </a:srgbClr>
+            </a:glow>
+          </a:effectLst>
+        </p:spPr>
+      </p:sp>
+      <p:sp>
+        <p:nvSpPr>
+          <p:cNvPr id="3" name="Shape 1"/>
+          <p:cNvSpPr/>
+          <p:nvPr/>
+        </p:nvSpPr>
+        <p:spPr>
+          <a:xfrm>
             <a:off x="566928" y="475488"/>
             <a:ext cx="11057839" cy="5907024"/>
           </a:xfrm>
@@ -20230,7 +22353,7 @@
       </p:sp>
       <p:sp>
         <p:nvSpPr>
-          <p:cNvPr id="3" name="Shape 1"/>
+          <p:cNvPr id="4" name="Shape 2"/>
           <p:cNvSpPr/>
           <p:nvPr/>
         </p:nvSpPr>
@@ -20259,7 +22382,7 @@
       </p:sp>
       <p:sp>
         <p:nvSpPr>
-          <p:cNvPr id="4" name="Shape 2"/>
+          <p:cNvPr id="5" name="Shape 3"/>
           <p:cNvSpPr/>
           <p:nvPr/>
         </p:nvSpPr>
@@ -20288,7 +22411,7 @@
       </p:sp>
       <p:sp>
         <p:nvSpPr>
-          <p:cNvPr id="5" name="Shape 3"/>
+          <p:cNvPr id="6" name="Shape 4"/>
           <p:cNvSpPr/>
           <p:nvPr/>
         </p:nvSpPr>
@@ -20317,7 +22440,7 @@
       </p:sp>
       <p:sp>
         <p:nvSpPr>
-          <p:cNvPr id="6" name="Shape 4"/>
+          <p:cNvPr id="7" name="Shape 5"/>
           <p:cNvSpPr/>
           <p:nvPr/>
         </p:nvSpPr>
@@ -20342,7 +22465,7 @@
       </p:sp>
       <p:sp>
         <p:nvSpPr>
-          <p:cNvPr id="7" name="Shape 5"/>
+          <p:cNvPr id="8" name="Shape 6"/>
           <p:cNvSpPr/>
           <p:nvPr/>
         </p:nvSpPr>
@@ -20367,7 +22490,94 @@
       </p:sp>
       <p:sp>
         <p:nvSpPr>
-          <p:cNvPr id="8" name="Shape 6"/>
+          <p:cNvPr id="9" name="Shape 7"/>
+          <p:cNvSpPr/>
+          <p:nvPr/>
+        </p:nvSpPr>
+        <p:spPr>
+          <a:xfrm>
+            <a:off x="9631375" y="603504"/>
+            <a:ext cx="1353312" cy="0"/>
+          </a:xfrm>
+          <a:prstGeom prst="line">
+            <a:avLst/>
+          </a:prstGeom>
+          <a:noFill/>
+          <a:ln w="12700">
+            <a:solidFill>
+              <a:srgbClr val="FFFFFF">
+                <a:alpha val="54000"/>
+              </a:srgbClr>
+            </a:solidFill>
+            <a:prstDash val="solid"/>
+          </a:ln>
+        </p:spPr>
+      </p:sp>
+      <p:sp>
+        <p:nvSpPr>
+          <p:cNvPr id="10" name="Shape 8"/>
+          <p:cNvSpPr/>
+          <p:nvPr/>
+        </p:nvSpPr>
+        <p:spPr>
+          <a:xfrm rot="-180000">
+            <a:off x="530352" y="438912"/>
+            <a:ext cx="6583515" cy="146304"/>
+          </a:xfrm>
+          <a:prstGeom prst="roundRect">
+            <a:avLst>
+              <a:gd name="adj" fmla="val 37500"/>
+            </a:avLst>
+          </a:prstGeom>
+          <a:solidFill>
+            <a:srgbClr val="FFFFFF">
+              <a:alpha val="22000"/>
+            </a:srgbClr>
+          </a:solidFill>
+          <a:ln w="12700">
+            <a:solidFill>
+              <a:srgbClr val="FFFFFF">
+                <a:alpha val="0"/>
+              </a:srgbClr>
+            </a:solidFill>
+            <a:prstDash val="solid"/>
+          </a:ln>
+        </p:spPr>
+      </p:sp>
+      <p:sp>
+        <p:nvSpPr>
+          <p:cNvPr id="11" name="Shape 9"/>
+          <p:cNvSpPr/>
+          <p:nvPr/>
+        </p:nvSpPr>
+        <p:spPr>
+          <a:xfrm rot="120000">
+            <a:off x="7558851" y="256032"/>
+            <a:ext cx="3047924" cy="201168"/>
+          </a:xfrm>
+          <a:prstGeom prst="roundRect">
+            <a:avLst>
+              <a:gd name="adj" fmla="val 31818"/>
+            </a:avLst>
+          </a:prstGeom>
+          <a:solidFill>
+            <a:srgbClr val="7DD3FC">
+              <a:alpha val="64000"/>
+            </a:srgbClr>
+          </a:solidFill>
+          <a:ln w="12700">
+            <a:solidFill>
+              <a:srgbClr val="FFFFFF">
+                <a:alpha val="18000"/>
+              </a:srgbClr>
+            </a:solidFill>
+            <a:prstDash val="solid"/>
+          </a:ln>
+        </p:spPr>
+      </p:sp>
+      <p:sp>
+        <p:nvSpPr>
+          <p:cNvPr id="12" name="Shape 10"/>
           <p:cNvSpPr/>
           <p:nvPr/>
         </p:nvSpPr>
@@ -20408,7 +22618,7 @@
       </p:sp>
       <p:sp>
         <p:nvSpPr>
-          <p:cNvPr id="9" name="Shape 7"/>
+          <p:cNvPr id="13" name="Shape 11"/>
           <p:cNvSpPr/>
           <p:nvPr/>
         </p:nvSpPr>
@@ -20437,7 +22647,7 @@
       </p:sp>
       <p:sp>
         <p:nvSpPr>
-          <p:cNvPr id="10" name="Shape 8"/>
+          <p:cNvPr id="14" name="Shape 12"/>
           <p:cNvSpPr/>
           <p:nvPr/>
         </p:nvSpPr>
@@ -20464,7 +22674,7 @@
       </p:sp>
       <p:sp>
         <p:nvSpPr>
-          <p:cNvPr id="11" name="Shape 9"/>
+          <p:cNvPr id="15" name="Shape 13"/>
           <p:cNvSpPr/>
           <p:nvPr/>
         </p:nvSpPr>
@@ -20491,7 +22701,7 @@
       </p:sp>
       <p:sp>
         <p:nvSpPr>
-          <p:cNvPr id="12" name="Shape 10"/>
+          <p:cNvPr id="16" name="Shape 14"/>
           <p:cNvSpPr/>
           <p:nvPr/>
         </p:nvSpPr>
@@ -20518,7 +22728,7 @@
       </p:sp>
       <p:pic>
         <p:nvPicPr>
-          <p:cNvPr id="13" name="Image 0" descr="preencoded.png">    </p:cNvPr>
+          <p:cNvPr id="17" name="Image 0" descr="preencoded.png">    </p:cNvPr>
           <p:cNvPicPr>
             <a:picLocks noChangeAspect="1"/>
           </p:cNvPicPr>
@@ -20548,7 +22758,7 @@
       </p:pic>
       <p:sp>
         <p:nvSpPr>
-          <p:cNvPr id="14" name="Shape 11"/>
+          <p:cNvPr id="18" name="Shape 15"/>
           <p:cNvSpPr/>
           <p:nvPr/>
         </p:nvSpPr>
@@ -20589,7 +22799,7 @@
       </p:sp>
       <p:pic>
         <p:nvPicPr>
-          <p:cNvPr id="15" name="Image 1" descr="preencoded.png">    </p:cNvPr>
+          <p:cNvPr id="19" name="Image 1" descr="preencoded.png">    </p:cNvPr>
           <p:cNvPicPr>
             <a:picLocks noChangeAspect="1"/>
           </p:cNvPicPr>
@@ -20619,7 +22829,7 @@
       </p:pic>
       <p:sp>
         <p:nvSpPr>
-          <p:cNvPr id="16" name="Shape 12"/>
+          <p:cNvPr id="20" name="Shape 16"/>
           <p:cNvSpPr/>
           <p:nvPr/>
         </p:nvSpPr>
@@ -20660,7 +22870,7 @@
       </p:sp>
       <p:pic>
         <p:nvPicPr>
-          <p:cNvPr id="17" name="Image 2" descr="preencoded.png">    </p:cNvPr>
+          <p:cNvPr id="21" name="Image 2" descr="preencoded.png">    </p:cNvPr>
           <p:cNvPicPr>
             <a:picLocks noChangeAspect="1"/>
           </p:cNvPicPr>
@@ -20690,7 +22900,7 @@
       </p:pic>
       <p:sp>
         <p:nvSpPr>
-          <p:cNvPr id="18" name="Shape 13"/>
+          <p:cNvPr id="22" name="Shape 17"/>
           <p:cNvSpPr/>
           <p:nvPr/>
         </p:nvSpPr>
@@ -20731,7 +22941,7 @@
       </p:sp>
       <p:sp>
         <p:nvSpPr>
-          <p:cNvPr id="19" name="Shape 14"/>
+          <p:cNvPr id="23" name="Shape 18"/>
           <p:cNvSpPr/>
           <p:nvPr/>
         </p:nvSpPr>
@@ -20758,7 +22968,7 @@
       </p:sp>
       <p:sp>
         <p:nvSpPr>
-          <p:cNvPr id="20" name="mdpr:mixed-object-packing-438299:title:__title:mixed-object-packing-438299"/>
+          <p:cNvPr id="24" name="mdpr:mixed-object-packing-438299:title:__title:mixed-object-packing-438299"/>
           <p:cNvSpPr txBox="1"/>
           <p:nvPr/>
         </p:nvSpPr>
@@ -20800,7 +23010,7 @@
       </p:sp>
       <p:graphicFrame>
         <p:nvGraphicFramePr>
-          <p:cNvPr id="21" name="Chart 0" descr=""/>
+          <p:cNvPr id="25" name="Chart 0" descr=""/>
           <p:cNvGraphicFramePr/>
           <p:nvPr/>
         </p:nvGraphicFramePr>
@@ -21258,7 +23468,7 @@
       </p:graphicFrame>
       <p:sp>
         <p:nvSpPr>
-          <p:cNvPr id="23" name="mdpr:mixed-object-packing-438299:body:block-36"/>
+          <p:cNvPr id="27" name="mdpr:mixed-object-packing-438299:body:block-36"/>
           <p:cNvSpPr txBox="1"/>
           <p:nvPr/>
         </p:nvSpPr>
@@ -21357,7 +23567,7 @@
       </p:sp>
       <p:pic>
         <p:nvPicPr>
-          <p:cNvPr id="24" name="mdpr:mixed-object-packing-438299:image-1:block-39" descr="{&quot;mdpr&quot;:{&quot;slideId&quot;:&quot;mixed-object-packing-438299&quot;,&quot;layoutSlideId&quot;:&quot;layout-mixed-object-packing-438299&quot;,&quot;regionId&quot;:&quot;image-1&quot;,&quot;blockIds&quot;:[&quot;block-39&quot;],&quot;objectKind&quot;:&quot;native-image&quot;,&quot;role&quot;:&quot;image&quot;,&quot;editable&quot;:false}}">    </p:cNvPr>
+          <p:cNvPr id="28" name="mdpr:mixed-object-packing-438299:image-1:block-39" descr="{&quot;mdpr&quot;:{&quot;slideId&quot;:&quot;mixed-object-packing-438299&quot;,&quot;layoutSlideId&quot;:&quot;layout-mixed-object-packing-438299&quot;,&quot;regionId&quot;:&quot;image-1&quot;,&quot;blockIds&quot;:[&quot;block-39&quot;],&quot;objectKind&quot;:&quot;native-image&quot;,&quot;role&quot;:&quot;image&quot;,&quot;editable&quot;:false}}">    </p:cNvPr>
           <p:cNvPicPr>
             <a:picLocks noChangeAspect="1"/>
           </p:cNvPicPr>
@@ -21425,6 +23635,49 @@
         </p:nvSpPr>
         <p:spPr>
           <a:xfrm>
+            <a:off x="310896" y="256032"/>
+            <a:ext cx="10893247" cy="5779008"/>
+          </a:xfrm>
+          <a:prstGeom prst="roundRect">
+            <a:avLst>
+              <a:gd name="adj" fmla="val 1899"/>
+            </a:avLst>
+          </a:prstGeom>
+          <a:solidFill>
+            <a:srgbClr val="7DD3FC">
+              <a:alpha val="26000"/>
+            </a:srgbClr>
+          </a:solidFill>
+          <a:ln w="12700">
+            <a:solidFill>
+              <a:srgbClr val="FFFFFF">
+                <a:alpha val="14000"/>
+              </a:srgbClr>
+            </a:solidFill>
+            <a:prstDash val="solid"/>
+          </a:ln>
+          <a:effectLst>
+            <a:outerShdw sx="100000" sy="100000" kx="0" ky="0" algn="bl" rotWithShape="0" blurRad="12700" dist="50800" dir="2700000">
+              <a:srgbClr val="7DD3FC">
+                <a:alpha val="10000"/>
+              </a:srgbClr>
+            </a:outerShdw>
+            <a:glow rad="63500">
+              <a:srgbClr val="7DD3FC">
+                <a:alpha val="23000"/>
+              </a:srgbClr>
+            </a:glow>
+          </a:effectLst>
+        </p:spPr>
+      </p:sp>
+      <p:sp>
+        <p:nvSpPr>
+          <p:cNvPr id="3" name="Shape 1"/>
+          <p:cNvSpPr/>
+          <p:nvPr/>
+        </p:nvSpPr>
+        <p:spPr>
+          <a:xfrm>
             <a:off x="566928" y="475488"/>
             <a:ext cx="11057839" cy="5907024"/>
           </a:xfrm>
@@ -21462,7 +23715,7 @@
       </p:sp>
       <p:sp>
         <p:nvSpPr>
-          <p:cNvPr id="3" name="Shape 1"/>
+          <p:cNvPr id="4" name="Shape 2"/>
           <p:cNvSpPr/>
           <p:nvPr/>
         </p:nvSpPr>
@@ -21491,7 +23744,7 @@
       </p:sp>
       <p:sp>
         <p:nvSpPr>
-          <p:cNvPr id="4" name="Shape 2"/>
+          <p:cNvPr id="5" name="Shape 3"/>
           <p:cNvSpPr/>
           <p:nvPr/>
         </p:nvSpPr>
@@ -21520,7 +23773,7 @@
       </p:sp>
       <p:sp>
         <p:nvSpPr>
-          <p:cNvPr id="5" name="Shape 3"/>
+          <p:cNvPr id="6" name="Shape 4"/>
           <p:cNvSpPr/>
           <p:nvPr/>
         </p:nvSpPr>
@@ -21549,7 +23802,7 @@
       </p:sp>
       <p:sp>
         <p:nvSpPr>
-          <p:cNvPr id="6" name="Shape 4"/>
+          <p:cNvPr id="7" name="Shape 5"/>
           <p:cNvSpPr/>
           <p:nvPr/>
         </p:nvSpPr>
@@ -21574,7 +23827,7 @@
       </p:sp>
       <p:sp>
         <p:nvSpPr>
-          <p:cNvPr id="7" name="Shape 5"/>
+          <p:cNvPr id="8" name="Shape 6"/>
           <p:cNvSpPr/>
           <p:nvPr/>
         </p:nvSpPr>
@@ -21599,7 +23852,94 @@
       </p:sp>
       <p:sp>
         <p:nvSpPr>
-          <p:cNvPr id="8" name="Shape 6"/>
+          <p:cNvPr id="9" name="Shape 7"/>
+          <p:cNvSpPr/>
+          <p:nvPr/>
+        </p:nvSpPr>
+        <p:spPr>
+          <a:xfrm>
+            <a:off x="9631375" y="603504"/>
+            <a:ext cx="1353312" cy="0"/>
+          </a:xfrm>
+          <a:prstGeom prst="line">
+            <a:avLst/>
+          </a:prstGeom>
+          <a:noFill/>
+          <a:ln w="12700">
+            <a:solidFill>
+              <a:srgbClr val="FFFFFF">
+                <a:alpha val="54000"/>
+              </a:srgbClr>
+            </a:solidFill>
+            <a:prstDash val="solid"/>
+          </a:ln>
+        </p:spPr>
+      </p:sp>
+      <p:sp>
+        <p:nvSpPr>
+          <p:cNvPr id="10" name="Shape 8"/>
+          <p:cNvSpPr/>
+          <p:nvPr/>
+        </p:nvSpPr>
+        <p:spPr>
+          <a:xfrm rot="-180000">
+            <a:off x="530352" y="438912"/>
+            <a:ext cx="6583515" cy="146304"/>
+          </a:xfrm>
+          <a:prstGeom prst="roundRect">
+            <a:avLst>
+              <a:gd name="adj" fmla="val 37500"/>
+            </a:avLst>
+          </a:prstGeom>
+          <a:solidFill>
+            <a:srgbClr val="FFFFFF">
+              <a:alpha val="22000"/>
+            </a:srgbClr>
+          </a:solidFill>
+          <a:ln w="12700">
+            <a:solidFill>
+              <a:srgbClr val="FFFFFF">
+                <a:alpha val="0"/>
+              </a:srgbClr>
+            </a:solidFill>
+            <a:prstDash val="solid"/>
+          </a:ln>
+        </p:spPr>
+      </p:sp>
+      <p:sp>
+        <p:nvSpPr>
+          <p:cNvPr id="11" name="Shape 9"/>
+          <p:cNvSpPr/>
+          <p:nvPr/>
+        </p:nvSpPr>
+        <p:spPr>
+          <a:xfrm rot="120000">
+            <a:off x="7558851" y="256032"/>
+            <a:ext cx="3047924" cy="201168"/>
+          </a:xfrm>
+          <a:prstGeom prst="roundRect">
+            <a:avLst>
+              <a:gd name="adj" fmla="val 31818"/>
+            </a:avLst>
+          </a:prstGeom>
+          <a:solidFill>
+            <a:srgbClr val="7DD3FC">
+              <a:alpha val="64000"/>
+            </a:srgbClr>
+          </a:solidFill>
+          <a:ln w="12700">
+            <a:solidFill>
+              <a:srgbClr val="FFFFFF">
+                <a:alpha val="18000"/>
+              </a:srgbClr>
+            </a:solidFill>
+            <a:prstDash val="solid"/>
+          </a:ln>
+        </p:spPr>
+      </p:sp>
+      <p:sp>
+        <p:nvSpPr>
+          <p:cNvPr id="12" name="Shape 10"/>
           <p:cNvSpPr/>
           <p:nvPr/>
         </p:nvSpPr>
@@ -21640,7 +23980,7 @@
       </p:sp>
       <p:sp>
         <p:nvSpPr>
-          <p:cNvPr id="9" name="Shape 7"/>
+          <p:cNvPr id="13" name="Shape 11"/>
           <p:cNvSpPr/>
           <p:nvPr/>
         </p:nvSpPr>
@@ -21669,7 +24009,7 @@
       </p:sp>
       <p:sp>
         <p:nvSpPr>
-          <p:cNvPr id="10" name="Shape 8"/>
+          <p:cNvPr id="14" name="Shape 12"/>
           <p:cNvSpPr/>
           <p:nvPr/>
         </p:nvSpPr>
@@ -21696,7 +24036,7 @@
       </p:sp>
       <p:sp>
         <p:nvSpPr>
-          <p:cNvPr id="11" name="Shape 9"/>
+          <p:cNvPr id="15" name="Shape 13"/>
           <p:cNvSpPr/>
           <p:nvPr/>
         </p:nvSpPr>
@@ -21723,7 +24063,7 @@
       </p:sp>
       <p:sp>
         <p:nvSpPr>
-          <p:cNvPr id="12" name="Shape 10"/>
+          <p:cNvPr id="16" name="Shape 14"/>
           <p:cNvSpPr/>
           <p:nvPr/>
         </p:nvSpPr>
@@ -21750,7 +24090,7 @@
       </p:sp>
       <p:pic>
         <p:nvPicPr>
-          <p:cNvPr id="13" name="Image 0" descr="preencoded.png">    </p:cNvPr>
+          <p:cNvPr id="17" name="Image 0" descr="preencoded.png">    </p:cNvPr>
           <p:cNvPicPr>
             <a:picLocks noChangeAspect="1"/>
           </p:cNvPicPr>
@@ -21780,7 +24120,7 @@
       </p:pic>
       <p:sp>
         <p:nvSpPr>
-          <p:cNvPr id="14" name="Shape 11"/>
+          <p:cNvPr id="18" name="Shape 15"/>
           <p:cNvSpPr/>
           <p:nvPr/>
         </p:nvSpPr>
@@ -21821,7 +24161,7 @@
       </p:sp>
       <p:pic>
         <p:nvPicPr>
-          <p:cNvPr id="15" name="Image 1" descr="preencoded.png">    </p:cNvPr>
+          <p:cNvPr id="19" name="Image 1" descr="preencoded.png">    </p:cNvPr>
           <p:cNvPicPr>
             <a:picLocks noChangeAspect="1"/>
           </p:cNvPicPr>
@@ -21851,7 +24191,7 @@
       </p:pic>
       <p:sp>
         <p:nvSpPr>
-          <p:cNvPr id="16" name="Shape 12"/>
+          <p:cNvPr id="20" name="Shape 16"/>
           <p:cNvSpPr/>
           <p:nvPr/>
         </p:nvSpPr>
@@ -21892,7 +24232,7 @@
       </p:sp>
       <p:pic>
         <p:nvPicPr>
-          <p:cNvPr id="17" name="Image 2" descr="preencoded.png">    </p:cNvPr>
+          <p:cNvPr id="21" name="Image 2" descr="preencoded.png">    </p:cNvPr>
           <p:cNvPicPr>
             <a:picLocks noChangeAspect="1"/>
           </p:cNvPicPr>
@@ -21922,7 +24262,7 @@
       </p:pic>
       <p:sp>
         <p:nvSpPr>
-          <p:cNvPr id="18" name="Shape 13"/>
+          <p:cNvPr id="22" name="Shape 17"/>
           <p:cNvSpPr/>
           <p:nvPr/>
         </p:nvSpPr>
@@ -21963,7 +24303,7 @@
       </p:sp>
       <p:sp>
         <p:nvSpPr>
-          <p:cNvPr id="19" name="Shape 14"/>
+          <p:cNvPr id="23" name="Shape 18"/>
           <p:cNvSpPr/>
           <p:nvPr/>
         </p:nvSpPr>
@@ -21992,7 +24332,7 @@
       </p:sp>
       <p:sp>
         <p:nvSpPr>
-          <p:cNvPr id="20" name="Shape 15"/>
+          <p:cNvPr id="24" name="Shape 19"/>
           <p:cNvSpPr/>
           <p:nvPr/>
         </p:nvSpPr>
@@ -22019,7 +24359,7 @@
       </p:sp>
       <p:sp>
         <p:nvSpPr>
-          <p:cNvPr id="21" name="Shape 16"/>
+          <p:cNvPr id="25" name="Shape 20"/>
           <p:cNvSpPr/>
           <p:nvPr/>
         </p:nvSpPr>
@@ -22046,7 +24386,7 @@
       </p:sp>
       <p:sp>
         <p:nvSpPr>
-          <p:cNvPr id="22" name="Shape 17"/>
+          <p:cNvPr id="26" name="Shape 21"/>
           <p:cNvSpPr/>
           <p:nvPr/>
         </p:nvSpPr>
@@ -22073,7 +24413,7 @@
       </p:sp>
       <p:sp>
         <p:nvSpPr>
-          <p:cNvPr id="23" name="mdpr:actions-output-review-326e07:title:__title:actions-output-review-326e07"/>
+          <p:cNvPr id="27" name="mdpr:actions-output-review-326e07:title:__title:actions-output-review-326e07"/>
           <p:cNvSpPr txBox="1"/>
           <p:nvPr/>
         </p:nvSpPr>
@@ -22115,7 +24455,7 @@
       </p:sp>
       <p:sp>
         <p:nvSpPr>
-          <p:cNvPr id="24" name="Shape 19"/>
+          <p:cNvPr id="28" name="Shape 23"/>
           <p:cNvSpPr/>
           <p:nvPr/>
         </p:nvSpPr>
@@ -22142,7 +24482,7 @@
       </p:sp>
       <p:pic>
         <p:nvPicPr>
-          <p:cNvPr id="25" name="Image 3" descr="flow icon from tabler-icons (MIT)">    </p:cNvPr>
+          <p:cNvPr id="29" name="Image 3" descr="flow icon from tabler-icons (MIT)">    </p:cNvPr>
           <p:cNvPicPr>
             <a:picLocks noChangeAspect="1"/>
           </p:cNvPicPr>
@@ -22172,7 +24512,7 @@
       </p:pic>
       <p:sp>
         <p:nvSpPr>
-          <p:cNvPr id="26" name="mdpr:actions-output-review-326e07:item-1:block-41"/>
+          <p:cNvPr id="30" name="mdpr:actions-output-review-326e07:item-1:block-41"/>
           <p:cNvSpPr txBox="1"/>
           <p:nvPr/>
         </p:nvSpPr>
@@ -22231,7 +24571,7 @@
       </p:sp>
       <p:sp>
         <p:nvSpPr>
-          <p:cNvPr id="27" name="Shape 21"/>
+          <p:cNvPr id="31" name="Shape 25"/>
           <p:cNvSpPr/>
           <p:nvPr/>
         </p:nvSpPr>
@@ -22258,7 +24598,7 @@
       </p:sp>
       <p:pic>
         <p:nvPicPr>
-          <p:cNvPr id="28" name="Image 4" descr="verified icon from tabler-icons (MIT)">    </p:cNvPr>
+          <p:cNvPr id="32" name="Image 4" descr="verified icon from tabler-icons (MIT)">    </p:cNvPr>
           <p:cNvPicPr>
             <a:picLocks noChangeAspect="1"/>
           </p:cNvPicPr>
@@ -22288,7 +24628,7 @@
       </p:pic>
       <p:sp>
         <p:nvSpPr>
-          <p:cNvPr id="29" name="mdpr:actions-output-review-326e07:item-2:block-41"/>
+          <p:cNvPr id="33" name="mdpr:actions-output-review-326e07:item-2:block-41"/>
           <p:cNvSpPr txBox="1"/>
           <p:nvPr/>
         </p:nvSpPr>
@@ -22347,7 +24687,7 @@
       </p:sp>
       <p:sp>
         <p:nvSpPr>
-          <p:cNvPr id="30" name="Shape 23"/>
+          <p:cNvPr id="34" name="Shape 27"/>
           <p:cNvSpPr/>
           <p:nvPr/>
         </p:nvSpPr>
@@ -22374,7 +24714,7 @@
       </p:sp>
       <p:pic>
         <p:nvPicPr>
-          <p:cNvPr id="31" name="Image 5" descr="spark icon from tabler-icons (MIT)">    </p:cNvPr>
+          <p:cNvPr id="35" name="Image 5" descr="spark icon from tabler-icons (MIT)">    </p:cNvPr>
           <p:cNvPicPr>
             <a:picLocks noChangeAspect="1"/>
           </p:cNvPicPr>
@@ -22404,7 +24744,7 @@
       </p:pic>
       <p:sp>
         <p:nvSpPr>
-          <p:cNvPr id="32" name="mdpr:actions-output-review-326e07:item-3:block-41"/>
+          <p:cNvPr id="36" name="mdpr:actions-output-review-326e07:item-3:block-41"/>
           <p:cNvSpPr txBox="1"/>
           <p:nvPr/>
         </p:nvSpPr>
@@ -22501,6 +24841,49 @@
         </p:nvSpPr>
         <p:spPr>
           <a:xfrm>
+            <a:off x="310896" y="256032"/>
+            <a:ext cx="10893247" cy="5779008"/>
+          </a:xfrm>
+          <a:prstGeom prst="roundRect">
+            <a:avLst>
+              <a:gd name="adj" fmla="val 1899"/>
+            </a:avLst>
+          </a:prstGeom>
+          <a:solidFill>
+            <a:srgbClr val="7DD3FC">
+              <a:alpha val="26000"/>
+            </a:srgbClr>
+          </a:solidFill>
+          <a:ln w="12700">
+            <a:solidFill>
+              <a:srgbClr val="FFFFFF">
+                <a:alpha val="14000"/>
+              </a:srgbClr>
+            </a:solidFill>
+            <a:prstDash val="solid"/>
+          </a:ln>
+          <a:effectLst>
+            <a:outerShdw sx="100000" sy="100000" kx="0" ky="0" algn="bl" rotWithShape="0" blurRad="12700" dist="50800" dir="2700000">
+              <a:srgbClr val="7DD3FC">
+                <a:alpha val="10000"/>
+              </a:srgbClr>
+            </a:outerShdw>
+            <a:glow rad="63500">
+              <a:srgbClr val="7DD3FC">
+                <a:alpha val="23000"/>
+              </a:srgbClr>
+            </a:glow>
+          </a:effectLst>
+        </p:spPr>
+      </p:sp>
+      <p:sp>
+        <p:nvSpPr>
+          <p:cNvPr id="3" name="Shape 1"/>
+          <p:cNvSpPr/>
+          <p:nvPr/>
+        </p:nvSpPr>
+        <p:spPr>
+          <a:xfrm>
             <a:off x="566928" y="475488"/>
             <a:ext cx="11057839" cy="5907024"/>
           </a:xfrm>
@@ -22538,7 +24921,7 @@
       </p:sp>
       <p:sp>
         <p:nvSpPr>
-          <p:cNvPr id="3" name="Shape 1"/>
+          <p:cNvPr id="4" name="Shape 2"/>
           <p:cNvSpPr/>
           <p:nvPr/>
         </p:nvSpPr>
@@ -22567,7 +24950,7 @@
       </p:sp>
       <p:sp>
         <p:nvSpPr>
-          <p:cNvPr id="4" name="Shape 2"/>
+          <p:cNvPr id="5" name="Shape 3"/>
           <p:cNvSpPr/>
           <p:nvPr/>
         </p:nvSpPr>
@@ -22596,7 +24979,7 @@
       </p:sp>
       <p:sp>
         <p:nvSpPr>
-          <p:cNvPr id="5" name="Shape 3"/>
+          <p:cNvPr id="6" name="Shape 4"/>
           <p:cNvSpPr/>
           <p:nvPr/>
         </p:nvSpPr>
@@ -22625,7 +25008,7 @@
       </p:sp>
       <p:sp>
         <p:nvSpPr>
-          <p:cNvPr id="6" name="Shape 4"/>
+          <p:cNvPr id="7" name="Shape 5"/>
           <p:cNvSpPr/>
           <p:nvPr/>
         </p:nvSpPr>
@@ -22650,7 +25033,7 @@
       </p:sp>
       <p:sp>
         <p:nvSpPr>
-          <p:cNvPr id="7" name="Shape 5"/>
+          <p:cNvPr id="8" name="Shape 6"/>
           <p:cNvSpPr/>
           <p:nvPr/>
         </p:nvSpPr>
@@ -22675,7 +25058,94 @@
       </p:sp>
       <p:sp>
         <p:nvSpPr>
-          <p:cNvPr id="8" name="Shape 6"/>
+          <p:cNvPr id="9" name="Shape 7"/>
+          <p:cNvSpPr/>
+          <p:nvPr/>
+        </p:nvSpPr>
+        <p:spPr>
+          <a:xfrm>
+            <a:off x="9631375" y="603504"/>
+            <a:ext cx="1353312" cy="0"/>
+          </a:xfrm>
+          <a:prstGeom prst="line">
+            <a:avLst/>
+          </a:prstGeom>
+          <a:noFill/>
+          <a:ln w="12700">
+            <a:solidFill>
+              <a:srgbClr val="FFFFFF">
+                <a:alpha val="54000"/>
+              </a:srgbClr>
+            </a:solidFill>
+            <a:prstDash val="solid"/>
+          </a:ln>
+        </p:spPr>
+      </p:sp>
+      <p:sp>
+        <p:nvSpPr>
+          <p:cNvPr id="10" name="Shape 8"/>
+          <p:cNvSpPr/>
+          <p:nvPr/>
+        </p:nvSpPr>
+        <p:spPr>
+          <a:xfrm rot="-180000">
+            <a:off x="530352" y="438912"/>
+            <a:ext cx="6583515" cy="146304"/>
+          </a:xfrm>
+          <a:prstGeom prst="roundRect">
+            <a:avLst>
+              <a:gd name="adj" fmla="val 37500"/>
+            </a:avLst>
+          </a:prstGeom>
+          <a:solidFill>
+            <a:srgbClr val="FFFFFF">
+              <a:alpha val="22000"/>
+            </a:srgbClr>
+          </a:solidFill>
+          <a:ln w="12700">
+            <a:solidFill>
+              <a:srgbClr val="FFFFFF">
+                <a:alpha val="0"/>
+              </a:srgbClr>
+            </a:solidFill>
+            <a:prstDash val="solid"/>
+          </a:ln>
+        </p:spPr>
+      </p:sp>
+      <p:sp>
+        <p:nvSpPr>
+          <p:cNvPr id="11" name="Shape 9"/>
+          <p:cNvSpPr/>
+          <p:nvPr/>
+        </p:nvSpPr>
+        <p:spPr>
+          <a:xfrm rot="120000">
+            <a:off x="7558851" y="256032"/>
+            <a:ext cx="3047924" cy="201168"/>
+          </a:xfrm>
+          <a:prstGeom prst="roundRect">
+            <a:avLst>
+              <a:gd name="adj" fmla="val 31818"/>
+            </a:avLst>
+          </a:prstGeom>
+          <a:solidFill>
+            <a:srgbClr val="7DD3FC">
+              <a:alpha val="64000"/>
+            </a:srgbClr>
+          </a:solidFill>
+          <a:ln w="12700">
+            <a:solidFill>
+              <a:srgbClr val="FFFFFF">
+                <a:alpha val="18000"/>
+              </a:srgbClr>
+            </a:solidFill>
+            <a:prstDash val="solid"/>
+          </a:ln>
+        </p:spPr>
+      </p:sp>
+      <p:sp>
+        <p:nvSpPr>
+          <p:cNvPr id="12" name="Shape 10"/>
           <p:cNvSpPr/>
           <p:nvPr/>
         </p:nvSpPr>
@@ -22716,7 +25186,7 @@
       </p:sp>
       <p:sp>
         <p:nvSpPr>
-          <p:cNvPr id="9" name="Shape 7"/>
+          <p:cNvPr id="13" name="Shape 11"/>
           <p:cNvSpPr/>
           <p:nvPr/>
         </p:nvSpPr>
@@ -22745,7 +25215,7 @@
       </p:sp>
       <p:sp>
         <p:nvSpPr>
-          <p:cNvPr id="10" name="Shape 8"/>
+          <p:cNvPr id="14" name="Shape 12"/>
           <p:cNvSpPr/>
           <p:nvPr/>
         </p:nvSpPr>
@@ -22772,7 +25242,7 @@
       </p:sp>
       <p:sp>
         <p:nvSpPr>
-          <p:cNvPr id="11" name="Shape 9"/>
+          <p:cNvPr id="15" name="Shape 13"/>
           <p:cNvSpPr/>
           <p:nvPr/>
         </p:nvSpPr>
@@ -22799,7 +25269,7 @@
       </p:sp>
       <p:sp>
         <p:nvSpPr>
-          <p:cNvPr id="12" name="Shape 10"/>
+          <p:cNvPr id="16" name="Shape 14"/>
           <p:cNvSpPr/>
           <p:nvPr/>
         </p:nvSpPr>
@@ -22826,7 +25296,7 @@
       </p:sp>
       <p:sp>
         <p:nvSpPr>
-          <p:cNvPr id="13" name="Shape 11"/>
+          <p:cNvPr id="17" name="Shape 15"/>
           <p:cNvSpPr/>
           <p:nvPr/>
         </p:nvSpPr>
@@ -22853,7 +25323,7 @@
       </p:sp>
       <p:sp>
         <p:nvSpPr>
-          <p:cNvPr id="14" name="Shape 12"/>
+          <p:cNvPr id="18" name="Shape 16"/>
           <p:cNvSpPr/>
           <p:nvPr/>
         </p:nvSpPr>
@@ -22880,7 +25350,7 @@
       </p:sp>
       <p:sp>
         <p:nvSpPr>
-          <p:cNvPr id="15" name="Shape 13"/>
+          <p:cNvPr id="19" name="Shape 17"/>
           <p:cNvSpPr/>
           <p:nvPr/>
         </p:nvSpPr>
@@ -22907,7 +25377,7 @@
       </p:sp>
       <p:sp>
         <p:nvSpPr>
-          <p:cNvPr id="16" name="mdpr:2-2-7bfb60:title:__title:2-2-7bfb60"/>
+          <p:cNvPr id="20" name="mdpr:2-2-7bfb60:title:__title:2-2-7bfb60"/>
           <p:cNvSpPr txBox="1"/>
           <p:nvPr/>
         </p:nvSpPr>
@@ -22949,7 +25419,7 @@
       </p:sp>
       <p:sp>
         <p:nvSpPr>
-          <p:cNvPr id="17" name="mdpr:2-2-7bfb60:toc-item-1:toc-item-15"/>
+          <p:cNvPr id="21" name="mdpr:2-2-7bfb60:toc-item-1:toc-item-15"/>
           <p:cNvSpPr txBox="1"/>
           <p:nvPr/>
         </p:nvSpPr>
@@ -23029,6 +25499,49 @@
         </p:nvSpPr>
         <p:spPr>
           <a:xfrm>
+            <a:off x="310896" y="256032"/>
+            <a:ext cx="10893247" cy="5779008"/>
+          </a:xfrm>
+          <a:prstGeom prst="roundRect">
+            <a:avLst>
+              <a:gd name="adj" fmla="val 1899"/>
+            </a:avLst>
+          </a:prstGeom>
+          <a:solidFill>
+            <a:srgbClr val="7DD3FC">
+              <a:alpha val="26000"/>
+            </a:srgbClr>
+          </a:solidFill>
+          <a:ln w="12700">
+            <a:solidFill>
+              <a:srgbClr val="FFFFFF">
+                <a:alpha val="14000"/>
+              </a:srgbClr>
+            </a:solidFill>
+            <a:prstDash val="solid"/>
+          </a:ln>
+          <a:effectLst>
+            <a:outerShdw sx="100000" sy="100000" kx="0" ky="0" algn="bl" rotWithShape="0" blurRad="12700" dist="50800" dir="2700000">
+              <a:srgbClr val="7DD3FC">
+                <a:alpha val="10000"/>
+              </a:srgbClr>
+            </a:outerShdw>
+            <a:glow rad="63500">
+              <a:srgbClr val="7DD3FC">
+                <a:alpha val="23000"/>
+              </a:srgbClr>
+            </a:glow>
+          </a:effectLst>
+        </p:spPr>
+      </p:sp>
+      <p:sp>
+        <p:nvSpPr>
+          <p:cNvPr id="3" name="Shape 1"/>
+          <p:cNvSpPr/>
+          <p:nvPr/>
+        </p:nvSpPr>
+        <p:spPr>
+          <a:xfrm>
             <a:off x="566928" y="475488"/>
             <a:ext cx="11057839" cy="5907024"/>
           </a:xfrm>
@@ -23066,7 +25579,7 @@
       </p:sp>
       <p:sp>
         <p:nvSpPr>
-          <p:cNvPr id="3" name="Shape 1"/>
+          <p:cNvPr id="4" name="Shape 2"/>
           <p:cNvSpPr/>
           <p:nvPr/>
         </p:nvSpPr>
@@ -23095,7 +25608,7 @@
       </p:sp>
       <p:sp>
         <p:nvSpPr>
-          <p:cNvPr id="4" name="Shape 2"/>
+          <p:cNvPr id="5" name="Shape 3"/>
           <p:cNvSpPr/>
           <p:nvPr/>
         </p:nvSpPr>
@@ -23124,7 +25637,7 @@
       </p:sp>
       <p:sp>
         <p:nvSpPr>
-          <p:cNvPr id="5" name="Shape 3"/>
+          <p:cNvPr id="6" name="Shape 4"/>
           <p:cNvSpPr/>
           <p:nvPr/>
         </p:nvSpPr>
@@ -23153,7 +25666,7 @@
       </p:sp>
       <p:sp>
         <p:nvSpPr>
-          <p:cNvPr id="6" name="Shape 4"/>
+          <p:cNvPr id="7" name="Shape 5"/>
           <p:cNvSpPr/>
           <p:nvPr/>
         </p:nvSpPr>
@@ -23178,7 +25691,7 @@
       </p:sp>
       <p:sp>
         <p:nvSpPr>
-          <p:cNvPr id="7" name="Shape 5"/>
+          <p:cNvPr id="8" name="Shape 6"/>
           <p:cNvSpPr/>
           <p:nvPr/>
         </p:nvSpPr>
@@ -23203,7 +25716,94 @@
       </p:sp>
       <p:sp>
         <p:nvSpPr>
-          <p:cNvPr id="8" name="Shape 6"/>
+          <p:cNvPr id="9" name="Shape 7"/>
+          <p:cNvSpPr/>
+          <p:nvPr/>
+        </p:nvSpPr>
+        <p:spPr>
+          <a:xfrm>
+            <a:off x="9631375" y="603504"/>
+            <a:ext cx="1353312" cy="0"/>
+          </a:xfrm>
+          <a:prstGeom prst="line">
+            <a:avLst/>
+          </a:prstGeom>
+          <a:noFill/>
+          <a:ln w="12700">
+            <a:solidFill>
+              <a:srgbClr val="FFFFFF">
+                <a:alpha val="54000"/>
+              </a:srgbClr>
+            </a:solidFill>
+            <a:prstDash val="solid"/>
+          </a:ln>
+        </p:spPr>
+      </p:sp>
+      <p:sp>
+        <p:nvSpPr>
+          <p:cNvPr id="10" name="Shape 8"/>
+          <p:cNvSpPr/>
+          <p:nvPr/>
+        </p:nvSpPr>
+        <p:spPr>
+          <a:xfrm rot="-180000">
+            <a:off x="530352" y="438912"/>
+            <a:ext cx="6583515" cy="146304"/>
+          </a:xfrm>
+          <a:prstGeom prst="roundRect">
+            <a:avLst>
+              <a:gd name="adj" fmla="val 37500"/>
+            </a:avLst>
+          </a:prstGeom>
+          <a:solidFill>
+            <a:srgbClr val="FFFFFF">
+              <a:alpha val="22000"/>
+            </a:srgbClr>
+          </a:solidFill>
+          <a:ln w="12700">
+            <a:solidFill>
+              <a:srgbClr val="FFFFFF">
+                <a:alpha val="0"/>
+              </a:srgbClr>
+            </a:solidFill>
+            <a:prstDash val="solid"/>
+          </a:ln>
+        </p:spPr>
+      </p:sp>
+      <p:sp>
+        <p:nvSpPr>
+          <p:cNvPr id="11" name="Shape 9"/>
+          <p:cNvSpPr/>
+          <p:nvPr/>
+        </p:nvSpPr>
+        <p:spPr>
+          <a:xfrm rot="120000">
+            <a:off x="7558851" y="256032"/>
+            <a:ext cx="3047924" cy="201168"/>
+          </a:xfrm>
+          <a:prstGeom prst="roundRect">
+            <a:avLst>
+              <a:gd name="adj" fmla="val 31818"/>
+            </a:avLst>
+          </a:prstGeom>
+          <a:solidFill>
+            <a:srgbClr val="7DD3FC">
+              <a:alpha val="64000"/>
+            </a:srgbClr>
+          </a:solidFill>
+          <a:ln w="12700">
+            <a:solidFill>
+              <a:srgbClr val="FFFFFF">
+                <a:alpha val="18000"/>
+              </a:srgbClr>
+            </a:solidFill>
+            <a:prstDash val="solid"/>
+          </a:ln>
+        </p:spPr>
+      </p:sp>
+      <p:sp>
+        <p:nvSpPr>
+          <p:cNvPr id="12" name="Shape 10"/>
           <p:cNvSpPr/>
           <p:nvPr/>
         </p:nvSpPr>
@@ -23244,7 +25844,7 @@
       </p:sp>
       <p:sp>
         <p:nvSpPr>
-          <p:cNvPr id="9" name="Shape 7"/>
+          <p:cNvPr id="13" name="Shape 11"/>
           <p:cNvSpPr/>
           <p:nvPr/>
         </p:nvSpPr>
@@ -23273,7 +25873,7 @@
       </p:sp>
       <p:sp>
         <p:nvSpPr>
-          <p:cNvPr id="10" name="Shape 8"/>
+          <p:cNvPr id="14" name="Shape 12"/>
           <p:cNvSpPr/>
           <p:nvPr/>
         </p:nvSpPr>
@@ -23300,7 +25900,7 @@
       </p:sp>
       <p:sp>
         <p:nvSpPr>
-          <p:cNvPr id="11" name="Shape 9"/>
+          <p:cNvPr id="15" name="Shape 13"/>
           <p:cNvSpPr/>
           <p:nvPr/>
         </p:nvSpPr>
@@ -23327,7 +25927,7 @@
       </p:sp>
       <p:sp>
         <p:nvSpPr>
-          <p:cNvPr id="12" name="Shape 10"/>
+          <p:cNvPr id="16" name="Shape 14"/>
           <p:cNvSpPr/>
           <p:nvPr/>
         </p:nvSpPr>
@@ -23354,7 +25954,7 @@
       </p:sp>
       <p:pic>
         <p:nvPicPr>
-          <p:cNvPr id="13" name="Image 0" descr="preencoded.png">    </p:cNvPr>
+          <p:cNvPr id="17" name="Image 0" descr="preencoded.png">    </p:cNvPr>
           <p:cNvPicPr>
             <a:picLocks noChangeAspect="1"/>
           </p:cNvPicPr>
@@ -23384,7 +25984,7 @@
       </p:pic>
       <p:sp>
         <p:nvSpPr>
-          <p:cNvPr id="14" name="Shape 11"/>
+          <p:cNvPr id="18" name="Shape 15"/>
           <p:cNvSpPr/>
           <p:nvPr/>
         </p:nvSpPr>
@@ -23425,7 +26025,7 @@
       </p:sp>
       <p:sp>
         <p:nvSpPr>
-          <p:cNvPr id="15" name="Shape 12"/>
+          <p:cNvPr id="19" name="Shape 16"/>
           <p:cNvSpPr/>
           <p:nvPr/>
         </p:nvSpPr>
@@ -23454,7 +26054,7 @@
       </p:sp>
       <p:sp>
         <p:nvSpPr>
-          <p:cNvPr id="16" name="Shape 13"/>
+          <p:cNvPr id="20" name="Shape 17"/>
           <p:cNvSpPr/>
           <p:nvPr/>
         </p:nvSpPr>
@@ -23481,7 +26081,7 @@
       </p:sp>
       <p:sp>
         <p:nvSpPr>
-          <p:cNvPr id="17" name="mdpr:teaser-summary-7731dc:title:__title:teaser-summary-7731dc"/>
+          <p:cNvPr id="21" name="mdpr:teaser-summary-7731dc:title:__title:teaser-summary-7731dc"/>
           <p:cNvSpPr txBox="1"/>
           <p:nvPr/>
         </p:nvSpPr>
@@ -23523,7 +26123,7 @@
       </p:sp>
       <p:sp>
         <p:nvSpPr>
-          <p:cNvPr id="18" name="mdpr:teaser-summary-7731dc:key-message:block-3"/>
+          <p:cNvPr id="22" name="mdpr:teaser-summary-7731dc:key-message:block-3"/>
           <p:cNvSpPr txBox="1"/>
           <p:nvPr/>
         </p:nvSpPr>
@@ -23565,7 +26165,7 @@
       </p:sp>
       <p:sp>
         <p:nvSpPr>
-          <p:cNvPr id="19" name="mdpr:teaser-summary-7731dc:body:block-4"/>
+          <p:cNvPr id="23" name="mdpr:teaser-summary-7731dc:body:block-4"/>
           <p:cNvSpPr txBox="1"/>
           <p:nvPr/>
         </p:nvSpPr>
@@ -23782,6 +26382,49 @@
         </p:nvSpPr>
         <p:spPr>
           <a:xfrm>
+            <a:off x="310896" y="256032"/>
+            <a:ext cx="10893247" cy="5779008"/>
+          </a:xfrm>
+          <a:prstGeom prst="roundRect">
+            <a:avLst>
+              <a:gd name="adj" fmla="val 1899"/>
+            </a:avLst>
+          </a:prstGeom>
+          <a:solidFill>
+            <a:srgbClr val="7DD3FC">
+              <a:alpha val="26000"/>
+            </a:srgbClr>
+          </a:solidFill>
+          <a:ln w="12700">
+            <a:solidFill>
+              <a:srgbClr val="FFFFFF">
+                <a:alpha val="14000"/>
+              </a:srgbClr>
+            </a:solidFill>
+            <a:prstDash val="solid"/>
+          </a:ln>
+          <a:effectLst>
+            <a:outerShdw sx="100000" sy="100000" kx="0" ky="0" algn="bl" rotWithShape="0" blurRad="12700" dist="50800" dir="2700000">
+              <a:srgbClr val="7DD3FC">
+                <a:alpha val="10000"/>
+              </a:srgbClr>
+            </a:outerShdw>
+            <a:glow rad="63500">
+              <a:srgbClr val="7DD3FC">
+                <a:alpha val="23000"/>
+              </a:srgbClr>
+            </a:glow>
+          </a:effectLst>
+        </p:spPr>
+      </p:sp>
+      <p:sp>
+        <p:nvSpPr>
+          <p:cNvPr id="3" name="Shape 1"/>
+          <p:cNvSpPr/>
+          <p:nvPr/>
+        </p:nvSpPr>
+        <p:spPr>
+          <a:xfrm>
             <a:off x="566928" y="475488"/>
             <a:ext cx="11057839" cy="5907024"/>
           </a:xfrm>
@@ -23819,7 +26462,7 @@
       </p:sp>
       <p:sp>
         <p:nvSpPr>
-          <p:cNvPr id="3" name="Shape 1"/>
+          <p:cNvPr id="4" name="Shape 2"/>
           <p:cNvSpPr/>
           <p:nvPr/>
         </p:nvSpPr>
@@ -23848,7 +26491,7 @@
       </p:sp>
       <p:sp>
         <p:nvSpPr>
-          <p:cNvPr id="4" name="Shape 2"/>
+          <p:cNvPr id="5" name="Shape 3"/>
           <p:cNvSpPr/>
           <p:nvPr/>
         </p:nvSpPr>
@@ -23877,7 +26520,7 @@
       </p:sp>
       <p:sp>
         <p:nvSpPr>
-          <p:cNvPr id="5" name="Shape 3"/>
+          <p:cNvPr id="6" name="Shape 4"/>
           <p:cNvSpPr/>
           <p:nvPr/>
         </p:nvSpPr>
@@ -23906,7 +26549,7 @@
       </p:sp>
       <p:sp>
         <p:nvSpPr>
-          <p:cNvPr id="6" name="Shape 4"/>
+          <p:cNvPr id="7" name="Shape 5"/>
           <p:cNvSpPr/>
           <p:nvPr/>
         </p:nvSpPr>
@@ -23931,7 +26574,7 @@
       </p:sp>
       <p:sp>
         <p:nvSpPr>
-          <p:cNvPr id="7" name="Shape 5"/>
+          <p:cNvPr id="8" name="Shape 6"/>
           <p:cNvSpPr/>
           <p:nvPr/>
         </p:nvSpPr>
@@ -23956,7 +26599,94 @@
       </p:sp>
       <p:sp>
         <p:nvSpPr>
-          <p:cNvPr id="8" name="Shape 6"/>
+          <p:cNvPr id="9" name="Shape 7"/>
+          <p:cNvSpPr/>
+          <p:nvPr/>
+        </p:nvSpPr>
+        <p:spPr>
+          <a:xfrm>
+            <a:off x="9631375" y="603504"/>
+            <a:ext cx="1353312" cy="0"/>
+          </a:xfrm>
+          <a:prstGeom prst="line">
+            <a:avLst/>
+          </a:prstGeom>
+          <a:noFill/>
+          <a:ln w="12700">
+            <a:solidFill>
+              <a:srgbClr val="FFFFFF">
+                <a:alpha val="54000"/>
+              </a:srgbClr>
+            </a:solidFill>
+            <a:prstDash val="solid"/>
+          </a:ln>
+        </p:spPr>
+      </p:sp>
+      <p:sp>
+        <p:nvSpPr>
+          <p:cNvPr id="10" name="Shape 8"/>
+          <p:cNvSpPr/>
+          <p:nvPr/>
+        </p:nvSpPr>
+        <p:spPr>
+          <a:xfrm rot="-180000">
+            <a:off x="530352" y="438912"/>
+            <a:ext cx="6583515" cy="146304"/>
+          </a:xfrm>
+          <a:prstGeom prst="roundRect">
+            <a:avLst>
+              <a:gd name="adj" fmla="val 37500"/>
+            </a:avLst>
+          </a:prstGeom>
+          <a:solidFill>
+            <a:srgbClr val="FFFFFF">
+              <a:alpha val="22000"/>
+            </a:srgbClr>
+          </a:solidFill>
+          <a:ln w="12700">
+            <a:solidFill>
+              <a:srgbClr val="FFFFFF">
+                <a:alpha val="0"/>
+              </a:srgbClr>
+            </a:solidFill>
+            <a:prstDash val="solid"/>
+          </a:ln>
+        </p:spPr>
+      </p:sp>
+      <p:sp>
+        <p:nvSpPr>
+          <p:cNvPr id="11" name="Shape 9"/>
+          <p:cNvSpPr/>
+          <p:nvPr/>
+        </p:nvSpPr>
+        <p:spPr>
+          <a:xfrm rot="120000">
+            <a:off x="7558851" y="256032"/>
+            <a:ext cx="3047924" cy="201168"/>
+          </a:xfrm>
+          <a:prstGeom prst="roundRect">
+            <a:avLst>
+              <a:gd name="adj" fmla="val 31818"/>
+            </a:avLst>
+          </a:prstGeom>
+          <a:solidFill>
+            <a:srgbClr val="7DD3FC">
+              <a:alpha val="64000"/>
+            </a:srgbClr>
+          </a:solidFill>
+          <a:ln w="12700">
+            <a:solidFill>
+              <a:srgbClr val="FFFFFF">
+                <a:alpha val="18000"/>
+              </a:srgbClr>
+            </a:solidFill>
+            <a:prstDash val="solid"/>
+          </a:ln>
+        </p:spPr>
+      </p:sp>
+      <p:sp>
+        <p:nvSpPr>
+          <p:cNvPr id="12" name="Shape 10"/>
           <p:cNvSpPr/>
           <p:nvPr/>
         </p:nvSpPr>
@@ -23997,7 +26727,7 @@
       </p:sp>
       <p:sp>
         <p:nvSpPr>
-          <p:cNvPr id="9" name="Shape 7"/>
+          <p:cNvPr id="13" name="Shape 11"/>
           <p:cNvSpPr/>
           <p:nvPr/>
         </p:nvSpPr>
@@ -24026,7 +26756,7 @@
       </p:sp>
       <p:sp>
         <p:nvSpPr>
-          <p:cNvPr id="10" name="Shape 8"/>
+          <p:cNvPr id="14" name="Shape 12"/>
           <p:cNvSpPr/>
           <p:nvPr/>
         </p:nvSpPr>
@@ -24053,7 +26783,7 @@
       </p:sp>
       <p:sp>
         <p:nvSpPr>
-          <p:cNvPr id="11" name="Shape 9"/>
+          <p:cNvPr id="15" name="Shape 13"/>
           <p:cNvSpPr/>
           <p:nvPr/>
         </p:nvSpPr>
@@ -24080,7 +26810,7 @@
       </p:sp>
       <p:sp>
         <p:nvSpPr>
-          <p:cNvPr id="12" name="Shape 10"/>
+          <p:cNvPr id="16" name="Shape 14"/>
           <p:cNvSpPr/>
           <p:nvPr/>
         </p:nvSpPr>
@@ -24107,7 +26837,7 @@
       </p:sp>
       <p:pic>
         <p:nvPicPr>
-          <p:cNvPr id="13" name="Image 0" descr="preencoded.png">    </p:cNvPr>
+          <p:cNvPr id="17" name="Image 0" descr="preencoded.png">    </p:cNvPr>
           <p:cNvPicPr>
             <a:picLocks noChangeAspect="1"/>
           </p:cNvPicPr>
@@ -24137,7 +26867,7 @@
       </p:pic>
       <p:sp>
         <p:nvSpPr>
-          <p:cNvPr id="14" name="Shape 11"/>
+          <p:cNvPr id="18" name="Shape 15"/>
           <p:cNvSpPr/>
           <p:nvPr/>
         </p:nvSpPr>
@@ -24178,7 +26908,7 @@
       </p:sp>
       <p:pic>
         <p:nvPicPr>
-          <p:cNvPr id="15" name="Image 1" descr="preencoded.png">    </p:cNvPr>
+          <p:cNvPr id="19" name="Image 1" descr="preencoded.png">    </p:cNvPr>
           <p:cNvPicPr>
             <a:picLocks noChangeAspect="1"/>
           </p:cNvPicPr>
@@ -24208,7 +26938,7 @@
       </p:pic>
       <p:sp>
         <p:nvSpPr>
-          <p:cNvPr id="16" name="Shape 12"/>
+          <p:cNvPr id="20" name="Shape 16"/>
           <p:cNvSpPr/>
           <p:nvPr/>
         </p:nvSpPr>
@@ -24249,7 +26979,7 @@
       </p:sp>
       <p:pic>
         <p:nvPicPr>
-          <p:cNvPr id="17" name="Image 2" descr="preencoded.png">    </p:cNvPr>
+          <p:cNvPr id="21" name="Image 2" descr="preencoded.png">    </p:cNvPr>
           <p:cNvPicPr>
             <a:picLocks noChangeAspect="1"/>
           </p:cNvPicPr>
@@ -24279,7 +27009,7 @@
       </p:pic>
       <p:sp>
         <p:nvSpPr>
-          <p:cNvPr id="18" name="Shape 13"/>
+          <p:cNvPr id="22" name="Shape 17"/>
           <p:cNvSpPr/>
           <p:nvPr/>
         </p:nvSpPr>
@@ -24320,7 +27050,7 @@
       </p:sp>
       <p:sp>
         <p:nvSpPr>
-          <p:cNvPr id="19" name="Shape 14"/>
+          <p:cNvPr id="23" name="Shape 18"/>
           <p:cNvSpPr/>
           <p:nvPr/>
         </p:nvSpPr>
@@ -24349,7 +27079,7 @@
       </p:sp>
       <p:sp>
         <p:nvSpPr>
-          <p:cNvPr id="20" name="Shape 15"/>
+          <p:cNvPr id="24" name="Shape 19"/>
           <p:cNvSpPr/>
           <p:nvPr/>
         </p:nvSpPr>
@@ -24376,7 +27106,7 @@
       </p:sp>
       <p:sp>
         <p:nvSpPr>
-          <p:cNvPr id="21" name="Shape 16"/>
+          <p:cNvPr id="25" name="Shape 20"/>
           <p:cNvSpPr/>
           <p:nvPr/>
         </p:nvSpPr>
@@ -24403,7 +27133,7 @@
       </p:sp>
       <p:sp>
         <p:nvSpPr>
-          <p:cNvPr id="22" name="Shape 17"/>
+          <p:cNvPr id="26" name="Shape 21"/>
           <p:cNvSpPr/>
           <p:nvPr/>
         </p:nvSpPr>
@@ -24430,7 +27160,7 @@
       </p:sp>
       <p:sp>
         <p:nvSpPr>
-          <p:cNvPr id="23" name="mdpr:1-2-32ac08:title:__title:1-2-32ac08"/>
+          <p:cNvPr id="27" name="mdpr:1-2-32ac08:title:__title:1-2-32ac08"/>
           <p:cNvSpPr txBox="1"/>
           <p:nvPr/>
         </p:nvSpPr>
@@ -24472,7 +27202,7 @@
       </p:sp>
       <p:sp>
         <p:nvSpPr>
-          <p:cNvPr id="24" name="Shape 19"/>
+          <p:cNvPr id="28" name="Shape 23"/>
           <p:cNvSpPr/>
           <p:nvPr/>
         </p:nvSpPr>
@@ -24499,7 +27229,7 @@
       </p:sp>
       <p:pic>
         <p:nvPicPr>
-          <p:cNvPr id="25" name="Image 3" descr="article icon from tabler-icons (MIT)">    </p:cNvPr>
+          <p:cNvPr id="29" name="Image 3" descr="article icon from tabler-icons (MIT)">    </p:cNvPr>
           <p:cNvPicPr>
             <a:picLocks noChangeAspect="1"/>
           </p:cNvPicPr>
@@ -24529,7 +27259,7 @@
       </p:pic>
       <p:sp>
         <p:nvSpPr>
-          <p:cNvPr id="26" name="mdpr:1-2-32ac08:item-1:block-6-chunk-1"/>
+          <p:cNvPr id="30" name="mdpr:1-2-32ac08:item-1:block-6-chunk-1"/>
           <p:cNvSpPr txBox="1"/>
           <p:nvPr/>
         </p:nvSpPr>
@@ -24588,7 +27318,7 @@
       </p:sp>
       <p:sp>
         <p:nvSpPr>
-          <p:cNvPr id="27" name="Shape 21"/>
+          <p:cNvPr id="31" name="Shape 25"/>
           <p:cNvSpPr/>
           <p:nvPr/>
         </p:nvSpPr>
@@ -24615,7 +27345,7 @@
       </p:sp>
       <p:pic>
         <p:nvPicPr>
-          <p:cNvPr id="28" name="Image 4" descr="chart icon from tabler-icons (MIT)">    </p:cNvPr>
+          <p:cNvPr id="32" name="Image 4" descr="chart icon from tabler-icons (MIT)">    </p:cNvPr>
           <p:cNvPicPr>
             <a:picLocks noChangeAspect="1"/>
           </p:cNvPicPr>
@@ -24645,7 +27375,7 @@
       </p:pic>
       <p:sp>
         <p:nvSpPr>
-          <p:cNvPr id="29" name="mdpr:1-2-32ac08:item-2:block-6-chunk-1"/>
+          <p:cNvPr id="33" name="mdpr:1-2-32ac08:item-2:block-6-chunk-1"/>
           <p:cNvSpPr txBox="1"/>
           <p:nvPr/>
         </p:nvSpPr>
@@ -24704,7 +27434,7 @@
       </p:sp>
       <p:sp>
         <p:nvSpPr>
-          <p:cNvPr id="30" name="Shape 23"/>
+          <p:cNvPr id="34" name="Shape 27"/>
           <p:cNvSpPr/>
           <p:nvPr/>
         </p:nvSpPr>
@@ -24731,7 +27461,7 @@
       </p:sp>
       <p:pic>
         <p:nvPicPr>
-          <p:cNvPr id="31" name="Image 5" descr="article icon from tabler-icons (MIT)">    </p:cNvPr>
+          <p:cNvPr id="35" name="Image 5" descr="article icon from tabler-icons (MIT)">    </p:cNvPr>
           <p:cNvPicPr>
             <a:picLocks noChangeAspect="1"/>
           </p:cNvPicPr>
@@ -24761,7 +27491,7 @@
       </p:pic>
       <p:sp>
         <p:nvSpPr>
-          <p:cNvPr id="32" name="mdpr:1-2-32ac08:item-3:block-6-chunk-1"/>
+          <p:cNvPr id="36" name="mdpr:1-2-32ac08:item-3:block-6-chunk-1"/>
           <p:cNvSpPr txBox="1"/>
           <p:nvPr/>
         </p:nvSpPr>
@@ -24858,6 +27588,49 @@
         </p:nvSpPr>
         <p:spPr>
           <a:xfrm>
+            <a:off x="310896" y="256032"/>
+            <a:ext cx="10893247" cy="5779008"/>
+          </a:xfrm>
+          <a:prstGeom prst="roundRect">
+            <a:avLst>
+              <a:gd name="adj" fmla="val 1899"/>
+            </a:avLst>
+          </a:prstGeom>
+          <a:solidFill>
+            <a:srgbClr val="7DD3FC">
+              <a:alpha val="26000"/>
+            </a:srgbClr>
+          </a:solidFill>
+          <a:ln w="12700">
+            <a:solidFill>
+              <a:srgbClr val="FFFFFF">
+                <a:alpha val="14000"/>
+              </a:srgbClr>
+            </a:solidFill>
+            <a:prstDash val="solid"/>
+          </a:ln>
+          <a:effectLst>
+            <a:outerShdw sx="100000" sy="100000" kx="0" ky="0" algn="bl" rotWithShape="0" blurRad="12700" dist="50800" dir="2700000">
+              <a:srgbClr val="7DD3FC">
+                <a:alpha val="10000"/>
+              </a:srgbClr>
+            </a:outerShdw>
+            <a:glow rad="63500">
+              <a:srgbClr val="7DD3FC">
+                <a:alpha val="23000"/>
+              </a:srgbClr>
+            </a:glow>
+          </a:effectLst>
+        </p:spPr>
+      </p:sp>
+      <p:sp>
+        <p:nvSpPr>
+          <p:cNvPr id="3" name="Shape 1"/>
+          <p:cNvSpPr/>
+          <p:nvPr/>
+        </p:nvSpPr>
+        <p:spPr>
+          <a:xfrm>
             <a:off x="566928" y="475488"/>
             <a:ext cx="11057839" cy="5907024"/>
           </a:xfrm>
@@ -24895,7 +27668,7 @@
       </p:sp>
       <p:sp>
         <p:nvSpPr>
-          <p:cNvPr id="3" name="Shape 1"/>
+          <p:cNvPr id="4" name="Shape 2"/>
           <p:cNvSpPr/>
           <p:nvPr/>
         </p:nvSpPr>
@@ -24924,7 +27697,7 @@
       </p:sp>
       <p:sp>
         <p:nvSpPr>
-          <p:cNvPr id="4" name="Shape 2"/>
+          <p:cNvPr id="5" name="Shape 3"/>
           <p:cNvSpPr/>
           <p:nvPr/>
         </p:nvSpPr>
@@ -24953,7 +27726,7 @@
       </p:sp>
       <p:sp>
         <p:nvSpPr>
-          <p:cNvPr id="5" name="Shape 3"/>
+          <p:cNvPr id="6" name="Shape 4"/>
           <p:cNvSpPr/>
           <p:nvPr/>
         </p:nvSpPr>
@@ -24982,7 +27755,7 @@
       </p:sp>
       <p:sp>
         <p:nvSpPr>
-          <p:cNvPr id="6" name="Shape 4"/>
+          <p:cNvPr id="7" name="Shape 5"/>
           <p:cNvSpPr/>
           <p:nvPr/>
         </p:nvSpPr>
@@ -25007,7 +27780,7 @@
       </p:sp>
       <p:sp>
         <p:nvSpPr>
-          <p:cNvPr id="7" name="Shape 5"/>
+          <p:cNvPr id="8" name="Shape 6"/>
           <p:cNvSpPr/>
           <p:nvPr/>
         </p:nvSpPr>
@@ -25032,7 +27805,94 @@
       </p:sp>
       <p:sp>
         <p:nvSpPr>
-          <p:cNvPr id="8" name="Shape 6"/>
+          <p:cNvPr id="9" name="Shape 7"/>
+          <p:cNvSpPr/>
+          <p:nvPr/>
+        </p:nvSpPr>
+        <p:spPr>
+          <a:xfrm>
+            <a:off x="9631375" y="603504"/>
+            <a:ext cx="1353312" cy="0"/>
+          </a:xfrm>
+          <a:prstGeom prst="line">
+            <a:avLst/>
+          </a:prstGeom>
+          <a:noFill/>
+          <a:ln w="12700">
+            <a:solidFill>
+              <a:srgbClr val="FFFFFF">
+                <a:alpha val="54000"/>
+              </a:srgbClr>
+            </a:solidFill>
+            <a:prstDash val="solid"/>
+          </a:ln>
+        </p:spPr>
+      </p:sp>
+      <p:sp>
+        <p:nvSpPr>
+          <p:cNvPr id="10" name="Shape 8"/>
+          <p:cNvSpPr/>
+          <p:nvPr/>
+        </p:nvSpPr>
+        <p:spPr>
+          <a:xfrm rot="-180000">
+            <a:off x="530352" y="438912"/>
+            <a:ext cx="6583515" cy="146304"/>
+          </a:xfrm>
+          <a:prstGeom prst="roundRect">
+            <a:avLst>
+              <a:gd name="adj" fmla="val 37500"/>
+            </a:avLst>
+          </a:prstGeom>
+          <a:solidFill>
+            <a:srgbClr val="FFFFFF">
+              <a:alpha val="22000"/>
+            </a:srgbClr>
+          </a:solidFill>
+          <a:ln w="12700">
+            <a:solidFill>
+              <a:srgbClr val="FFFFFF">
+                <a:alpha val="0"/>
+              </a:srgbClr>
+            </a:solidFill>
+            <a:prstDash val="solid"/>
+          </a:ln>
+        </p:spPr>
+      </p:sp>
+      <p:sp>
+        <p:nvSpPr>
+          <p:cNvPr id="11" name="Shape 9"/>
+          <p:cNvSpPr/>
+          <p:nvPr/>
+        </p:nvSpPr>
+        <p:spPr>
+          <a:xfrm rot="120000">
+            <a:off x="7558851" y="256032"/>
+            <a:ext cx="3047924" cy="201168"/>
+          </a:xfrm>
+          <a:prstGeom prst="roundRect">
+            <a:avLst>
+              <a:gd name="adj" fmla="val 31818"/>
+            </a:avLst>
+          </a:prstGeom>
+          <a:solidFill>
+            <a:srgbClr val="7DD3FC">
+              <a:alpha val="64000"/>
+            </a:srgbClr>
+          </a:solidFill>
+          <a:ln w="12700">
+            <a:solidFill>
+              <a:srgbClr val="FFFFFF">
+                <a:alpha val="18000"/>
+              </a:srgbClr>
+            </a:solidFill>
+            <a:prstDash val="solid"/>
+          </a:ln>
+        </p:spPr>
+      </p:sp>
+      <p:sp>
+        <p:nvSpPr>
+          <p:cNvPr id="12" name="Shape 10"/>
           <p:cNvSpPr/>
           <p:nvPr/>
         </p:nvSpPr>
@@ -25073,7 +27933,7 @@
       </p:sp>
       <p:sp>
         <p:nvSpPr>
-          <p:cNvPr id="9" name="Shape 7"/>
+          <p:cNvPr id="13" name="Shape 11"/>
           <p:cNvSpPr/>
           <p:nvPr/>
         </p:nvSpPr>
@@ -25102,7 +27962,7 @@
       </p:sp>
       <p:sp>
         <p:nvSpPr>
-          <p:cNvPr id="10" name="Shape 8"/>
+          <p:cNvPr id="14" name="Shape 12"/>
           <p:cNvSpPr/>
           <p:nvPr/>
         </p:nvSpPr>
@@ -25129,7 +27989,7 @@
       </p:sp>
       <p:sp>
         <p:nvSpPr>
-          <p:cNvPr id="11" name="Shape 9"/>
+          <p:cNvPr id="15" name="Shape 13"/>
           <p:cNvSpPr/>
           <p:nvPr/>
         </p:nvSpPr>
@@ -25156,7 +28016,7 @@
       </p:sp>
       <p:sp>
         <p:nvSpPr>
-          <p:cNvPr id="12" name="Shape 10"/>
+          <p:cNvPr id="16" name="Shape 14"/>
           <p:cNvSpPr/>
           <p:nvPr/>
         </p:nvSpPr>
@@ -25183,7 +28043,7 @@
       </p:sp>
       <p:sp>
         <p:nvSpPr>
-          <p:cNvPr id="13" name="Shape 11"/>
+          <p:cNvPr id="17" name="Shape 15"/>
           <p:cNvSpPr/>
           <p:nvPr/>
         </p:nvSpPr>
@@ -25210,7 +28070,7 @@
       </p:sp>
       <p:sp>
         <p:nvSpPr>
-          <p:cNvPr id="14" name="Shape 12"/>
+          <p:cNvPr id="18" name="Shape 16"/>
           <p:cNvSpPr/>
           <p:nvPr/>
         </p:nvSpPr>
@@ -25237,7 +28097,7 @@
       </p:sp>
       <p:sp>
         <p:nvSpPr>
-          <p:cNvPr id="15" name="mdpr:2-2-14f8eb:title:__title:2-2-14f8eb"/>
+          <p:cNvPr id="19" name="mdpr:2-2-14f8eb:title:__title:2-2-14f8eb"/>
           <p:cNvSpPr txBox="1"/>
           <p:nvPr/>
         </p:nvSpPr>
@@ -25279,7 +28139,7 @@
       </p:sp>
       <p:sp>
         <p:nvSpPr>
-          <p:cNvPr id="16" name="mdpr:2-2-14f8eb:left:block-6-chunk-2"/>
+          <p:cNvPr id="20" name="mdpr:2-2-14f8eb:left:block-6-chunk-2"/>
           <p:cNvSpPr txBox="1"/>
           <p:nvPr/>
         </p:nvSpPr>
@@ -25338,7 +28198,7 @@
       </p:sp>
       <p:sp>
         <p:nvSpPr>
-          <p:cNvPr id="17" name="mdpr:2-2-14f8eb:right:block-6-chunk-2"/>
+          <p:cNvPr id="21" name="mdpr:2-2-14f8eb:right:block-6-chunk-2"/>
           <p:cNvSpPr txBox="1"/>
           <p:nvPr/>
         </p:nvSpPr>
@@ -25435,6 +28295,49 @@
         </p:nvSpPr>
         <p:spPr>
           <a:xfrm>
+            <a:off x="310896" y="256032"/>
+            <a:ext cx="10893247" cy="5779008"/>
+          </a:xfrm>
+          <a:prstGeom prst="roundRect">
+            <a:avLst>
+              <a:gd name="adj" fmla="val 1899"/>
+            </a:avLst>
+          </a:prstGeom>
+          <a:solidFill>
+            <a:srgbClr val="7DD3FC">
+              <a:alpha val="26000"/>
+            </a:srgbClr>
+          </a:solidFill>
+          <a:ln w="12700">
+            <a:solidFill>
+              <a:srgbClr val="FFFFFF">
+                <a:alpha val="14000"/>
+              </a:srgbClr>
+            </a:solidFill>
+            <a:prstDash val="solid"/>
+          </a:ln>
+          <a:effectLst>
+            <a:outerShdw sx="100000" sy="100000" kx="0" ky="0" algn="bl" rotWithShape="0" blurRad="12700" dist="50800" dir="2700000">
+              <a:srgbClr val="7DD3FC">
+                <a:alpha val="10000"/>
+              </a:srgbClr>
+            </a:outerShdw>
+            <a:glow rad="63500">
+              <a:srgbClr val="7DD3FC">
+                <a:alpha val="23000"/>
+              </a:srgbClr>
+            </a:glow>
+          </a:effectLst>
+        </p:spPr>
+      </p:sp>
+      <p:sp>
+        <p:nvSpPr>
+          <p:cNvPr id="3" name="Shape 1"/>
+          <p:cNvSpPr/>
+          <p:nvPr/>
+        </p:nvSpPr>
+        <p:spPr>
+          <a:xfrm>
             <a:off x="566928" y="475488"/>
             <a:ext cx="11057839" cy="5907024"/>
           </a:xfrm>
@@ -25472,7 +28375,7 @@
       </p:sp>
       <p:sp>
         <p:nvSpPr>
-          <p:cNvPr id="3" name="Shape 1"/>
+          <p:cNvPr id="4" name="Shape 2"/>
           <p:cNvSpPr/>
           <p:nvPr/>
         </p:nvSpPr>
@@ -25501,7 +28404,7 @@
       </p:sp>
       <p:sp>
         <p:nvSpPr>
-          <p:cNvPr id="4" name="Shape 2"/>
+          <p:cNvPr id="5" name="Shape 3"/>
           <p:cNvSpPr/>
           <p:nvPr/>
         </p:nvSpPr>
@@ -25530,7 +28433,7 @@
       </p:sp>
       <p:sp>
         <p:nvSpPr>
-          <p:cNvPr id="5" name="Shape 3"/>
+          <p:cNvPr id="6" name="Shape 4"/>
           <p:cNvSpPr/>
           <p:nvPr/>
         </p:nvSpPr>
@@ -25559,7 +28462,7 @@
       </p:sp>
       <p:sp>
         <p:nvSpPr>
-          <p:cNvPr id="6" name="Shape 4"/>
+          <p:cNvPr id="7" name="Shape 5"/>
           <p:cNvSpPr/>
           <p:nvPr/>
         </p:nvSpPr>
@@ -25584,7 +28487,7 @@
       </p:sp>
       <p:sp>
         <p:nvSpPr>
-          <p:cNvPr id="7" name="Shape 5"/>
+          <p:cNvPr id="8" name="Shape 6"/>
           <p:cNvSpPr/>
           <p:nvPr/>
         </p:nvSpPr>
@@ -25609,7 +28512,94 @@
       </p:sp>
       <p:sp>
         <p:nvSpPr>
-          <p:cNvPr id="8" name="Shape 6"/>
+          <p:cNvPr id="9" name="Shape 7"/>
+          <p:cNvSpPr/>
+          <p:nvPr/>
+        </p:nvSpPr>
+        <p:spPr>
+          <a:xfrm>
+            <a:off x="9631375" y="603504"/>
+            <a:ext cx="1353312" cy="0"/>
+          </a:xfrm>
+          <a:prstGeom prst="line">
+            <a:avLst/>
+          </a:prstGeom>
+          <a:noFill/>
+          <a:ln w="12700">
+            <a:solidFill>
+              <a:srgbClr val="FFFFFF">
+                <a:alpha val="54000"/>
+              </a:srgbClr>
+            </a:solidFill>
+            <a:prstDash val="solid"/>
+          </a:ln>
+        </p:spPr>
+      </p:sp>
+      <p:sp>
+        <p:nvSpPr>
+          <p:cNvPr id="10" name="Shape 8"/>
+          <p:cNvSpPr/>
+          <p:nvPr/>
+        </p:nvSpPr>
+        <p:spPr>
+          <a:xfrm rot="-180000">
+            <a:off x="530352" y="438912"/>
+            <a:ext cx="6583515" cy="146304"/>
+          </a:xfrm>
+          <a:prstGeom prst="roundRect">
+            <a:avLst>
+              <a:gd name="adj" fmla="val 37500"/>
+            </a:avLst>
+          </a:prstGeom>
+          <a:solidFill>
+            <a:srgbClr val="FFFFFF">
+              <a:alpha val="22000"/>
+            </a:srgbClr>
+          </a:solidFill>
+          <a:ln w="12700">
+            <a:solidFill>
+              <a:srgbClr val="FFFFFF">
+                <a:alpha val="0"/>
+              </a:srgbClr>
+            </a:solidFill>
+            <a:prstDash val="solid"/>
+          </a:ln>
+        </p:spPr>
+      </p:sp>
+      <p:sp>
+        <p:nvSpPr>
+          <p:cNvPr id="11" name="Shape 9"/>
+          <p:cNvSpPr/>
+          <p:nvPr/>
+        </p:nvSpPr>
+        <p:spPr>
+          <a:xfrm rot="120000">
+            <a:off x="7558851" y="256032"/>
+            <a:ext cx="3047924" cy="201168"/>
+          </a:xfrm>
+          <a:prstGeom prst="roundRect">
+            <a:avLst>
+              <a:gd name="adj" fmla="val 31818"/>
+            </a:avLst>
+          </a:prstGeom>
+          <a:solidFill>
+            <a:srgbClr val="7DD3FC">
+              <a:alpha val="64000"/>
+            </a:srgbClr>
+          </a:solidFill>
+          <a:ln w="12700">
+            <a:solidFill>
+              <a:srgbClr val="FFFFFF">
+                <a:alpha val="18000"/>
+              </a:srgbClr>
+            </a:solidFill>
+            <a:prstDash val="solid"/>
+          </a:ln>
+        </p:spPr>
+      </p:sp>
+      <p:sp>
+        <p:nvSpPr>
+          <p:cNvPr id="12" name="Shape 10"/>
           <p:cNvSpPr/>
           <p:nvPr/>
         </p:nvSpPr>
@@ -25650,7 +28640,7 @@
       </p:sp>
       <p:sp>
         <p:nvSpPr>
-          <p:cNvPr id="9" name="Shape 7"/>
+          <p:cNvPr id="13" name="Shape 11"/>
           <p:cNvSpPr/>
           <p:nvPr/>
         </p:nvSpPr>
@@ -25679,7 +28669,7 @@
       </p:sp>
       <p:sp>
         <p:nvSpPr>
-          <p:cNvPr id="10" name="Shape 8"/>
+          <p:cNvPr id="14" name="Shape 12"/>
           <p:cNvSpPr/>
           <p:nvPr/>
         </p:nvSpPr>
@@ -25706,7 +28696,7 @@
       </p:sp>
       <p:sp>
         <p:nvSpPr>
-          <p:cNvPr id="11" name="Shape 9"/>
+          <p:cNvPr id="15" name="Shape 13"/>
           <p:cNvSpPr/>
           <p:nvPr/>
         </p:nvSpPr>
@@ -25733,7 +28723,7 @@
       </p:sp>
       <p:sp>
         <p:nvSpPr>
-          <p:cNvPr id="12" name="Shape 10"/>
+          <p:cNvPr id="16" name="Shape 14"/>
           <p:cNvSpPr/>
           <p:nvPr/>
         </p:nvSpPr>
@@ -25760,7 +28750,7 @@
       </p:sp>
       <p:pic>
         <p:nvPicPr>
-          <p:cNvPr id="13" name="Image 0" descr="preencoded.png">    </p:cNvPr>
+          <p:cNvPr id="17" name="Image 0" descr="preencoded.png">    </p:cNvPr>
           <p:cNvPicPr>
             <a:picLocks noChangeAspect="1"/>
           </p:cNvPicPr>
@@ -25790,7 +28780,7 @@
       </p:pic>
       <p:sp>
         <p:nvSpPr>
-          <p:cNvPr id="14" name="Shape 11"/>
+          <p:cNvPr id="18" name="Shape 15"/>
           <p:cNvSpPr/>
           <p:nvPr/>
         </p:nvSpPr>
@@ -25831,7 +28821,7 @@
       </p:sp>
       <p:pic>
         <p:nvPicPr>
-          <p:cNvPr id="15" name="Image 1" descr="preencoded.png">    </p:cNvPr>
+          <p:cNvPr id="19" name="Image 1" descr="preencoded.png">    </p:cNvPr>
           <p:cNvPicPr>
             <a:picLocks noChangeAspect="1"/>
           </p:cNvPicPr>
@@ -25861,7 +28851,7 @@
       </p:pic>
       <p:sp>
         <p:nvSpPr>
-          <p:cNvPr id="16" name="Shape 12"/>
+          <p:cNvPr id="20" name="Shape 16"/>
           <p:cNvSpPr/>
           <p:nvPr/>
         </p:nvSpPr>
@@ -25902,7 +28892,7 @@
       </p:sp>
       <p:pic>
         <p:nvPicPr>
-          <p:cNvPr id="17" name="Image 2" descr="preencoded.png">    </p:cNvPr>
+          <p:cNvPr id="21" name="Image 2" descr="preencoded.png">    </p:cNvPr>
           <p:cNvPicPr>
             <a:picLocks noChangeAspect="1"/>
           </p:cNvPicPr>
@@ -25932,7 +28922,7 @@
       </p:pic>
       <p:sp>
         <p:nvSpPr>
-          <p:cNvPr id="18" name="Shape 13"/>
+          <p:cNvPr id="22" name="Shape 17"/>
           <p:cNvSpPr/>
           <p:nvPr/>
         </p:nvSpPr>
@@ -25973,7 +28963,7 @@
       </p:sp>
       <p:sp>
         <p:nvSpPr>
-          <p:cNvPr id="19" name="Shape 14"/>
+          <p:cNvPr id="23" name="Shape 18"/>
           <p:cNvSpPr/>
           <p:nvPr/>
         </p:nvSpPr>
@@ -26002,7 +28992,7 @@
       </p:sp>
       <p:sp>
         <p:nvSpPr>
-          <p:cNvPr id="20" name="Shape 15"/>
+          <p:cNvPr id="24" name="Shape 19"/>
           <p:cNvSpPr/>
           <p:nvPr/>
         </p:nvSpPr>
@@ -26029,7 +29019,7 @@
       </p:sp>
       <p:sp>
         <p:nvSpPr>
-          <p:cNvPr id="21" name="Shape 16"/>
+          <p:cNvPr id="25" name="Shape 20"/>
           <p:cNvSpPr/>
           <p:nvPr/>
         </p:nvSpPr>
@@ -26056,7 +29046,7 @@
       </p:sp>
       <p:sp>
         <p:nvSpPr>
-          <p:cNvPr id="22" name="Shape 17"/>
+          <p:cNvPr id="26" name="Shape 21"/>
           <p:cNvSpPr/>
           <p:nvPr/>
         </p:nvSpPr>
@@ -26083,7 +29073,7 @@
       </p:sp>
       <p:sp>
         <p:nvSpPr>
-          <p:cNvPr id="23" name="mdpr:1-2-dfa474:title:__title:1-2-dfa474"/>
+          <p:cNvPr id="27" name="mdpr:1-2-dfa474:title:__title:1-2-dfa474"/>
           <p:cNvSpPr txBox="1"/>
           <p:nvPr/>
         </p:nvSpPr>
@@ -26125,7 +29115,7 @@
       </p:sp>
       <p:sp>
         <p:nvSpPr>
-          <p:cNvPr id="24" name="Shape 19"/>
+          <p:cNvPr id="28" name="Shape 23"/>
           <p:cNvSpPr/>
           <p:nvPr/>
         </p:nvSpPr>
@@ -26152,7 +29142,7 @@
       </p:sp>
       <p:pic>
         <p:nvPicPr>
-          <p:cNvPr id="25" name="Image 3" descr="article icon from tabler-icons (MIT)">    </p:cNvPr>
+          <p:cNvPr id="29" name="Image 3" descr="article icon from tabler-icons (MIT)">    </p:cNvPr>
           <p:cNvPicPr>
             <a:picLocks noChangeAspect="1"/>
           </p:cNvPicPr>
@@ -26182,7 +29172,7 @@
       </p:pic>
       <p:sp>
         <p:nvSpPr>
-          <p:cNvPr id="26" name="mdpr:1-2-dfa474:item-1:block-8-chunk-1"/>
+          <p:cNvPr id="30" name="mdpr:1-2-dfa474:item-1:block-8-chunk-1"/>
           <p:cNvSpPr txBox="1"/>
           <p:nvPr/>
         </p:nvSpPr>
@@ -26241,7 +29231,7 @@
       </p:sp>
       <p:sp>
         <p:nvSpPr>
-          <p:cNvPr id="27" name="Shape 21"/>
+          <p:cNvPr id="31" name="Shape 25"/>
           <p:cNvSpPr/>
           <p:nvPr/>
         </p:nvSpPr>
@@ -26268,7 +29258,7 @@
       </p:sp>
       <p:pic>
         <p:nvPicPr>
-          <p:cNvPr id="28" name="Image 4" descr="article icon from tabler-icons (MIT)">    </p:cNvPr>
+          <p:cNvPr id="32" name="Image 4" descr="article icon from tabler-icons (MIT)">    </p:cNvPr>
           <p:cNvPicPr>
             <a:picLocks noChangeAspect="1"/>
           </p:cNvPicPr>
@@ -26298,7 +29288,7 @@
       </p:pic>
       <p:sp>
         <p:nvSpPr>
-          <p:cNvPr id="29" name="mdpr:1-2-dfa474:item-2:block-8-chunk-1"/>
+          <p:cNvPr id="33" name="mdpr:1-2-dfa474:item-2:block-8-chunk-1"/>
           <p:cNvSpPr txBox="1"/>
           <p:nvPr/>
         </p:nvSpPr>
@@ -26357,7 +29347,7 @@
       </p:sp>
       <p:sp>
         <p:nvSpPr>
-          <p:cNvPr id="30" name="Shape 23"/>
+          <p:cNvPr id="34" name="Shape 27"/>
           <p:cNvSpPr/>
           <p:nvPr/>
         </p:nvSpPr>
@@ -26384,7 +29374,7 @@
       </p:sp>
       <p:pic>
         <p:nvPicPr>
-          <p:cNvPr id="31" name="Image 5" descr="article icon from tabler-icons (MIT)">    </p:cNvPr>
+          <p:cNvPr id="35" name="Image 5" descr="article icon from tabler-icons (MIT)">    </p:cNvPr>
           <p:cNvPicPr>
             <a:picLocks noChangeAspect="1"/>
           </p:cNvPicPr>
@@ -26414,7 +29404,7 @@
       </p:pic>
       <p:sp>
         <p:nvSpPr>
-          <p:cNvPr id="32" name="mdpr:1-2-dfa474:item-3:block-8-chunk-1"/>
+          <p:cNvPr id="36" name="mdpr:1-2-dfa474:item-3:block-8-chunk-1"/>
           <p:cNvSpPr txBox="1"/>
           <p:nvPr/>
         </p:nvSpPr>
@@ -26511,6 +29501,49 @@
         </p:nvSpPr>
         <p:spPr>
           <a:xfrm>
+            <a:off x="310896" y="256032"/>
+            <a:ext cx="10893247" cy="5779008"/>
+          </a:xfrm>
+          <a:prstGeom prst="roundRect">
+            <a:avLst>
+              <a:gd name="adj" fmla="val 1899"/>
+            </a:avLst>
+          </a:prstGeom>
+          <a:solidFill>
+            <a:srgbClr val="7DD3FC">
+              <a:alpha val="26000"/>
+            </a:srgbClr>
+          </a:solidFill>
+          <a:ln w="12700">
+            <a:solidFill>
+              <a:srgbClr val="FFFFFF">
+                <a:alpha val="14000"/>
+              </a:srgbClr>
+            </a:solidFill>
+            <a:prstDash val="solid"/>
+          </a:ln>
+          <a:effectLst>
+            <a:outerShdw sx="100000" sy="100000" kx="0" ky="0" algn="bl" rotWithShape="0" blurRad="12700" dist="50800" dir="2700000">
+              <a:srgbClr val="7DD3FC">
+                <a:alpha val="10000"/>
+              </a:srgbClr>
+            </a:outerShdw>
+            <a:glow rad="63500">
+              <a:srgbClr val="7DD3FC">
+                <a:alpha val="23000"/>
+              </a:srgbClr>
+            </a:glow>
+          </a:effectLst>
+        </p:spPr>
+      </p:sp>
+      <p:sp>
+        <p:nvSpPr>
+          <p:cNvPr id="3" name="Shape 1"/>
+          <p:cNvSpPr/>
+          <p:nvPr/>
+        </p:nvSpPr>
+        <p:spPr>
+          <a:xfrm>
             <a:off x="566928" y="475488"/>
             <a:ext cx="11057839" cy="5907024"/>
           </a:xfrm>
@@ -26548,7 +29581,7 @@
       </p:sp>
       <p:sp>
         <p:nvSpPr>
-          <p:cNvPr id="3" name="Shape 1"/>
+          <p:cNvPr id="4" name="Shape 2"/>
           <p:cNvSpPr/>
           <p:nvPr/>
         </p:nvSpPr>
@@ -26577,7 +29610,7 @@
       </p:sp>
       <p:sp>
         <p:nvSpPr>
-          <p:cNvPr id="4" name="Shape 2"/>
+          <p:cNvPr id="5" name="Shape 3"/>
           <p:cNvSpPr/>
           <p:nvPr/>
         </p:nvSpPr>
@@ -26606,7 +29639,7 @@
       </p:sp>
       <p:sp>
         <p:nvSpPr>
-          <p:cNvPr id="5" name="Shape 3"/>
+          <p:cNvPr id="6" name="Shape 4"/>
           <p:cNvSpPr/>
           <p:nvPr/>
         </p:nvSpPr>
@@ -26635,7 +29668,7 @@
       </p:sp>
       <p:sp>
         <p:nvSpPr>
-          <p:cNvPr id="6" name="Shape 4"/>
+          <p:cNvPr id="7" name="Shape 5"/>
           <p:cNvSpPr/>
           <p:nvPr/>
         </p:nvSpPr>
@@ -26660,7 +29693,7 @@
       </p:sp>
       <p:sp>
         <p:nvSpPr>
-          <p:cNvPr id="7" name="Shape 5"/>
+          <p:cNvPr id="8" name="Shape 6"/>
           <p:cNvSpPr/>
           <p:nvPr/>
         </p:nvSpPr>
@@ -26685,7 +29718,94 @@
       </p:sp>
       <p:sp>
         <p:nvSpPr>
-          <p:cNvPr id="8" name="Shape 6"/>
+          <p:cNvPr id="9" name="Shape 7"/>
+          <p:cNvSpPr/>
+          <p:nvPr/>
+        </p:nvSpPr>
+        <p:spPr>
+          <a:xfrm>
+            <a:off x="9631375" y="603504"/>
+            <a:ext cx="1353312" cy="0"/>
+          </a:xfrm>
+          <a:prstGeom prst="line">
+            <a:avLst/>
+          </a:prstGeom>
+          <a:noFill/>
+          <a:ln w="12700">
+            <a:solidFill>
+              <a:srgbClr val="FFFFFF">
+                <a:alpha val="54000"/>
+              </a:srgbClr>
+            </a:solidFill>
+            <a:prstDash val="solid"/>
+          </a:ln>
+        </p:spPr>
+      </p:sp>
+      <p:sp>
+        <p:nvSpPr>
+          <p:cNvPr id="10" name="Shape 8"/>
+          <p:cNvSpPr/>
+          <p:nvPr/>
+        </p:nvSpPr>
+        <p:spPr>
+          <a:xfrm rot="-180000">
+            <a:off x="530352" y="438912"/>
+            <a:ext cx="6583515" cy="146304"/>
+          </a:xfrm>
+          <a:prstGeom prst="roundRect">
+            <a:avLst>
+              <a:gd name="adj" fmla="val 37500"/>
+            </a:avLst>
+          </a:prstGeom>
+          <a:solidFill>
+            <a:srgbClr val="FFFFFF">
+              <a:alpha val="22000"/>
+            </a:srgbClr>
+          </a:solidFill>
+          <a:ln w="12700">
+            <a:solidFill>
+              <a:srgbClr val="FFFFFF">
+                <a:alpha val="0"/>
+              </a:srgbClr>
+            </a:solidFill>
+            <a:prstDash val="solid"/>
+          </a:ln>
+        </p:spPr>
+      </p:sp>
+      <p:sp>
+        <p:nvSpPr>
+          <p:cNvPr id="11" name="Shape 9"/>
+          <p:cNvSpPr/>
+          <p:nvPr/>
+        </p:nvSpPr>
+        <p:spPr>
+          <a:xfrm rot="120000">
+            <a:off x="7558851" y="256032"/>
+            <a:ext cx="3047924" cy="201168"/>
+          </a:xfrm>
+          <a:prstGeom prst="roundRect">
+            <a:avLst>
+              <a:gd name="adj" fmla="val 31818"/>
+            </a:avLst>
+          </a:prstGeom>
+          <a:solidFill>
+            <a:srgbClr val="7DD3FC">
+              <a:alpha val="64000"/>
+            </a:srgbClr>
+          </a:solidFill>
+          <a:ln w="12700">
+            <a:solidFill>
+              <a:srgbClr val="FFFFFF">
+                <a:alpha val="18000"/>
+              </a:srgbClr>
+            </a:solidFill>
+            <a:prstDash val="solid"/>
+          </a:ln>
+        </p:spPr>
+      </p:sp>
+      <p:sp>
+        <p:nvSpPr>
+          <p:cNvPr id="12" name="Shape 10"/>
           <p:cNvSpPr/>
           <p:nvPr/>
         </p:nvSpPr>
@@ -26726,7 +29846,7 @@
       </p:sp>
       <p:sp>
         <p:nvSpPr>
-          <p:cNvPr id="9" name="Shape 7"/>
+          <p:cNvPr id="13" name="Shape 11"/>
           <p:cNvSpPr/>
           <p:nvPr/>
         </p:nvSpPr>
@@ -26755,7 +29875,7 @@
       </p:sp>
       <p:sp>
         <p:nvSpPr>
-          <p:cNvPr id="10" name="Shape 8"/>
+          <p:cNvPr id="14" name="Shape 12"/>
           <p:cNvSpPr/>
           <p:nvPr/>
         </p:nvSpPr>
@@ -26782,7 +29902,7 @@
       </p:sp>
       <p:sp>
         <p:nvSpPr>
-          <p:cNvPr id="11" name="Shape 9"/>
+          <p:cNvPr id="15" name="Shape 13"/>
           <p:cNvSpPr/>
           <p:nvPr/>
         </p:nvSpPr>
@@ -26809,7 +29929,7 @@
       </p:sp>
       <p:sp>
         <p:nvSpPr>
-          <p:cNvPr id="12" name="Shape 10"/>
+          <p:cNvPr id="16" name="Shape 14"/>
           <p:cNvSpPr/>
           <p:nvPr/>
         </p:nvSpPr>
@@ -26836,7 +29956,7 @@
       </p:sp>
       <p:sp>
         <p:nvSpPr>
-          <p:cNvPr id="13" name="Shape 11"/>
+          <p:cNvPr id="17" name="Shape 15"/>
           <p:cNvSpPr/>
           <p:nvPr/>
         </p:nvSpPr>
@@ -26863,7 +29983,7 @@
       </p:sp>
       <p:sp>
         <p:nvSpPr>
-          <p:cNvPr id="14" name="Shape 12"/>
+          <p:cNvPr id="18" name="Shape 16"/>
           <p:cNvSpPr/>
           <p:nvPr/>
         </p:nvSpPr>
@@ -26890,7 +30010,7 @@
       </p:sp>
       <p:sp>
         <p:nvSpPr>
-          <p:cNvPr id="15" name="mdpr:2-2-149bde:title:__title:2-2-149bde"/>
+          <p:cNvPr id="19" name="mdpr:2-2-149bde:title:__title:2-2-149bde"/>
           <p:cNvSpPr txBox="1"/>
           <p:nvPr/>
         </p:nvSpPr>
@@ -26932,7 +30052,7 @@
       </p:sp>
       <p:sp>
         <p:nvSpPr>
-          <p:cNvPr id="16" name="mdpr:2-2-149bde:left:block-8-chunk-2"/>
+          <p:cNvPr id="20" name="mdpr:2-2-149bde:left:block-8-chunk-2"/>
           <p:cNvSpPr txBox="1"/>
           <p:nvPr/>
         </p:nvSpPr>
@@ -26991,7 +30111,7 @@
       </p:sp>
       <p:sp>
         <p:nvSpPr>
-          <p:cNvPr id="17" name="mdpr:2-2-149bde:right:block-8-chunk-2"/>
+          <p:cNvPr id="21" name="mdpr:2-2-149bde:right:block-8-chunk-2"/>
           <p:cNvSpPr txBox="1"/>
           <p:nvPr/>
         </p:nvSpPr>
@@ -27088,6 +30208,49 @@
         </p:nvSpPr>
         <p:spPr>
           <a:xfrm>
+            <a:off x="310896" y="256032"/>
+            <a:ext cx="10893247" cy="5779008"/>
+          </a:xfrm>
+          <a:prstGeom prst="roundRect">
+            <a:avLst>
+              <a:gd name="adj" fmla="val 1899"/>
+            </a:avLst>
+          </a:prstGeom>
+          <a:solidFill>
+            <a:srgbClr val="7DD3FC">
+              <a:alpha val="26000"/>
+            </a:srgbClr>
+          </a:solidFill>
+          <a:ln w="12700">
+            <a:solidFill>
+              <a:srgbClr val="FFFFFF">
+                <a:alpha val="14000"/>
+              </a:srgbClr>
+            </a:solidFill>
+            <a:prstDash val="solid"/>
+          </a:ln>
+          <a:effectLst>
+            <a:outerShdw sx="100000" sy="100000" kx="0" ky="0" algn="bl" rotWithShape="0" blurRad="12700" dist="50800" dir="2700000">
+              <a:srgbClr val="7DD3FC">
+                <a:alpha val="10000"/>
+              </a:srgbClr>
+            </a:outerShdw>
+            <a:glow rad="63500">
+              <a:srgbClr val="7DD3FC">
+                <a:alpha val="23000"/>
+              </a:srgbClr>
+            </a:glow>
+          </a:effectLst>
+        </p:spPr>
+      </p:sp>
+      <p:sp>
+        <p:nvSpPr>
+          <p:cNvPr id="3" name="Shape 1"/>
+          <p:cNvSpPr/>
+          <p:nvPr/>
+        </p:nvSpPr>
+        <p:spPr>
+          <a:xfrm>
             <a:off x="566928" y="475488"/>
             <a:ext cx="11057839" cy="5907024"/>
           </a:xfrm>
@@ -27125,7 +30288,7 @@
       </p:sp>
       <p:sp>
         <p:nvSpPr>
-          <p:cNvPr id="3" name="Shape 1"/>
+          <p:cNvPr id="4" name="Shape 2"/>
           <p:cNvSpPr/>
           <p:nvPr/>
         </p:nvSpPr>
@@ -27154,7 +30317,7 @@
       </p:sp>
       <p:sp>
         <p:nvSpPr>
-          <p:cNvPr id="4" name="Shape 2"/>
+          <p:cNvPr id="5" name="Shape 3"/>
           <p:cNvSpPr/>
           <p:nvPr/>
         </p:nvSpPr>
@@ -27183,7 +30346,7 @@
       </p:sp>
       <p:sp>
         <p:nvSpPr>
-          <p:cNvPr id="5" name="Shape 3"/>
+          <p:cNvPr id="6" name="Shape 4"/>
           <p:cNvSpPr/>
           <p:nvPr/>
         </p:nvSpPr>
@@ -27212,7 +30375,7 @@
       </p:sp>
       <p:sp>
         <p:nvSpPr>
-          <p:cNvPr id="6" name="Shape 4"/>
+          <p:cNvPr id="7" name="Shape 5"/>
           <p:cNvSpPr/>
           <p:nvPr/>
         </p:nvSpPr>
@@ -27237,7 +30400,7 @@
       </p:sp>
       <p:sp>
         <p:nvSpPr>
-          <p:cNvPr id="7" name="Shape 5"/>
+          <p:cNvPr id="8" name="Shape 6"/>
           <p:cNvSpPr/>
           <p:nvPr/>
         </p:nvSpPr>
@@ -27262,7 +30425,94 @@
       </p:sp>
       <p:sp>
         <p:nvSpPr>
-          <p:cNvPr id="8" name="Shape 6"/>
+          <p:cNvPr id="9" name="Shape 7"/>
+          <p:cNvSpPr/>
+          <p:nvPr/>
+        </p:nvSpPr>
+        <p:spPr>
+          <a:xfrm>
+            <a:off x="9631375" y="603504"/>
+            <a:ext cx="1353312" cy="0"/>
+          </a:xfrm>
+          <a:prstGeom prst="line">
+            <a:avLst/>
+          </a:prstGeom>
+          <a:noFill/>
+          <a:ln w="12700">
+            <a:solidFill>
+              <a:srgbClr val="FFFFFF">
+                <a:alpha val="54000"/>
+              </a:srgbClr>
+            </a:solidFill>
+            <a:prstDash val="solid"/>
+          </a:ln>
+        </p:spPr>
+      </p:sp>
+      <p:sp>
+        <p:nvSpPr>
+          <p:cNvPr id="10" name="Shape 8"/>
+          <p:cNvSpPr/>
+          <p:nvPr/>
+        </p:nvSpPr>
+        <p:spPr>
+          <a:xfrm rot="-180000">
+            <a:off x="530352" y="438912"/>
+            <a:ext cx="6583515" cy="146304"/>
+          </a:xfrm>
+          <a:prstGeom prst="roundRect">
+            <a:avLst>
+              <a:gd name="adj" fmla="val 37500"/>
+            </a:avLst>
+          </a:prstGeom>
+          <a:solidFill>
+            <a:srgbClr val="FFFFFF">
+              <a:alpha val="22000"/>
+            </a:srgbClr>
+          </a:solidFill>
+          <a:ln w="12700">
+            <a:solidFill>
+              <a:srgbClr val="FFFFFF">
+                <a:alpha val="0"/>
+              </a:srgbClr>
+            </a:solidFill>
+            <a:prstDash val="solid"/>
+          </a:ln>
+        </p:spPr>
+      </p:sp>
+      <p:sp>
+        <p:nvSpPr>
+          <p:cNvPr id="11" name="Shape 9"/>
+          <p:cNvSpPr/>
+          <p:nvPr/>
+        </p:nvSpPr>
+        <p:spPr>
+          <a:xfrm rot="120000">
+            <a:off x="7558851" y="256032"/>
+            <a:ext cx="3047924" cy="201168"/>
+          </a:xfrm>
+          <a:prstGeom prst="roundRect">
+            <a:avLst>
+              <a:gd name="adj" fmla="val 31818"/>
+            </a:avLst>
+          </a:prstGeom>
+          <a:solidFill>
+            <a:srgbClr val="7DD3FC">
+              <a:alpha val="64000"/>
+            </a:srgbClr>
+          </a:solidFill>
+          <a:ln w="12700">
+            <a:solidFill>
+              <a:srgbClr val="FFFFFF">
+                <a:alpha val="18000"/>
+              </a:srgbClr>
+            </a:solidFill>
+            <a:prstDash val="solid"/>
+          </a:ln>
+        </p:spPr>
+      </p:sp>
+      <p:sp>
+        <p:nvSpPr>
+          <p:cNvPr id="12" name="Shape 10"/>
           <p:cNvSpPr/>
           <p:nvPr/>
         </p:nvSpPr>
@@ -27303,7 +30553,7 @@
       </p:sp>
       <p:sp>
         <p:nvSpPr>
-          <p:cNvPr id="9" name="Shape 7"/>
+          <p:cNvPr id="13" name="Shape 11"/>
           <p:cNvSpPr/>
           <p:nvPr/>
         </p:nvSpPr>
@@ -27332,7 +30582,7 @@
       </p:sp>
       <p:sp>
         <p:nvSpPr>
-          <p:cNvPr id="10" name="Shape 8"/>
+          <p:cNvPr id="14" name="Shape 12"/>
           <p:cNvSpPr/>
           <p:nvPr/>
         </p:nvSpPr>
@@ -27359,7 +30609,7 @@
       </p:sp>
       <p:sp>
         <p:nvSpPr>
-          <p:cNvPr id="11" name="Shape 9"/>
+          <p:cNvPr id="15" name="Shape 13"/>
           <p:cNvSpPr/>
           <p:nvPr/>
         </p:nvSpPr>
@@ -27386,7 +30636,7 @@
       </p:sp>
       <p:sp>
         <p:nvSpPr>
-          <p:cNvPr id="12" name="Shape 10"/>
+          <p:cNvPr id="16" name="Shape 14"/>
           <p:cNvSpPr/>
           <p:nvPr/>
         </p:nvSpPr>
@@ -27413,7 +30663,7 @@
       </p:sp>
       <p:sp>
         <p:nvSpPr>
-          <p:cNvPr id="13" name="Shape 11"/>
+          <p:cNvPr id="17" name="Shape 15"/>
           <p:cNvSpPr/>
           <p:nvPr/>
         </p:nvSpPr>
@@ -27440,7 +30690,7 @@
       </p:sp>
       <p:sp>
         <p:nvSpPr>
-          <p:cNvPr id="14" name="Shape 12"/>
+          <p:cNvPr id="18" name="Shape 16"/>
           <p:cNvSpPr/>
           <p:nvPr/>
         </p:nvSpPr>
@@ -27467,7 +30717,7 @@
       </p:sp>
       <p:sp>
         <p:nvSpPr>
-          <p:cNvPr id="15" name="mdpr:1-2-5a84f1:title:__title:1-2-5a84f1"/>
+          <p:cNvPr id="19" name="mdpr:1-2-5a84f1:title:__title:1-2-5a84f1"/>
           <p:cNvSpPr txBox="1"/>
           <p:nvPr/>
         </p:nvSpPr>
@@ -27509,7 +30759,7 @@
       </p:sp>
       <p:sp>
         <p:nvSpPr>
-          <p:cNvPr id="16" name="mdpr:1-2-5a84f1:left:block-10-chunk-1"/>
+          <p:cNvPr id="20" name="mdpr:1-2-5a84f1:left:block-10-chunk-1"/>
           <p:cNvSpPr txBox="1"/>
           <p:nvPr/>
         </p:nvSpPr>
@@ -27568,7 +30818,7 @@
       </p:sp>
       <p:sp>
         <p:nvSpPr>
-          <p:cNvPr id="17" name="mdpr:1-2-5a84f1:right:block-10-chunk-1"/>
+          <p:cNvPr id="21" name="mdpr:1-2-5a84f1:right:block-10-chunk-1"/>
           <p:cNvSpPr txBox="1"/>
           <p:nvPr/>
         </p:nvSpPr>

--- a/docs/theme-preview/pptx/liquid-glass.pptx
+++ b/docs/theme-preview/pptx/liquid-glass.pptx
@@ -7094,401 +7094,63 @@
           </a:ln>
         </p:spPr>
       </p:sp>
-      <p:pic>
-        <p:nvPicPr>
-          <p:cNvPr id="17" name="Image 0" descr="preencoded.png">    </p:cNvPr>
-          <p:cNvPicPr>
-            <a:picLocks noChangeAspect="1"/>
-          </p:cNvPicPr>
-          <p:nvPr/>
-        </p:nvPicPr>
-        <p:blipFill>
-          <a:blip r:embed="rId1">
-            <a:extLst>
-              <a:ext uri="{96DAC541-7B7A-43D3-8B79-37D633B846F1}">
-                <asvg:svgBlip xmlns:asvg="http://schemas.microsoft.com/office/drawing/2016/SVG/main" r:embed="rId2"/>
-              </a:ext>
-            </a:extLst>
-          </a:blip>
-          <a:stretch>
-            <a:fillRect/>
-          </a:stretch>
-        </p:blipFill>
-        <p:spPr>
-          <a:xfrm>
-            <a:off x="822960" y="1463040"/>
-            <a:ext cx="5029200" cy="1920240"/>
-          </a:xfrm>
-          <a:prstGeom prst="rect">
-            <a:avLst/>
-          </a:prstGeom>
-        </p:spPr>
-      </p:pic>
-      <p:sp>
-        <p:nvSpPr>
-          <p:cNvPr id="18" name="Shape 15"/>
-          <p:cNvSpPr/>
-          <p:nvPr/>
-        </p:nvSpPr>
-        <p:spPr>
-          <a:xfrm>
-            <a:off x="822960" y="1463040"/>
-            <a:ext cx="5029200" cy="1920240"/>
-          </a:xfrm>
-          <a:prstGeom prst="rect">
-            <a:avLst/>
-          </a:prstGeom>
-          <a:solidFill>
-            <a:srgbClr val="132238">
-              <a:alpha val="0"/>
-            </a:srgbClr>
-          </a:solidFill>
-          <a:ln w="12700">
-            <a:solidFill>
-              <a:srgbClr val="BAE6FD">
+      <p:sp>
+        <p:nvSpPr>
+          <p:cNvPr id="17" name="Shape 15"/>
+          <p:cNvSpPr/>
+          <p:nvPr/>
+        </p:nvSpPr>
+        <p:spPr>
+          <a:xfrm>
+            <a:off x="822960" y="1389888"/>
+            <a:ext cx="4937760" cy="73152"/>
+          </a:xfrm>
+          <a:prstGeom prst="rect">
+            <a:avLst/>
+          </a:prstGeom>
+          <a:solidFill>
+            <a:srgbClr val="7DD3FC"/>
+          </a:solidFill>
+          <a:ln w="12700">
+            <a:solidFill>
+              <a:srgbClr val="7DD3FC">
                 <a:alpha val="0"/>
               </a:srgbClr>
             </a:solidFill>
             <a:prstDash val="solid"/>
           </a:ln>
-          <a:effectLst>
-            <a:outerShdw sx="100000" sy="100000" kx="0" ky="0" algn="bl" rotWithShape="0" blurRad="30480" dist="50800" dir="2700000">
-              <a:srgbClr val="CBD5E1">
-                <a:alpha val="20000"/>
-              </a:srgbClr>
-            </a:outerShdw>
-            <a:glow rad="63500">
-              <a:srgbClr val="7DD3FC">
-                <a:alpha val="23000"/>
-              </a:srgbClr>
-            </a:glow>
-          </a:effectLst>
-        </p:spPr>
-      </p:sp>
-      <p:pic>
-        <p:nvPicPr>
-          <p:cNvPr id="19" name="Image 1" descr="preencoded.png">    </p:cNvPr>
-          <p:cNvPicPr>
-            <a:picLocks noChangeAspect="1"/>
-          </p:cNvPicPr>
-          <p:nvPr/>
-        </p:nvPicPr>
-        <p:blipFill>
-          <a:blip r:embed="rId3">
-            <a:extLst>
-              <a:ext uri="{96DAC541-7B7A-43D3-8B79-37D633B846F1}">
-                <asvg:svgBlip xmlns:asvg="http://schemas.microsoft.com/office/drawing/2016/SVG/main" r:embed="rId4"/>
-              </a:ext>
-            </a:extLst>
-          </a:blip>
-          <a:stretch>
-            <a:fillRect/>
-          </a:stretch>
-        </p:blipFill>
-        <p:spPr>
-          <a:xfrm>
-            <a:off x="6309360" y="1463040"/>
-            <a:ext cx="5029200" cy="1920240"/>
-          </a:xfrm>
-          <a:prstGeom prst="rect">
-            <a:avLst/>
-          </a:prstGeom>
-        </p:spPr>
-      </p:pic>
-      <p:sp>
-        <p:nvSpPr>
-          <p:cNvPr id="20" name="Shape 16"/>
-          <p:cNvSpPr/>
-          <p:nvPr/>
-        </p:nvSpPr>
-        <p:spPr>
-          <a:xfrm>
-            <a:off x="6309360" y="1463040"/>
-            <a:ext cx="5029200" cy="1920240"/>
-          </a:xfrm>
-          <a:prstGeom prst="rect">
-            <a:avLst/>
-          </a:prstGeom>
-          <a:solidFill>
-            <a:srgbClr val="132238">
-              <a:alpha val="0"/>
-            </a:srgbClr>
-          </a:solidFill>
-          <a:ln w="12700">
-            <a:solidFill>
-              <a:srgbClr val="BAE6FD">
+        </p:spPr>
+      </p:sp>
+      <p:sp>
+        <p:nvSpPr>
+          <p:cNvPr id="18" name="Shape 16"/>
+          <p:cNvSpPr/>
+          <p:nvPr/>
+        </p:nvSpPr>
+        <p:spPr>
+          <a:xfrm>
+            <a:off x="6400800" y="1389888"/>
+            <a:ext cx="4937760" cy="73152"/>
+          </a:xfrm>
+          <a:prstGeom prst="rect">
+            <a:avLst/>
+          </a:prstGeom>
+          <a:solidFill>
+            <a:srgbClr val="7DD3FC"/>
+          </a:solidFill>
+          <a:ln w="12700">
+            <a:solidFill>
+              <a:srgbClr val="7DD3FC">
                 <a:alpha val="0"/>
               </a:srgbClr>
             </a:solidFill>
             <a:prstDash val="solid"/>
           </a:ln>
-          <a:effectLst>
-            <a:outerShdw sx="100000" sy="100000" kx="0" ky="0" algn="bl" rotWithShape="0" blurRad="30480" dist="50800" dir="2700000">
-              <a:srgbClr val="CBD5E1">
-                <a:alpha val="20000"/>
-              </a:srgbClr>
-            </a:outerShdw>
-            <a:glow rad="63500">
-              <a:srgbClr val="7DD3FC">
-                <a:alpha val="23000"/>
-              </a:srgbClr>
-            </a:glow>
-          </a:effectLst>
-        </p:spPr>
-      </p:sp>
-      <p:pic>
-        <p:nvPicPr>
-          <p:cNvPr id="21" name="Image 2" descr="preencoded.png">    </p:cNvPr>
-          <p:cNvPicPr>
-            <a:picLocks noChangeAspect="1"/>
-          </p:cNvPicPr>
-          <p:nvPr/>
-        </p:nvPicPr>
-        <p:blipFill>
-          <a:blip r:embed="rId5">
-            <a:extLst>
-              <a:ext uri="{96DAC541-7B7A-43D3-8B79-37D633B846F1}">
-                <asvg:svgBlip xmlns:asvg="http://schemas.microsoft.com/office/drawing/2016/SVG/main" r:embed="rId6"/>
-              </a:ext>
-            </a:extLst>
-          </a:blip>
-          <a:stretch>
-            <a:fillRect/>
-          </a:stretch>
-        </p:blipFill>
-        <p:spPr>
-          <a:xfrm>
-            <a:off x="822960" y="3749040"/>
-            <a:ext cx="5029200" cy="1920240"/>
-          </a:xfrm>
-          <a:prstGeom prst="rect">
-            <a:avLst/>
-          </a:prstGeom>
-        </p:spPr>
-      </p:pic>
-      <p:sp>
-        <p:nvSpPr>
-          <p:cNvPr id="22" name="Shape 17"/>
-          <p:cNvSpPr/>
-          <p:nvPr/>
-        </p:nvSpPr>
-        <p:spPr>
-          <a:xfrm>
-            <a:off x="822960" y="3749040"/>
-            <a:ext cx="5029200" cy="1920240"/>
-          </a:xfrm>
-          <a:prstGeom prst="rect">
-            <a:avLst/>
-          </a:prstGeom>
-          <a:solidFill>
-            <a:srgbClr val="132238">
-              <a:alpha val="0"/>
-            </a:srgbClr>
-          </a:solidFill>
-          <a:ln w="12700">
-            <a:solidFill>
-              <a:srgbClr val="BAE6FD">
-                <a:alpha val="0"/>
-              </a:srgbClr>
-            </a:solidFill>
-            <a:prstDash val="solid"/>
-          </a:ln>
-          <a:effectLst>
-            <a:outerShdw sx="100000" sy="100000" kx="0" ky="0" algn="bl" rotWithShape="0" blurRad="30480" dist="50800" dir="2700000">
-              <a:srgbClr val="CBD5E1">
-                <a:alpha val="20000"/>
-              </a:srgbClr>
-            </a:outerShdw>
-            <a:glow rad="63500">
-              <a:srgbClr val="7DD3FC">
-                <a:alpha val="23000"/>
-              </a:srgbClr>
-            </a:glow>
-          </a:effectLst>
-        </p:spPr>
-      </p:sp>
-      <p:pic>
-        <p:nvPicPr>
-          <p:cNvPr id="23" name="Image 3" descr="preencoded.png">    </p:cNvPr>
-          <p:cNvPicPr>
-            <a:picLocks noChangeAspect="1"/>
-          </p:cNvPicPr>
-          <p:nvPr/>
-        </p:nvPicPr>
-        <p:blipFill>
-          <a:blip r:embed="rId7">
-            <a:extLst>
-              <a:ext uri="{96DAC541-7B7A-43D3-8B79-37D633B846F1}">
-                <asvg:svgBlip xmlns:asvg="http://schemas.microsoft.com/office/drawing/2016/SVG/main" r:embed="rId8"/>
-              </a:ext>
-            </a:extLst>
-          </a:blip>
-          <a:stretch>
-            <a:fillRect/>
-          </a:stretch>
-        </p:blipFill>
-        <p:spPr>
-          <a:xfrm>
-            <a:off x="6309360" y="3749040"/>
-            <a:ext cx="5029200" cy="1920240"/>
-          </a:xfrm>
-          <a:prstGeom prst="rect">
-            <a:avLst/>
-          </a:prstGeom>
-        </p:spPr>
-      </p:pic>
-      <p:sp>
-        <p:nvSpPr>
-          <p:cNvPr id="24" name="Shape 18"/>
-          <p:cNvSpPr/>
-          <p:nvPr/>
-        </p:nvSpPr>
-        <p:spPr>
-          <a:xfrm>
-            <a:off x="6309360" y="3749040"/>
-            <a:ext cx="5029200" cy="1920240"/>
-          </a:xfrm>
-          <a:prstGeom prst="rect">
-            <a:avLst/>
-          </a:prstGeom>
-          <a:solidFill>
-            <a:srgbClr val="132238">
-              <a:alpha val="0"/>
-            </a:srgbClr>
-          </a:solidFill>
-          <a:ln w="12700">
-            <a:solidFill>
-              <a:srgbClr val="BAE6FD">
-                <a:alpha val="0"/>
-              </a:srgbClr>
-            </a:solidFill>
-            <a:prstDash val="solid"/>
-          </a:ln>
-          <a:effectLst>
-            <a:outerShdw sx="100000" sy="100000" kx="0" ky="0" algn="bl" rotWithShape="0" blurRad="30480" dist="50800" dir="2700000">
-              <a:srgbClr val="CBD5E1">
-                <a:alpha val="20000"/>
-              </a:srgbClr>
-            </a:outerShdw>
-            <a:glow rad="63500">
-              <a:srgbClr val="7DD3FC">
-                <a:alpha val="23000"/>
-              </a:srgbClr>
-            </a:glow>
-          </a:effectLst>
-        </p:spPr>
-      </p:sp>
-      <p:sp>
-        <p:nvSpPr>
-          <p:cNvPr id="25" name="Shape 19"/>
-          <p:cNvSpPr/>
-          <p:nvPr/>
-        </p:nvSpPr>
-        <p:spPr>
-          <a:xfrm>
-            <a:off x="822960" y="1463040"/>
-            <a:ext cx="73152" cy="1920240"/>
-          </a:xfrm>
-          <a:prstGeom prst="rect">
-            <a:avLst/>
-          </a:prstGeom>
-          <a:solidFill>
-            <a:srgbClr val="7DD3FC"/>
-          </a:solidFill>
-          <a:ln w="12700">
-            <a:solidFill>
-              <a:srgbClr val="7DD3FC">
-                <a:alpha val="0"/>
-              </a:srgbClr>
-            </a:solidFill>
-            <a:prstDash val="solid"/>
-          </a:ln>
-        </p:spPr>
-      </p:sp>
-      <p:sp>
-        <p:nvSpPr>
-          <p:cNvPr id="26" name="Shape 20"/>
-          <p:cNvSpPr/>
-          <p:nvPr/>
-        </p:nvSpPr>
-        <p:spPr>
-          <a:xfrm>
-            <a:off x="6309360" y="1463040"/>
-            <a:ext cx="73152" cy="1920240"/>
-          </a:xfrm>
-          <a:prstGeom prst="rect">
-            <a:avLst/>
-          </a:prstGeom>
-          <a:solidFill>
-            <a:srgbClr val="A78BFA"/>
-          </a:solidFill>
-          <a:ln w="12700">
-            <a:solidFill>
-              <a:srgbClr val="A78BFA">
-                <a:alpha val="0"/>
-              </a:srgbClr>
-            </a:solidFill>
-            <a:prstDash val="solid"/>
-          </a:ln>
-        </p:spPr>
-      </p:sp>
-      <p:sp>
-        <p:nvSpPr>
-          <p:cNvPr id="27" name="Shape 21"/>
-          <p:cNvSpPr/>
-          <p:nvPr/>
-        </p:nvSpPr>
-        <p:spPr>
-          <a:xfrm>
-            <a:off x="822960" y="3749040"/>
-            <a:ext cx="73152" cy="1920240"/>
-          </a:xfrm>
-          <a:prstGeom prst="rect">
-            <a:avLst/>
-          </a:prstGeom>
-          <a:solidFill>
-            <a:srgbClr val="7DD3FC"/>
-          </a:solidFill>
-          <a:ln w="12700">
-            <a:solidFill>
-              <a:srgbClr val="7DD3FC">
-                <a:alpha val="0"/>
-              </a:srgbClr>
-            </a:solidFill>
-            <a:prstDash val="solid"/>
-          </a:ln>
-        </p:spPr>
-      </p:sp>
-      <p:sp>
-        <p:nvSpPr>
-          <p:cNvPr id="28" name="Shape 22"/>
-          <p:cNvSpPr/>
-          <p:nvPr/>
-        </p:nvSpPr>
-        <p:spPr>
-          <a:xfrm>
-            <a:off x="6309360" y="3749040"/>
-            <a:ext cx="73152" cy="1920240"/>
-          </a:xfrm>
-          <a:prstGeom prst="rect">
-            <a:avLst/>
-          </a:prstGeom>
-          <a:solidFill>
-            <a:srgbClr val="A78BFA"/>
-          </a:solidFill>
-          <a:ln w="12700">
-            <a:solidFill>
-              <a:srgbClr val="A78BFA">
-                <a:alpha val="0"/>
-              </a:srgbClr>
-            </a:solidFill>
-            <a:prstDash val="solid"/>
-          </a:ln>
-        </p:spPr>
-      </p:sp>
-      <p:sp>
-        <p:nvSpPr>
-          <p:cNvPr id="29" name="mdpr:1-2-e3669a:title:__title:1-2-e3669a"/>
+        </p:spPr>
+      </p:sp>
+      <p:sp>
+        <p:nvSpPr>
+          <p:cNvPr id="19" name="mdpr:1-2-e3669a:title:__title:1-2-e3669a"/>
           <p:cNvSpPr txBox="1"/>
           <p:nvPr/>
         </p:nvSpPr>
@@ -7530,71 +7192,14 @@
       </p:sp>
       <p:sp>
         <p:nvSpPr>
-          <p:cNvPr id="30" name="Shape 24"/>
-          <p:cNvSpPr/>
-          <p:nvPr/>
-        </p:nvSpPr>
-        <p:spPr>
-          <a:xfrm>
-            <a:off x="976122" y="2130552"/>
-            <a:ext cx="585216" cy="585216"/>
-          </a:xfrm>
-          <a:prstGeom prst="roundRect">
-            <a:avLst>
-              <a:gd name="adj" fmla="val 6250"/>
-            </a:avLst>
-          </a:prstGeom>
-          <a:solidFill>
-            <a:srgbClr val="07111F"/>
-          </a:solidFill>
-          <a:ln w="12700">
-            <a:solidFill>
-              <a:srgbClr val="BAE6FD"/>
-            </a:solidFill>
-            <a:prstDash val="solid"/>
-          </a:ln>
-        </p:spPr>
-      </p:sp>
-      <p:pic>
-        <p:nvPicPr>
-          <p:cNvPr id="31" name="Image 4" descr="article icon from tabler-icons (MIT)">    </p:cNvPr>
-          <p:cNvPicPr>
-            <a:picLocks noChangeAspect="1"/>
-          </p:cNvPicPr>
-          <p:nvPr/>
-        </p:nvPicPr>
-        <p:blipFill>
-          <a:blip r:embed="rId9">
-            <a:extLst>
-              <a:ext uri="{96DAC541-7B7A-43D3-8B79-37D633B846F1}">
-                <asvg:svgBlip xmlns:asvg="http://schemas.microsoft.com/office/drawing/2016/SVG/main" r:embed="rId10"/>
-              </a:ext>
-            </a:extLst>
-          </a:blip>
-          <a:stretch>
-            <a:fillRect/>
-          </a:stretch>
-        </p:blipFill>
-        <p:spPr>
-          <a:xfrm>
-            <a:off x="1049274" y="2203704"/>
-            <a:ext cx="438912" cy="438912"/>
-          </a:xfrm>
-          <a:prstGeom prst="rect">
-            <a:avLst/>
-          </a:prstGeom>
-        </p:spPr>
-      </p:pic>
-      <p:sp>
-        <p:nvSpPr>
-          <p:cNvPr id="32" name="mdpr:1-2-e3669a:item-1:block-15-chunk-1"/>
+          <p:cNvPr id="20" name="mdpr:1-2-e3669a:left:block-15-chunk-1-block-15-chunk-1"/>
           <p:cNvSpPr txBox="1"/>
           <p:nvPr/>
         </p:nvSpPr>
         <p:spPr>
           <a:xfrm>
-            <a:off x="1689354" y="1627632"/>
-            <a:ext cx="3961638" cy="1591056"/>
+            <a:off x="896112" y="1499616"/>
+            <a:ext cx="4791456" cy="4398264"/>
           </a:xfrm>
           <a:prstGeom prst="rect">
             <a:avLst/>
@@ -7603,7 +7208,7 @@
           <a:ln/>
         </p:spPr>
         <p:txBody>
-          <a:bodyPr wrap="square" lIns="0" tIns="25400" rIns="25400" bIns="0" rtlCol="0" anchor="ctr"/>
+          <a:bodyPr wrap="square" lIns="0" tIns="25400" rIns="25400" bIns="0" rtlCol="0" anchor="t"/>
           <a:lstStyle/>
           <a:p>
             <a:pPr algn="l" indent="0" marL="0">
@@ -7613,7 +7218,7 @@
               <a:buNone/>
             </a:pPr>
             <a:r>
-              <a:rPr lang="en-US" sz="2200" b="1" dirty="0">
+              <a:rPr lang="en-US" sz="1800" b="1" dirty="0">
                 <a:solidFill>
                   <a:srgbClr val="7DD3FC"/>
                 </a:solidFill>
@@ -7621,7 +7226,7 @@
                 <a:ea typeface="Pretendard" pitchFamily="34" charset="-122"/>
                 <a:cs typeface="Pretendard" pitchFamily="34" charset="-120"/>
               </a:rPr>
-              <a:t>Surfaces</a:t>
+              <a:t>- Surfaces</a:t>
             </a:r>
             <a:pPr algn="l" indent="0" marL="0">
               <a:lnSpc>
@@ -7630,7 +7235,7 @@
               <a:buNone/>
             </a:pPr>
             <a:r>
-              <a:rPr lang="en-US" sz="2200" dirty="0">
+              <a:rPr lang="en-US" sz="1800" dirty="0">
                 <a:solidFill>
                   <a:srgbClr val="F8F8F8"/>
                 </a:solidFill>
@@ -7640,77 +7245,60 @@
               </a:rPr>
               <a:t>  rounded-card, two-corner-card, flag-drop, ticket-panel, notched-panel, circle-vine.</a:t>
             </a:r>
-            <a:endParaRPr lang="en-US" sz="2200" dirty="0"/>
+            <a:endParaRPr lang="en-US" sz="1800" dirty="0"/>
+          </a:p>
+          <a:p>
+            <a:pPr algn="l" indent="0" marL="0">
+              <a:lnSpc>
+                <a:spcPct val="120000"/>
+              </a:lnSpc>
+              <a:buNone/>
+            </a:pPr>
+            <a:r>
+              <a:rPr lang="en-US" sz="1800" b="1" dirty="0">
+                <a:solidFill>
+                  <a:srgbClr val="7DD3FC"/>
+                </a:solidFill>
+                <a:latin typeface="Pretendard" pitchFamily="34" charset="0"/>
+                <a:ea typeface="Pretendard" pitchFamily="34" charset="-122"/>
+                <a:cs typeface="Pretendard" pitchFamily="34" charset="-120"/>
+              </a:rPr>
+              <a:t>- Layouts</a:t>
+            </a:r>
+            <a:endParaRPr lang="en-US" sz="1800" dirty="0"/>
+          </a:p>
+          <a:p>
+            <a:pPr algn="l" indent="0" marL="0">
+              <a:lnSpc>
+                <a:spcPct val="120000"/>
+              </a:lnSpc>
+              <a:buNone/>
+            </a:pPr>
+            <a:r>
+              <a:rPr lang="en-US" sz="1800" dirty="0">
+                <a:solidFill>
+                  <a:srgbClr val="F8F8F8"/>
+                </a:solidFill>
+                <a:latin typeface="Pretendard" pitchFamily="34" charset="0"/>
+                <a:ea typeface="Pretendard" pitchFamily="34" charset="-122"/>
+                <a:cs typeface="Pretendard" pitchFamily="34" charset="-120"/>
+              </a:rPr>
+              <a:t>  toc-strips, two-column-compare, three-card-grid, six-tile-grid, timeline-rail, pipeline-chain.</a:t>
+            </a:r>
+            <a:endParaRPr lang="en-US" sz="1800" dirty="0"/>
           </a:p>
         </p:txBody>
       </p:sp>
       <p:sp>
         <p:nvSpPr>
-          <p:cNvPr id="33" name="Shape 26"/>
-          <p:cNvSpPr/>
-          <p:nvPr/>
-        </p:nvSpPr>
-        <p:spPr>
-          <a:xfrm>
-            <a:off x="6462522" y="2130552"/>
-            <a:ext cx="585216" cy="585216"/>
-          </a:xfrm>
-          <a:prstGeom prst="roundRect">
-            <a:avLst>
-              <a:gd name="adj" fmla="val 6250"/>
-            </a:avLst>
-          </a:prstGeom>
-          <a:solidFill>
-            <a:srgbClr val="07111F"/>
-          </a:solidFill>
-          <a:ln w="12700">
-            <a:solidFill>
-              <a:srgbClr val="BAE6FD"/>
-            </a:solidFill>
-            <a:prstDash val="solid"/>
-          </a:ln>
-        </p:spPr>
-      </p:sp>
-      <p:pic>
-        <p:nvPicPr>
-          <p:cNvPr id="34" name="Image 5" descr="table icon from tabler-icons (MIT)">    </p:cNvPr>
-          <p:cNvPicPr>
-            <a:picLocks noChangeAspect="1"/>
-          </p:cNvPicPr>
-          <p:nvPr/>
-        </p:nvPicPr>
-        <p:blipFill>
-          <a:blip r:embed="rId11">
-            <a:extLst>
-              <a:ext uri="{96DAC541-7B7A-43D3-8B79-37D633B846F1}">
-                <asvg:svgBlip xmlns:asvg="http://schemas.microsoft.com/office/drawing/2016/SVG/main" r:embed="rId12"/>
-              </a:ext>
-            </a:extLst>
-          </a:blip>
-          <a:stretch>
-            <a:fillRect/>
-          </a:stretch>
-        </p:blipFill>
-        <p:spPr>
-          <a:xfrm>
-            <a:off x="6535674" y="2203704"/>
-            <a:ext cx="438912" cy="438912"/>
-          </a:xfrm>
-          <a:prstGeom prst="rect">
-            <a:avLst/>
-          </a:prstGeom>
-        </p:spPr>
-      </p:pic>
-      <p:sp>
-        <p:nvSpPr>
-          <p:cNvPr id="35" name="mdpr:1-2-e3669a:item-2:block-15-chunk-1"/>
+          <p:cNvPr id="21" name="mdpr:1-2-e3669a:right:block-15-chunk-1-block-15-chunk-1"/>
           <p:cNvSpPr txBox="1"/>
           <p:nvPr/>
         </p:nvSpPr>
         <p:spPr>
           <a:xfrm>
-            <a:off x="7175754" y="1627632"/>
-            <a:ext cx="3961638" cy="1591056"/>
+            <a:off x="6473952" y="1499616"/>
+            <a:ext cx="4791456" cy="4398264"/>
           </a:xfrm>
           <a:prstGeom prst="rect">
             <a:avLst/>
@@ -7719,7 +7307,7 @@
           <a:ln/>
         </p:spPr>
         <p:txBody>
-          <a:bodyPr wrap="square" lIns="0" tIns="25400" rIns="25400" bIns="0" rtlCol="0" anchor="ctr"/>
+          <a:bodyPr wrap="square" lIns="0" tIns="25400" rIns="25400" bIns="0" rtlCol="0" anchor="t"/>
           <a:lstStyle/>
           <a:p>
             <a:pPr algn="l" indent="0" marL="0">
@@ -7729,7 +7317,7 @@
               <a:buNone/>
             </a:pPr>
             <a:r>
-              <a:rPr lang="en-US" sz="2200" b="1" dirty="0">
+              <a:rPr lang="en-US" sz="1800" b="1" dirty="0">
                 <a:solidFill>
                   <a:srgbClr val="7DD3FC"/>
                 </a:solidFill>
@@ -7737,7 +7325,7 @@
                 <a:ea typeface="Pretendard" pitchFamily="34" charset="-122"/>
                 <a:cs typeface="Pretendard" pitchFamily="34" charset="-120"/>
               </a:rPr>
-              <a:t>Layouts</a:t>
+              <a:t>- Evidence</a:t>
             </a:r>
             <a:pPr algn="l" indent="0" marL="0">
               <a:lnSpc>
@@ -7746,123 +7334,7 @@
               <a:buNone/>
             </a:pPr>
             <a:r>
-              <a:rPr lang="en-US" sz="2200" dirty="0">
-                <a:solidFill>
-                  <a:srgbClr val="F8F8F8"/>
-                </a:solidFill>
-                <a:latin typeface="Pretendard" pitchFamily="34" charset="0"/>
-                <a:ea typeface="Pretendard" pitchFamily="34" charset="-122"/>
-                <a:cs typeface="Pretendard" pitchFamily="34" charset="-120"/>
-              </a:rPr>
-              <a:t>  toc-strips, two-column-compare, three-card-grid, six-tile-grid, timeline-rail, pipeline-chain.</a:t>
-            </a:r>
-            <a:endParaRPr lang="en-US" sz="2200" dirty="0"/>
-          </a:p>
-        </p:txBody>
-      </p:sp>
-      <p:sp>
-        <p:nvSpPr>
-          <p:cNvPr id="36" name="Shape 28"/>
-          <p:cNvSpPr/>
-          <p:nvPr/>
-        </p:nvSpPr>
-        <p:spPr>
-          <a:xfrm>
-            <a:off x="976122" y="4416552"/>
-            <a:ext cx="585216" cy="585216"/>
-          </a:xfrm>
-          <a:prstGeom prst="roundRect">
-            <a:avLst>
-              <a:gd name="adj" fmla="val 6250"/>
-            </a:avLst>
-          </a:prstGeom>
-          <a:solidFill>
-            <a:srgbClr val="07111F"/>
-          </a:solidFill>
-          <a:ln w="12700">
-            <a:solidFill>
-              <a:srgbClr val="BAE6FD"/>
-            </a:solidFill>
-            <a:prstDash val="solid"/>
-          </a:ln>
-        </p:spPr>
-      </p:sp>
-      <p:pic>
-        <p:nvPicPr>
-          <p:cNvPr id="37" name="Image 6" descr="chart icon from tabler-icons (MIT)">    </p:cNvPr>
-          <p:cNvPicPr>
-            <a:picLocks noChangeAspect="1"/>
-          </p:cNvPicPr>
-          <p:nvPr/>
-        </p:nvPicPr>
-        <p:blipFill>
-          <a:blip r:embed="rId13">
-            <a:extLst>
-              <a:ext uri="{96DAC541-7B7A-43D3-8B79-37D633B846F1}">
-                <asvg:svgBlip xmlns:asvg="http://schemas.microsoft.com/office/drawing/2016/SVG/main" r:embed="rId14"/>
-              </a:ext>
-            </a:extLst>
-          </a:blip>
-          <a:stretch>
-            <a:fillRect/>
-          </a:stretch>
-        </p:blipFill>
-        <p:spPr>
-          <a:xfrm>
-            <a:off x="1049274" y="4489704"/>
-            <a:ext cx="438912" cy="438912"/>
-          </a:xfrm>
-          <a:prstGeom prst="rect">
-            <a:avLst/>
-          </a:prstGeom>
-        </p:spPr>
-      </p:pic>
-      <p:sp>
-        <p:nvSpPr>
-          <p:cNvPr id="38" name="mdpr:1-2-e3669a:item-3:block-15-chunk-1"/>
-          <p:cNvSpPr txBox="1"/>
-          <p:nvPr/>
-        </p:nvSpPr>
-        <p:spPr>
-          <a:xfrm>
-            <a:off x="1689354" y="3913632"/>
-            <a:ext cx="3961638" cy="1591056"/>
-          </a:xfrm>
-          <a:prstGeom prst="rect">
-            <a:avLst/>
-          </a:prstGeom>
-          <a:noFill/>
-          <a:ln/>
-        </p:spPr>
-        <p:txBody>
-          <a:bodyPr wrap="square" lIns="0" tIns="25400" rIns="25400" bIns="0" rtlCol="0" anchor="ctr"/>
-          <a:lstStyle/>
-          <a:p>
-            <a:pPr algn="l" indent="0" marL="0">
-              <a:lnSpc>
-                <a:spcPct val="120000"/>
-              </a:lnSpc>
-              <a:buNone/>
-            </a:pPr>
-            <a:r>
-              <a:rPr lang="en-US" sz="2200" b="1" dirty="0">
-                <a:solidFill>
-                  <a:srgbClr val="7DD3FC"/>
-                </a:solidFill>
-                <a:latin typeface="Pretendard" pitchFamily="34" charset="0"/>
-                <a:ea typeface="Pretendard" pitchFamily="34" charset="-122"/>
-                <a:cs typeface="Pretendard" pitchFamily="34" charset="-120"/>
-              </a:rPr>
-              <a:t>Evidence</a:t>
-            </a:r>
-            <a:pPr algn="l" indent="0" marL="0">
-              <a:lnSpc>
-                <a:spcPct val="120000"/>
-              </a:lnSpc>
-              <a:buNone/>
-            </a:pPr>
-            <a:r>
-              <a:rPr lang="en-US" sz="2200" dirty="0">
+              <a:rPr lang="en-US" sz="1800" dirty="0">
                 <a:solidFill>
                   <a:srgbClr val="F8F8F8"/>
                 </a:solidFill>
@@ -7872,87 +7344,8 @@
               </a:rPr>
               <a:t>  chart-table-pair, metric-proof, arc-ring-proof, gauge-proof, connected-strip, mixed-object-pack.</a:t>
             </a:r>
-            <a:endParaRPr lang="en-US" sz="2200" dirty="0"/>
+            <a:endParaRPr lang="en-US" sz="1800" dirty="0"/>
           </a:p>
-        </p:txBody>
-      </p:sp>
-      <p:sp>
-        <p:nvSpPr>
-          <p:cNvPr id="39" name="Shape 30"/>
-          <p:cNvSpPr/>
-          <p:nvPr/>
-        </p:nvSpPr>
-        <p:spPr>
-          <a:xfrm>
-            <a:off x="6462522" y="4416552"/>
-            <a:ext cx="585216" cy="585216"/>
-          </a:xfrm>
-          <a:prstGeom prst="roundRect">
-            <a:avLst>
-              <a:gd name="adj" fmla="val 6250"/>
-            </a:avLst>
-          </a:prstGeom>
-          <a:solidFill>
-            <a:srgbClr val="07111F"/>
-          </a:solidFill>
-          <a:ln w="12700">
-            <a:solidFill>
-              <a:srgbClr val="BAE6FD"/>
-            </a:solidFill>
-            <a:prstDash val="solid"/>
-          </a:ln>
-        </p:spPr>
-      </p:sp>
-      <p:pic>
-        <p:nvPicPr>
-          <p:cNvPr id="40" name="Image 7" descr="flow icon from tabler-icons (MIT)">    </p:cNvPr>
-          <p:cNvPicPr>
-            <a:picLocks noChangeAspect="1"/>
-          </p:cNvPicPr>
-          <p:nvPr/>
-        </p:nvPicPr>
-        <p:blipFill>
-          <a:blip r:embed="rId15">
-            <a:extLst>
-              <a:ext uri="{96DAC541-7B7A-43D3-8B79-37D633B846F1}">
-                <asvg:svgBlip xmlns:asvg="http://schemas.microsoft.com/office/drawing/2016/SVG/main" r:embed="rId16"/>
-              </a:ext>
-            </a:extLst>
-          </a:blip>
-          <a:stretch>
-            <a:fillRect/>
-          </a:stretch>
-        </p:blipFill>
-        <p:spPr>
-          <a:xfrm>
-            <a:off x="6535674" y="4489704"/>
-            <a:ext cx="438912" cy="438912"/>
-          </a:xfrm>
-          <a:prstGeom prst="rect">
-            <a:avLst/>
-          </a:prstGeom>
-        </p:spPr>
-      </p:pic>
-      <p:sp>
-        <p:nvSpPr>
-          <p:cNvPr id="41" name="mdpr:1-2-e3669a:item-4:block-15-chunk-1"/>
-          <p:cNvSpPr txBox="1"/>
-          <p:nvPr/>
-        </p:nvSpPr>
-        <p:spPr>
-          <a:xfrm>
-            <a:off x="7175754" y="3913632"/>
-            <a:ext cx="3961638" cy="1591056"/>
-          </a:xfrm>
-          <a:prstGeom prst="rect">
-            <a:avLst/>
-          </a:prstGeom>
-          <a:noFill/>
-          <a:ln/>
-        </p:spPr>
-        <p:txBody>
-          <a:bodyPr wrap="square" lIns="0" tIns="25400" rIns="25400" bIns="0" rtlCol="0" anchor="ctr"/>
-          <a:lstStyle/>
           <a:p>
             <a:pPr algn="l" indent="0" marL="0">
               <a:lnSpc>
@@ -7961,7 +7354,7 @@
               <a:buNone/>
             </a:pPr>
             <a:r>
-              <a:rPr lang="en-US" sz="2200" b="1" dirty="0">
+              <a:rPr lang="en-US" sz="1800" b="1" dirty="0">
                 <a:solidFill>
                   <a:srgbClr val="7DD3FC"/>
                 </a:solidFill>
@@ -7969,8 +7362,11 @@
                 <a:ea typeface="Pretendard" pitchFamily="34" charset="-122"/>
                 <a:cs typeface="Pretendard" pitchFamily="34" charset="-120"/>
               </a:rPr>
-              <a:t>Connectors</a:t>
+              <a:t>- Connectors</a:t>
             </a:r>
+            <a:endParaRPr lang="en-US" sz="1800" dirty="0"/>
+          </a:p>
+          <a:p>
             <a:pPr algn="l" indent="0" marL="0">
               <a:lnSpc>
                 <a:spcPct val="120000"/>
@@ -7978,7 +7374,7 @@
               <a:buNone/>
             </a:pPr>
             <a:r>
-              <a:rPr lang="en-US" sz="2200" dirty="0">
+              <a:rPr lang="en-US" sz="1800" dirty="0">
                 <a:solidFill>
                   <a:srgbClr val="F8F8F8"/>
                 </a:solidFill>
@@ -7988,7 +7384,7 @@
               </a:rPr>
               <a:t>  straight-arrow, elbow-arrow, boundary-attach, overlap-joint, parallel-flow, contrast-flow.</a:t>
             </a:r>
-            <a:endParaRPr lang="en-US" sz="2200" dirty="0"/>
+            <a:endParaRPr lang="en-US" sz="1800" dirty="0"/>
           </a:p>
         </p:txBody>
       </p:sp>
@@ -16012,71 +15408,14 @@
       </p:sp>
       <p:sp>
         <p:nvSpPr>
-          <p:cNvPr id="28" name="Shape 23"/>
-          <p:cNvSpPr/>
-          <p:nvPr/>
-        </p:nvSpPr>
-        <p:spPr>
-          <a:xfrm>
-            <a:off x="1097280" y="2140428"/>
-            <a:ext cx="474025" cy="474025"/>
-          </a:xfrm>
-          <a:prstGeom prst="roundRect">
-            <a:avLst>
-              <a:gd name="adj" fmla="val 7716"/>
-            </a:avLst>
-          </a:prstGeom>
-          <a:solidFill>
-            <a:srgbClr val="07111F"/>
-          </a:solidFill>
-          <a:ln w="12700">
-            <a:solidFill>
-              <a:srgbClr val="BAE6FD"/>
-            </a:solidFill>
-            <a:prstDash val="solid"/>
-          </a:ln>
-        </p:spPr>
-      </p:sp>
-      <p:pic>
-        <p:nvPicPr>
-          <p:cNvPr id="29" name="Image 3" descr="article icon from tabler-icons (MIT)">    </p:cNvPr>
-          <p:cNvPicPr>
-            <a:picLocks noChangeAspect="1"/>
-          </p:cNvPicPr>
-          <p:nvPr/>
-        </p:nvPicPr>
-        <p:blipFill>
-          <a:blip r:embed="rId7">
-            <a:extLst>
-              <a:ext uri="{96DAC541-7B7A-43D3-8B79-37D633B846F1}">
-                <asvg:svgBlip xmlns:asvg="http://schemas.microsoft.com/office/drawing/2016/SVG/main" r:embed="rId8"/>
-              </a:ext>
-            </a:extLst>
-          </a:blip>
-          <a:stretch>
-            <a:fillRect/>
-          </a:stretch>
-        </p:blipFill>
-        <p:spPr>
-          <a:xfrm>
-            <a:off x="1170432" y="2213580"/>
-            <a:ext cx="327721" cy="327721"/>
-          </a:xfrm>
-          <a:prstGeom prst="rect">
-            <a:avLst/>
-          </a:prstGeom>
-        </p:spPr>
-      </p:pic>
-      <p:sp>
-        <p:nvSpPr>
-          <p:cNvPr id="30" name="mdpr:1-2-ea42c8:item-1:block-27-chunk-1"/>
+          <p:cNvPr id="28" name="mdpr:1-2-ea42c8:item-1:block-27-chunk-1"/>
           <p:cNvSpPr txBox="1"/>
           <p:nvPr/>
         </p:nvSpPr>
         <p:spPr>
           <a:xfrm>
-            <a:off x="1699321" y="1987296"/>
-            <a:ext cx="9255191" cy="780288"/>
+            <a:off x="1133856" y="1957548"/>
+            <a:ext cx="9820656" cy="839785"/>
           </a:xfrm>
           <a:prstGeom prst="rect">
             <a:avLst/>
@@ -16128,71 +15467,14 @@
       </p:sp>
       <p:sp>
         <p:nvSpPr>
-          <p:cNvPr id="31" name="Shape 25"/>
-          <p:cNvSpPr/>
-          <p:nvPr/>
-        </p:nvSpPr>
-        <p:spPr>
-          <a:xfrm>
-            <a:off x="1097280" y="3466308"/>
-            <a:ext cx="474025" cy="474025"/>
-          </a:xfrm>
-          <a:prstGeom prst="roundRect">
-            <a:avLst>
-              <a:gd name="adj" fmla="val 7716"/>
-            </a:avLst>
-          </a:prstGeom>
-          <a:solidFill>
-            <a:srgbClr val="07111F"/>
-          </a:solidFill>
-          <a:ln w="12700">
-            <a:solidFill>
-              <a:srgbClr val="BAE6FD"/>
-            </a:solidFill>
-            <a:prstDash val="solid"/>
-          </a:ln>
-        </p:spPr>
-      </p:sp>
-      <p:pic>
-        <p:nvPicPr>
-          <p:cNvPr id="32" name="Image 4" descr="article icon from tabler-icons (MIT)">    </p:cNvPr>
-          <p:cNvPicPr>
-            <a:picLocks noChangeAspect="1"/>
-          </p:cNvPicPr>
-          <p:nvPr/>
-        </p:nvPicPr>
-        <p:blipFill>
-          <a:blip r:embed="rId9">
-            <a:extLst>
-              <a:ext uri="{96DAC541-7B7A-43D3-8B79-37D633B846F1}">
-                <asvg:svgBlip xmlns:asvg="http://schemas.microsoft.com/office/drawing/2016/SVG/main" r:embed="rId10"/>
-              </a:ext>
-            </a:extLst>
-          </a:blip>
-          <a:stretch>
-            <a:fillRect/>
-          </a:stretch>
-        </p:blipFill>
-        <p:spPr>
-          <a:xfrm>
-            <a:off x="1170432" y="3539460"/>
-            <a:ext cx="327721" cy="327721"/>
-          </a:xfrm>
-          <a:prstGeom prst="rect">
-            <a:avLst/>
-          </a:prstGeom>
-        </p:spPr>
-      </p:pic>
-      <p:sp>
-        <p:nvSpPr>
-          <p:cNvPr id="33" name="mdpr:1-2-ea42c8:item-2:block-27-chunk-1"/>
+          <p:cNvPr id="29" name="mdpr:1-2-ea42c8:item-2:block-27-chunk-1"/>
           <p:cNvSpPr txBox="1"/>
           <p:nvPr/>
         </p:nvSpPr>
         <p:spPr>
           <a:xfrm>
-            <a:off x="1699321" y="3313176"/>
-            <a:ext cx="9255191" cy="780288"/>
+            <a:off x="1133856" y="3283428"/>
+            <a:ext cx="9820656" cy="839785"/>
           </a:xfrm>
           <a:prstGeom prst="rect">
             <a:avLst/>
@@ -16244,71 +15526,14 @@
       </p:sp>
       <p:sp>
         <p:nvSpPr>
-          <p:cNvPr id="34" name="Shape 27"/>
-          <p:cNvSpPr/>
-          <p:nvPr/>
-        </p:nvSpPr>
-        <p:spPr>
-          <a:xfrm>
-            <a:off x="1097280" y="4783044"/>
-            <a:ext cx="474025" cy="474025"/>
-          </a:xfrm>
-          <a:prstGeom prst="roundRect">
-            <a:avLst>
-              <a:gd name="adj" fmla="val 7716"/>
-            </a:avLst>
-          </a:prstGeom>
-          <a:solidFill>
-            <a:srgbClr val="07111F"/>
-          </a:solidFill>
-          <a:ln w="12700">
-            <a:solidFill>
-              <a:srgbClr val="BAE6FD"/>
-            </a:solidFill>
-            <a:prstDash val="solid"/>
-          </a:ln>
-        </p:spPr>
-      </p:sp>
-      <p:pic>
-        <p:nvPicPr>
-          <p:cNvPr id="35" name="Image 5" descr="article icon from tabler-icons (MIT)">    </p:cNvPr>
-          <p:cNvPicPr>
-            <a:picLocks noChangeAspect="1"/>
-          </p:cNvPicPr>
-          <p:nvPr/>
-        </p:nvPicPr>
-        <p:blipFill>
-          <a:blip r:embed="rId11">
-            <a:extLst>
-              <a:ext uri="{96DAC541-7B7A-43D3-8B79-37D633B846F1}">
-                <asvg:svgBlip xmlns:asvg="http://schemas.microsoft.com/office/drawing/2016/SVG/main" r:embed="rId12"/>
-              </a:ext>
-            </a:extLst>
-          </a:blip>
-          <a:stretch>
-            <a:fillRect/>
-          </a:stretch>
-        </p:blipFill>
-        <p:spPr>
-          <a:xfrm>
-            <a:off x="1170432" y="4856196"/>
-            <a:ext cx="327721" cy="327721"/>
-          </a:xfrm>
-          <a:prstGeom prst="rect">
-            <a:avLst/>
-          </a:prstGeom>
-        </p:spPr>
-      </p:pic>
-      <p:sp>
-        <p:nvSpPr>
-          <p:cNvPr id="36" name="mdpr:1-2-ea42c8:item-3:block-27-chunk-1"/>
+          <p:cNvPr id="30" name="mdpr:1-2-ea42c8:item-3:block-27-chunk-1"/>
           <p:cNvSpPr txBox="1"/>
           <p:nvPr/>
         </p:nvSpPr>
         <p:spPr>
           <a:xfrm>
-            <a:off x="1699321" y="4629912"/>
-            <a:ext cx="9255191" cy="780288"/>
+            <a:off x="1133856" y="4600164"/>
+            <a:ext cx="9820656" cy="839785"/>
           </a:xfrm>
           <a:prstGeom prst="rect">
             <a:avLst/>
@@ -19578,71 +18803,14 @@
       </p:sp>
       <p:sp>
         <p:nvSpPr>
-          <p:cNvPr id="30" name="Shape 24"/>
-          <p:cNvSpPr/>
-          <p:nvPr/>
-        </p:nvSpPr>
-        <p:spPr>
-          <a:xfrm>
-            <a:off x="976122" y="2130552"/>
-            <a:ext cx="585216" cy="585216"/>
-          </a:xfrm>
-          <a:prstGeom prst="roundRect">
-            <a:avLst>
-              <a:gd name="adj" fmla="val 6250"/>
-            </a:avLst>
-          </a:prstGeom>
-          <a:solidFill>
-            <a:srgbClr val="07111F"/>
-          </a:solidFill>
-          <a:ln w="12700">
-            <a:solidFill>
-              <a:srgbClr val="BAE6FD"/>
-            </a:solidFill>
-            <a:prstDash val="solid"/>
-          </a:ln>
-        </p:spPr>
-      </p:sp>
-      <p:pic>
-        <p:nvPicPr>
-          <p:cNvPr id="31" name="Image 4" descr="article icon from tabler-icons (MIT)">    </p:cNvPr>
-          <p:cNvPicPr>
-            <a:picLocks noChangeAspect="1"/>
-          </p:cNvPicPr>
-          <p:nvPr/>
-        </p:nvPicPr>
-        <p:blipFill>
-          <a:blip r:embed="rId9">
-            <a:extLst>
-              <a:ext uri="{96DAC541-7B7A-43D3-8B79-37D633B846F1}">
-                <asvg:svgBlip xmlns:asvg="http://schemas.microsoft.com/office/drawing/2016/SVG/main" r:embed="rId10"/>
-              </a:ext>
-            </a:extLst>
-          </a:blip>
-          <a:stretch>
-            <a:fillRect/>
-          </a:stretch>
-        </p:blipFill>
-        <p:spPr>
-          <a:xfrm>
-            <a:off x="1049274" y="2203704"/>
-            <a:ext cx="438912" cy="438912"/>
-          </a:xfrm>
-          <a:prstGeom prst="rect">
-            <a:avLst/>
-          </a:prstGeom>
-        </p:spPr>
-      </p:pic>
-      <p:sp>
-        <p:nvSpPr>
-          <p:cNvPr id="32" name="mdpr:icon-and-text-aside-8429fc:item-1:block-29"/>
+          <p:cNvPr id="30" name="mdpr:icon-and-text-aside-8429fc:item-1:block-29"/>
           <p:cNvSpPr txBox="1"/>
           <p:nvPr/>
         </p:nvSpPr>
         <p:spPr>
           <a:xfrm>
-            <a:off x="1689354" y="2033016"/>
-            <a:ext cx="3961638" cy="780288"/>
+            <a:off x="1042416" y="1627632"/>
+            <a:ext cx="4608576" cy="1591056"/>
           </a:xfrm>
           <a:prstGeom prst="rect">
             <a:avLst/>
@@ -19694,71 +18862,14 @@
       </p:sp>
       <p:sp>
         <p:nvSpPr>
-          <p:cNvPr id="33" name="Shape 26"/>
-          <p:cNvSpPr/>
-          <p:nvPr/>
-        </p:nvSpPr>
-        <p:spPr>
-          <a:xfrm>
-            <a:off x="6462522" y="2130552"/>
-            <a:ext cx="585216" cy="585216"/>
-          </a:xfrm>
-          <a:prstGeom prst="roundRect">
-            <a:avLst>
-              <a:gd name="adj" fmla="val 6250"/>
-            </a:avLst>
-          </a:prstGeom>
-          <a:solidFill>
-            <a:srgbClr val="07111F"/>
-          </a:solidFill>
-          <a:ln w="12700">
-            <a:solidFill>
-              <a:srgbClr val="BAE6FD"/>
-            </a:solidFill>
-            <a:prstDash val="solid"/>
-          </a:ln>
-        </p:spPr>
-      </p:sp>
-      <p:pic>
-        <p:nvPicPr>
-          <p:cNvPr id="34" name="Image 5" descr="article icon from tabler-icons (MIT)">    </p:cNvPr>
-          <p:cNvPicPr>
-            <a:picLocks noChangeAspect="1"/>
-          </p:cNvPicPr>
-          <p:nvPr/>
-        </p:nvPicPr>
-        <p:blipFill>
-          <a:blip r:embed="rId11">
-            <a:extLst>
-              <a:ext uri="{96DAC541-7B7A-43D3-8B79-37D633B846F1}">
-                <asvg:svgBlip xmlns:asvg="http://schemas.microsoft.com/office/drawing/2016/SVG/main" r:embed="rId12"/>
-              </a:ext>
-            </a:extLst>
-          </a:blip>
-          <a:stretch>
-            <a:fillRect/>
-          </a:stretch>
-        </p:blipFill>
-        <p:spPr>
-          <a:xfrm>
-            <a:off x="6535674" y="2203704"/>
-            <a:ext cx="438912" cy="438912"/>
-          </a:xfrm>
-          <a:prstGeom prst="rect">
-            <a:avLst/>
-          </a:prstGeom>
-        </p:spPr>
-      </p:pic>
-      <p:sp>
-        <p:nvSpPr>
-          <p:cNvPr id="35" name="mdpr:icon-and-text-aside-8429fc:item-2:block-29"/>
+          <p:cNvPr id="31" name="mdpr:icon-and-text-aside-8429fc:item-2:block-29"/>
           <p:cNvSpPr txBox="1"/>
           <p:nvPr/>
         </p:nvSpPr>
         <p:spPr>
           <a:xfrm>
-            <a:off x="7175754" y="1865376"/>
-            <a:ext cx="3961638" cy="1115568"/>
+            <a:off x="6528816" y="1627632"/>
+            <a:ext cx="4608576" cy="1591056"/>
           </a:xfrm>
           <a:prstGeom prst="rect">
             <a:avLst/>
@@ -19810,71 +18921,14 @@
       </p:sp>
       <p:sp>
         <p:nvSpPr>
-          <p:cNvPr id="36" name="Shape 28"/>
-          <p:cNvSpPr/>
-          <p:nvPr/>
-        </p:nvSpPr>
-        <p:spPr>
-          <a:xfrm>
-            <a:off x="976122" y="4416552"/>
-            <a:ext cx="585216" cy="585216"/>
-          </a:xfrm>
-          <a:prstGeom prst="roundRect">
-            <a:avLst>
-              <a:gd name="adj" fmla="val 6250"/>
-            </a:avLst>
-          </a:prstGeom>
-          <a:solidFill>
-            <a:srgbClr val="07111F"/>
-          </a:solidFill>
-          <a:ln w="12700">
-            <a:solidFill>
-              <a:srgbClr val="BAE6FD"/>
-            </a:solidFill>
-            <a:prstDash val="solid"/>
-          </a:ln>
-        </p:spPr>
-      </p:sp>
-      <p:pic>
-        <p:nvPicPr>
-          <p:cNvPr id="37" name="Image 6" descr="article icon from tabler-icons (MIT)">    </p:cNvPr>
-          <p:cNvPicPr>
-            <a:picLocks noChangeAspect="1"/>
-          </p:cNvPicPr>
-          <p:nvPr/>
-        </p:nvPicPr>
-        <p:blipFill>
-          <a:blip r:embed="rId13">
-            <a:extLst>
-              <a:ext uri="{96DAC541-7B7A-43D3-8B79-37D633B846F1}">
-                <asvg:svgBlip xmlns:asvg="http://schemas.microsoft.com/office/drawing/2016/SVG/main" r:embed="rId14"/>
-              </a:ext>
-            </a:extLst>
-          </a:blip>
-          <a:stretch>
-            <a:fillRect/>
-          </a:stretch>
-        </p:blipFill>
-        <p:spPr>
-          <a:xfrm>
-            <a:off x="1049274" y="4489704"/>
-            <a:ext cx="438912" cy="438912"/>
-          </a:xfrm>
-          <a:prstGeom prst="rect">
-            <a:avLst/>
-          </a:prstGeom>
-        </p:spPr>
-      </p:pic>
-      <p:sp>
-        <p:nvSpPr>
-          <p:cNvPr id="38" name="mdpr:icon-and-text-aside-8429fc:item-3:block-29"/>
+          <p:cNvPr id="32" name="mdpr:icon-and-text-aside-8429fc:item-3:block-29"/>
           <p:cNvSpPr txBox="1"/>
           <p:nvPr/>
         </p:nvSpPr>
         <p:spPr>
           <a:xfrm>
-            <a:off x="1689354" y="4151376"/>
-            <a:ext cx="3961638" cy="1115568"/>
+            <a:off x="1042416" y="3913632"/>
+            <a:ext cx="4608576" cy="1591056"/>
           </a:xfrm>
           <a:prstGeom prst="rect">
             <a:avLst/>
@@ -19926,71 +18980,14 @@
       </p:sp>
       <p:sp>
         <p:nvSpPr>
-          <p:cNvPr id="39" name="Shape 30"/>
-          <p:cNvSpPr/>
-          <p:nvPr/>
-        </p:nvSpPr>
-        <p:spPr>
-          <a:xfrm>
-            <a:off x="6462522" y="4416552"/>
-            <a:ext cx="585216" cy="585216"/>
-          </a:xfrm>
-          <a:prstGeom prst="roundRect">
-            <a:avLst>
-              <a:gd name="adj" fmla="val 6250"/>
-            </a:avLst>
-          </a:prstGeom>
-          <a:solidFill>
-            <a:srgbClr val="07111F"/>
-          </a:solidFill>
-          <a:ln w="12700">
-            <a:solidFill>
-              <a:srgbClr val="BAE6FD"/>
-            </a:solidFill>
-            <a:prstDash val="solid"/>
-          </a:ln>
-        </p:spPr>
-      </p:sp>
-      <p:pic>
-        <p:nvPicPr>
-          <p:cNvPr id="40" name="Image 7" descr="table icon from tabler-icons (MIT)">    </p:cNvPr>
-          <p:cNvPicPr>
-            <a:picLocks noChangeAspect="1"/>
-          </p:cNvPicPr>
-          <p:nvPr/>
-        </p:nvPicPr>
-        <p:blipFill>
-          <a:blip r:embed="rId15">
-            <a:extLst>
-              <a:ext uri="{96DAC541-7B7A-43D3-8B79-37D633B846F1}">
-                <asvg:svgBlip xmlns:asvg="http://schemas.microsoft.com/office/drawing/2016/SVG/main" r:embed="rId16"/>
-              </a:ext>
-            </a:extLst>
-          </a:blip>
-          <a:stretch>
-            <a:fillRect/>
-          </a:stretch>
-        </p:blipFill>
-        <p:spPr>
-          <a:xfrm>
-            <a:off x="6535674" y="4489704"/>
-            <a:ext cx="438912" cy="438912"/>
-          </a:xfrm>
-          <a:prstGeom prst="rect">
-            <a:avLst/>
-          </a:prstGeom>
-        </p:spPr>
-      </p:pic>
-      <p:sp>
-        <p:nvSpPr>
-          <p:cNvPr id="41" name="mdpr:icon-and-text-aside-8429fc:item-4:block-29"/>
+          <p:cNvPr id="33" name="mdpr:icon-and-text-aside-8429fc:item-4:block-29"/>
           <p:cNvSpPr txBox="1"/>
           <p:nvPr/>
         </p:nvSpPr>
         <p:spPr>
           <a:xfrm>
-            <a:off x="7175754" y="4151376"/>
-            <a:ext cx="3961638" cy="1115568"/>
+            <a:off x="6528816" y="3913632"/>
+            <a:ext cx="4608576" cy="1591056"/>
           </a:xfrm>
           <a:prstGeom prst="rect">
             <a:avLst/>
@@ -20969,71 +19966,14 @@
       </p:sp>
       <p:sp>
         <p:nvSpPr>
-          <p:cNvPr id="30" name="Shape 24"/>
-          <p:cNvSpPr/>
-          <p:nvPr/>
-        </p:nvSpPr>
-        <p:spPr>
-          <a:xfrm>
-            <a:off x="976122" y="2130552"/>
-            <a:ext cx="585216" cy="585216"/>
-          </a:xfrm>
-          <a:prstGeom prst="roundRect">
-            <a:avLst>
-              <a:gd name="adj" fmla="val 6250"/>
-            </a:avLst>
-          </a:prstGeom>
-          <a:solidFill>
-            <a:srgbClr val="07111F"/>
-          </a:solidFill>
-          <a:ln w="12700">
-            <a:solidFill>
-              <a:srgbClr val="BAE6FD"/>
-            </a:solidFill>
-            <a:prstDash val="solid"/>
-          </a:ln>
-        </p:spPr>
-      </p:sp>
-      <p:pic>
-        <p:nvPicPr>
-          <p:cNvPr id="31" name="Image 4" descr="verified icon from tabler-icons (MIT)">    </p:cNvPr>
-          <p:cNvPicPr>
-            <a:picLocks noChangeAspect="1"/>
-          </p:cNvPicPr>
-          <p:nvPr/>
-        </p:nvPicPr>
-        <p:blipFill>
-          <a:blip r:embed="rId9">
-            <a:extLst>
-              <a:ext uri="{96DAC541-7B7A-43D3-8B79-37D633B846F1}">
-                <asvg:svgBlip xmlns:asvg="http://schemas.microsoft.com/office/drawing/2016/SVG/main" r:embed="rId10"/>
-              </a:ext>
-            </a:extLst>
-          </a:blip>
-          <a:stretch>
-            <a:fillRect/>
-          </a:stretch>
-        </p:blipFill>
-        <p:spPr>
-          <a:xfrm>
-            <a:off x="1049274" y="2203704"/>
-            <a:ext cx="438912" cy="438912"/>
-          </a:xfrm>
-          <a:prstGeom prst="rect">
-            <a:avLst/>
-          </a:prstGeom>
-        </p:spPr>
-      </p:pic>
-      <p:sp>
-        <p:nvSpPr>
-          <p:cNvPr id="32" name="mdpr:overflow-guard-f8d03e:item-1:block-31"/>
+          <p:cNvPr id="30" name="mdpr:overflow-guard-f8d03e:item-1:block-31"/>
           <p:cNvSpPr txBox="1"/>
           <p:nvPr/>
         </p:nvSpPr>
         <p:spPr>
           <a:xfrm>
-            <a:off x="1689354" y="1865376"/>
-            <a:ext cx="3961638" cy="1115568"/>
+            <a:off x="1042416" y="1627632"/>
+            <a:ext cx="4608576" cy="1591056"/>
           </a:xfrm>
           <a:prstGeom prst="rect">
             <a:avLst/>
@@ -21085,71 +20025,14 @@
       </p:sp>
       <p:sp>
         <p:nvSpPr>
-          <p:cNvPr id="33" name="Shape 26"/>
-          <p:cNvSpPr/>
-          <p:nvPr/>
-        </p:nvSpPr>
-        <p:spPr>
-          <a:xfrm>
-            <a:off x="6462522" y="2130552"/>
-            <a:ext cx="585216" cy="585216"/>
-          </a:xfrm>
-          <a:prstGeom prst="roundRect">
-            <a:avLst>
-              <a:gd name="adj" fmla="val 6250"/>
-            </a:avLst>
-          </a:prstGeom>
-          <a:solidFill>
-            <a:srgbClr val="07111F"/>
-          </a:solidFill>
-          <a:ln w="12700">
-            <a:solidFill>
-              <a:srgbClr val="BAE6FD"/>
-            </a:solidFill>
-            <a:prstDash val="solid"/>
-          </a:ln>
-        </p:spPr>
-      </p:sp>
-      <p:pic>
-        <p:nvPicPr>
-          <p:cNvPr id="34" name="Image 5" descr="table icon from tabler-icons (MIT)">    </p:cNvPr>
-          <p:cNvPicPr>
-            <a:picLocks noChangeAspect="1"/>
-          </p:cNvPicPr>
-          <p:nvPr/>
-        </p:nvPicPr>
-        <p:blipFill>
-          <a:blip r:embed="rId11">
-            <a:extLst>
-              <a:ext uri="{96DAC541-7B7A-43D3-8B79-37D633B846F1}">
-                <asvg:svgBlip xmlns:asvg="http://schemas.microsoft.com/office/drawing/2016/SVG/main" r:embed="rId12"/>
-              </a:ext>
-            </a:extLst>
-          </a:blip>
-          <a:stretch>
-            <a:fillRect/>
-          </a:stretch>
-        </p:blipFill>
-        <p:spPr>
-          <a:xfrm>
-            <a:off x="6535674" y="2203704"/>
-            <a:ext cx="438912" cy="438912"/>
-          </a:xfrm>
-          <a:prstGeom prst="rect">
-            <a:avLst/>
-          </a:prstGeom>
-        </p:spPr>
-      </p:pic>
-      <p:sp>
-        <p:nvSpPr>
-          <p:cNvPr id="35" name="mdpr:overflow-guard-f8d03e:item-2:block-31"/>
+          <p:cNvPr id="31" name="mdpr:overflow-guard-f8d03e:item-2:block-31"/>
           <p:cNvSpPr txBox="1"/>
           <p:nvPr/>
         </p:nvSpPr>
         <p:spPr>
           <a:xfrm>
-            <a:off x="7175754" y="1697736"/>
-            <a:ext cx="3961638" cy="1450848"/>
+            <a:off x="6528816" y="1627632"/>
+            <a:ext cx="4608576" cy="1591056"/>
           </a:xfrm>
           <a:prstGeom prst="rect">
             <a:avLst/>
@@ -21201,71 +20084,14 @@
       </p:sp>
       <p:sp>
         <p:nvSpPr>
-          <p:cNvPr id="36" name="Shape 28"/>
-          <p:cNvSpPr/>
-          <p:nvPr/>
-        </p:nvSpPr>
-        <p:spPr>
-          <a:xfrm>
-            <a:off x="976122" y="4416552"/>
-            <a:ext cx="585216" cy="585216"/>
-          </a:xfrm>
-          <a:prstGeom prst="roundRect">
-            <a:avLst>
-              <a:gd name="adj" fmla="val 6250"/>
-            </a:avLst>
-          </a:prstGeom>
-          <a:solidFill>
-            <a:srgbClr val="07111F"/>
-          </a:solidFill>
-          <a:ln w="12700">
-            <a:solidFill>
-              <a:srgbClr val="BAE6FD"/>
-            </a:solidFill>
-            <a:prstDash val="solid"/>
-          </a:ln>
-        </p:spPr>
-      </p:sp>
-      <p:pic>
-        <p:nvPicPr>
-          <p:cNvPr id="37" name="Image 6" descr="article icon from tabler-icons (MIT)">    </p:cNvPr>
-          <p:cNvPicPr>
-            <a:picLocks noChangeAspect="1"/>
-          </p:cNvPicPr>
-          <p:nvPr/>
-        </p:nvPicPr>
-        <p:blipFill>
-          <a:blip r:embed="rId13">
-            <a:extLst>
-              <a:ext uri="{96DAC541-7B7A-43D3-8B79-37D633B846F1}">
-                <asvg:svgBlip xmlns:asvg="http://schemas.microsoft.com/office/drawing/2016/SVG/main" r:embed="rId14"/>
-              </a:ext>
-            </a:extLst>
-          </a:blip>
-          <a:stretch>
-            <a:fillRect/>
-          </a:stretch>
-        </p:blipFill>
-        <p:spPr>
-          <a:xfrm>
-            <a:off x="1049274" y="4489704"/>
-            <a:ext cx="438912" cy="438912"/>
-          </a:xfrm>
-          <a:prstGeom prst="rect">
-            <a:avLst/>
-          </a:prstGeom>
-        </p:spPr>
-      </p:pic>
-      <p:sp>
-        <p:nvSpPr>
-          <p:cNvPr id="38" name="mdpr:overflow-guard-f8d03e:item-3:block-31"/>
+          <p:cNvPr id="32" name="mdpr:overflow-guard-f8d03e:item-3:block-31"/>
           <p:cNvSpPr txBox="1"/>
           <p:nvPr/>
         </p:nvSpPr>
         <p:spPr>
           <a:xfrm>
-            <a:off x="1689354" y="4151376"/>
-            <a:ext cx="3961638" cy="1115568"/>
+            <a:off x="1042416" y="3913632"/>
+            <a:ext cx="4608576" cy="1591056"/>
           </a:xfrm>
           <a:prstGeom prst="rect">
             <a:avLst/>
@@ -21317,71 +20143,14 @@
       </p:sp>
       <p:sp>
         <p:nvSpPr>
-          <p:cNvPr id="39" name="Shape 30"/>
-          <p:cNvSpPr/>
-          <p:nvPr/>
-        </p:nvSpPr>
-        <p:spPr>
-          <a:xfrm>
-            <a:off x="6462522" y="4416552"/>
-            <a:ext cx="585216" cy="585216"/>
-          </a:xfrm>
-          <a:prstGeom prst="roundRect">
-            <a:avLst>
-              <a:gd name="adj" fmla="val 6250"/>
-            </a:avLst>
-          </a:prstGeom>
-          <a:solidFill>
-            <a:srgbClr val="07111F"/>
-          </a:solidFill>
-          <a:ln w="12700">
-            <a:solidFill>
-              <a:srgbClr val="BAE6FD"/>
-            </a:solidFill>
-            <a:prstDash val="solid"/>
-          </a:ln>
-        </p:spPr>
-      </p:sp>
-      <p:pic>
-        <p:nvPicPr>
-          <p:cNvPr id="40" name="Image 7" descr="article icon from tabler-icons (MIT)">    </p:cNvPr>
-          <p:cNvPicPr>
-            <a:picLocks noChangeAspect="1"/>
-          </p:cNvPicPr>
-          <p:nvPr/>
-        </p:nvPicPr>
-        <p:blipFill>
-          <a:blip r:embed="rId15">
-            <a:extLst>
-              <a:ext uri="{96DAC541-7B7A-43D3-8B79-37D633B846F1}">
-                <asvg:svgBlip xmlns:asvg="http://schemas.microsoft.com/office/drawing/2016/SVG/main" r:embed="rId16"/>
-              </a:ext>
-            </a:extLst>
-          </a:blip>
-          <a:stretch>
-            <a:fillRect/>
-          </a:stretch>
-        </p:blipFill>
-        <p:spPr>
-          <a:xfrm>
-            <a:off x="6535674" y="4489704"/>
-            <a:ext cx="438912" cy="438912"/>
-          </a:xfrm>
-          <a:prstGeom prst="rect">
-            <a:avLst/>
-          </a:prstGeom>
-        </p:spPr>
-      </p:pic>
-      <p:sp>
-        <p:nvSpPr>
-          <p:cNvPr id="41" name="mdpr:overflow-guard-f8d03e:item-4:block-31"/>
+          <p:cNvPr id="33" name="mdpr:overflow-guard-f8d03e:item-4:block-31"/>
           <p:cNvSpPr txBox="1"/>
           <p:nvPr/>
         </p:nvSpPr>
         <p:spPr>
           <a:xfrm>
-            <a:off x="7175754" y="4151376"/>
-            <a:ext cx="3961638" cy="1115568"/>
+            <a:off x="6528816" y="3913632"/>
+            <a:ext cx="4608576" cy="1591056"/>
           </a:xfrm>
           <a:prstGeom prst="rect">
             <a:avLst/>
@@ -24455,71 +23224,14 @@
       </p:sp>
       <p:sp>
         <p:nvSpPr>
-          <p:cNvPr id="28" name="Shape 23"/>
-          <p:cNvSpPr/>
-          <p:nvPr/>
-        </p:nvSpPr>
-        <p:spPr>
-          <a:xfrm>
-            <a:off x="1097280" y="2140428"/>
-            <a:ext cx="474025" cy="474025"/>
-          </a:xfrm>
-          <a:prstGeom prst="roundRect">
-            <a:avLst>
-              <a:gd name="adj" fmla="val 7716"/>
-            </a:avLst>
-          </a:prstGeom>
-          <a:solidFill>
-            <a:srgbClr val="07111F"/>
-          </a:solidFill>
-          <a:ln w="12700">
-            <a:solidFill>
-              <a:srgbClr val="BAE6FD"/>
-            </a:solidFill>
-            <a:prstDash val="solid"/>
-          </a:ln>
-        </p:spPr>
-      </p:sp>
-      <p:pic>
-        <p:nvPicPr>
-          <p:cNvPr id="29" name="Image 3" descr="flow icon from tabler-icons (MIT)">    </p:cNvPr>
-          <p:cNvPicPr>
-            <a:picLocks noChangeAspect="1"/>
-          </p:cNvPicPr>
-          <p:nvPr/>
-        </p:nvPicPr>
-        <p:blipFill>
-          <a:blip r:embed="rId7">
-            <a:extLst>
-              <a:ext uri="{96DAC541-7B7A-43D3-8B79-37D633B846F1}">
-                <asvg:svgBlip xmlns:asvg="http://schemas.microsoft.com/office/drawing/2016/SVG/main" r:embed="rId8"/>
-              </a:ext>
-            </a:extLst>
-          </a:blip>
-          <a:stretch>
-            <a:fillRect/>
-          </a:stretch>
-        </p:blipFill>
-        <p:spPr>
-          <a:xfrm>
-            <a:off x="1170432" y="2213580"/>
-            <a:ext cx="327721" cy="327721"/>
-          </a:xfrm>
-          <a:prstGeom prst="rect">
-            <a:avLst/>
-          </a:prstGeom>
-        </p:spPr>
-      </p:pic>
-      <p:sp>
-        <p:nvSpPr>
-          <p:cNvPr id="30" name="mdpr:actions-output-review-326e07:item-1:block-41"/>
+          <p:cNvPr id="28" name="mdpr:actions-output-review-326e07:item-1:block-41"/>
           <p:cNvSpPr txBox="1"/>
           <p:nvPr/>
         </p:nvSpPr>
         <p:spPr>
           <a:xfrm>
-            <a:off x="1699321" y="1987296"/>
-            <a:ext cx="9255191" cy="780288"/>
+            <a:off x="1133856" y="1957548"/>
+            <a:ext cx="9820656" cy="839785"/>
           </a:xfrm>
           <a:prstGeom prst="rect">
             <a:avLst/>
@@ -24571,71 +23283,14 @@
       </p:sp>
       <p:sp>
         <p:nvSpPr>
-          <p:cNvPr id="31" name="Shape 25"/>
-          <p:cNvSpPr/>
-          <p:nvPr/>
-        </p:nvSpPr>
-        <p:spPr>
-          <a:xfrm>
-            <a:off x="1097280" y="3466308"/>
-            <a:ext cx="474025" cy="474025"/>
-          </a:xfrm>
-          <a:prstGeom prst="roundRect">
-            <a:avLst>
-              <a:gd name="adj" fmla="val 7716"/>
-            </a:avLst>
-          </a:prstGeom>
-          <a:solidFill>
-            <a:srgbClr val="07111F"/>
-          </a:solidFill>
-          <a:ln w="12700">
-            <a:solidFill>
-              <a:srgbClr val="BAE6FD"/>
-            </a:solidFill>
-            <a:prstDash val="solid"/>
-          </a:ln>
-        </p:spPr>
-      </p:sp>
-      <p:pic>
-        <p:nvPicPr>
-          <p:cNvPr id="32" name="Image 4" descr="verified icon from tabler-icons (MIT)">    </p:cNvPr>
-          <p:cNvPicPr>
-            <a:picLocks noChangeAspect="1"/>
-          </p:cNvPicPr>
-          <p:nvPr/>
-        </p:nvPicPr>
-        <p:blipFill>
-          <a:blip r:embed="rId9">
-            <a:extLst>
-              <a:ext uri="{96DAC541-7B7A-43D3-8B79-37D633B846F1}">
-                <asvg:svgBlip xmlns:asvg="http://schemas.microsoft.com/office/drawing/2016/SVG/main" r:embed="rId10"/>
-              </a:ext>
-            </a:extLst>
-          </a:blip>
-          <a:stretch>
-            <a:fillRect/>
-          </a:stretch>
-        </p:blipFill>
-        <p:spPr>
-          <a:xfrm>
-            <a:off x="1170432" y="3539460"/>
-            <a:ext cx="327721" cy="327721"/>
-          </a:xfrm>
-          <a:prstGeom prst="rect">
-            <a:avLst/>
-          </a:prstGeom>
-        </p:spPr>
-      </p:pic>
-      <p:sp>
-        <p:nvSpPr>
-          <p:cNvPr id="33" name="mdpr:actions-output-review-326e07:item-2:block-41"/>
+          <p:cNvPr id="29" name="mdpr:actions-output-review-326e07:item-2:block-41"/>
           <p:cNvSpPr txBox="1"/>
           <p:nvPr/>
         </p:nvSpPr>
         <p:spPr>
           <a:xfrm>
-            <a:off x="1699321" y="3313176"/>
-            <a:ext cx="9255191" cy="780288"/>
+            <a:off x="1133856" y="3283428"/>
+            <a:ext cx="9820656" cy="839785"/>
           </a:xfrm>
           <a:prstGeom prst="rect">
             <a:avLst/>
@@ -24687,71 +23342,14 @@
       </p:sp>
       <p:sp>
         <p:nvSpPr>
-          <p:cNvPr id="34" name="Shape 27"/>
-          <p:cNvSpPr/>
-          <p:nvPr/>
-        </p:nvSpPr>
-        <p:spPr>
-          <a:xfrm>
-            <a:off x="1097280" y="4783044"/>
-            <a:ext cx="474025" cy="474025"/>
-          </a:xfrm>
-          <a:prstGeom prst="roundRect">
-            <a:avLst>
-              <a:gd name="adj" fmla="val 7716"/>
-            </a:avLst>
-          </a:prstGeom>
-          <a:solidFill>
-            <a:srgbClr val="07111F"/>
-          </a:solidFill>
-          <a:ln w="12700">
-            <a:solidFill>
-              <a:srgbClr val="BAE6FD"/>
-            </a:solidFill>
-            <a:prstDash val="solid"/>
-          </a:ln>
-        </p:spPr>
-      </p:sp>
-      <p:pic>
-        <p:nvPicPr>
-          <p:cNvPr id="35" name="Image 5" descr="spark icon from tabler-icons (MIT)">    </p:cNvPr>
-          <p:cNvPicPr>
-            <a:picLocks noChangeAspect="1"/>
-          </p:cNvPicPr>
-          <p:nvPr/>
-        </p:nvPicPr>
-        <p:blipFill>
-          <a:blip r:embed="rId11">
-            <a:extLst>
-              <a:ext uri="{96DAC541-7B7A-43D3-8B79-37D633B846F1}">
-                <asvg:svgBlip xmlns:asvg="http://schemas.microsoft.com/office/drawing/2016/SVG/main" r:embed="rId12"/>
-              </a:ext>
-            </a:extLst>
-          </a:blip>
-          <a:stretch>
-            <a:fillRect/>
-          </a:stretch>
-        </p:blipFill>
-        <p:spPr>
-          <a:xfrm>
-            <a:off x="1170432" y="4856196"/>
-            <a:ext cx="327721" cy="327721"/>
-          </a:xfrm>
-          <a:prstGeom prst="rect">
-            <a:avLst/>
-          </a:prstGeom>
-        </p:spPr>
-      </p:pic>
-      <p:sp>
-        <p:nvSpPr>
-          <p:cNvPr id="36" name="mdpr:actions-output-review-326e07:item-3:block-41"/>
+          <p:cNvPr id="30" name="mdpr:actions-output-review-326e07:item-3:block-41"/>
           <p:cNvSpPr txBox="1"/>
           <p:nvPr/>
         </p:nvSpPr>
         <p:spPr>
           <a:xfrm>
-            <a:off x="1699321" y="4629912"/>
-            <a:ext cx="9255191" cy="780288"/>
+            <a:off x="1133856" y="4600164"/>
+            <a:ext cx="9820656" cy="839785"/>
           </a:xfrm>
           <a:prstGeom prst="rect">
             <a:avLst/>
@@ -27202,71 +25800,14 @@
       </p:sp>
       <p:sp>
         <p:nvSpPr>
-          <p:cNvPr id="28" name="Shape 23"/>
-          <p:cNvSpPr/>
-          <p:nvPr/>
-        </p:nvSpPr>
-        <p:spPr>
-          <a:xfrm>
-            <a:off x="1097280" y="2140428"/>
-            <a:ext cx="474025" cy="474025"/>
-          </a:xfrm>
-          <a:prstGeom prst="roundRect">
-            <a:avLst>
-              <a:gd name="adj" fmla="val 7716"/>
-            </a:avLst>
-          </a:prstGeom>
-          <a:solidFill>
-            <a:srgbClr val="07111F"/>
-          </a:solidFill>
-          <a:ln w="12700">
-            <a:solidFill>
-              <a:srgbClr val="BAE6FD"/>
-            </a:solidFill>
-            <a:prstDash val="solid"/>
-          </a:ln>
-        </p:spPr>
-      </p:sp>
-      <p:pic>
-        <p:nvPicPr>
-          <p:cNvPr id="29" name="Image 3" descr="article icon from tabler-icons (MIT)">    </p:cNvPr>
-          <p:cNvPicPr>
-            <a:picLocks noChangeAspect="1"/>
-          </p:cNvPicPr>
-          <p:nvPr/>
-        </p:nvPicPr>
-        <p:blipFill>
-          <a:blip r:embed="rId7">
-            <a:extLst>
-              <a:ext uri="{96DAC541-7B7A-43D3-8B79-37D633B846F1}">
-                <asvg:svgBlip xmlns:asvg="http://schemas.microsoft.com/office/drawing/2016/SVG/main" r:embed="rId8"/>
-              </a:ext>
-            </a:extLst>
-          </a:blip>
-          <a:stretch>
-            <a:fillRect/>
-          </a:stretch>
-        </p:blipFill>
-        <p:spPr>
-          <a:xfrm>
-            <a:off x="1170432" y="2213580"/>
-            <a:ext cx="327721" cy="327721"/>
-          </a:xfrm>
-          <a:prstGeom prst="rect">
-            <a:avLst/>
-          </a:prstGeom>
-        </p:spPr>
-      </p:pic>
-      <p:sp>
-        <p:nvSpPr>
-          <p:cNvPr id="30" name="mdpr:1-2-32ac08:item-1:block-6-chunk-1"/>
+          <p:cNvPr id="28" name="mdpr:1-2-32ac08:item-1:block-6-chunk-1"/>
           <p:cNvSpPr txBox="1"/>
           <p:nvPr/>
         </p:nvSpPr>
         <p:spPr>
           <a:xfrm>
-            <a:off x="1699321" y="1987296"/>
-            <a:ext cx="9255191" cy="780288"/>
+            <a:off x="1133856" y="1957548"/>
+            <a:ext cx="9820656" cy="839785"/>
           </a:xfrm>
           <a:prstGeom prst="rect">
             <a:avLst/>
@@ -27318,71 +25859,14 @@
       </p:sp>
       <p:sp>
         <p:nvSpPr>
-          <p:cNvPr id="31" name="Shape 25"/>
-          <p:cNvSpPr/>
-          <p:nvPr/>
-        </p:nvSpPr>
-        <p:spPr>
-          <a:xfrm>
-            <a:off x="1097280" y="3466308"/>
-            <a:ext cx="474025" cy="474025"/>
-          </a:xfrm>
-          <a:prstGeom prst="roundRect">
-            <a:avLst>
-              <a:gd name="adj" fmla="val 7716"/>
-            </a:avLst>
-          </a:prstGeom>
-          <a:solidFill>
-            <a:srgbClr val="07111F"/>
-          </a:solidFill>
-          <a:ln w="12700">
-            <a:solidFill>
-              <a:srgbClr val="BAE6FD"/>
-            </a:solidFill>
-            <a:prstDash val="solid"/>
-          </a:ln>
-        </p:spPr>
-      </p:sp>
-      <p:pic>
-        <p:nvPicPr>
-          <p:cNvPr id="32" name="Image 4" descr="chart icon from tabler-icons (MIT)">    </p:cNvPr>
-          <p:cNvPicPr>
-            <a:picLocks noChangeAspect="1"/>
-          </p:cNvPicPr>
-          <p:nvPr/>
-        </p:nvPicPr>
-        <p:blipFill>
-          <a:blip r:embed="rId9">
-            <a:extLst>
-              <a:ext uri="{96DAC541-7B7A-43D3-8B79-37D633B846F1}">
-                <asvg:svgBlip xmlns:asvg="http://schemas.microsoft.com/office/drawing/2016/SVG/main" r:embed="rId10"/>
-              </a:ext>
-            </a:extLst>
-          </a:blip>
-          <a:stretch>
-            <a:fillRect/>
-          </a:stretch>
-        </p:blipFill>
-        <p:spPr>
-          <a:xfrm>
-            <a:off x="1170432" y="3539460"/>
-            <a:ext cx="327721" cy="327721"/>
-          </a:xfrm>
-          <a:prstGeom prst="rect">
-            <a:avLst/>
-          </a:prstGeom>
-        </p:spPr>
-      </p:pic>
-      <p:sp>
-        <p:nvSpPr>
-          <p:cNvPr id="33" name="mdpr:1-2-32ac08:item-2:block-6-chunk-1"/>
+          <p:cNvPr id="29" name="mdpr:1-2-32ac08:item-2:block-6-chunk-1"/>
           <p:cNvSpPr txBox="1"/>
           <p:nvPr/>
         </p:nvSpPr>
         <p:spPr>
           <a:xfrm>
-            <a:off x="1699321" y="3313176"/>
-            <a:ext cx="9255191" cy="780288"/>
+            <a:off x="1133856" y="3283428"/>
+            <a:ext cx="9820656" cy="839785"/>
           </a:xfrm>
           <a:prstGeom prst="rect">
             <a:avLst/>
@@ -27434,71 +25918,14 @@
       </p:sp>
       <p:sp>
         <p:nvSpPr>
-          <p:cNvPr id="34" name="Shape 27"/>
-          <p:cNvSpPr/>
-          <p:nvPr/>
-        </p:nvSpPr>
-        <p:spPr>
-          <a:xfrm>
-            <a:off x="1097280" y="4783044"/>
-            <a:ext cx="474025" cy="474025"/>
-          </a:xfrm>
-          <a:prstGeom prst="roundRect">
-            <a:avLst>
-              <a:gd name="adj" fmla="val 7716"/>
-            </a:avLst>
-          </a:prstGeom>
-          <a:solidFill>
-            <a:srgbClr val="07111F"/>
-          </a:solidFill>
-          <a:ln w="12700">
-            <a:solidFill>
-              <a:srgbClr val="BAE6FD"/>
-            </a:solidFill>
-            <a:prstDash val="solid"/>
-          </a:ln>
-        </p:spPr>
-      </p:sp>
-      <p:pic>
-        <p:nvPicPr>
-          <p:cNvPr id="35" name="Image 5" descr="article icon from tabler-icons (MIT)">    </p:cNvPr>
-          <p:cNvPicPr>
-            <a:picLocks noChangeAspect="1"/>
-          </p:cNvPicPr>
-          <p:nvPr/>
-        </p:nvPicPr>
-        <p:blipFill>
-          <a:blip r:embed="rId11">
-            <a:extLst>
-              <a:ext uri="{96DAC541-7B7A-43D3-8B79-37D633B846F1}">
-                <asvg:svgBlip xmlns:asvg="http://schemas.microsoft.com/office/drawing/2016/SVG/main" r:embed="rId12"/>
-              </a:ext>
-            </a:extLst>
-          </a:blip>
-          <a:stretch>
-            <a:fillRect/>
-          </a:stretch>
-        </p:blipFill>
-        <p:spPr>
-          <a:xfrm>
-            <a:off x="1170432" y="4856196"/>
-            <a:ext cx="327721" cy="327721"/>
-          </a:xfrm>
-          <a:prstGeom prst="rect">
-            <a:avLst/>
-          </a:prstGeom>
-        </p:spPr>
-      </p:pic>
-      <p:sp>
-        <p:nvSpPr>
-          <p:cNvPr id="36" name="mdpr:1-2-32ac08:item-3:block-6-chunk-1"/>
+          <p:cNvPr id="30" name="mdpr:1-2-32ac08:item-3:block-6-chunk-1"/>
           <p:cNvSpPr txBox="1"/>
           <p:nvPr/>
         </p:nvSpPr>
         <p:spPr>
           <a:xfrm>
-            <a:off x="1699321" y="4629912"/>
-            <a:ext cx="9255191" cy="780288"/>
+            <a:off x="1133856" y="4600164"/>
+            <a:ext cx="9820656" cy="839785"/>
           </a:xfrm>
           <a:prstGeom prst="rect">
             <a:avLst/>
@@ -29115,71 +27542,14 @@
       </p:sp>
       <p:sp>
         <p:nvSpPr>
-          <p:cNvPr id="28" name="Shape 23"/>
-          <p:cNvSpPr/>
-          <p:nvPr/>
-        </p:nvSpPr>
-        <p:spPr>
-          <a:xfrm>
-            <a:off x="1097280" y="2140428"/>
-            <a:ext cx="474025" cy="474025"/>
-          </a:xfrm>
-          <a:prstGeom prst="roundRect">
-            <a:avLst>
-              <a:gd name="adj" fmla="val 7716"/>
-            </a:avLst>
-          </a:prstGeom>
-          <a:solidFill>
-            <a:srgbClr val="07111F"/>
-          </a:solidFill>
-          <a:ln w="12700">
-            <a:solidFill>
-              <a:srgbClr val="BAE6FD"/>
-            </a:solidFill>
-            <a:prstDash val="solid"/>
-          </a:ln>
-        </p:spPr>
-      </p:sp>
-      <p:pic>
-        <p:nvPicPr>
-          <p:cNvPr id="29" name="Image 3" descr="article icon from tabler-icons (MIT)">    </p:cNvPr>
-          <p:cNvPicPr>
-            <a:picLocks noChangeAspect="1"/>
-          </p:cNvPicPr>
-          <p:nvPr/>
-        </p:nvPicPr>
-        <p:blipFill>
-          <a:blip r:embed="rId7">
-            <a:extLst>
-              <a:ext uri="{96DAC541-7B7A-43D3-8B79-37D633B846F1}">
-                <asvg:svgBlip xmlns:asvg="http://schemas.microsoft.com/office/drawing/2016/SVG/main" r:embed="rId8"/>
-              </a:ext>
-            </a:extLst>
-          </a:blip>
-          <a:stretch>
-            <a:fillRect/>
-          </a:stretch>
-        </p:blipFill>
-        <p:spPr>
-          <a:xfrm>
-            <a:off x="1170432" y="2213580"/>
-            <a:ext cx="327721" cy="327721"/>
-          </a:xfrm>
-          <a:prstGeom prst="rect">
-            <a:avLst/>
-          </a:prstGeom>
-        </p:spPr>
-      </p:pic>
-      <p:sp>
-        <p:nvSpPr>
-          <p:cNvPr id="30" name="mdpr:1-2-dfa474:item-1:block-8-chunk-1"/>
+          <p:cNvPr id="28" name="mdpr:1-2-dfa474:item-1:block-8-chunk-1"/>
           <p:cNvSpPr txBox="1"/>
           <p:nvPr/>
         </p:nvSpPr>
         <p:spPr>
           <a:xfrm>
-            <a:off x="1699321" y="1987296"/>
-            <a:ext cx="9255191" cy="780288"/>
+            <a:off x="1133856" y="1957548"/>
+            <a:ext cx="9820656" cy="839785"/>
           </a:xfrm>
           <a:prstGeom prst="rect">
             <a:avLst/>
@@ -29231,71 +27601,14 @@
       </p:sp>
       <p:sp>
         <p:nvSpPr>
-          <p:cNvPr id="31" name="Shape 25"/>
-          <p:cNvSpPr/>
-          <p:nvPr/>
-        </p:nvSpPr>
-        <p:spPr>
-          <a:xfrm>
-            <a:off x="1097280" y="3466308"/>
-            <a:ext cx="474025" cy="474025"/>
-          </a:xfrm>
-          <a:prstGeom prst="roundRect">
-            <a:avLst>
-              <a:gd name="adj" fmla="val 7716"/>
-            </a:avLst>
-          </a:prstGeom>
-          <a:solidFill>
-            <a:srgbClr val="07111F"/>
-          </a:solidFill>
-          <a:ln w="12700">
-            <a:solidFill>
-              <a:srgbClr val="BAE6FD"/>
-            </a:solidFill>
-            <a:prstDash val="solid"/>
-          </a:ln>
-        </p:spPr>
-      </p:sp>
-      <p:pic>
-        <p:nvPicPr>
-          <p:cNvPr id="32" name="Image 4" descr="article icon from tabler-icons (MIT)">    </p:cNvPr>
-          <p:cNvPicPr>
-            <a:picLocks noChangeAspect="1"/>
-          </p:cNvPicPr>
-          <p:nvPr/>
-        </p:nvPicPr>
-        <p:blipFill>
-          <a:blip r:embed="rId9">
-            <a:extLst>
-              <a:ext uri="{96DAC541-7B7A-43D3-8B79-37D633B846F1}">
-                <asvg:svgBlip xmlns:asvg="http://schemas.microsoft.com/office/drawing/2016/SVG/main" r:embed="rId10"/>
-              </a:ext>
-            </a:extLst>
-          </a:blip>
-          <a:stretch>
-            <a:fillRect/>
-          </a:stretch>
-        </p:blipFill>
-        <p:spPr>
-          <a:xfrm>
-            <a:off x="1170432" y="3539460"/>
-            <a:ext cx="327721" cy="327721"/>
-          </a:xfrm>
-          <a:prstGeom prst="rect">
-            <a:avLst/>
-          </a:prstGeom>
-        </p:spPr>
-      </p:pic>
-      <p:sp>
-        <p:nvSpPr>
-          <p:cNvPr id="33" name="mdpr:1-2-dfa474:item-2:block-8-chunk-1"/>
+          <p:cNvPr id="29" name="mdpr:1-2-dfa474:item-2:block-8-chunk-1"/>
           <p:cNvSpPr txBox="1"/>
           <p:nvPr/>
         </p:nvSpPr>
         <p:spPr>
           <a:xfrm>
-            <a:off x="1699321" y="3313176"/>
-            <a:ext cx="9255191" cy="780288"/>
+            <a:off x="1133856" y="3283428"/>
+            <a:ext cx="9820656" cy="839785"/>
           </a:xfrm>
           <a:prstGeom prst="rect">
             <a:avLst/>
@@ -29347,71 +27660,14 @@
       </p:sp>
       <p:sp>
         <p:nvSpPr>
-          <p:cNvPr id="34" name="Shape 27"/>
-          <p:cNvSpPr/>
-          <p:nvPr/>
-        </p:nvSpPr>
-        <p:spPr>
-          <a:xfrm>
-            <a:off x="1097280" y="4783044"/>
-            <a:ext cx="474025" cy="474025"/>
-          </a:xfrm>
-          <a:prstGeom prst="roundRect">
-            <a:avLst>
-              <a:gd name="adj" fmla="val 7716"/>
-            </a:avLst>
-          </a:prstGeom>
-          <a:solidFill>
-            <a:srgbClr val="07111F"/>
-          </a:solidFill>
-          <a:ln w="12700">
-            <a:solidFill>
-              <a:srgbClr val="BAE6FD"/>
-            </a:solidFill>
-            <a:prstDash val="solid"/>
-          </a:ln>
-        </p:spPr>
-      </p:sp>
-      <p:pic>
-        <p:nvPicPr>
-          <p:cNvPr id="35" name="Image 5" descr="article icon from tabler-icons (MIT)">    </p:cNvPr>
-          <p:cNvPicPr>
-            <a:picLocks noChangeAspect="1"/>
-          </p:cNvPicPr>
-          <p:nvPr/>
-        </p:nvPicPr>
-        <p:blipFill>
-          <a:blip r:embed="rId11">
-            <a:extLst>
-              <a:ext uri="{96DAC541-7B7A-43D3-8B79-37D633B846F1}">
-                <asvg:svgBlip xmlns:asvg="http://schemas.microsoft.com/office/drawing/2016/SVG/main" r:embed="rId12"/>
-              </a:ext>
-            </a:extLst>
-          </a:blip>
-          <a:stretch>
-            <a:fillRect/>
-          </a:stretch>
-        </p:blipFill>
-        <p:spPr>
-          <a:xfrm>
-            <a:off x="1170432" y="4856196"/>
-            <a:ext cx="327721" cy="327721"/>
-          </a:xfrm>
-          <a:prstGeom prst="rect">
-            <a:avLst/>
-          </a:prstGeom>
-        </p:spPr>
-      </p:pic>
-      <p:sp>
-        <p:nvSpPr>
-          <p:cNvPr id="36" name="mdpr:1-2-dfa474:item-3:block-8-chunk-1"/>
+          <p:cNvPr id="30" name="mdpr:1-2-dfa474:item-3:block-8-chunk-1"/>
           <p:cNvSpPr txBox="1"/>
           <p:nvPr/>
         </p:nvSpPr>
         <p:spPr>
           <a:xfrm>
-            <a:off x="1699321" y="4629912"/>
-            <a:ext cx="9255191" cy="780288"/>
+            <a:off x="1133856" y="4600164"/>
+            <a:ext cx="9820656" cy="839785"/>
           </a:xfrm>
           <a:prstGeom prst="rect">
             <a:avLst/>

--- a/docs/theme-preview/pptx/liquid-glass.pptx
+++ b/docs/theme-preview/pptx/liquid-glass.pptx
@@ -4036,33 +4036,6 @@
         </p:nvSpPr>
         <p:spPr>
           <a:xfrm>
-            <a:off x="731520" y="1207008"/>
-            <a:ext cx="1325880" cy="54864"/>
-          </a:xfrm>
-          <a:prstGeom prst="rect">
-            <a:avLst/>
-          </a:prstGeom>
-          <a:solidFill>
-            <a:srgbClr val="7DD3FC"/>
-          </a:solidFill>
-          <a:ln w="12700">
-            <a:solidFill>
-              <a:srgbClr val="7DD3FC">
-                <a:alpha val="0"/>
-              </a:srgbClr>
-            </a:solidFill>
-            <a:prstDash val="solid"/>
-          </a:ln>
-        </p:spPr>
-      </p:sp>
-      <p:sp>
-        <p:nvSpPr>
-          <p:cNvPr id="17" name="Shape 15"/>
-          <p:cNvSpPr/>
-          <p:nvPr/>
-        </p:nvSpPr>
-        <p:spPr>
-          <a:xfrm>
             <a:off x="0" y="0"/>
             <a:ext cx="12191695" cy="201168"/>
           </a:xfrm>
@@ -4084,36 +4057,7 @@
       </p:sp>
       <p:sp>
         <p:nvSpPr>
-          <p:cNvPr id="18" name="Shape 16"/>
-          <p:cNvSpPr/>
-          <p:nvPr/>
-        </p:nvSpPr>
-        <p:spPr>
-          <a:xfrm>
-            <a:off x="9357055" y="6528816"/>
-            <a:ext cx="2148840" cy="73152"/>
-          </a:xfrm>
-          <a:prstGeom prst="rect">
-            <a:avLst/>
-          </a:prstGeom>
-          <a:solidFill>
-            <a:srgbClr val="111827">
-              <a:alpha val="90000"/>
-            </a:srgbClr>
-          </a:solidFill>
-          <a:ln w="12700">
-            <a:solidFill>
-              <a:srgbClr val="111827">
-                <a:alpha val="0"/>
-              </a:srgbClr>
-            </a:solidFill>
-            <a:prstDash val="solid"/>
-          </a:ln>
-        </p:spPr>
-      </p:sp>
-      <p:sp>
-        <p:nvSpPr>
-          <p:cNvPr id="19" name="mdpr:mdpr-design-grammar-b3a462:title:__title:mdpr-design-grammar-b3a462"/>
+          <p:cNvPr id="17" name="mdpr:mdpr-design-grammar-b3a462:title:__title:mdpr-design-grammar-b3a462"/>
           <p:cNvSpPr txBox="1"/>
           <p:nvPr/>
         </p:nvSpPr>
@@ -4619,16 +4563,158 @@
           </a:ln>
         </p:spPr>
       </p:sp>
-      <p:sp>
-        <p:nvSpPr>
-          <p:cNvPr id="16" name="Shape 14"/>
-          <p:cNvSpPr/>
-          <p:nvPr/>
-        </p:nvSpPr>
-        <p:spPr>
-          <a:xfrm>
-            <a:off x="731520" y="1207008"/>
-            <a:ext cx="1325880" cy="54864"/>
+      <p:pic>
+        <p:nvPicPr>
+          <p:cNvPr id="16" name="Image 0" descr="preencoded.png">    </p:cNvPr>
+          <p:cNvPicPr>
+            <a:picLocks noChangeAspect="1"/>
+          </p:cNvPicPr>
+          <p:nvPr/>
+        </p:nvPicPr>
+        <p:blipFill>
+          <a:blip r:embed="rId1">
+            <a:extLst>
+              <a:ext uri="{96DAC541-7B7A-43D3-8B79-37D633B846F1}">
+                <asvg:svgBlip xmlns:asvg="http://schemas.microsoft.com/office/drawing/2016/SVG/main" r:embed="rId2"/>
+              </a:ext>
+            </a:extLst>
+          </a:blip>
+          <a:stretch>
+            <a:fillRect/>
+          </a:stretch>
+        </p:blipFill>
+        <p:spPr>
+          <a:xfrm>
+            <a:off x="914400" y="2523744"/>
+            <a:ext cx="10241280" cy="1024128"/>
+          </a:xfrm>
+          <a:prstGeom prst="rect">
+            <a:avLst/>
+          </a:prstGeom>
+        </p:spPr>
+      </p:pic>
+      <p:sp>
+        <p:nvSpPr>
+          <p:cNvPr id="17" name="Shape 14"/>
+          <p:cNvSpPr/>
+          <p:nvPr/>
+        </p:nvSpPr>
+        <p:spPr>
+          <a:xfrm>
+            <a:off x="914400" y="2523744"/>
+            <a:ext cx="10241280" cy="1024128"/>
+          </a:xfrm>
+          <a:prstGeom prst="rect">
+            <a:avLst/>
+          </a:prstGeom>
+          <a:solidFill>
+            <a:srgbClr val="132238">
+              <a:alpha val="0"/>
+            </a:srgbClr>
+          </a:solidFill>
+          <a:ln w="12700">
+            <a:solidFill>
+              <a:srgbClr val="BAE6FD">
+                <a:alpha val="0"/>
+              </a:srgbClr>
+            </a:solidFill>
+            <a:prstDash val="solid"/>
+          </a:ln>
+          <a:effectLst>
+            <a:outerShdw sx="100000" sy="100000" kx="0" ky="0" algn="bl" rotWithShape="0" blurRad="30480" dist="50800" dir="2700000">
+              <a:srgbClr val="CBD5E1">
+                <a:alpha val="20000"/>
+              </a:srgbClr>
+            </a:outerShdw>
+            <a:glow rad="63500">
+              <a:srgbClr val="7DD3FC">
+                <a:alpha val="23000"/>
+              </a:srgbClr>
+            </a:glow>
+          </a:effectLst>
+        </p:spPr>
+      </p:sp>
+      <p:pic>
+        <p:nvPicPr>
+          <p:cNvPr id="18" name="Image 1" descr="preencoded.png">    </p:cNvPr>
+          <p:cNvPicPr>
+            <a:picLocks noChangeAspect="1"/>
+          </p:cNvPicPr>
+          <p:nvPr/>
+        </p:nvPicPr>
+        <p:blipFill>
+          <a:blip r:embed="rId3">
+            <a:extLst>
+              <a:ext uri="{96DAC541-7B7A-43D3-8B79-37D633B846F1}">
+                <asvg:svgBlip xmlns:asvg="http://schemas.microsoft.com/office/drawing/2016/SVG/main" r:embed="rId4"/>
+              </a:ext>
+            </a:extLst>
+          </a:blip>
+          <a:stretch>
+            <a:fillRect/>
+          </a:stretch>
+        </p:blipFill>
+        <p:spPr>
+          <a:xfrm>
+            <a:off x="914400" y="3849624"/>
+            <a:ext cx="10241280" cy="1024128"/>
+          </a:xfrm>
+          <a:prstGeom prst="rect">
+            <a:avLst/>
+          </a:prstGeom>
+        </p:spPr>
+      </p:pic>
+      <p:sp>
+        <p:nvSpPr>
+          <p:cNvPr id="19" name="Shape 15"/>
+          <p:cNvSpPr/>
+          <p:nvPr/>
+        </p:nvSpPr>
+        <p:spPr>
+          <a:xfrm>
+            <a:off x="914400" y="3849624"/>
+            <a:ext cx="10241280" cy="1024128"/>
+          </a:xfrm>
+          <a:prstGeom prst="rect">
+            <a:avLst/>
+          </a:prstGeom>
+          <a:solidFill>
+            <a:srgbClr val="132238">
+              <a:alpha val="0"/>
+            </a:srgbClr>
+          </a:solidFill>
+          <a:ln w="12700">
+            <a:solidFill>
+              <a:srgbClr val="BAE6FD">
+                <a:alpha val="0"/>
+              </a:srgbClr>
+            </a:solidFill>
+            <a:prstDash val="solid"/>
+          </a:ln>
+          <a:effectLst>
+            <a:outerShdw sx="100000" sy="100000" kx="0" ky="0" algn="bl" rotWithShape="0" blurRad="30480" dist="50800" dir="2700000">
+              <a:srgbClr val="CBD5E1">
+                <a:alpha val="20000"/>
+              </a:srgbClr>
+            </a:outerShdw>
+            <a:glow rad="63500">
+              <a:srgbClr val="7DD3FC">
+                <a:alpha val="23000"/>
+              </a:srgbClr>
+            </a:glow>
+          </a:effectLst>
+        </p:spPr>
+      </p:sp>
+      <p:sp>
+        <p:nvSpPr>
+          <p:cNvPr id="20" name="Shape 16"/>
+          <p:cNvSpPr/>
+          <p:nvPr/>
+        </p:nvSpPr>
+        <p:spPr>
+          <a:xfrm>
+            <a:off x="914400" y="2523744"/>
+            <a:ext cx="73152" cy="1024128"/>
           </a:xfrm>
           <a:prstGeom prst="rect">
             <a:avLst/>
@@ -4648,24 +4734,24 @@
       </p:sp>
       <p:sp>
         <p:nvSpPr>
-          <p:cNvPr id="17" name="Shape 15"/>
-          <p:cNvSpPr/>
-          <p:nvPr/>
-        </p:nvSpPr>
-        <p:spPr>
-          <a:xfrm>
-            <a:off x="822960" y="1554480"/>
-            <a:ext cx="4937760" cy="73152"/>
-          </a:xfrm>
-          <a:prstGeom prst="rect">
-            <a:avLst/>
-          </a:prstGeom>
-          <a:solidFill>
-            <a:srgbClr val="7DD3FC"/>
-          </a:solidFill>
-          <a:ln w="12700">
-            <a:solidFill>
-              <a:srgbClr val="7DD3FC">
+          <p:cNvPr id="21" name="Shape 17"/>
+          <p:cNvSpPr/>
+          <p:nvPr/>
+        </p:nvSpPr>
+        <p:spPr>
+          <a:xfrm>
+            <a:off x="914400" y="3849624"/>
+            <a:ext cx="73152" cy="1024128"/>
+          </a:xfrm>
+          <a:prstGeom prst="rect">
+            <a:avLst/>
+          </a:prstGeom>
+          <a:solidFill>
+            <a:srgbClr val="A78BFA"/>
+          </a:solidFill>
+          <a:ln w="12700">
+            <a:solidFill>
+              <a:srgbClr val="A78BFA">
                 <a:alpha val="0"/>
               </a:srgbClr>
             </a:solidFill>
@@ -4675,34 +4761,7 @@
       </p:sp>
       <p:sp>
         <p:nvSpPr>
-          <p:cNvPr id="18" name="Shape 16"/>
-          <p:cNvSpPr/>
-          <p:nvPr/>
-        </p:nvSpPr>
-        <p:spPr>
-          <a:xfrm>
-            <a:off x="6400800" y="1554480"/>
-            <a:ext cx="4937760" cy="73152"/>
-          </a:xfrm>
-          <a:prstGeom prst="rect">
-            <a:avLst/>
-          </a:prstGeom>
-          <a:solidFill>
-            <a:srgbClr val="7DD3FC"/>
-          </a:solidFill>
-          <a:ln w="12700">
-            <a:solidFill>
-              <a:srgbClr val="7DD3FC">
-                <a:alpha val="0"/>
-              </a:srgbClr>
-            </a:solidFill>
-            <a:prstDash val="solid"/>
-          </a:ln>
-        </p:spPr>
-      </p:sp>
-      <p:sp>
-        <p:nvSpPr>
-          <p:cNvPr id="19" name="mdpr:2-2-a9df10:title:__title:2-2-a9df10"/>
+          <p:cNvPr id="22" name="mdpr:2-2-a9df10:title:__title:2-2-a9df10"/>
           <p:cNvSpPr txBox="1"/>
           <p:nvPr/>
         </p:nvSpPr>
@@ -4736,7 +4795,24 @@
                 <a:ea typeface="Pretendard" pitchFamily="34" charset="-122"/>
                 <a:cs typeface="Pretendard" pitchFamily="34" charset="-120"/>
               </a:rPr>
-              <a:t>Semantic Blocks (Cont. 2/2)</a:t>
+              <a:t>Semantic Blocks</a:t>
+            </a:r>
+            <a:pPr algn="ctr" indent="0" marL="0">
+              <a:lnSpc>
+                <a:spcPct val="120000"/>
+              </a:lnSpc>
+              <a:buNone/>
+            </a:pPr>
+            <a:r>
+              <a:rPr lang="en-US" sz="2000" dirty="0">
+                <a:solidFill>
+                  <a:srgbClr val="6C6C6C"/>
+                </a:solidFill>
+                <a:latin typeface="Pretendard" pitchFamily="34" charset="0"/>
+                <a:ea typeface="Pretendard" pitchFamily="34" charset="-122"/>
+                <a:cs typeface="Pretendard" pitchFamily="34" charset="-120"/>
+              </a:rPr>
+              <a:t> (Cont. 2/2)</a:t>
             </a:r>
             <a:endParaRPr lang="en-US" sz="3400" dirty="0"/>
           </a:p>
@@ -4744,14 +4820,14 @@
       </p:sp>
       <p:sp>
         <p:nvSpPr>
-          <p:cNvPr id="20" name="mdpr:2-2-a9df10:left:block-10-chunk-2"/>
+          <p:cNvPr id="23" name="mdpr:2-2-a9df10:item-1:block-10-chunk-2"/>
           <p:cNvSpPr txBox="1"/>
           <p:nvPr/>
         </p:nvSpPr>
         <p:spPr>
           <a:xfrm>
-            <a:off x="896112" y="1664208"/>
-            <a:ext cx="4791456" cy="4169664"/>
+            <a:off x="1133856" y="2615916"/>
+            <a:ext cx="9820656" cy="839785"/>
           </a:xfrm>
           <a:prstGeom prst="rect">
             <a:avLst/>
@@ -4760,7 +4836,7 @@
           <a:ln/>
         </p:spPr>
         <p:txBody>
-          <a:bodyPr wrap="square" lIns="0" tIns="25400" rIns="25400" bIns="0" rtlCol="0" anchor="t"/>
+          <a:bodyPr wrap="square" lIns="0" tIns="25400" rIns="25400" bIns="0" rtlCol="0" anchor="ctr"/>
           <a:lstStyle/>
           <a:p>
             <a:pPr algn="l" indent="0" marL="0">
@@ -4778,7 +4854,7 @@
                 <a:ea typeface="Pretendard" pitchFamily="34" charset="-122"/>
                 <a:cs typeface="Pretendard" pitchFamily="34" charset="-120"/>
               </a:rPr>
-              <a:t>- Constraint:</a:t>
+              <a:t>Constraint:</a:t>
             </a:r>
             <a:pPr algn="l" indent="0" marL="0">
               <a:lnSpc>
@@ -4803,14 +4879,14 @@
       </p:sp>
       <p:sp>
         <p:nvSpPr>
-          <p:cNvPr id="21" name="mdpr:2-2-a9df10:right:block-10-chunk-2"/>
+          <p:cNvPr id="24" name="mdpr:2-2-a9df10:item-2:block-10-chunk-2"/>
           <p:cNvSpPr txBox="1"/>
           <p:nvPr/>
         </p:nvSpPr>
         <p:spPr>
           <a:xfrm>
-            <a:off x="6473952" y="1664208"/>
-            <a:ext cx="4791456" cy="4169664"/>
+            <a:off x="1133856" y="3941796"/>
+            <a:ext cx="9820656" cy="839785"/>
           </a:xfrm>
           <a:prstGeom prst="rect">
             <a:avLst/>
@@ -4819,7 +4895,7 @@
           <a:ln/>
         </p:spPr>
         <p:txBody>
-          <a:bodyPr wrap="square" lIns="0" tIns="25400" rIns="25400" bIns="0" rtlCol="0" anchor="t"/>
+          <a:bodyPr wrap="square" lIns="0" tIns="25400" rIns="25400" bIns="0" rtlCol="0" anchor="ctr"/>
           <a:lstStyle/>
           <a:p>
             <a:pPr algn="l" indent="0" marL="0">
@@ -4837,7 +4913,7 @@
                 <a:ea typeface="Pretendard" pitchFamily="34" charset="-122"/>
                 <a:cs typeface="Pretendard" pitchFamily="34" charset="-120"/>
               </a:rPr>
-              <a:t>- Emphasis</a:t>
+              <a:t>Emphasis</a:t>
             </a:r>
             <a:pPr algn="l" indent="0" marL="0">
               <a:lnSpc>
@@ -5328,34 +5404,7 @@
       </p:sp>
       <p:sp>
         <p:nvSpPr>
-          <p:cNvPr id="16" name="Shape 14"/>
-          <p:cNvSpPr/>
-          <p:nvPr/>
-        </p:nvSpPr>
-        <p:spPr>
-          <a:xfrm>
-            <a:off x="731520" y="1207008"/>
-            <a:ext cx="1325880" cy="54864"/>
-          </a:xfrm>
-          <a:prstGeom prst="rect">
-            <a:avLst/>
-          </a:prstGeom>
-          <a:solidFill>
-            <a:srgbClr val="7DD3FC"/>
-          </a:solidFill>
-          <a:ln w="12700">
-            <a:solidFill>
-              <a:srgbClr val="7DD3FC">
-                <a:alpha val="0"/>
-              </a:srgbClr>
-            </a:solidFill>
-            <a:prstDash val="solid"/>
-          </a:ln>
-        </p:spPr>
-      </p:sp>
-      <p:sp>
-        <p:nvSpPr>
-          <p:cNvPr id="17" name="mdpr:pipeline-diagram-51792c:title:__title:pipeline-diagram-51792c"/>
+          <p:cNvPr id="16" name="mdpr:pipeline-diagram-51792c:title:__title:pipeline-diagram-51792c"/>
           <p:cNvSpPr txBox="1"/>
           <p:nvPr/>
         </p:nvSpPr>
@@ -5397,7 +5446,7 @@
       </p:sp>
       <p:sp>
         <p:nvSpPr>
-          <p:cNvPr id="18" name="Shape 16"/>
+          <p:cNvPr id="17" name="Shape 15"/>
           <p:cNvSpPr/>
           <p:nvPr/>
         </p:nvSpPr>
@@ -5421,7 +5470,7 @@
       </p:sp>
       <p:sp>
         <p:nvSpPr>
-          <p:cNvPr id="19" name="Shape 17"/>
+          <p:cNvPr id="18" name="Shape 16"/>
           <p:cNvSpPr/>
           <p:nvPr/>
         </p:nvSpPr>
@@ -5445,7 +5494,7 @@
       </p:sp>
       <p:sp>
         <p:nvSpPr>
-          <p:cNvPr id="20" name="Shape 18"/>
+          <p:cNvPr id="19" name="Shape 17"/>
           <p:cNvSpPr/>
           <p:nvPr/>
         </p:nvSpPr>
@@ -5469,7 +5518,7 @@
       </p:sp>
       <p:sp>
         <p:nvSpPr>
-          <p:cNvPr id="21" name="Shape 19"/>
+          <p:cNvPr id="20" name="Shape 18"/>
           <p:cNvSpPr/>
           <p:nvPr/>
         </p:nvSpPr>
@@ -5493,7 +5542,7 @@
       </p:sp>
       <p:sp>
         <p:nvSpPr>
-          <p:cNvPr id="22" name="Shape 20"/>
+          <p:cNvPr id="21" name="Shape 19"/>
           <p:cNvSpPr/>
           <p:nvPr/>
         </p:nvSpPr>
@@ -5517,7 +5566,7 @@
       </p:sp>
       <p:sp>
         <p:nvSpPr>
-          <p:cNvPr id="23" name="Shape 21"/>
+          <p:cNvPr id="22" name="Shape 20"/>
           <p:cNvSpPr/>
           <p:nvPr/>
         </p:nvSpPr>
@@ -5556,7 +5605,7 @@
       </p:sp>
       <p:sp>
         <p:nvSpPr>
-          <p:cNvPr id="24" name="Shape 22"/>
+          <p:cNvPr id="23" name="Shape 21"/>
           <p:cNvSpPr/>
           <p:nvPr/>
         </p:nvSpPr>
@@ -5583,7 +5632,7 @@
       </p:sp>
       <p:sp>
         <p:nvSpPr>
-          <p:cNvPr id="25" name="Shape 23"/>
+          <p:cNvPr id="24" name="Shape 22"/>
           <p:cNvSpPr/>
           <p:nvPr/>
         </p:nvSpPr>
@@ -5610,7 +5659,7 @@
       </p:sp>
       <p:sp>
         <p:nvSpPr>
-          <p:cNvPr id="26" name="Text 24"/>
+          <p:cNvPr id="25" name="Text 23"/>
           <p:cNvSpPr txBox="1"/>
           <p:nvPr/>
         </p:nvSpPr>
@@ -5638,7 +5687,7 @@
               <a:buNone/>
             </a:pPr>
             <a:r>
-              <a:rPr lang="en-US" sz="1500" b="1" dirty="0">
+              <a:rPr lang="en-US" sz="1600" b="1" dirty="0">
                 <a:solidFill>
                   <a:srgbClr val="07111F"/>
                 </a:solidFill>
@@ -5648,13 +5697,13 @@
               </a:rPr>
               <a:t>1</a:t>
             </a:r>
-            <a:endParaRPr lang="en-US" sz="1500" dirty="0"/>
+            <a:endParaRPr lang="en-US" sz="1600" dirty="0"/>
           </a:p>
         </p:txBody>
       </p:sp>
       <p:sp>
         <p:nvSpPr>
-          <p:cNvPr id="27" name="Text 25"/>
+          <p:cNvPr id="26" name="Text 24"/>
           <p:cNvSpPr txBox="1"/>
           <p:nvPr/>
         </p:nvSpPr>
@@ -5698,7 +5747,7 @@
       </p:sp>
       <p:sp>
         <p:nvSpPr>
-          <p:cNvPr id="28" name="Shape 26"/>
+          <p:cNvPr id="27" name="Shape 25"/>
           <p:cNvSpPr/>
           <p:nvPr/>
         </p:nvSpPr>
@@ -5737,7 +5786,7 @@
       </p:sp>
       <p:sp>
         <p:nvSpPr>
-          <p:cNvPr id="29" name="Shape 27"/>
+          <p:cNvPr id="28" name="Shape 26"/>
           <p:cNvSpPr/>
           <p:nvPr/>
         </p:nvSpPr>
@@ -5764,7 +5813,7 @@
       </p:sp>
       <p:sp>
         <p:nvSpPr>
-          <p:cNvPr id="30" name="Shape 28"/>
+          <p:cNvPr id="29" name="Shape 27"/>
           <p:cNvSpPr/>
           <p:nvPr/>
         </p:nvSpPr>
@@ -5791,7 +5840,7 @@
       </p:sp>
       <p:sp>
         <p:nvSpPr>
-          <p:cNvPr id="31" name="Text 29"/>
+          <p:cNvPr id="30" name="Text 28"/>
           <p:cNvSpPr txBox="1"/>
           <p:nvPr/>
         </p:nvSpPr>
@@ -5819,7 +5868,7 @@
               <a:buNone/>
             </a:pPr>
             <a:r>
-              <a:rPr lang="en-US" sz="1500" b="1" dirty="0">
+              <a:rPr lang="en-US" sz="1600" b="1" dirty="0">
                 <a:solidFill>
                   <a:srgbClr val="07111F"/>
                 </a:solidFill>
@@ -5829,13 +5878,13 @@
               </a:rPr>
               <a:t>2</a:t>
             </a:r>
-            <a:endParaRPr lang="en-US" sz="1500" dirty="0"/>
+            <a:endParaRPr lang="en-US" sz="1600" dirty="0"/>
           </a:p>
         </p:txBody>
       </p:sp>
       <p:sp>
         <p:nvSpPr>
-          <p:cNvPr id="32" name="Text 30"/>
+          <p:cNvPr id="31" name="Text 29"/>
           <p:cNvSpPr txBox="1"/>
           <p:nvPr/>
         </p:nvSpPr>
@@ -5879,7 +5928,7 @@
       </p:sp>
       <p:sp>
         <p:nvSpPr>
-          <p:cNvPr id="33" name="Shape 31"/>
+          <p:cNvPr id="32" name="Shape 30"/>
           <p:cNvSpPr/>
           <p:nvPr/>
         </p:nvSpPr>
@@ -5918,7 +5967,7 @@
       </p:sp>
       <p:sp>
         <p:nvSpPr>
-          <p:cNvPr id="34" name="Shape 32"/>
+          <p:cNvPr id="33" name="Shape 31"/>
           <p:cNvSpPr/>
           <p:nvPr/>
         </p:nvSpPr>
@@ -5945,7 +5994,7 @@
       </p:sp>
       <p:sp>
         <p:nvSpPr>
-          <p:cNvPr id="35" name="Shape 33"/>
+          <p:cNvPr id="34" name="Shape 32"/>
           <p:cNvSpPr/>
           <p:nvPr/>
         </p:nvSpPr>
@@ -5972,7 +6021,7 @@
       </p:sp>
       <p:sp>
         <p:nvSpPr>
-          <p:cNvPr id="36" name="Text 34"/>
+          <p:cNvPr id="35" name="Text 33"/>
           <p:cNvSpPr txBox="1"/>
           <p:nvPr/>
         </p:nvSpPr>
@@ -6000,7 +6049,7 @@
               <a:buNone/>
             </a:pPr>
             <a:r>
-              <a:rPr lang="en-US" sz="1500" b="1" dirty="0">
+              <a:rPr lang="en-US" sz="1600" b="1" dirty="0">
                 <a:solidFill>
                   <a:srgbClr val="07111F"/>
                 </a:solidFill>
@@ -6010,13 +6059,13 @@
               </a:rPr>
               <a:t>3</a:t>
             </a:r>
-            <a:endParaRPr lang="en-US" sz="1500" dirty="0"/>
+            <a:endParaRPr lang="en-US" sz="1600" dirty="0"/>
           </a:p>
         </p:txBody>
       </p:sp>
       <p:sp>
         <p:nvSpPr>
-          <p:cNvPr id="37" name="Text 35"/>
+          <p:cNvPr id="36" name="Text 34"/>
           <p:cNvSpPr txBox="1"/>
           <p:nvPr/>
         </p:nvSpPr>
@@ -6060,7 +6109,7 @@
       </p:sp>
       <p:sp>
         <p:nvSpPr>
-          <p:cNvPr id="38" name="Shape 36"/>
+          <p:cNvPr id="37" name="Shape 35"/>
           <p:cNvSpPr/>
           <p:nvPr/>
         </p:nvSpPr>
@@ -6099,7 +6148,7 @@
       </p:sp>
       <p:sp>
         <p:nvSpPr>
-          <p:cNvPr id="39" name="Shape 37"/>
+          <p:cNvPr id="38" name="Shape 36"/>
           <p:cNvSpPr/>
           <p:nvPr/>
         </p:nvSpPr>
@@ -6126,7 +6175,7 @@
       </p:sp>
       <p:sp>
         <p:nvSpPr>
-          <p:cNvPr id="40" name="Shape 38"/>
+          <p:cNvPr id="39" name="Shape 37"/>
           <p:cNvSpPr/>
           <p:nvPr/>
         </p:nvSpPr>
@@ -6153,7 +6202,7 @@
       </p:sp>
       <p:sp>
         <p:nvSpPr>
-          <p:cNvPr id="41" name="Text 39"/>
+          <p:cNvPr id="40" name="Text 38"/>
           <p:cNvSpPr txBox="1"/>
           <p:nvPr/>
         </p:nvSpPr>
@@ -6181,7 +6230,7 @@
               <a:buNone/>
             </a:pPr>
             <a:r>
-              <a:rPr lang="en-US" sz="1500" b="1" dirty="0">
+              <a:rPr lang="en-US" sz="1600" b="1" dirty="0">
                 <a:solidFill>
                   <a:srgbClr val="07111F"/>
                 </a:solidFill>
@@ -6191,13 +6240,13 @@
               </a:rPr>
               <a:t>4</a:t>
             </a:r>
-            <a:endParaRPr lang="en-US" sz="1500" dirty="0"/>
+            <a:endParaRPr lang="en-US" sz="1600" dirty="0"/>
           </a:p>
         </p:txBody>
       </p:sp>
       <p:sp>
         <p:nvSpPr>
-          <p:cNvPr id="42" name="Text 40"/>
+          <p:cNvPr id="41" name="Text 39"/>
           <p:cNvSpPr txBox="1"/>
           <p:nvPr/>
         </p:nvSpPr>
@@ -6241,7 +6290,7 @@
       </p:sp>
       <p:sp>
         <p:nvSpPr>
-          <p:cNvPr id="43" name="Shape 41"/>
+          <p:cNvPr id="42" name="Shape 40"/>
           <p:cNvSpPr/>
           <p:nvPr/>
         </p:nvSpPr>
@@ -6280,7 +6329,7 @@
       </p:sp>
       <p:sp>
         <p:nvSpPr>
-          <p:cNvPr id="44" name="Shape 42"/>
+          <p:cNvPr id="43" name="Shape 41"/>
           <p:cNvSpPr/>
           <p:nvPr/>
         </p:nvSpPr>
@@ -6307,7 +6356,7 @@
       </p:sp>
       <p:sp>
         <p:nvSpPr>
-          <p:cNvPr id="45" name="Shape 43"/>
+          <p:cNvPr id="44" name="Shape 42"/>
           <p:cNvSpPr/>
           <p:nvPr/>
         </p:nvSpPr>
@@ -6334,7 +6383,7 @@
       </p:sp>
       <p:sp>
         <p:nvSpPr>
-          <p:cNvPr id="46" name="Text 44"/>
+          <p:cNvPr id="45" name="Text 43"/>
           <p:cNvSpPr txBox="1"/>
           <p:nvPr/>
         </p:nvSpPr>
@@ -6362,7 +6411,7 @@
               <a:buNone/>
             </a:pPr>
             <a:r>
-              <a:rPr lang="en-US" sz="1500" b="1" dirty="0">
+              <a:rPr lang="en-US" sz="1600" b="1" dirty="0">
                 <a:solidFill>
                   <a:srgbClr val="07111F"/>
                 </a:solidFill>
@@ -6372,13 +6421,13 @@
               </a:rPr>
               <a:t>5</a:t>
             </a:r>
-            <a:endParaRPr lang="en-US" sz="1500" dirty="0"/>
+            <a:endParaRPr lang="en-US" sz="1600" dirty="0"/>
           </a:p>
         </p:txBody>
       </p:sp>
       <p:sp>
         <p:nvSpPr>
-          <p:cNvPr id="47" name="Text 45"/>
+          <p:cNvPr id="46" name="Text 44"/>
           <p:cNvSpPr txBox="1"/>
           <p:nvPr/>
         </p:nvSpPr>
@@ -6422,7 +6471,7 @@
       </p:sp>
       <p:sp>
         <p:nvSpPr>
-          <p:cNvPr id="48" name="Shape 46"/>
+          <p:cNvPr id="47" name="Shape 45"/>
           <p:cNvSpPr/>
           <p:nvPr/>
         </p:nvSpPr>
@@ -6461,7 +6510,7 @@
       </p:sp>
       <p:sp>
         <p:nvSpPr>
-          <p:cNvPr id="49" name="Shape 47"/>
+          <p:cNvPr id="48" name="Shape 46"/>
           <p:cNvSpPr/>
           <p:nvPr/>
         </p:nvSpPr>
@@ -6488,7 +6537,7 @@
       </p:sp>
       <p:sp>
         <p:nvSpPr>
-          <p:cNvPr id="50" name="Shape 48"/>
+          <p:cNvPr id="49" name="Shape 47"/>
           <p:cNvSpPr/>
           <p:nvPr/>
         </p:nvSpPr>
@@ -6515,7 +6564,7 @@
       </p:sp>
       <p:sp>
         <p:nvSpPr>
-          <p:cNvPr id="51" name="Text 49"/>
+          <p:cNvPr id="50" name="Text 48"/>
           <p:cNvSpPr txBox="1"/>
           <p:nvPr/>
         </p:nvSpPr>
@@ -6543,7 +6592,7 @@
               <a:buNone/>
             </a:pPr>
             <a:r>
-              <a:rPr lang="en-US" sz="1500" b="1" dirty="0">
+              <a:rPr lang="en-US" sz="1600" b="1" dirty="0">
                 <a:solidFill>
                   <a:srgbClr val="07111F"/>
                 </a:solidFill>
@@ -6553,13 +6602,13 @@
               </a:rPr>
               <a:t>6</a:t>
             </a:r>
-            <a:endParaRPr lang="en-US" sz="1500" dirty="0"/>
+            <a:endParaRPr lang="en-US" sz="1600" dirty="0"/>
           </a:p>
         </p:txBody>
       </p:sp>
       <p:sp>
         <p:nvSpPr>
-          <p:cNvPr id="52" name="Text 50"/>
+          <p:cNvPr id="51" name="Text 49"/>
           <p:cNvSpPr txBox="1"/>
           <p:nvPr/>
         </p:nvSpPr>
@@ -7069,88 +7118,7 @@
       </p:sp>
       <p:sp>
         <p:nvSpPr>
-          <p:cNvPr id="16" name="Shape 14"/>
-          <p:cNvSpPr/>
-          <p:nvPr/>
-        </p:nvSpPr>
-        <p:spPr>
-          <a:xfrm>
-            <a:off x="731520" y="1207008"/>
-            <a:ext cx="1325880" cy="54864"/>
-          </a:xfrm>
-          <a:prstGeom prst="rect">
-            <a:avLst/>
-          </a:prstGeom>
-          <a:solidFill>
-            <a:srgbClr val="7DD3FC"/>
-          </a:solidFill>
-          <a:ln w="12700">
-            <a:solidFill>
-              <a:srgbClr val="7DD3FC">
-                <a:alpha val="0"/>
-              </a:srgbClr>
-            </a:solidFill>
-            <a:prstDash val="solid"/>
-          </a:ln>
-        </p:spPr>
-      </p:sp>
-      <p:sp>
-        <p:nvSpPr>
-          <p:cNvPr id="17" name="Shape 15"/>
-          <p:cNvSpPr/>
-          <p:nvPr/>
-        </p:nvSpPr>
-        <p:spPr>
-          <a:xfrm>
-            <a:off x="822960" y="1389888"/>
-            <a:ext cx="4937760" cy="73152"/>
-          </a:xfrm>
-          <a:prstGeom prst="rect">
-            <a:avLst/>
-          </a:prstGeom>
-          <a:solidFill>
-            <a:srgbClr val="7DD3FC"/>
-          </a:solidFill>
-          <a:ln w="12700">
-            <a:solidFill>
-              <a:srgbClr val="7DD3FC">
-                <a:alpha val="0"/>
-              </a:srgbClr>
-            </a:solidFill>
-            <a:prstDash val="solid"/>
-          </a:ln>
-        </p:spPr>
-      </p:sp>
-      <p:sp>
-        <p:nvSpPr>
-          <p:cNvPr id="18" name="Shape 16"/>
-          <p:cNvSpPr/>
-          <p:nvPr/>
-        </p:nvSpPr>
-        <p:spPr>
-          <a:xfrm>
-            <a:off x="6400800" y="1389888"/>
-            <a:ext cx="4937760" cy="73152"/>
-          </a:xfrm>
-          <a:prstGeom prst="rect">
-            <a:avLst/>
-          </a:prstGeom>
-          <a:solidFill>
-            <a:srgbClr val="7DD3FC"/>
-          </a:solidFill>
-          <a:ln w="12700">
-            <a:solidFill>
-              <a:srgbClr val="7DD3FC">
-                <a:alpha val="0"/>
-              </a:srgbClr>
-            </a:solidFill>
-            <a:prstDash val="solid"/>
-          </a:ln>
-        </p:spPr>
-      </p:sp>
-      <p:sp>
-        <p:nvSpPr>
-          <p:cNvPr id="19" name="mdpr:1-2-e3669a:title:__title:1-2-e3669a"/>
+          <p:cNvPr id="16" name="mdpr:1-2-e3669a:title:__title:1-2-e3669a"/>
           <p:cNvSpPr txBox="1"/>
           <p:nvPr/>
         </p:nvSpPr>
@@ -7192,14 +7160,14 @@
       </p:sp>
       <p:sp>
         <p:nvSpPr>
-          <p:cNvPr id="20" name="mdpr:1-2-e3669a:left:block-15-chunk-1-block-15-chunk-1"/>
+          <p:cNvPr id="17" name="mdpr:1-2-e3669a:left:block-15-chunk-1-block-15-chunk-1"/>
           <p:cNvSpPr txBox="1"/>
           <p:nvPr/>
         </p:nvSpPr>
         <p:spPr>
           <a:xfrm>
-            <a:off x="896112" y="1499616"/>
-            <a:ext cx="4791456" cy="4398264"/>
+            <a:off x="896112" y="1463040"/>
+            <a:ext cx="4791456" cy="4261104"/>
           </a:xfrm>
           <a:prstGeom prst="rect">
             <a:avLst/>
@@ -7291,14 +7259,14 @@
       </p:sp>
       <p:sp>
         <p:nvSpPr>
-          <p:cNvPr id="21" name="mdpr:1-2-e3669a:right:block-15-chunk-1-block-15-chunk-1"/>
+          <p:cNvPr id="18" name="mdpr:1-2-e3669a:right:block-15-chunk-1"/>
           <p:cNvSpPr txBox="1"/>
           <p:nvPr/>
         </p:nvSpPr>
         <p:spPr>
           <a:xfrm>
-            <a:off x="6473952" y="1499616"/>
-            <a:ext cx="4791456" cy="4398264"/>
+            <a:off x="6473952" y="1463040"/>
+            <a:ext cx="4791456" cy="4261104"/>
           </a:xfrm>
           <a:prstGeom prst="rect">
             <a:avLst/>
@@ -7346,46 +7314,6 @@
             </a:r>
             <a:endParaRPr lang="en-US" sz="1800" dirty="0"/>
           </a:p>
-          <a:p>
-            <a:pPr algn="l" indent="0" marL="0">
-              <a:lnSpc>
-                <a:spcPct val="120000"/>
-              </a:lnSpc>
-              <a:buNone/>
-            </a:pPr>
-            <a:r>
-              <a:rPr lang="en-US" sz="1800" b="1" dirty="0">
-                <a:solidFill>
-                  <a:srgbClr val="7DD3FC"/>
-                </a:solidFill>
-                <a:latin typeface="Pretendard" pitchFamily="34" charset="0"/>
-                <a:ea typeface="Pretendard" pitchFamily="34" charset="-122"/>
-                <a:cs typeface="Pretendard" pitchFamily="34" charset="-120"/>
-              </a:rPr>
-              <a:t>- Connectors</a:t>
-            </a:r>
-            <a:endParaRPr lang="en-US" sz="1800" dirty="0"/>
-          </a:p>
-          <a:p>
-            <a:pPr algn="l" indent="0" marL="0">
-              <a:lnSpc>
-                <a:spcPct val="120000"/>
-              </a:lnSpc>
-              <a:buNone/>
-            </a:pPr>
-            <a:r>
-              <a:rPr lang="en-US" sz="1800" dirty="0">
-                <a:solidFill>
-                  <a:srgbClr val="F8F8F8"/>
-                </a:solidFill>
-                <a:latin typeface="Pretendard" pitchFamily="34" charset="0"/>
-                <a:ea typeface="Pretendard" pitchFamily="34" charset="-122"/>
-                <a:cs typeface="Pretendard" pitchFamily="34" charset="-120"/>
-              </a:rPr>
-              <a:t>  straight-arrow, elbow-arrow, boundary-attach, overlap-joint, parallel-flow, contrast-flow.</a:t>
-            </a:r>
-            <a:endParaRPr lang="en-US" sz="1800" dirty="0"/>
-          </a:p>
         </p:txBody>
       </p:sp>
     </p:spTree>
@@ -7856,88 +7784,7 @@
       </p:sp>
       <p:sp>
         <p:nvSpPr>
-          <p:cNvPr id="16" name="Shape 14"/>
-          <p:cNvSpPr/>
-          <p:nvPr/>
-        </p:nvSpPr>
-        <p:spPr>
-          <a:xfrm>
-            <a:off x="731520" y="1207008"/>
-            <a:ext cx="1325880" cy="54864"/>
-          </a:xfrm>
-          <a:prstGeom prst="rect">
-            <a:avLst/>
-          </a:prstGeom>
-          <a:solidFill>
-            <a:srgbClr val="7DD3FC"/>
-          </a:solidFill>
-          <a:ln w="12700">
-            <a:solidFill>
-              <a:srgbClr val="7DD3FC">
-                <a:alpha val="0"/>
-              </a:srgbClr>
-            </a:solidFill>
-            <a:prstDash val="solid"/>
-          </a:ln>
-        </p:spPr>
-      </p:sp>
-      <p:sp>
-        <p:nvSpPr>
-          <p:cNvPr id="17" name="Shape 15"/>
-          <p:cNvSpPr/>
-          <p:nvPr/>
-        </p:nvSpPr>
-        <p:spPr>
-          <a:xfrm>
-            <a:off x="822960" y="1554480"/>
-            <a:ext cx="4937760" cy="73152"/>
-          </a:xfrm>
-          <a:prstGeom prst="rect">
-            <a:avLst/>
-          </a:prstGeom>
-          <a:solidFill>
-            <a:srgbClr val="7DD3FC"/>
-          </a:solidFill>
-          <a:ln w="12700">
-            <a:solidFill>
-              <a:srgbClr val="7DD3FC">
-                <a:alpha val="0"/>
-              </a:srgbClr>
-            </a:solidFill>
-            <a:prstDash val="solid"/>
-          </a:ln>
-        </p:spPr>
-      </p:sp>
-      <p:sp>
-        <p:nvSpPr>
-          <p:cNvPr id="18" name="Shape 16"/>
-          <p:cNvSpPr/>
-          <p:nvPr/>
-        </p:nvSpPr>
-        <p:spPr>
-          <a:xfrm>
-            <a:off x="6400800" y="1554480"/>
-            <a:ext cx="4937760" cy="73152"/>
-          </a:xfrm>
-          <a:prstGeom prst="rect">
-            <a:avLst/>
-          </a:prstGeom>
-          <a:solidFill>
-            <a:srgbClr val="7DD3FC"/>
-          </a:solidFill>
-          <a:ln w="12700">
-            <a:solidFill>
-              <a:srgbClr val="7DD3FC">
-                <a:alpha val="0"/>
-              </a:srgbClr>
-            </a:solidFill>
-            <a:prstDash val="solid"/>
-          </a:ln>
-        </p:spPr>
-      </p:sp>
-      <p:sp>
-        <p:nvSpPr>
-          <p:cNvPr id="19" name="mdpr:2-2-c23e9b:title:__title:2-2-c23e9b"/>
+          <p:cNvPr id="16" name="mdpr:2-2-c23e9b:title:__title:2-2-c23e9b"/>
           <p:cNvSpPr txBox="1"/>
           <p:nvPr/>
         </p:nvSpPr>
@@ -7971,7 +7818,24 @@
                 <a:ea typeface="Pretendard" pitchFamily="34" charset="-122"/>
                 <a:cs typeface="Pretendard" pitchFamily="34" charset="-120"/>
               </a:rPr>
-              <a:t>Decoration Pattern Catalog (Cont. 2/2)</a:t>
+              <a:t>Decoration Pattern Catalog</a:t>
+            </a:r>
+            <a:pPr algn="ctr" indent="0" marL="0">
+              <a:lnSpc>
+                <a:spcPct val="120000"/>
+              </a:lnSpc>
+              <a:buNone/>
+            </a:pPr>
+            <a:r>
+              <a:rPr lang="en-US" sz="2000" dirty="0">
+                <a:solidFill>
+                  <a:srgbClr val="6C6C6C"/>
+                </a:solidFill>
+                <a:latin typeface="Pretendard" pitchFamily="34" charset="0"/>
+                <a:ea typeface="Pretendard" pitchFamily="34" charset="-122"/>
+                <a:cs typeface="Pretendard" pitchFamily="34" charset="-120"/>
+              </a:rPr>
+              <a:t> (Cont. 2/2)</a:t>
             </a:r>
             <a:endParaRPr lang="en-US" sz="3400" dirty="0"/>
           </a:p>
@@ -7979,14 +7843,14 @@
       </p:sp>
       <p:sp>
         <p:nvSpPr>
-          <p:cNvPr id="20" name="mdpr:2-2-c23e9b:left:block-15-chunk-2"/>
+          <p:cNvPr id="17" name="mdpr:2-2-c23e9b:left:block-15-chunk-2-block-15-chunk-2"/>
           <p:cNvSpPr txBox="1"/>
           <p:nvPr/>
         </p:nvSpPr>
         <p:spPr>
           <a:xfrm>
-            <a:off x="896112" y="1664208"/>
-            <a:ext cx="4791456" cy="4169664"/>
+            <a:off x="896112" y="1463040"/>
+            <a:ext cx="4791456" cy="4261104"/>
           </a:xfrm>
           <a:prstGeom prst="rect">
             <a:avLst/>
@@ -8005,7 +7869,44 @@
               <a:buNone/>
             </a:pPr>
             <a:r>
-              <a:rPr lang="en-US" sz="2200" b="1" dirty="0">
+              <a:rPr lang="en-US" sz="1800" b="1" dirty="0">
+                <a:solidFill>
+                  <a:srgbClr val="7DD3FC"/>
+                </a:solidFill>
+                <a:latin typeface="Pretendard" pitchFamily="34" charset="0"/>
+                <a:ea typeface="Pretendard" pitchFamily="34" charset="-122"/>
+                <a:cs typeface="Pretendard" pitchFamily="34" charset="-120"/>
+              </a:rPr>
+              <a:t>- Connectors</a:t>
+            </a:r>
+            <a:pPr algn="l" indent="0" marL="0">
+              <a:lnSpc>
+                <a:spcPct val="120000"/>
+              </a:lnSpc>
+              <a:buNone/>
+            </a:pPr>
+            <a:r>
+              <a:rPr lang="en-US" sz="1800" dirty="0">
+                <a:solidFill>
+                  <a:srgbClr val="F8F8F8"/>
+                </a:solidFill>
+                <a:latin typeface="Pretendard" pitchFamily="34" charset="0"/>
+                <a:ea typeface="Pretendard" pitchFamily="34" charset="-122"/>
+                <a:cs typeface="Pretendard" pitchFamily="34" charset="-120"/>
+              </a:rPr>
+              <a:t>  straight-arrow, elbow-arrow, boundary-attach, overlap-joint, parallel-flow, contrast-flow.</a:t>
+            </a:r>
+            <a:endParaRPr lang="en-US" sz="1800" dirty="0"/>
+          </a:p>
+          <a:p>
+            <a:pPr algn="l" indent="0" marL="0">
+              <a:lnSpc>
+                <a:spcPct val="120000"/>
+              </a:lnSpc>
+              <a:buNone/>
+            </a:pPr>
+            <a:r>
+              <a:rPr lang="en-US" sz="1800" b="1" dirty="0">
                 <a:solidFill>
                   <a:srgbClr val="7DD3FC"/>
                 </a:solidFill>
@@ -8015,6 +7916,9 @@
               </a:rPr>
               <a:t>- Icons</a:t>
             </a:r>
+            <a:endParaRPr lang="en-US" sz="1800" dirty="0"/>
+          </a:p>
+          <a:p>
             <a:pPr algn="l" indent="0" marL="0">
               <a:lnSpc>
                 <a:spcPct val="120000"/>
@@ -8022,7 +7926,7 @@
               <a:buNone/>
             </a:pPr>
             <a:r>
-              <a:rPr lang="en-US" sz="2200" dirty="0">
+              <a:rPr lang="en-US" sz="1800" dirty="0">
                 <a:solidFill>
                   <a:srgbClr val="F8F8F8"/>
                 </a:solidFill>
@@ -8032,20 +7936,20 @@
               </a:rPr>
               <a:t>  number-badge, mono-icon-slot, letter-disc, quiet-aside, image-safe-frame, brand-glyph.</a:t>
             </a:r>
-            <a:endParaRPr lang="en-US" sz="2200" dirty="0"/>
+            <a:endParaRPr lang="en-US" sz="1800" dirty="0"/>
           </a:p>
         </p:txBody>
       </p:sp>
       <p:sp>
         <p:nvSpPr>
-          <p:cNvPr id="21" name="mdpr:2-2-c23e9b:right:block-15-chunk-2"/>
+          <p:cNvPr id="18" name="mdpr:2-2-c23e9b:right:block-15-chunk-2"/>
           <p:cNvSpPr txBox="1"/>
           <p:nvPr/>
         </p:nvSpPr>
         <p:spPr>
           <a:xfrm>
-            <a:off x="6473952" y="1664208"/>
-            <a:ext cx="4791456" cy="4169664"/>
+            <a:off x="6473952" y="1463040"/>
+            <a:ext cx="4791456" cy="4261104"/>
           </a:xfrm>
           <a:prstGeom prst="rect">
             <a:avLst/>
@@ -8064,7 +7968,7 @@
               <a:buNone/>
             </a:pPr>
             <a:r>
-              <a:rPr lang="en-US" sz="2200" b="1" dirty="0">
+              <a:rPr lang="en-US" sz="1800" b="1" dirty="0">
                 <a:solidFill>
                   <a:srgbClr val="7DD3FC"/>
                 </a:solidFill>
@@ -8081,7 +7985,7 @@
               <a:buNone/>
             </a:pPr>
             <a:r>
-              <a:rPr lang="en-US" sz="2200" dirty="0">
+              <a:rPr lang="en-US" sz="1800" dirty="0">
                 <a:solidFill>
                   <a:srgbClr val="F8F8F8"/>
                 </a:solidFill>
@@ -8091,7 +7995,7 @@
               </a:rPr>
               <a:t>  skeuomorphic-bevel, glassmorphism-surface, newmorphic-panel, clay-blob, bento-tile, liquid-lens.</a:t>
             </a:r>
-            <a:endParaRPr lang="en-US" sz="2200" dirty="0"/>
+            <a:endParaRPr lang="en-US" sz="1800" dirty="0"/>
           </a:p>
         </p:txBody>
       </p:sp>
@@ -8561,36 +8465,9 @@
           </a:ln>
         </p:spPr>
       </p:sp>
-      <p:sp>
-        <p:nvSpPr>
-          <p:cNvPr id="16" name="Shape 14"/>
-          <p:cNvSpPr/>
-          <p:nvPr/>
-        </p:nvSpPr>
-        <p:spPr>
-          <a:xfrm>
-            <a:off x="731520" y="1207008"/>
-            <a:ext cx="1325880" cy="54864"/>
-          </a:xfrm>
-          <a:prstGeom prst="rect">
-            <a:avLst/>
-          </a:prstGeom>
-          <a:solidFill>
-            <a:srgbClr val="7DD3FC"/>
-          </a:solidFill>
-          <a:ln w="12700">
-            <a:solidFill>
-              <a:srgbClr val="7DD3FC">
-                <a:alpha val="0"/>
-              </a:srgbClr>
-            </a:solidFill>
-            <a:prstDash val="solid"/>
-          </a:ln>
-        </p:spPr>
-      </p:sp>
       <p:pic>
         <p:nvPicPr>
-          <p:cNvPr id="17" name="Image 0" descr="preencoded.png">    </p:cNvPr>
+          <p:cNvPr id="16" name="Image 0" descr="preencoded.png">    </p:cNvPr>
           <p:cNvPicPr>
             <a:picLocks noChangeAspect="1"/>
           </p:cNvPicPr>
@@ -8620,7 +8497,7 @@
       </p:pic>
       <p:sp>
         <p:nvSpPr>
-          <p:cNvPr id="18" name="Shape 15"/>
+          <p:cNvPr id="17" name="Shape 14"/>
           <p:cNvSpPr/>
           <p:nvPr/>
         </p:nvSpPr>
@@ -8661,7 +8538,7 @@
       </p:sp>
       <p:sp>
         <p:nvSpPr>
-          <p:cNvPr id="19" name="mdpr:table-coherence-2f9a7b:title:__title:table-coherence-2f9a7b"/>
+          <p:cNvPr id="18" name="mdpr:table-coherence-2f9a7b:title:__title:table-coherence-2f9a7b"/>
           <p:cNvSpPr txBox="1"/>
           <p:nvPr/>
         </p:nvSpPr>
@@ -10222,36 +10099,9 @@
           </a:ln>
         </p:spPr>
       </p:sp>
-      <p:sp>
-        <p:nvSpPr>
-          <p:cNvPr id="16" name="Shape 14"/>
-          <p:cNvSpPr/>
-          <p:nvPr/>
-        </p:nvSpPr>
-        <p:spPr>
-          <a:xfrm>
-            <a:off x="731520" y="1207008"/>
-            <a:ext cx="1325880" cy="54864"/>
-          </a:xfrm>
-          <a:prstGeom prst="rect">
-            <a:avLst/>
-          </a:prstGeom>
-          <a:solidFill>
-            <a:srgbClr val="7DD3FC"/>
-          </a:solidFill>
-          <a:ln w="12700">
-            <a:solidFill>
-              <a:srgbClr val="7DD3FC">
-                <a:alpha val="0"/>
-              </a:srgbClr>
-            </a:solidFill>
-            <a:prstDash val="solid"/>
-          </a:ln>
-        </p:spPr>
-      </p:sp>
       <p:pic>
         <p:nvPicPr>
-          <p:cNvPr id="17" name="Image 0" descr="preencoded.png">    </p:cNvPr>
+          <p:cNvPr id="16" name="Image 0" descr="preencoded.png">    </p:cNvPr>
           <p:cNvPicPr>
             <a:picLocks noChangeAspect="1"/>
           </p:cNvPicPr>
@@ -10281,7 +10131,7 @@
       </p:pic>
       <p:sp>
         <p:nvSpPr>
-          <p:cNvPr id="18" name="Shape 15"/>
+          <p:cNvPr id="17" name="Shape 14"/>
           <p:cNvSpPr/>
           <p:nvPr/>
         </p:nvSpPr>
@@ -10322,7 +10172,7 @@
       </p:sp>
       <p:sp>
         <p:nvSpPr>
-          <p:cNvPr id="19" name="Shape 16"/>
+          <p:cNvPr id="18" name="Shape 15"/>
           <p:cNvSpPr/>
           <p:nvPr/>
         </p:nvSpPr>
@@ -10349,7 +10199,7 @@
       </p:sp>
       <p:sp>
         <p:nvSpPr>
-          <p:cNvPr id="20" name="mdpr:1-2-2ff3f0:title:__title:1-2-2ff3f0"/>
+          <p:cNvPr id="19" name="mdpr:1-2-2ff3f0:title:__title:1-2-2ff3f0"/>
           <p:cNvSpPr txBox="1"/>
           <p:nvPr/>
         </p:nvSpPr>
@@ -10391,7 +10241,7 @@
       </p:sp>
       <p:sp>
         <p:nvSpPr>
-          <p:cNvPr id="21" name="mdpr:1-2-2ff3f0:body:block-19"/>
+          <p:cNvPr id="20" name="mdpr:1-2-2ff3f0:body:block-19"/>
           <p:cNvSpPr txBox="1"/>
           <p:nvPr/>
         </p:nvSpPr>
@@ -10530,7 +10380,7 @@
       </p:sp>
       <p:graphicFrame>
         <p:nvGraphicFramePr>
-          <p:cNvPr id="22" name="Chart 0" descr=""/>
+          <p:cNvPr id="21" name="Chart 0" descr=""/>
           <p:cNvGraphicFramePr/>
           <p:nvPr/>
         </p:nvGraphicFramePr>
@@ -11010,36 +10860,9 @@
           </a:ln>
         </p:spPr>
       </p:sp>
-      <p:sp>
-        <p:nvSpPr>
-          <p:cNvPr id="16" name="Shape 14"/>
-          <p:cNvSpPr/>
-          <p:nvPr/>
-        </p:nvSpPr>
-        <p:spPr>
-          <a:xfrm>
-            <a:off x="731520" y="1207008"/>
-            <a:ext cx="1325880" cy="54864"/>
-          </a:xfrm>
-          <a:prstGeom prst="rect">
-            <a:avLst/>
-          </a:prstGeom>
-          <a:solidFill>
-            <a:srgbClr val="7DD3FC"/>
-          </a:solidFill>
-          <a:ln w="12700">
-            <a:solidFill>
-              <a:srgbClr val="7DD3FC">
-                <a:alpha val="0"/>
-              </a:srgbClr>
-            </a:solidFill>
-            <a:prstDash val="solid"/>
-          </a:ln>
-        </p:spPr>
-      </p:sp>
       <p:pic>
         <p:nvPicPr>
-          <p:cNvPr id="17" name="Image 0" descr="preencoded.png">    </p:cNvPr>
+          <p:cNvPr id="16" name="Image 0" descr="preencoded.png">    </p:cNvPr>
           <p:cNvPicPr>
             <a:picLocks noChangeAspect="1"/>
           </p:cNvPicPr>
@@ -11069,7 +10892,7 @@
       </p:pic>
       <p:sp>
         <p:nvSpPr>
-          <p:cNvPr id="18" name="Shape 15"/>
+          <p:cNvPr id="17" name="Shape 14"/>
           <p:cNvSpPr/>
           <p:nvPr/>
         </p:nvSpPr>
@@ -11110,7 +10933,7 @@
       </p:sp>
       <p:sp>
         <p:nvSpPr>
-          <p:cNvPr id="19" name="mdpr:2-2-542095:title:__title:2-2-542095"/>
+          <p:cNvPr id="18" name="mdpr:2-2-542095:title:__title:2-2-542095"/>
           <p:cNvSpPr txBox="1"/>
           <p:nvPr/>
         </p:nvSpPr>
@@ -11144,7 +10967,24 @@
                 <a:ea typeface="Pretendard" pitchFamily="34" charset="-122"/>
                 <a:cs typeface="Pretendard" pitchFamily="34" charset="-120"/>
               </a:rPr>
-              <a:t>Chart and Table Pair (Cont. 2/2)</a:t>
+              <a:t>Chart and Table Pair</a:t>
+            </a:r>
+            <a:pPr algn="ctr" indent="0" marL="0">
+              <a:lnSpc>
+                <a:spcPct val="120000"/>
+              </a:lnSpc>
+              <a:buNone/>
+            </a:pPr>
+            <a:r>
+              <a:rPr lang="en-US" sz="2000" dirty="0">
+                <a:solidFill>
+                  <a:srgbClr val="6C6C6C"/>
+                </a:solidFill>
+                <a:latin typeface="Pretendard" pitchFamily="34" charset="0"/>
+                <a:ea typeface="Pretendard" pitchFamily="34" charset="-122"/>
+                <a:cs typeface="Pretendard" pitchFamily="34" charset="-120"/>
+              </a:rPr>
+              <a:t> (Cont. 2/2)</a:t>
             </a:r>
             <a:endParaRPr lang="en-US" sz="3400" dirty="0"/>
           </a:p>
@@ -12459,36 +12299,9 @@
           </a:ln>
         </p:spPr>
       </p:sp>
-      <p:sp>
-        <p:nvSpPr>
-          <p:cNvPr id="16" name="Shape 14"/>
-          <p:cNvSpPr/>
-          <p:nvPr/>
-        </p:nvSpPr>
-        <p:spPr>
-          <a:xfrm>
-            <a:off x="731520" y="1207008"/>
-            <a:ext cx="1325880" cy="54864"/>
-          </a:xfrm>
-          <a:prstGeom prst="rect">
-            <a:avLst/>
-          </a:prstGeom>
-          <a:solidFill>
-            <a:srgbClr val="7DD3FC"/>
-          </a:solidFill>
-          <a:ln w="12700">
-            <a:solidFill>
-              <a:srgbClr val="7DD3FC">
-                <a:alpha val="0"/>
-              </a:srgbClr>
-            </a:solidFill>
-            <a:prstDash val="solid"/>
-          </a:ln>
-        </p:spPr>
-      </p:sp>
       <p:pic>
         <p:nvPicPr>
-          <p:cNvPr id="17" name="Image 0" descr="preencoded.png">    </p:cNvPr>
+          <p:cNvPr id="16" name="Image 0" descr="preencoded.png">    </p:cNvPr>
           <p:cNvPicPr>
             <a:picLocks noChangeAspect="1"/>
           </p:cNvPicPr>
@@ -12518,7 +12331,7 @@
       </p:pic>
       <p:sp>
         <p:nvSpPr>
-          <p:cNvPr id="18" name="Shape 15"/>
+          <p:cNvPr id="17" name="Shape 14"/>
           <p:cNvSpPr/>
           <p:nvPr/>
         </p:nvSpPr>
@@ -12559,7 +12372,7 @@
       </p:sp>
       <p:sp>
         <p:nvSpPr>
-          <p:cNvPr id="19" name="mdpr:1-2-b8955f:title:__title:1-2-b8955f"/>
+          <p:cNvPr id="18" name="mdpr:1-2-b8955f:title:__title:1-2-b8955f"/>
           <p:cNvSpPr txBox="1"/>
           <p:nvPr/>
         </p:nvSpPr>
@@ -12601,7 +12414,7 @@
       </p:sp>
       <p:sp>
         <p:nvSpPr>
-          <p:cNvPr id="20" name="Shape 17"/>
+          <p:cNvPr id="19" name="Shape 16"/>
           <p:cNvSpPr/>
           <p:nvPr/>
         </p:nvSpPr>
@@ -12634,7 +12447,7 @@
       </p:sp>
       <p:sp>
         <p:nvSpPr>
-          <p:cNvPr id="21" name="Shape 18"/>
+          <p:cNvPr id="20" name="Shape 17"/>
           <p:cNvSpPr/>
           <p:nvPr/>
         </p:nvSpPr>
@@ -12665,7 +12478,7 @@
       </p:sp>
       <p:sp>
         <p:nvSpPr>
-          <p:cNvPr id="22" name="Shape 19"/>
+          <p:cNvPr id="21" name="Shape 18"/>
           <p:cNvSpPr/>
           <p:nvPr/>
         </p:nvSpPr>
@@ -12696,7 +12509,7 @@
       </p:sp>
       <p:sp>
         <p:nvSpPr>
-          <p:cNvPr id="23" name="Shape 20"/>
+          <p:cNvPr id="22" name="Shape 19"/>
           <p:cNvSpPr/>
           <p:nvPr/>
         </p:nvSpPr>
@@ -12721,7 +12534,7 @@
       </p:sp>
       <p:sp>
         <p:nvSpPr>
-          <p:cNvPr id="24" name="Shape 21"/>
+          <p:cNvPr id="23" name="Shape 20"/>
           <p:cNvSpPr/>
           <p:nvPr/>
         </p:nvSpPr>
@@ -12748,7 +12561,7 @@
       </p:sp>
       <p:sp>
         <p:nvSpPr>
-          <p:cNvPr id="25" name="Text 22"/>
+          <p:cNvPr id="24" name="Text 21"/>
           <p:cNvSpPr txBox="1"/>
           <p:nvPr/>
         </p:nvSpPr>
@@ -12792,7 +12605,7 @@
       </p:sp>
       <p:sp>
         <p:nvSpPr>
-          <p:cNvPr id="26" name="Text 23"/>
+          <p:cNvPr id="25" name="Text 22"/>
           <p:cNvSpPr txBox="1"/>
           <p:nvPr/>
         </p:nvSpPr>
@@ -12834,7 +12647,7 @@
       </p:sp>
       <p:sp>
         <p:nvSpPr>
-          <p:cNvPr id="27" name="Shape 24"/>
+          <p:cNvPr id="26" name="Shape 23"/>
           <p:cNvSpPr/>
           <p:nvPr/>
         </p:nvSpPr>
@@ -12861,7 +12674,7 @@
       </p:sp>
       <p:sp>
         <p:nvSpPr>
-          <p:cNvPr id="28" name="Text 25"/>
+          <p:cNvPr id="27" name="Text 24"/>
           <p:cNvSpPr txBox="1"/>
           <p:nvPr/>
         </p:nvSpPr>
@@ -12905,7 +12718,7 @@
       </p:sp>
       <p:sp>
         <p:nvSpPr>
-          <p:cNvPr id="29" name="Shape 26"/>
+          <p:cNvPr id="28" name="Shape 25"/>
           <p:cNvSpPr/>
           <p:nvPr/>
         </p:nvSpPr>
@@ -12932,7 +12745,7 @@
       </p:sp>
       <p:sp>
         <p:nvSpPr>
-          <p:cNvPr id="30" name="Text 27"/>
+          <p:cNvPr id="29" name="Text 26"/>
           <p:cNvSpPr txBox="1"/>
           <p:nvPr/>
         </p:nvSpPr>
@@ -12976,7 +12789,7 @@
       </p:sp>
       <p:sp>
         <p:nvSpPr>
-          <p:cNvPr id="31" name="Shape 28"/>
+          <p:cNvPr id="30" name="Shape 27"/>
           <p:cNvSpPr/>
           <p:nvPr/>
         </p:nvSpPr>
@@ -13007,7 +12820,7 @@
       </p:sp>
       <p:sp>
         <p:nvSpPr>
-          <p:cNvPr id="32" name="Shape 29"/>
+          <p:cNvPr id="31" name="Shape 28"/>
           <p:cNvSpPr/>
           <p:nvPr/>
         </p:nvSpPr>
@@ -13036,7 +12849,7 @@
       </p:sp>
       <p:sp>
         <p:nvSpPr>
-          <p:cNvPr id="33" name="Shape 30"/>
+          <p:cNvPr id="32" name="Shape 29"/>
           <p:cNvSpPr/>
           <p:nvPr/>
         </p:nvSpPr>
@@ -13059,7 +12872,7 @@
       </p:sp>
       <p:sp>
         <p:nvSpPr>
-          <p:cNvPr id="34" name="Shape 31"/>
+          <p:cNvPr id="33" name="Shape 30"/>
           <p:cNvSpPr/>
           <p:nvPr/>
         </p:nvSpPr>
@@ -13084,7 +12897,7 @@
       </p:sp>
       <p:sp>
         <p:nvSpPr>
-          <p:cNvPr id="35" name="Shape 32"/>
+          <p:cNvPr id="34" name="Shape 31"/>
           <p:cNvSpPr/>
           <p:nvPr/>
         </p:nvSpPr>
@@ -13109,7 +12922,7 @@
       </p:sp>
       <p:sp>
         <p:nvSpPr>
-          <p:cNvPr id="36" name="Shape 33"/>
+          <p:cNvPr id="35" name="Shape 32"/>
           <p:cNvSpPr/>
           <p:nvPr/>
         </p:nvSpPr>
@@ -13134,7 +12947,7 @@
       </p:sp>
       <p:sp>
         <p:nvSpPr>
-          <p:cNvPr id="37" name="Text 34"/>
+          <p:cNvPr id="36" name="Text 33"/>
           <p:cNvSpPr txBox="1"/>
           <p:nvPr/>
         </p:nvSpPr>
@@ -13178,7 +12991,7 @@
       </p:sp>
       <p:sp>
         <p:nvSpPr>
-          <p:cNvPr id="38" name="Text 35"/>
+          <p:cNvPr id="37" name="Text 34"/>
           <p:cNvSpPr txBox="1"/>
           <p:nvPr/>
         </p:nvSpPr>
@@ -13220,7 +13033,7 @@
       </p:sp>
       <p:sp>
         <p:nvSpPr>
-          <p:cNvPr id="39" name="Text 36"/>
+          <p:cNvPr id="38" name="Text 35"/>
           <p:cNvSpPr txBox="1"/>
           <p:nvPr/>
         </p:nvSpPr>
@@ -13262,7 +13075,7 @@
       </p:sp>
       <p:sp>
         <p:nvSpPr>
-          <p:cNvPr id="40" name="Text 37"/>
+          <p:cNvPr id="39" name="Text 36"/>
           <p:cNvSpPr txBox="1"/>
           <p:nvPr/>
         </p:nvSpPr>
@@ -13768,36 +13581,9 @@
           </a:ln>
         </p:spPr>
       </p:sp>
-      <p:sp>
-        <p:nvSpPr>
-          <p:cNvPr id="16" name="Shape 14"/>
-          <p:cNvSpPr/>
-          <p:nvPr/>
-        </p:nvSpPr>
-        <p:spPr>
-          <a:xfrm>
-            <a:off x="731520" y="1207008"/>
-            <a:ext cx="1325880" cy="54864"/>
-          </a:xfrm>
-          <a:prstGeom prst="rect">
-            <a:avLst/>
-          </a:prstGeom>
-          <a:solidFill>
-            <a:srgbClr val="7DD3FC"/>
-          </a:solidFill>
-          <a:ln w="12700">
-            <a:solidFill>
-              <a:srgbClr val="7DD3FC">
-                <a:alpha val="0"/>
-              </a:srgbClr>
-            </a:solidFill>
-            <a:prstDash val="solid"/>
-          </a:ln>
-        </p:spPr>
-      </p:sp>
       <p:pic>
         <p:nvPicPr>
-          <p:cNvPr id="17" name="Image 0" descr="preencoded.png">    </p:cNvPr>
+          <p:cNvPr id="16" name="Image 0" descr="preencoded.png">    </p:cNvPr>
           <p:cNvPicPr>
             <a:picLocks noChangeAspect="1"/>
           </p:cNvPicPr>
@@ -13827,7 +13613,7 @@
       </p:pic>
       <p:sp>
         <p:nvSpPr>
-          <p:cNvPr id="18" name="Shape 15"/>
+          <p:cNvPr id="17" name="Shape 14"/>
           <p:cNvSpPr/>
           <p:nvPr/>
         </p:nvSpPr>
@@ -13868,7 +13654,7 @@
       </p:sp>
       <p:sp>
         <p:nvSpPr>
-          <p:cNvPr id="19" name="mdpr:2-2-4dc4c1:title:__title:2-2-4dc4c1"/>
+          <p:cNvPr id="18" name="mdpr:2-2-4dc4c1:title:__title:2-2-4dc4c1"/>
           <p:cNvSpPr txBox="1"/>
           <p:nvPr/>
         </p:nvSpPr>
@@ -13902,7 +13688,24 @@
                 <a:ea typeface="Pretendard" pitchFamily="34" charset="-122"/>
                 <a:cs typeface="Pretendard" pitchFamily="34" charset="-120"/>
               </a:rPr>
-              <a:t>Editable Proof Objects (Cont. 2/2)</a:t>
+              <a:t>Editable Proof Objects</a:t>
+            </a:r>
+            <a:pPr algn="ctr" indent="0" marL="0">
+              <a:lnSpc>
+                <a:spcPct val="120000"/>
+              </a:lnSpc>
+              <a:buNone/>
+            </a:pPr>
+            <a:r>
+              <a:rPr lang="en-US" sz="2000" dirty="0">
+                <a:solidFill>
+                  <a:srgbClr val="6C6C6C"/>
+                </a:solidFill>
+                <a:latin typeface="Pretendard" pitchFamily="34" charset="0"/>
+                <a:ea typeface="Pretendard" pitchFamily="34" charset="-122"/>
+                <a:cs typeface="Pretendard" pitchFamily="34" charset="-120"/>
+              </a:rPr>
+              <a:t> (Cont. 2/2)</a:t>
             </a:r>
             <a:endParaRPr lang="en-US" sz="3400" dirty="0"/>
           </a:p>
@@ -13910,7 +13713,7 @@
       </p:sp>
       <p:sp>
         <p:nvSpPr>
-          <p:cNvPr id="20" name="Shape 17"/>
+          <p:cNvPr id="19" name="Shape 16"/>
           <p:cNvSpPr/>
           <p:nvPr/>
         </p:nvSpPr>
@@ -13937,7 +13740,7 @@
       </p:sp>
       <p:sp>
         <p:nvSpPr>
-          <p:cNvPr id="21" name="Shape 18"/>
+          <p:cNvPr id="20" name="Shape 17"/>
           <p:cNvSpPr/>
           <p:nvPr/>
         </p:nvSpPr>
@@ -13964,7 +13767,7 @@
       </p:sp>
       <p:sp>
         <p:nvSpPr>
-          <p:cNvPr id="22" name="Text 19"/>
+          <p:cNvPr id="21" name="Text 18"/>
           <p:cNvSpPr txBox="1"/>
           <p:nvPr/>
         </p:nvSpPr>
@@ -14008,7 +13811,7 @@
       </p:sp>
       <p:sp>
         <p:nvSpPr>
-          <p:cNvPr id="23" name="Text 20"/>
+          <p:cNvPr id="22" name="Text 19"/>
           <p:cNvSpPr txBox="1"/>
           <p:nvPr/>
         </p:nvSpPr>
@@ -14052,7 +13855,7 @@
       </p:sp>
       <p:sp>
         <p:nvSpPr>
-          <p:cNvPr id="24" name="Shape 21"/>
+          <p:cNvPr id="23" name="Shape 20"/>
           <p:cNvSpPr/>
           <p:nvPr/>
         </p:nvSpPr>
@@ -14079,7 +13882,7 @@
       </p:sp>
       <p:sp>
         <p:nvSpPr>
-          <p:cNvPr id="25" name="Shape 22"/>
+          <p:cNvPr id="24" name="Shape 21"/>
           <p:cNvSpPr/>
           <p:nvPr/>
         </p:nvSpPr>
@@ -14106,7 +13909,7 @@
       </p:sp>
       <p:sp>
         <p:nvSpPr>
-          <p:cNvPr id="26" name="Text 23"/>
+          <p:cNvPr id="25" name="Text 22"/>
           <p:cNvSpPr txBox="1"/>
           <p:nvPr/>
         </p:nvSpPr>
@@ -14150,7 +13953,7 @@
       </p:sp>
       <p:sp>
         <p:nvSpPr>
-          <p:cNvPr id="27" name="Text 24"/>
+          <p:cNvPr id="26" name="Text 23"/>
           <p:cNvSpPr txBox="1"/>
           <p:nvPr/>
         </p:nvSpPr>
@@ -14194,7 +13997,7 @@
       </p:sp>
       <p:sp>
         <p:nvSpPr>
-          <p:cNvPr id="28" name="Shape 25"/>
+          <p:cNvPr id="27" name="Shape 24"/>
           <p:cNvSpPr/>
           <p:nvPr/>
         </p:nvSpPr>
@@ -14221,7 +14024,7 @@
       </p:sp>
       <p:sp>
         <p:nvSpPr>
-          <p:cNvPr id="29" name="Shape 26"/>
+          <p:cNvPr id="28" name="Shape 25"/>
           <p:cNvSpPr/>
           <p:nvPr/>
         </p:nvSpPr>
@@ -14248,7 +14051,7 @@
       </p:sp>
       <p:sp>
         <p:nvSpPr>
-          <p:cNvPr id="30" name="Text 27"/>
+          <p:cNvPr id="29" name="Text 26"/>
           <p:cNvSpPr txBox="1"/>
           <p:nvPr/>
         </p:nvSpPr>
@@ -14292,7 +14095,7 @@
       </p:sp>
       <p:sp>
         <p:nvSpPr>
-          <p:cNvPr id="31" name="Text 28"/>
+          <p:cNvPr id="30" name="Text 27"/>
           <p:cNvSpPr txBox="1"/>
           <p:nvPr/>
         </p:nvSpPr>
@@ -14336,7 +14139,7 @@
       </p:sp>
       <p:sp>
         <p:nvSpPr>
-          <p:cNvPr id="32" name="Shape 29"/>
+          <p:cNvPr id="31" name="Shape 28"/>
           <p:cNvSpPr/>
           <p:nvPr/>
         </p:nvSpPr>
@@ -14363,7 +14166,7 @@
       </p:sp>
       <p:sp>
         <p:nvSpPr>
-          <p:cNvPr id="33" name="Shape 30"/>
+          <p:cNvPr id="32" name="Shape 29"/>
           <p:cNvSpPr/>
           <p:nvPr/>
         </p:nvSpPr>
@@ -14390,7 +14193,7 @@
       </p:sp>
       <p:sp>
         <p:nvSpPr>
-          <p:cNvPr id="34" name="Text 31"/>
+          <p:cNvPr id="33" name="Text 30"/>
           <p:cNvSpPr txBox="1"/>
           <p:nvPr/>
         </p:nvSpPr>
@@ -14434,7 +14237,7 @@
       </p:sp>
       <p:sp>
         <p:nvSpPr>
-          <p:cNvPr id="35" name="Text 32"/>
+          <p:cNvPr id="34" name="Text 31"/>
           <p:cNvSpPr txBox="1"/>
           <p:nvPr/>
         </p:nvSpPr>
@@ -14478,7 +14281,7 @@
       </p:sp>
       <p:sp>
         <p:nvSpPr>
-          <p:cNvPr id="36" name="Shape 33"/>
+          <p:cNvPr id="35" name="Shape 32"/>
           <p:cNvSpPr/>
           <p:nvPr/>
         </p:nvSpPr>
@@ -14502,7 +14305,7 @@
       </p:sp>
       <p:sp>
         <p:nvSpPr>
-          <p:cNvPr id="37" name="Shape 34"/>
+          <p:cNvPr id="36" name="Shape 33"/>
           <p:cNvSpPr/>
           <p:nvPr/>
         </p:nvSpPr>
@@ -14526,7 +14329,7 @@
       </p:sp>
       <p:sp>
         <p:nvSpPr>
-          <p:cNvPr id="38" name="Shape 35"/>
+          <p:cNvPr id="37" name="Shape 34"/>
           <p:cNvSpPr/>
           <p:nvPr/>
         </p:nvSpPr>
@@ -15022,8 +14825,8 @@
         </p:nvSpPr>
         <p:spPr>
           <a:xfrm>
-            <a:off x="731520" y="1207008"/>
-            <a:ext cx="1325880" cy="54864"/>
+            <a:off x="822960" y="1938528"/>
+            <a:ext cx="73152" cy="2514600"/>
           </a:xfrm>
           <a:prstGeom prst="rect">
             <a:avLst/>
@@ -15041,237 +14844,22 @@
           </a:ln>
         </p:spPr>
       </p:sp>
-      <p:pic>
-        <p:nvPicPr>
-          <p:cNvPr id="17" name="Image 0" descr="preencoded.png">    </p:cNvPr>
-          <p:cNvPicPr>
-            <a:picLocks noChangeAspect="1"/>
-          </p:cNvPicPr>
-          <p:nvPr/>
-        </p:nvPicPr>
-        <p:blipFill>
-          <a:blip r:embed="rId1">
-            <a:extLst>
-              <a:ext uri="{96DAC541-7B7A-43D3-8B79-37D633B846F1}">
-                <asvg:svgBlip xmlns:asvg="http://schemas.microsoft.com/office/drawing/2016/SVG/main" r:embed="rId2"/>
-              </a:ext>
-            </a:extLst>
-          </a:blip>
-          <a:stretch>
-            <a:fillRect/>
-          </a:stretch>
-        </p:blipFill>
-        <p:spPr>
-          <a:xfrm>
-            <a:off x="914400" y="1865376"/>
-            <a:ext cx="10241280" cy="1024128"/>
-          </a:xfrm>
-          <a:prstGeom prst="rect">
-            <a:avLst/>
-          </a:prstGeom>
-        </p:spPr>
-      </p:pic>
-      <p:sp>
-        <p:nvSpPr>
-          <p:cNvPr id="18" name="Shape 15"/>
-          <p:cNvSpPr/>
-          <p:nvPr/>
-        </p:nvSpPr>
-        <p:spPr>
-          <a:xfrm>
-            <a:off x="914400" y="1865376"/>
-            <a:ext cx="10241280" cy="1024128"/>
-          </a:xfrm>
-          <a:prstGeom prst="rect">
-            <a:avLst/>
-          </a:prstGeom>
-          <a:solidFill>
-            <a:srgbClr val="132238">
-              <a:alpha val="0"/>
-            </a:srgbClr>
-          </a:solidFill>
-          <a:ln w="12700">
-            <a:solidFill>
-              <a:srgbClr val="BAE6FD">
-                <a:alpha val="0"/>
-              </a:srgbClr>
-            </a:solidFill>
-            <a:prstDash val="solid"/>
-          </a:ln>
-          <a:effectLst>
-            <a:outerShdw sx="100000" sy="100000" kx="0" ky="0" algn="bl" rotWithShape="0" blurRad="30480" dist="50800" dir="2700000">
-              <a:srgbClr val="CBD5E1">
-                <a:alpha val="20000"/>
-              </a:srgbClr>
-            </a:outerShdw>
-            <a:glow rad="63500">
-              <a:srgbClr val="7DD3FC">
-                <a:alpha val="23000"/>
-              </a:srgbClr>
-            </a:glow>
-          </a:effectLst>
-        </p:spPr>
-      </p:sp>
-      <p:pic>
-        <p:nvPicPr>
-          <p:cNvPr id="19" name="Image 1" descr="preencoded.png">    </p:cNvPr>
-          <p:cNvPicPr>
-            <a:picLocks noChangeAspect="1"/>
-          </p:cNvPicPr>
-          <p:nvPr/>
-        </p:nvPicPr>
-        <p:blipFill>
-          <a:blip r:embed="rId3">
-            <a:extLst>
-              <a:ext uri="{96DAC541-7B7A-43D3-8B79-37D633B846F1}">
-                <asvg:svgBlip xmlns:asvg="http://schemas.microsoft.com/office/drawing/2016/SVG/main" r:embed="rId4"/>
-              </a:ext>
-            </a:extLst>
-          </a:blip>
-          <a:stretch>
-            <a:fillRect/>
-          </a:stretch>
-        </p:blipFill>
-        <p:spPr>
-          <a:xfrm>
-            <a:off x="914400" y="3191256"/>
-            <a:ext cx="10241280" cy="1024128"/>
-          </a:xfrm>
-          <a:prstGeom prst="rect">
-            <a:avLst/>
-          </a:prstGeom>
-        </p:spPr>
-      </p:pic>
-      <p:sp>
-        <p:nvSpPr>
-          <p:cNvPr id="20" name="Shape 16"/>
-          <p:cNvSpPr/>
-          <p:nvPr/>
-        </p:nvSpPr>
-        <p:spPr>
-          <a:xfrm>
-            <a:off x="914400" y="3191256"/>
-            <a:ext cx="10241280" cy="1024128"/>
-          </a:xfrm>
-          <a:prstGeom prst="rect">
-            <a:avLst/>
-          </a:prstGeom>
-          <a:solidFill>
-            <a:srgbClr val="132238">
-              <a:alpha val="0"/>
-            </a:srgbClr>
-          </a:solidFill>
-          <a:ln w="12700">
-            <a:solidFill>
-              <a:srgbClr val="BAE6FD">
-                <a:alpha val="0"/>
-              </a:srgbClr>
-            </a:solidFill>
-            <a:prstDash val="solid"/>
-          </a:ln>
-          <a:effectLst>
-            <a:outerShdw sx="100000" sy="100000" kx="0" ky="0" algn="bl" rotWithShape="0" blurRad="30480" dist="50800" dir="2700000">
-              <a:srgbClr val="CBD5E1">
-                <a:alpha val="20000"/>
-              </a:srgbClr>
-            </a:outerShdw>
-            <a:glow rad="63500">
-              <a:srgbClr val="7DD3FC">
-                <a:alpha val="23000"/>
-              </a:srgbClr>
-            </a:glow>
-          </a:effectLst>
-        </p:spPr>
-      </p:sp>
-      <p:pic>
-        <p:nvPicPr>
-          <p:cNvPr id="21" name="Image 2" descr="preencoded.png">    </p:cNvPr>
-          <p:cNvPicPr>
-            <a:picLocks noChangeAspect="1"/>
-          </p:cNvPicPr>
-          <p:nvPr/>
-        </p:nvPicPr>
-        <p:blipFill>
-          <a:blip r:embed="rId5">
-            <a:extLst>
-              <a:ext uri="{96DAC541-7B7A-43D3-8B79-37D633B846F1}">
-                <asvg:svgBlip xmlns:asvg="http://schemas.microsoft.com/office/drawing/2016/SVG/main" r:embed="rId6"/>
-              </a:ext>
-            </a:extLst>
-          </a:blip>
-          <a:stretch>
-            <a:fillRect/>
-          </a:stretch>
-        </p:blipFill>
-        <p:spPr>
-          <a:xfrm>
-            <a:off x="914400" y="4507992"/>
-            <a:ext cx="10241280" cy="1024128"/>
-          </a:xfrm>
-          <a:prstGeom prst="rect">
-            <a:avLst/>
-          </a:prstGeom>
-        </p:spPr>
-      </p:pic>
-      <p:sp>
-        <p:nvSpPr>
-          <p:cNvPr id="22" name="Shape 17"/>
-          <p:cNvSpPr/>
-          <p:nvPr/>
-        </p:nvSpPr>
-        <p:spPr>
-          <a:xfrm>
-            <a:off x="914400" y="4507992"/>
-            <a:ext cx="10241280" cy="1024128"/>
-          </a:xfrm>
-          <a:prstGeom prst="rect">
-            <a:avLst/>
-          </a:prstGeom>
-          <a:solidFill>
-            <a:srgbClr val="132238">
-              <a:alpha val="0"/>
-            </a:srgbClr>
-          </a:solidFill>
-          <a:ln w="12700">
-            <a:solidFill>
-              <a:srgbClr val="BAE6FD">
-                <a:alpha val="0"/>
-              </a:srgbClr>
-            </a:solidFill>
-            <a:prstDash val="solid"/>
-          </a:ln>
-          <a:effectLst>
-            <a:outerShdw sx="100000" sy="100000" kx="0" ky="0" algn="bl" rotWithShape="0" blurRad="30480" dist="50800" dir="2700000">
-              <a:srgbClr val="CBD5E1">
-                <a:alpha val="20000"/>
-              </a:srgbClr>
-            </a:outerShdw>
-            <a:glow rad="63500">
-              <a:srgbClr val="7DD3FC">
-                <a:alpha val="23000"/>
-              </a:srgbClr>
-            </a:glow>
-          </a:effectLst>
-        </p:spPr>
-      </p:sp>
-      <p:sp>
-        <p:nvSpPr>
-          <p:cNvPr id="23" name="Shape 18"/>
-          <p:cNvSpPr/>
-          <p:nvPr/>
-        </p:nvSpPr>
-        <p:spPr>
-          <a:xfrm>
-            <a:off x="786384" y="1956816"/>
-            <a:ext cx="32004" cy="3483864"/>
-          </a:xfrm>
-          <a:prstGeom prst="rect">
-            <a:avLst/>
-          </a:prstGeom>
-          <a:solidFill>
-            <a:srgbClr val="A78BFA">
-              <a:alpha val="80000"/>
-            </a:srgbClr>
+      <p:sp>
+        <p:nvSpPr>
+          <p:cNvPr id="17" name="Shape 15"/>
+          <p:cNvSpPr/>
+          <p:nvPr/>
+        </p:nvSpPr>
+        <p:spPr>
+          <a:xfrm>
+            <a:off x="4343400" y="1938528"/>
+            <a:ext cx="73152" cy="2514600"/>
+          </a:xfrm>
+          <a:prstGeom prst="rect">
+            <a:avLst/>
+          </a:prstGeom>
+          <a:solidFill>
+            <a:srgbClr val="A78BFA"/>
           </a:solidFill>
           <a:ln w="12700">
             <a:solidFill>
@@ -15285,14 +14873,14 @@
       </p:sp>
       <p:sp>
         <p:nvSpPr>
-          <p:cNvPr id="24" name="Shape 19"/>
-          <p:cNvSpPr/>
-          <p:nvPr/>
-        </p:nvSpPr>
-        <p:spPr>
-          <a:xfrm>
-            <a:off x="914400" y="1865376"/>
-            <a:ext cx="73152" cy="1024128"/>
+          <p:cNvPr id="18" name="Shape 16"/>
+          <p:cNvSpPr/>
+          <p:nvPr/>
+        </p:nvSpPr>
+        <p:spPr>
+          <a:xfrm>
+            <a:off x="7863840" y="1938528"/>
+            <a:ext cx="73152" cy="2514600"/>
           </a:xfrm>
           <a:prstGeom prst="rect">
             <a:avLst/>
@@ -15312,61 +14900,7 @@
       </p:sp>
       <p:sp>
         <p:nvSpPr>
-          <p:cNvPr id="25" name="Shape 20"/>
-          <p:cNvSpPr/>
-          <p:nvPr/>
-        </p:nvSpPr>
-        <p:spPr>
-          <a:xfrm>
-            <a:off x="914400" y="3191256"/>
-            <a:ext cx="73152" cy="1024128"/>
-          </a:xfrm>
-          <a:prstGeom prst="rect">
-            <a:avLst/>
-          </a:prstGeom>
-          <a:solidFill>
-            <a:srgbClr val="A78BFA"/>
-          </a:solidFill>
-          <a:ln w="12700">
-            <a:solidFill>
-              <a:srgbClr val="A78BFA">
-                <a:alpha val="0"/>
-              </a:srgbClr>
-            </a:solidFill>
-            <a:prstDash val="solid"/>
-          </a:ln>
-        </p:spPr>
-      </p:sp>
-      <p:sp>
-        <p:nvSpPr>
-          <p:cNvPr id="26" name="Shape 21"/>
-          <p:cNvSpPr/>
-          <p:nvPr/>
-        </p:nvSpPr>
-        <p:spPr>
-          <a:xfrm>
-            <a:off x="914400" y="4507992"/>
-            <a:ext cx="73152" cy="1024128"/>
-          </a:xfrm>
-          <a:prstGeom prst="rect">
-            <a:avLst/>
-          </a:prstGeom>
-          <a:solidFill>
-            <a:srgbClr val="7DD3FC"/>
-          </a:solidFill>
-          <a:ln w="12700">
-            <a:solidFill>
-              <a:srgbClr val="7DD3FC">
-                <a:alpha val="0"/>
-              </a:srgbClr>
-            </a:solidFill>
-            <a:prstDash val="solid"/>
-          </a:ln>
-        </p:spPr>
-      </p:sp>
-      <p:sp>
-        <p:nvSpPr>
-          <p:cNvPr id="27" name="mdpr:1-2-ea42c8:title:__title:1-2-ea42c8"/>
+          <p:cNvPr id="19" name="mdpr:1-2-ea42c8:title:__title:1-2-ea42c8"/>
           <p:cNvSpPr txBox="1"/>
           <p:nvPr/>
         </p:nvSpPr>
@@ -15408,14 +14942,14 @@
       </p:sp>
       <p:sp>
         <p:nvSpPr>
-          <p:cNvPr id="28" name="mdpr:1-2-ea42c8:item-1:block-27-chunk-1"/>
+          <p:cNvPr id="20" name="mdpr:1-2-ea42c8:item-1:block-27-chunk-1"/>
           <p:cNvSpPr txBox="1"/>
           <p:nvPr/>
         </p:nvSpPr>
         <p:spPr>
           <a:xfrm>
-            <a:off x="1133856" y="1957548"/>
-            <a:ext cx="9820656" cy="839785"/>
+            <a:off x="1042416" y="2103120"/>
+            <a:ext cx="2825496" cy="2185416"/>
           </a:xfrm>
           <a:prstGeom prst="rect">
             <a:avLst/>
@@ -15467,14 +15001,14 @@
       </p:sp>
       <p:sp>
         <p:nvSpPr>
-          <p:cNvPr id="29" name="mdpr:1-2-ea42c8:item-2:block-27-chunk-1"/>
+          <p:cNvPr id="21" name="mdpr:1-2-ea42c8:item-2:block-27-chunk-1"/>
           <p:cNvSpPr txBox="1"/>
           <p:nvPr/>
         </p:nvSpPr>
         <p:spPr>
           <a:xfrm>
-            <a:off x="1133856" y="3283428"/>
-            <a:ext cx="9820656" cy="839785"/>
+            <a:off x="4562856" y="2103120"/>
+            <a:ext cx="2825496" cy="2185416"/>
           </a:xfrm>
           <a:prstGeom prst="rect">
             <a:avLst/>
@@ -15526,14 +15060,14 @@
       </p:sp>
       <p:sp>
         <p:nvSpPr>
-          <p:cNvPr id="30" name="mdpr:1-2-ea42c8:item-3:block-27-chunk-1"/>
+          <p:cNvPr id="22" name="mdpr:1-2-ea42c8:item-3:block-27-chunk-1"/>
           <p:cNvSpPr txBox="1"/>
           <p:nvPr/>
         </p:nvSpPr>
         <p:spPr>
           <a:xfrm>
-            <a:off x="1133856" y="4600164"/>
-            <a:ext cx="9820656" cy="839785"/>
+            <a:off x="8083296" y="2103120"/>
+            <a:ext cx="2825496" cy="2185416"/>
           </a:xfrm>
           <a:prstGeom prst="rect">
             <a:avLst/>
@@ -16057,8 +15591,8 @@
         </p:nvSpPr>
         <p:spPr>
           <a:xfrm>
-            <a:off x="731520" y="1207008"/>
-            <a:ext cx="1325880" cy="54864"/>
+            <a:off x="822960" y="1737360"/>
+            <a:ext cx="73152" cy="841248"/>
           </a:xfrm>
           <a:prstGeom prst="rect">
             <a:avLst/>
@@ -16084,8 +15618,35 @@
         </p:nvSpPr>
         <p:spPr>
           <a:xfrm>
-            <a:off x="822960" y="1188720"/>
-            <a:ext cx="10515600" cy="45720"/>
+            <a:off x="822960" y="2779776"/>
+            <a:ext cx="73152" cy="841248"/>
+          </a:xfrm>
+          <a:prstGeom prst="rect">
+            <a:avLst/>
+          </a:prstGeom>
+          <a:solidFill>
+            <a:srgbClr val="A78BFA"/>
+          </a:solidFill>
+          <a:ln w="12700">
+            <a:solidFill>
+              <a:srgbClr val="A78BFA">
+                <a:alpha val="0"/>
+              </a:srgbClr>
+            </a:solidFill>
+            <a:prstDash val="solid"/>
+          </a:ln>
+        </p:spPr>
+      </p:sp>
+      <p:sp>
+        <p:nvSpPr>
+          <p:cNvPr id="18" name="Shape 16"/>
+          <p:cNvSpPr/>
+          <p:nvPr/>
+        </p:nvSpPr>
+        <p:spPr>
+          <a:xfrm>
+            <a:off x="822960" y="3822192"/>
+            <a:ext cx="73152" cy="841248"/>
           </a:xfrm>
           <a:prstGeom prst="rect">
             <a:avLst/>
@@ -16105,14 +15666,14 @@
       </p:sp>
       <p:sp>
         <p:nvSpPr>
-          <p:cNvPr id="18" name="Shape 16"/>
-          <p:cNvSpPr/>
-          <p:nvPr/>
-        </p:nvSpPr>
-        <p:spPr>
-          <a:xfrm>
-            <a:off x="822960" y="6382512"/>
-            <a:ext cx="2011680" cy="45720"/>
+          <p:cNvPr id="19" name="Shape 17"/>
+          <p:cNvSpPr/>
+          <p:nvPr/>
+        </p:nvSpPr>
+        <p:spPr>
+          <a:xfrm>
+            <a:off x="822960" y="4864608"/>
+            <a:ext cx="73152" cy="841248"/>
           </a:xfrm>
           <a:prstGeom prst="rect">
             <a:avLst/>
@@ -16132,43 +15693,14 @@
       </p:sp>
       <p:sp>
         <p:nvSpPr>
-          <p:cNvPr id="19" name="Shape 17"/>
-          <p:cNvSpPr/>
-          <p:nvPr/>
-        </p:nvSpPr>
-        <p:spPr>
-          <a:xfrm>
-            <a:off x="6080760" y="1389888"/>
-            <a:ext cx="22860" cy="4846320"/>
-          </a:xfrm>
-          <a:prstGeom prst="rect">
-            <a:avLst/>
-          </a:prstGeom>
-          <a:solidFill>
-            <a:srgbClr val="BAE6FD">
-              <a:alpha val="90000"/>
-            </a:srgbClr>
-          </a:solidFill>
-          <a:ln w="12700">
-            <a:solidFill>
-              <a:srgbClr val="BAE6FD">
-                <a:alpha val="0"/>
-              </a:srgbClr>
-            </a:solidFill>
-            <a:prstDash val="solid"/>
-          </a:ln>
-        </p:spPr>
-      </p:sp>
-      <p:sp>
-        <p:nvSpPr>
           <p:cNvPr id="20" name="Shape 18"/>
           <p:cNvSpPr/>
           <p:nvPr/>
         </p:nvSpPr>
         <p:spPr>
           <a:xfrm>
-            <a:off x="822960" y="1389888"/>
-            <a:ext cx="73152" cy="566928"/>
+            <a:off x="6272784" y="1737360"/>
+            <a:ext cx="73152" cy="841248"/>
           </a:xfrm>
           <a:prstGeom prst="rect">
             <a:avLst/>
@@ -16194,8 +15726,8 @@
         </p:nvSpPr>
         <p:spPr>
           <a:xfrm>
-            <a:off x="822960" y="2103120"/>
-            <a:ext cx="73152" cy="566928"/>
+            <a:off x="6272784" y="2779776"/>
+            <a:ext cx="73152" cy="841248"/>
           </a:xfrm>
           <a:prstGeom prst="rect">
             <a:avLst/>
@@ -16221,8 +15753,8 @@
         </p:nvSpPr>
         <p:spPr>
           <a:xfrm>
-            <a:off x="822960" y="2816352"/>
-            <a:ext cx="73152" cy="566928"/>
+            <a:off x="6272784" y="3822192"/>
+            <a:ext cx="73152" cy="841248"/>
           </a:xfrm>
           <a:prstGeom prst="rect">
             <a:avLst/>
@@ -16248,8 +15780,8 @@
         </p:nvSpPr>
         <p:spPr>
           <a:xfrm>
-            <a:off x="822960" y="3529584"/>
-            <a:ext cx="73152" cy="566928"/>
+            <a:off x="6272784" y="4864608"/>
+            <a:ext cx="73152" cy="841248"/>
           </a:xfrm>
           <a:prstGeom prst="rect">
             <a:avLst/>
@@ -16269,277 +15801,7 @@
       </p:sp>
       <p:sp>
         <p:nvSpPr>
-          <p:cNvPr id="24" name="Shape 22"/>
-          <p:cNvSpPr/>
-          <p:nvPr/>
-        </p:nvSpPr>
-        <p:spPr>
-          <a:xfrm>
-            <a:off x="822960" y="4242816"/>
-            <a:ext cx="73152" cy="566928"/>
-          </a:xfrm>
-          <a:prstGeom prst="rect">
-            <a:avLst/>
-          </a:prstGeom>
-          <a:solidFill>
-            <a:srgbClr val="7DD3FC"/>
-          </a:solidFill>
-          <a:ln w="12700">
-            <a:solidFill>
-              <a:srgbClr val="7DD3FC">
-                <a:alpha val="0"/>
-              </a:srgbClr>
-            </a:solidFill>
-            <a:prstDash val="solid"/>
-          </a:ln>
-        </p:spPr>
-      </p:sp>
-      <p:sp>
-        <p:nvSpPr>
-          <p:cNvPr id="25" name="Shape 23"/>
-          <p:cNvSpPr/>
-          <p:nvPr/>
-        </p:nvSpPr>
-        <p:spPr>
-          <a:xfrm>
-            <a:off x="822960" y="4956048"/>
-            <a:ext cx="73152" cy="566928"/>
-          </a:xfrm>
-          <a:prstGeom prst="rect">
-            <a:avLst/>
-          </a:prstGeom>
-          <a:solidFill>
-            <a:srgbClr val="A78BFA"/>
-          </a:solidFill>
-          <a:ln w="12700">
-            <a:solidFill>
-              <a:srgbClr val="A78BFA">
-                <a:alpha val="0"/>
-              </a:srgbClr>
-            </a:solidFill>
-            <a:prstDash val="solid"/>
-          </a:ln>
-        </p:spPr>
-      </p:sp>
-      <p:sp>
-        <p:nvSpPr>
-          <p:cNvPr id="26" name="Shape 24"/>
-          <p:cNvSpPr/>
-          <p:nvPr/>
-        </p:nvSpPr>
-        <p:spPr>
-          <a:xfrm>
-            <a:off x="822960" y="5669280"/>
-            <a:ext cx="73152" cy="566928"/>
-          </a:xfrm>
-          <a:prstGeom prst="rect">
-            <a:avLst/>
-          </a:prstGeom>
-          <a:solidFill>
-            <a:srgbClr val="7DD3FC"/>
-          </a:solidFill>
-          <a:ln w="12700">
-            <a:solidFill>
-              <a:srgbClr val="7DD3FC">
-                <a:alpha val="0"/>
-              </a:srgbClr>
-            </a:solidFill>
-            <a:prstDash val="solid"/>
-          </a:ln>
-        </p:spPr>
-      </p:sp>
-      <p:sp>
-        <p:nvSpPr>
-          <p:cNvPr id="27" name="Shape 25"/>
-          <p:cNvSpPr/>
-          <p:nvPr/>
-        </p:nvSpPr>
-        <p:spPr>
-          <a:xfrm>
-            <a:off x="6272784" y="1389888"/>
-            <a:ext cx="73152" cy="566928"/>
-          </a:xfrm>
-          <a:prstGeom prst="rect">
-            <a:avLst/>
-          </a:prstGeom>
-          <a:solidFill>
-            <a:srgbClr val="A78BFA"/>
-          </a:solidFill>
-          <a:ln w="12700">
-            <a:solidFill>
-              <a:srgbClr val="A78BFA">
-                <a:alpha val="0"/>
-              </a:srgbClr>
-            </a:solidFill>
-            <a:prstDash val="solid"/>
-          </a:ln>
-        </p:spPr>
-      </p:sp>
-      <p:sp>
-        <p:nvSpPr>
-          <p:cNvPr id="28" name="Shape 26"/>
-          <p:cNvSpPr/>
-          <p:nvPr/>
-        </p:nvSpPr>
-        <p:spPr>
-          <a:xfrm>
-            <a:off x="6272784" y="2103120"/>
-            <a:ext cx="73152" cy="566928"/>
-          </a:xfrm>
-          <a:prstGeom prst="rect">
-            <a:avLst/>
-          </a:prstGeom>
-          <a:solidFill>
-            <a:srgbClr val="7DD3FC"/>
-          </a:solidFill>
-          <a:ln w="12700">
-            <a:solidFill>
-              <a:srgbClr val="7DD3FC">
-                <a:alpha val="0"/>
-              </a:srgbClr>
-            </a:solidFill>
-            <a:prstDash val="solid"/>
-          </a:ln>
-        </p:spPr>
-      </p:sp>
-      <p:sp>
-        <p:nvSpPr>
-          <p:cNvPr id="29" name="Shape 27"/>
-          <p:cNvSpPr/>
-          <p:nvPr/>
-        </p:nvSpPr>
-        <p:spPr>
-          <a:xfrm>
-            <a:off x="6272784" y="2816352"/>
-            <a:ext cx="73152" cy="566928"/>
-          </a:xfrm>
-          <a:prstGeom prst="rect">
-            <a:avLst/>
-          </a:prstGeom>
-          <a:solidFill>
-            <a:srgbClr val="A78BFA"/>
-          </a:solidFill>
-          <a:ln w="12700">
-            <a:solidFill>
-              <a:srgbClr val="A78BFA">
-                <a:alpha val="0"/>
-              </a:srgbClr>
-            </a:solidFill>
-            <a:prstDash val="solid"/>
-          </a:ln>
-        </p:spPr>
-      </p:sp>
-      <p:sp>
-        <p:nvSpPr>
-          <p:cNvPr id="30" name="Shape 28"/>
-          <p:cNvSpPr/>
-          <p:nvPr/>
-        </p:nvSpPr>
-        <p:spPr>
-          <a:xfrm>
-            <a:off x="6272784" y="3529584"/>
-            <a:ext cx="73152" cy="566928"/>
-          </a:xfrm>
-          <a:prstGeom prst="rect">
-            <a:avLst/>
-          </a:prstGeom>
-          <a:solidFill>
-            <a:srgbClr val="7DD3FC"/>
-          </a:solidFill>
-          <a:ln w="12700">
-            <a:solidFill>
-              <a:srgbClr val="7DD3FC">
-                <a:alpha val="0"/>
-              </a:srgbClr>
-            </a:solidFill>
-            <a:prstDash val="solid"/>
-          </a:ln>
-        </p:spPr>
-      </p:sp>
-      <p:sp>
-        <p:nvSpPr>
-          <p:cNvPr id="31" name="Shape 29"/>
-          <p:cNvSpPr/>
-          <p:nvPr/>
-        </p:nvSpPr>
-        <p:spPr>
-          <a:xfrm>
-            <a:off x="6272784" y="4242816"/>
-            <a:ext cx="73152" cy="566928"/>
-          </a:xfrm>
-          <a:prstGeom prst="rect">
-            <a:avLst/>
-          </a:prstGeom>
-          <a:solidFill>
-            <a:srgbClr val="A78BFA"/>
-          </a:solidFill>
-          <a:ln w="12700">
-            <a:solidFill>
-              <a:srgbClr val="A78BFA">
-                <a:alpha val="0"/>
-              </a:srgbClr>
-            </a:solidFill>
-            <a:prstDash val="solid"/>
-          </a:ln>
-        </p:spPr>
-      </p:sp>
-      <p:sp>
-        <p:nvSpPr>
-          <p:cNvPr id="32" name="Shape 30"/>
-          <p:cNvSpPr/>
-          <p:nvPr/>
-        </p:nvSpPr>
-        <p:spPr>
-          <a:xfrm>
-            <a:off x="6272784" y="4956048"/>
-            <a:ext cx="73152" cy="566928"/>
-          </a:xfrm>
-          <a:prstGeom prst="rect">
-            <a:avLst/>
-          </a:prstGeom>
-          <a:solidFill>
-            <a:srgbClr val="7DD3FC"/>
-          </a:solidFill>
-          <a:ln w="12700">
-            <a:solidFill>
-              <a:srgbClr val="7DD3FC">
-                <a:alpha val="0"/>
-              </a:srgbClr>
-            </a:solidFill>
-            <a:prstDash val="solid"/>
-          </a:ln>
-        </p:spPr>
-      </p:sp>
-      <p:sp>
-        <p:nvSpPr>
-          <p:cNvPr id="33" name="Shape 31"/>
-          <p:cNvSpPr/>
-          <p:nvPr/>
-        </p:nvSpPr>
-        <p:spPr>
-          <a:xfrm>
-            <a:off x="6272784" y="5669280"/>
-            <a:ext cx="73152" cy="566928"/>
-          </a:xfrm>
-          <a:prstGeom prst="rect">
-            <a:avLst/>
-          </a:prstGeom>
-          <a:solidFill>
-            <a:srgbClr val="A78BFA"/>
-          </a:solidFill>
-          <a:ln w="12700">
-            <a:solidFill>
-              <a:srgbClr val="A78BFA">
-                <a:alpha val="0"/>
-              </a:srgbClr>
-            </a:solidFill>
-            <a:prstDash val="solid"/>
-          </a:ln>
-        </p:spPr>
-      </p:sp>
-      <p:sp>
-        <p:nvSpPr>
-          <p:cNvPr id="34" name="mdpr:1-2-0772f8:title:__title:1-2-0772f8"/>
+          <p:cNvPr id="24" name="mdpr:1-2-0772f8:title:__title:1-2-0772f8"/>
           <p:cNvSpPr txBox="1"/>
           <p:nvPr/>
         </p:nvSpPr>
@@ -16581,14 +15843,14 @@
       </p:sp>
       <p:sp>
         <p:nvSpPr>
-          <p:cNvPr id="35" name="mdpr:1-2-0772f8:toc-item-1:toc-item-1"/>
+          <p:cNvPr id="25" name="mdpr:1-2-0772f8:toc-item-1:toc-item-1"/>
           <p:cNvSpPr txBox="1"/>
           <p:nvPr/>
         </p:nvSpPr>
         <p:spPr>
           <a:xfrm>
-            <a:off x="1042416" y="1481328"/>
-            <a:ext cx="4645152" cy="384048"/>
+            <a:off x="1042416" y="1828800"/>
+            <a:ext cx="4645152" cy="658368"/>
           </a:xfrm>
           <a:prstGeom prst="rect">
             <a:avLst/>
@@ -16623,14 +15885,14 @@
       </p:sp>
       <p:sp>
         <p:nvSpPr>
-          <p:cNvPr id="36" name="mdpr:1-2-0772f8:toc-item-2:toc-item-2"/>
+          <p:cNvPr id="26" name="mdpr:1-2-0772f8:toc-item-2:toc-item-2"/>
           <p:cNvSpPr txBox="1"/>
           <p:nvPr/>
         </p:nvSpPr>
         <p:spPr>
           <a:xfrm>
-            <a:off x="1042416" y="2194560"/>
-            <a:ext cx="4645152" cy="384048"/>
+            <a:off x="1042416" y="2871216"/>
+            <a:ext cx="4645152" cy="658368"/>
           </a:xfrm>
           <a:prstGeom prst="rect">
             <a:avLst/>
@@ -16665,14 +15927,14 @@
       </p:sp>
       <p:sp>
         <p:nvSpPr>
-          <p:cNvPr id="37" name="mdpr:1-2-0772f8:toc-item-3:toc-item-3"/>
+          <p:cNvPr id="27" name="mdpr:1-2-0772f8:toc-item-3:toc-item-3"/>
           <p:cNvSpPr txBox="1"/>
           <p:nvPr/>
         </p:nvSpPr>
         <p:spPr>
           <a:xfrm>
-            <a:off x="1042416" y="2907792"/>
-            <a:ext cx="4645152" cy="384048"/>
+            <a:off x="1042416" y="3913632"/>
+            <a:ext cx="4645152" cy="658368"/>
           </a:xfrm>
           <a:prstGeom prst="rect">
             <a:avLst/>
@@ -16707,14 +15969,14 @@
       </p:sp>
       <p:sp>
         <p:nvSpPr>
-          <p:cNvPr id="38" name="mdpr:1-2-0772f8:toc-item-4:toc-item-4"/>
+          <p:cNvPr id="28" name="mdpr:1-2-0772f8:toc-item-4:toc-item-4"/>
           <p:cNvSpPr txBox="1"/>
           <p:nvPr/>
         </p:nvSpPr>
         <p:spPr>
           <a:xfrm>
-            <a:off x="1042416" y="3621024"/>
-            <a:ext cx="4645152" cy="384048"/>
+            <a:off x="1042416" y="4956048"/>
+            <a:ext cx="4645152" cy="658368"/>
           </a:xfrm>
           <a:prstGeom prst="rect">
             <a:avLst/>
@@ -16749,14 +16011,14 @@
       </p:sp>
       <p:sp>
         <p:nvSpPr>
-          <p:cNvPr id="39" name="mdpr:1-2-0772f8:toc-item-5:toc-item-5"/>
+          <p:cNvPr id="29" name="mdpr:1-2-0772f8:toc-item-5:toc-item-5"/>
           <p:cNvSpPr txBox="1"/>
           <p:nvPr/>
         </p:nvSpPr>
         <p:spPr>
           <a:xfrm>
-            <a:off x="1042416" y="4334256"/>
-            <a:ext cx="4645152" cy="384048"/>
+            <a:off x="6492240" y="1828800"/>
+            <a:ext cx="4645152" cy="658368"/>
           </a:xfrm>
           <a:prstGeom prst="rect">
             <a:avLst/>
@@ -16791,14 +16053,14 @@
       </p:sp>
       <p:sp>
         <p:nvSpPr>
-          <p:cNvPr id="40" name="mdpr:1-2-0772f8:toc-item-6:toc-item-6"/>
+          <p:cNvPr id="30" name="mdpr:1-2-0772f8:toc-item-6:toc-item-6"/>
           <p:cNvSpPr txBox="1"/>
           <p:nvPr/>
         </p:nvSpPr>
         <p:spPr>
           <a:xfrm>
-            <a:off x="1042416" y="5047488"/>
-            <a:ext cx="4645152" cy="384048"/>
+            <a:off x="6492240" y="2871216"/>
+            <a:ext cx="4645152" cy="658368"/>
           </a:xfrm>
           <a:prstGeom prst="rect">
             <a:avLst/>
@@ -16833,14 +16095,14 @@
       </p:sp>
       <p:sp>
         <p:nvSpPr>
-          <p:cNvPr id="41" name="mdpr:1-2-0772f8:toc-item-7:toc-item-7"/>
+          <p:cNvPr id="31" name="mdpr:1-2-0772f8:toc-item-7:toc-item-7"/>
           <p:cNvSpPr txBox="1"/>
           <p:nvPr/>
         </p:nvSpPr>
         <p:spPr>
           <a:xfrm>
-            <a:off x="1042416" y="5760720"/>
-            <a:ext cx="4645152" cy="384048"/>
+            <a:off x="6492240" y="3913632"/>
+            <a:ext cx="4645152" cy="658368"/>
           </a:xfrm>
           <a:prstGeom prst="rect">
             <a:avLst/>
@@ -16875,14 +16137,14 @@
       </p:sp>
       <p:sp>
         <p:nvSpPr>
-          <p:cNvPr id="42" name="mdpr:1-2-0772f8:toc-item-8:toc-item-8"/>
+          <p:cNvPr id="32" name="mdpr:1-2-0772f8:toc-item-8:toc-item-8"/>
           <p:cNvSpPr txBox="1"/>
           <p:nvPr/>
         </p:nvSpPr>
         <p:spPr>
           <a:xfrm>
-            <a:off x="6492240" y="1481328"/>
-            <a:ext cx="4645152" cy="384048"/>
+            <a:off x="6492240" y="4956048"/>
+            <a:ext cx="4645152" cy="658368"/>
           </a:xfrm>
           <a:prstGeom prst="rect">
             <a:avLst/>
@@ -16910,258 +16172,6 @@
                 <a:cs typeface="Pretendard" pitchFamily="34" charset="-120"/>
               </a:rPr>
               <a:t>08  Chart and Table Pair</a:t>
-            </a:r>
-            <a:endParaRPr lang="en-US" sz="1800" dirty="0"/>
-          </a:p>
-        </p:txBody>
-      </p:sp>
-      <p:sp>
-        <p:nvSpPr>
-          <p:cNvPr id="43" name="mdpr:1-2-0772f8:toc-item-9:toc-item-9"/>
-          <p:cNvSpPr txBox="1"/>
-          <p:nvPr/>
-        </p:nvSpPr>
-        <p:spPr>
-          <a:xfrm>
-            <a:off x="6492240" y="2194560"/>
-            <a:ext cx="4645152" cy="384048"/>
-          </a:xfrm>
-          <a:prstGeom prst="rect">
-            <a:avLst/>
-          </a:prstGeom>
-          <a:noFill/>
-          <a:ln/>
-        </p:spPr>
-        <p:txBody>
-          <a:bodyPr wrap="square" lIns="0" tIns="25400" rIns="25400" bIns="0" rtlCol="0" anchor="ctr"/>
-          <a:lstStyle/>
-          <a:p>
-            <a:pPr algn="ctr" indent="0" marL="0">
-              <a:lnSpc>
-                <a:spcPct val="120000"/>
-              </a:lnSpc>
-              <a:buNone/>
-            </a:pPr>
-            <a:r>
-              <a:rPr lang="en-US" sz="1800" dirty="0">
-                <a:solidFill>
-                  <a:srgbClr val="F8F8F8"/>
-                </a:solidFill>
-                <a:latin typeface="Pretendard" pitchFamily="34" charset="0"/>
-                <a:ea typeface="Pretendard" pitchFamily="34" charset="-122"/>
-                <a:cs typeface="Pretendard" pitchFamily="34" charset="-120"/>
-              </a:rPr>
-              <a:t>09  Editable Proof Objects</a:t>
-            </a:r>
-            <a:endParaRPr lang="en-US" sz="1800" dirty="0"/>
-          </a:p>
-        </p:txBody>
-      </p:sp>
-      <p:sp>
-        <p:nvSpPr>
-          <p:cNvPr id="44" name="mdpr:1-2-0772f8:toc-item-10:toc-item-10"/>
-          <p:cNvSpPr txBox="1"/>
-          <p:nvPr/>
-        </p:nvSpPr>
-        <p:spPr>
-          <a:xfrm>
-            <a:off x="6492240" y="2907792"/>
-            <a:ext cx="4645152" cy="384048"/>
-          </a:xfrm>
-          <a:prstGeom prst="rect">
-            <a:avLst/>
-          </a:prstGeom>
-          <a:noFill/>
-          <a:ln/>
-        </p:spPr>
-        <p:txBody>
-          <a:bodyPr wrap="square" lIns="0" tIns="25400" rIns="25400" bIns="0" rtlCol="0" anchor="ctr"/>
-          <a:lstStyle/>
-          <a:p>
-            <a:pPr algn="ctr" indent="0" marL="0">
-              <a:lnSpc>
-                <a:spcPct val="120000"/>
-              </a:lnSpc>
-              <a:buNone/>
-            </a:pPr>
-            <a:r>
-              <a:rPr lang="en-US" sz="1800" dirty="0">
-                <a:solidFill>
-                  <a:srgbClr val="F8F8F8"/>
-                </a:solidFill>
-                <a:latin typeface="Pretendard" pitchFamily="34" charset="0"/>
-                <a:ea typeface="Pretendard" pitchFamily="34" charset="-122"/>
-                <a:cs typeface="Pretendard" pitchFamily="34" charset="-120"/>
-              </a:rPr>
-              <a:t>10  Object Shape Grammar</a:t>
-            </a:r>
-            <a:endParaRPr lang="en-US" sz="1800" dirty="0"/>
-          </a:p>
-        </p:txBody>
-      </p:sp>
-      <p:sp>
-        <p:nvSpPr>
-          <p:cNvPr id="45" name="mdpr:1-2-0772f8:toc-item-11:toc-item-11"/>
-          <p:cNvSpPr txBox="1"/>
-          <p:nvPr/>
-        </p:nvSpPr>
-        <p:spPr>
-          <a:xfrm>
-            <a:off x="6492240" y="3621024"/>
-            <a:ext cx="4645152" cy="384048"/>
-          </a:xfrm>
-          <a:prstGeom prst="rect">
-            <a:avLst/>
-          </a:prstGeom>
-          <a:noFill/>
-          <a:ln/>
-        </p:spPr>
-        <p:txBody>
-          <a:bodyPr wrap="square" lIns="0" tIns="25400" rIns="25400" bIns="0" rtlCol="0" anchor="ctr"/>
-          <a:lstStyle/>
-          <a:p>
-            <a:pPr algn="ctr" indent="0" marL="0">
-              <a:lnSpc>
-                <a:spcPct val="120000"/>
-              </a:lnSpc>
-              <a:buNone/>
-            </a:pPr>
-            <a:r>
-              <a:rPr lang="en-US" sz="1800" dirty="0">
-                <a:solidFill>
-                  <a:srgbClr val="F8F8F8"/>
-                </a:solidFill>
-                <a:latin typeface="Pretendard" pitchFamily="34" charset="0"/>
-                <a:ea typeface="Pretendard" pitchFamily="34" charset="-122"/>
-                <a:cs typeface="Pretendard" pitchFamily="34" charset="-120"/>
-              </a:rPr>
-              <a:t>11  Icon and Text Aside</a:t>
-            </a:r>
-            <a:endParaRPr lang="en-US" sz="1800" dirty="0"/>
-          </a:p>
-        </p:txBody>
-      </p:sp>
-      <p:sp>
-        <p:nvSpPr>
-          <p:cNvPr id="46" name="mdpr:1-2-0772f8:toc-item-12:toc-item-12"/>
-          <p:cNvSpPr txBox="1"/>
-          <p:nvPr/>
-        </p:nvSpPr>
-        <p:spPr>
-          <a:xfrm>
-            <a:off x="6492240" y="4334256"/>
-            <a:ext cx="4645152" cy="384048"/>
-          </a:xfrm>
-          <a:prstGeom prst="rect">
-            <a:avLst/>
-          </a:prstGeom>
-          <a:noFill/>
-          <a:ln/>
-        </p:spPr>
-        <p:txBody>
-          <a:bodyPr wrap="square" lIns="0" tIns="25400" rIns="25400" bIns="0" rtlCol="0" anchor="ctr"/>
-          <a:lstStyle/>
-          <a:p>
-            <a:pPr algn="ctr" indent="0" marL="0">
-              <a:lnSpc>
-                <a:spcPct val="120000"/>
-              </a:lnSpc>
-              <a:buNone/>
-            </a:pPr>
-            <a:r>
-              <a:rPr lang="en-US" sz="1800" dirty="0">
-                <a:solidFill>
-                  <a:srgbClr val="F8F8F8"/>
-                </a:solidFill>
-                <a:latin typeface="Pretendard" pitchFamily="34" charset="0"/>
-                <a:ea typeface="Pretendard" pitchFamily="34" charset="-122"/>
-                <a:cs typeface="Pretendard" pitchFamily="34" charset="-120"/>
-              </a:rPr>
-              <a:t>12  Overflow Guard</a:t>
-            </a:r>
-            <a:endParaRPr lang="en-US" sz="1800" dirty="0"/>
-          </a:p>
-        </p:txBody>
-      </p:sp>
-      <p:sp>
-        <p:nvSpPr>
-          <p:cNvPr id="47" name="mdpr:1-2-0772f8:toc-item-13:toc-item-13"/>
-          <p:cNvSpPr txBox="1"/>
-          <p:nvPr/>
-        </p:nvSpPr>
-        <p:spPr>
-          <a:xfrm>
-            <a:off x="6492240" y="5047488"/>
-            <a:ext cx="4645152" cy="384048"/>
-          </a:xfrm>
-          <a:prstGeom prst="rect">
-            <a:avLst/>
-          </a:prstGeom>
-          <a:noFill/>
-          <a:ln/>
-        </p:spPr>
-        <p:txBody>
-          <a:bodyPr wrap="square" lIns="0" tIns="25400" rIns="25400" bIns="0" rtlCol="0" anchor="ctr"/>
-          <a:lstStyle/>
-          <a:p>
-            <a:pPr algn="ctr" indent="0" marL="0">
-              <a:lnSpc>
-                <a:spcPct val="120000"/>
-              </a:lnSpc>
-              <a:buNone/>
-            </a:pPr>
-            <a:r>
-              <a:rPr lang="en-US" sz="1800" dirty="0">
-                <a:solidFill>
-                  <a:srgbClr val="F8F8F8"/>
-                </a:solidFill>
-                <a:latin typeface="Pretendard" pitchFamily="34" charset="0"/>
-                <a:ea typeface="Pretendard" pitchFamily="34" charset="-122"/>
-                <a:cs typeface="Pretendard" pitchFamily="34" charset="-120"/>
-              </a:rPr>
-              <a:t>13  Image Safe Frame</a:t>
-            </a:r>
-            <a:endParaRPr lang="en-US" sz="1800" dirty="0"/>
-          </a:p>
-        </p:txBody>
-      </p:sp>
-      <p:sp>
-        <p:nvSpPr>
-          <p:cNvPr id="48" name="mdpr:1-2-0772f8:toc-item-14:toc-item-14"/>
-          <p:cNvSpPr txBox="1"/>
-          <p:nvPr/>
-        </p:nvSpPr>
-        <p:spPr>
-          <a:xfrm>
-            <a:off x="6492240" y="5760720"/>
-            <a:ext cx="4645152" cy="384048"/>
-          </a:xfrm>
-          <a:prstGeom prst="rect">
-            <a:avLst/>
-          </a:prstGeom>
-          <a:noFill/>
-          <a:ln/>
-        </p:spPr>
-        <p:txBody>
-          <a:bodyPr wrap="square" lIns="0" tIns="25400" rIns="25400" bIns="0" rtlCol="0" anchor="ctr"/>
-          <a:lstStyle/>
-          <a:p>
-            <a:pPr algn="ctr" indent="0" marL="0">
-              <a:lnSpc>
-                <a:spcPct val="120000"/>
-              </a:lnSpc>
-              <a:buNone/>
-            </a:pPr>
-            <a:r>
-              <a:rPr lang="en-US" sz="1800" dirty="0">
-                <a:solidFill>
-                  <a:srgbClr val="F8F8F8"/>
-                </a:solidFill>
-                <a:latin typeface="Pretendard" pitchFamily="34" charset="0"/>
-                <a:ea typeface="Pretendard" pitchFamily="34" charset="-122"/>
-                <a:cs typeface="Pretendard" pitchFamily="34" charset="-120"/>
-              </a:rPr>
-              <a:t>14  Mixed Object Packing</a:t>
             </a:r>
             <a:endParaRPr lang="en-US" sz="1800" dirty="0"/>
           </a:p>
@@ -17641,8 +16651,8 @@
         </p:nvSpPr>
         <p:spPr>
           <a:xfrm>
-            <a:off x="731520" y="1207008"/>
-            <a:ext cx="1325880" cy="54864"/>
+            <a:off x="914400" y="1463040"/>
+            <a:ext cx="10241280" cy="73152"/>
           </a:xfrm>
           <a:prstGeom prst="rect">
             <a:avLst/>
@@ -17662,61 +16672,7 @@
       </p:sp>
       <p:sp>
         <p:nvSpPr>
-          <p:cNvPr id="17" name="Shape 15"/>
-          <p:cNvSpPr/>
-          <p:nvPr/>
-        </p:nvSpPr>
-        <p:spPr>
-          <a:xfrm>
-            <a:off x="822960" y="1554480"/>
-            <a:ext cx="4937760" cy="73152"/>
-          </a:xfrm>
-          <a:prstGeom prst="rect">
-            <a:avLst/>
-          </a:prstGeom>
-          <a:solidFill>
-            <a:srgbClr val="7DD3FC"/>
-          </a:solidFill>
-          <a:ln w="12700">
-            <a:solidFill>
-              <a:srgbClr val="7DD3FC">
-                <a:alpha val="0"/>
-              </a:srgbClr>
-            </a:solidFill>
-            <a:prstDash val="solid"/>
-          </a:ln>
-        </p:spPr>
-      </p:sp>
-      <p:sp>
-        <p:nvSpPr>
-          <p:cNvPr id="18" name="Shape 16"/>
-          <p:cNvSpPr/>
-          <p:nvPr/>
-        </p:nvSpPr>
-        <p:spPr>
-          <a:xfrm>
-            <a:off x="6400800" y="1554480"/>
-            <a:ext cx="4937760" cy="73152"/>
-          </a:xfrm>
-          <a:prstGeom prst="rect">
-            <a:avLst/>
-          </a:prstGeom>
-          <a:solidFill>
-            <a:srgbClr val="7DD3FC"/>
-          </a:solidFill>
-          <a:ln w="12700">
-            <a:solidFill>
-              <a:srgbClr val="7DD3FC">
-                <a:alpha val="0"/>
-              </a:srgbClr>
-            </a:solidFill>
-            <a:prstDash val="solid"/>
-          </a:ln>
-        </p:spPr>
-      </p:sp>
-      <p:sp>
-        <p:nvSpPr>
-          <p:cNvPr id="19" name="mdpr:2-2-4f71ba:title:__title:2-2-4f71ba"/>
+          <p:cNvPr id="17" name="mdpr:2-2-4f71ba:title:__title:2-2-4f71ba"/>
           <p:cNvSpPr txBox="1"/>
           <p:nvPr/>
         </p:nvSpPr>
@@ -17750,7 +16706,24 @@
                 <a:ea typeface="Pretendard" pitchFamily="34" charset="-122"/>
                 <a:cs typeface="Pretendard" pitchFamily="34" charset="-120"/>
               </a:rPr>
-              <a:t>Object Shape Grammar (Cont. 2/2)</a:t>
+              <a:t>Object Shape Grammar</a:t>
+            </a:r>
+            <a:pPr algn="ctr" indent="0" marL="0">
+              <a:lnSpc>
+                <a:spcPct val="120000"/>
+              </a:lnSpc>
+              <a:buNone/>
+            </a:pPr>
+            <a:r>
+              <a:rPr lang="en-US" sz="2000" dirty="0">
+                <a:solidFill>
+                  <a:srgbClr val="6C6C6C"/>
+                </a:solidFill>
+                <a:latin typeface="Pretendard" pitchFamily="34" charset="0"/>
+                <a:ea typeface="Pretendard" pitchFamily="34" charset="-122"/>
+                <a:cs typeface="Pretendard" pitchFamily="34" charset="-120"/>
+              </a:rPr>
+              <a:t> (Cont. 2/2)</a:t>
             </a:r>
             <a:endParaRPr lang="en-US" sz="3400" dirty="0"/>
           </a:p>
@@ -17758,14 +16731,14 @@
       </p:sp>
       <p:sp>
         <p:nvSpPr>
-          <p:cNvPr id="20" name="mdpr:2-2-4f71ba:left:block-27-chunk-2"/>
+          <p:cNvPr id="18" name="mdpr:2-2-4f71ba:body:block-27-chunk-2"/>
           <p:cNvSpPr txBox="1"/>
           <p:nvPr/>
         </p:nvSpPr>
         <p:spPr>
           <a:xfrm>
-            <a:off x="896112" y="1664208"/>
-            <a:ext cx="4791456" cy="4169664"/>
+            <a:off x="987552" y="1572768"/>
+            <a:ext cx="10094976" cy="4261104"/>
           </a:xfrm>
           <a:prstGeom prst="rect">
             <a:avLst/>
@@ -17813,28 +16786,6 @@
             </a:r>
             <a:endParaRPr lang="en-US" sz="2200" dirty="0"/>
           </a:p>
-        </p:txBody>
-      </p:sp>
-      <p:sp>
-        <p:nvSpPr>
-          <p:cNvPr id="21" name="mdpr:2-2-4f71ba:right:block-27-chunk-2"/>
-          <p:cNvSpPr txBox="1"/>
-          <p:nvPr/>
-        </p:nvSpPr>
-        <p:spPr>
-          <a:xfrm>
-            <a:off x="6473952" y="1664208"/>
-            <a:ext cx="4791456" cy="4169664"/>
-          </a:xfrm>
-          <a:prstGeom prst="rect">
-            <a:avLst/>
-          </a:prstGeom>
-          <a:noFill/>
-          <a:ln/>
-        </p:spPr>
-        <p:txBody>
-          <a:bodyPr wrap="square" lIns="0" tIns="25400" rIns="25400" bIns="0" rtlCol="0" anchor="t"/>
-          <a:lstStyle/>
           <a:p>
             <a:pPr algn="l" indent="0" marL="0">
               <a:lnSpc>
@@ -17853,6 +16804,9 @@
               </a:rPr>
               <a:t>- Rounded panel</a:t>
             </a:r>
+            <a:endParaRPr lang="en-US" sz="2200" dirty="0"/>
+          </a:p>
+          <a:p>
             <a:pPr algn="l" indent="0" marL="0">
               <a:lnSpc>
                 <a:spcPct val="120000"/>
@@ -18340,36 +17294,9 @@
           </a:ln>
         </p:spPr>
       </p:sp>
-      <p:sp>
-        <p:nvSpPr>
-          <p:cNvPr id="16" name="Shape 14"/>
-          <p:cNvSpPr/>
-          <p:nvPr/>
-        </p:nvSpPr>
-        <p:spPr>
-          <a:xfrm>
-            <a:off x="731520" y="1207008"/>
-            <a:ext cx="1325880" cy="54864"/>
-          </a:xfrm>
-          <a:prstGeom prst="rect">
-            <a:avLst/>
-          </a:prstGeom>
-          <a:solidFill>
-            <a:srgbClr val="7DD3FC"/>
-          </a:solidFill>
-          <a:ln w="12700">
-            <a:solidFill>
-              <a:srgbClr val="7DD3FC">
-                <a:alpha val="0"/>
-              </a:srgbClr>
-            </a:solidFill>
-            <a:prstDash val="solid"/>
-          </a:ln>
-        </p:spPr>
-      </p:sp>
       <p:pic>
         <p:nvPicPr>
-          <p:cNvPr id="17" name="Image 0" descr="preencoded.png">    </p:cNvPr>
+          <p:cNvPr id="16" name="Image 0" descr="preencoded.png">    </p:cNvPr>
           <p:cNvPicPr>
             <a:picLocks noChangeAspect="1"/>
           </p:cNvPicPr>
@@ -18399,7 +17326,7 @@
       </p:pic>
       <p:sp>
         <p:nvSpPr>
-          <p:cNvPr id="18" name="Shape 15"/>
+          <p:cNvPr id="17" name="Shape 14"/>
           <p:cNvSpPr/>
           <p:nvPr/>
         </p:nvSpPr>
@@ -18440,7 +17367,7 @@
       </p:sp>
       <p:pic>
         <p:nvPicPr>
-          <p:cNvPr id="19" name="Image 1" descr="preencoded.png">    </p:cNvPr>
+          <p:cNvPr id="18" name="Image 1" descr="preencoded.png">    </p:cNvPr>
           <p:cNvPicPr>
             <a:picLocks noChangeAspect="1"/>
           </p:cNvPicPr>
@@ -18470,7 +17397,7 @@
       </p:pic>
       <p:sp>
         <p:nvSpPr>
-          <p:cNvPr id="20" name="Shape 16"/>
+          <p:cNvPr id="19" name="Shape 15"/>
           <p:cNvSpPr/>
           <p:nvPr/>
         </p:nvSpPr>
@@ -18511,7 +17438,7 @@
       </p:sp>
       <p:pic>
         <p:nvPicPr>
-          <p:cNvPr id="21" name="Image 2" descr="preencoded.png">    </p:cNvPr>
+          <p:cNvPr id="20" name="Image 2" descr="preencoded.png">    </p:cNvPr>
           <p:cNvPicPr>
             <a:picLocks noChangeAspect="1"/>
           </p:cNvPicPr>
@@ -18541,7 +17468,7 @@
       </p:pic>
       <p:sp>
         <p:nvSpPr>
-          <p:cNvPr id="22" name="Shape 17"/>
+          <p:cNvPr id="21" name="Shape 16"/>
           <p:cNvSpPr/>
           <p:nvPr/>
         </p:nvSpPr>
@@ -18582,7 +17509,7 @@
       </p:sp>
       <p:pic>
         <p:nvPicPr>
-          <p:cNvPr id="23" name="Image 3" descr="preencoded.png">    </p:cNvPr>
+          <p:cNvPr id="22" name="Image 3" descr="preencoded.png">    </p:cNvPr>
           <p:cNvPicPr>
             <a:picLocks noChangeAspect="1"/>
           </p:cNvPicPr>
@@ -18612,7 +17539,7 @@
       </p:pic>
       <p:sp>
         <p:nvSpPr>
-          <p:cNvPr id="24" name="Shape 18"/>
+          <p:cNvPr id="23" name="Shape 17"/>
           <p:cNvSpPr/>
           <p:nvPr/>
         </p:nvSpPr>
@@ -18653,7 +17580,7 @@
       </p:sp>
       <p:sp>
         <p:nvSpPr>
-          <p:cNvPr id="25" name="Shape 19"/>
+          <p:cNvPr id="24" name="Shape 18"/>
           <p:cNvSpPr/>
           <p:nvPr/>
         </p:nvSpPr>
@@ -18680,7 +17607,7 @@
       </p:sp>
       <p:sp>
         <p:nvSpPr>
-          <p:cNvPr id="26" name="Shape 20"/>
+          <p:cNvPr id="25" name="Shape 19"/>
           <p:cNvSpPr/>
           <p:nvPr/>
         </p:nvSpPr>
@@ -18707,7 +17634,7 @@
       </p:sp>
       <p:sp>
         <p:nvSpPr>
-          <p:cNvPr id="27" name="Shape 21"/>
+          <p:cNvPr id="26" name="Shape 20"/>
           <p:cNvSpPr/>
           <p:nvPr/>
         </p:nvSpPr>
@@ -18734,7 +17661,7 @@
       </p:sp>
       <p:sp>
         <p:nvSpPr>
-          <p:cNvPr id="28" name="Shape 22"/>
+          <p:cNvPr id="27" name="Shape 21"/>
           <p:cNvSpPr/>
           <p:nvPr/>
         </p:nvSpPr>
@@ -18761,7 +17688,7 @@
       </p:sp>
       <p:sp>
         <p:nvSpPr>
-          <p:cNvPr id="29" name="mdpr:icon-and-text-aside-8429fc:title:__title:icon-and-text-aside-8429fc"/>
+          <p:cNvPr id="28" name="mdpr:icon-and-text-aside-8429fc:title:__title:icon-and-text-aside-8429fc"/>
           <p:cNvSpPr txBox="1"/>
           <p:nvPr/>
         </p:nvSpPr>
@@ -18803,7 +17730,7 @@
       </p:sp>
       <p:sp>
         <p:nvSpPr>
-          <p:cNvPr id="30" name="mdpr:icon-and-text-aside-8429fc:item-1:block-29"/>
+          <p:cNvPr id="29" name="mdpr:icon-and-text-aside-8429fc:item-1:block-29"/>
           <p:cNvSpPr txBox="1"/>
           <p:nvPr/>
         </p:nvSpPr>
@@ -18862,7 +17789,7 @@
       </p:sp>
       <p:sp>
         <p:nvSpPr>
-          <p:cNvPr id="31" name="mdpr:icon-and-text-aside-8429fc:item-2:block-29"/>
+          <p:cNvPr id="30" name="mdpr:icon-and-text-aside-8429fc:item-2:block-29"/>
           <p:cNvSpPr txBox="1"/>
           <p:nvPr/>
         </p:nvSpPr>
@@ -18921,7 +17848,7 @@
       </p:sp>
       <p:sp>
         <p:nvSpPr>
-          <p:cNvPr id="32" name="mdpr:icon-and-text-aside-8429fc:item-3:block-29"/>
+          <p:cNvPr id="31" name="mdpr:icon-and-text-aside-8429fc:item-3:block-29"/>
           <p:cNvSpPr txBox="1"/>
           <p:nvPr/>
         </p:nvSpPr>
@@ -18980,7 +17907,7 @@
       </p:sp>
       <p:sp>
         <p:nvSpPr>
-          <p:cNvPr id="33" name="mdpr:icon-and-text-aside-8429fc:item-4:block-29"/>
+          <p:cNvPr id="32" name="mdpr:icon-and-text-aside-8429fc:item-4:block-29"/>
           <p:cNvSpPr txBox="1"/>
           <p:nvPr/>
         </p:nvSpPr>
@@ -19503,36 +18430,9 @@
           </a:ln>
         </p:spPr>
       </p:sp>
-      <p:sp>
-        <p:nvSpPr>
-          <p:cNvPr id="16" name="Shape 14"/>
-          <p:cNvSpPr/>
-          <p:nvPr/>
-        </p:nvSpPr>
-        <p:spPr>
-          <a:xfrm>
-            <a:off x="731520" y="1207008"/>
-            <a:ext cx="1325880" cy="54864"/>
-          </a:xfrm>
-          <a:prstGeom prst="rect">
-            <a:avLst/>
-          </a:prstGeom>
-          <a:solidFill>
-            <a:srgbClr val="7DD3FC"/>
-          </a:solidFill>
-          <a:ln w="12700">
-            <a:solidFill>
-              <a:srgbClr val="7DD3FC">
-                <a:alpha val="0"/>
-              </a:srgbClr>
-            </a:solidFill>
-            <a:prstDash val="solid"/>
-          </a:ln>
-        </p:spPr>
-      </p:sp>
       <p:pic>
         <p:nvPicPr>
-          <p:cNvPr id="17" name="Image 0" descr="preencoded.png">    </p:cNvPr>
+          <p:cNvPr id="16" name="Image 0" descr="preencoded.png">    </p:cNvPr>
           <p:cNvPicPr>
             <a:picLocks noChangeAspect="1"/>
           </p:cNvPicPr>
@@ -19562,7 +18462,7 @@
       </p:pic>
       <p:sp>
         <p:nvSpPr>
-          <p:cNvPr id="18" name="Shape 15"/>
+          <p:cNvPr id="17" name="Shape 14"/>
           <p:cNvSpPr/>
           <p:nvPr/>
         </p:nvSpPr>
@@ -19603,7 +18503,7 @@
       </p:sp>
       <p:pic>
         <p:nvPicPr>
-          <p:cNvPr id="19" name="Image 1" descr="preencoded.png">    </p:cNvPr>
+          <p:cNvPr id="18" name="Image 1" descr="preencoded.png">    </p:cNvPr>
           <p:cNvPicPr>
             <a:picLocks noChangeAspect="1"/>
           </p:cNvPicPr>
@@ -19633,7 +18533,7 @@
       </p:pic>
       <p:sp>
         <p:nvSpPr>
-          <p:cNvPr id="20" name="Shape 16"/>
+          <p:cNvPr id="19" name="Shape 15"/>
           <p:cNvSpPr/>
           <p:nvPr/>
         </p:nvSpPr>
@@ -19674,7 +18574,7 @@
       </p:sp>
       <p:pic>
         <p:nvPicPr>
-          <p:cNvPr id="21" name="Image 2" descr="preencoded.png">    </p:cNvPr>
+          <p:cNvPr id="20" name="Image 2" descr="preencoded.png">    </p:cNvPr>
           <p:cNvPicPr>
             <a:picLocks noChangeAspect="1"/>
           </p:cNvPicPr>
@@ -19704,7 +18604,7 @@
       </p:pic>
       <p:sp>
         <p:nvSpPr>
-          <p:cNvPr id="22" name="Shape 17"/>
+          <p:cNvPr id="21" name="Shape 16"/>
           <p:cNvSpPr/>
           <p:nvPr/>
         </p:nvSpPr>
@@ -19745,7 +18645,7 @@
       </p:sp>
       <p:pic>
         <p:nvPicPr>
-          <p:cNvPr id="23" name="Image 3" descr="preencoded.png">    </p:cNvPr>
+          <p:cNvPr id="22" name="Image 3" descr="preencoded.png">    </p:cNvPr>
           <p:cNvPicPr>
             <a:picLocks noChangeAspect="1"/>
           </p:cNvPicPr>
@@ -19775,7 +18675,7 @@
       </p:pic>
       <p:sp>
         <p:nvSpPr>
-          <p:cNvPr id="24" name="Shape 18"/>
+          <p:cNvPr id="23" name="Shape 17"/>
           <p:cNvSpPr/>
           <p:nvPr/>
         </p:nvSpPr>
@@ -19816,7 +18716,7 @@
       </p:sp>
       <p:sp>
         <p:nvSpPr>
-          <p:cNvPr id="25" name="Shape 19"/>
+          <p:cNvPr id="24" name="Shape 18"/>
           <p:cNvSpPr/>
           <p:nvPr/>
         </p:nvSpPr>
@@ -19843,7 +18743,7 @@
       </p:sp>
       <p:sp>
         <p:nvSpPr>
-          <p:cNvPr id="26" name="Shape 20"/>
+          <p:cNvPr id="25" name="Shape 19"/>
           <p:cNvSpPr/>
           <p:nvPr/>
         </p:nvSpPr>
@@ -19870,7 +18770,7 @@
       </p:sp>
       <p:sp>
         <p:nvSpPr>
-          <p:cNvPr id="27" name="Shape 21"/>
+          <p:cNvPr id="26" name="Shape 20"/>
           <p:cNvSpPr/>
           <p:nvPr/>
         </p:nvSpPr>
@@ -19897,7 +18797,7 @@
       </p:sp>
       <p:sp>
         <p:nvSpPr>
-          <p:cNvPr id="28" name="Shape 22"/>
+          <p:cNvPr id="27" name="Shape 21"/>
           <p:cNvSpPr/>
           <p:nvPr/>
         </p:nvSpPr>
@@ -19924,7 +18824,7 @@
       </p:sp>
       <p:sp>
         <p:nvSpPr>
-          <p:cNvPr id="29" name="mdpr:overflow-guard-f8d03e:title:__title:overflow-guard-f8d03e"/>
+          <p:cNvPr id="28" name="mdpr:overflow-guard-f8d03e:title:__title:overflow-guard-f8d03e"/>
           <p:cNvSpPr txBox="1"/>
           <p:nvPr/>
         </p:nvSpPr>
@@ -19966,7 +18866,7 @@
       </p:sp>
       <p:sp>
         <p:nvSpPr>
-          <p:cNvPr id="30" name="mdpr:overflow-guard-f8d03e:item-1:block-31"/>
+          <p:cNvPr id="29" name="mdpr:overflow-guard-f8d03e:item-1:block-31"/>
           <p:cNvSpPr txBox="1"/>
           <p:nvPr/>
         </p:nvSpPr>
@@ -20025,7 +18925,7 @@
       </p:sp>
       <p:sp>
         <p:nvSpPr>
-          <p:cNvPr id="31" name="mdpr:overflow-guard-f8d03e:item-2:block-31"/>
+          <p:cNvPr id="30" name="mdpr:overflow-guard-f8d03e:item-2:block-31"/>
           <p:cNvSpPr txBox="1"/>
           <p:nvPr/>
         </p:nvSpPr>
@@ -20084,7 +18984,7 @@
       </p:sp>
       <p:sp>
         <p:nvSpPr>
-          <p:cNvPr id="32" name="mdpr:overflow-guard-f8d03e:item-3:block-31"/>
+          <p:cNvPr id="31" name="mdpr:overflow-guard-f8d03e:item-3:block-31"/>
           <p:cNvSpPr txBox="1"/>
           <p:nvPr/>
         </p:nvSpPr>
@@ -20143,7 +19043,7 @@
       </p:sp>
       <p:sp>
         <p:nvSpPr>
-          <p:cNvPr id="33" name="mdpr:overflow-guard-f8d03e:item-4:block-31"/>
+          <p:cNvPr id="32" name="mdpr:overflow-guard-f8d03e:item-4:block-31"/>
           <p:cNvSpPr txBox="1"/>
           <p:nvPr/>
         </p:nvSpPr>
@@ -20666,36 +19566,9 @@
           </a:ln>
         </p:spPr>
       </p:sp>
-      <p:sp>
-        <p:nvSpPr>
-          <p:cNvPr id="16" name="Shape 14"/>
-          <p:cNvSpPr/>
-          <p:nvPr/>
-        </p:nvSpPr>
-        <p:spPr>
-          <a:xfrm>
-            <a:off x="731520" y="1207008"/>
-            <a:ext cx="1325880" cy="54864"/>
-          </a:xfrm>
-          <a:prstGeom prst="rect">
-            <a:avLst/>
-          </a:prstGeom>
-          <a:solidFill>
-            <a:srgbClr val="7DD3FC"/>
-          </a:solidFill>
-          <a:ln w="12700">
-            <a:solidFill>
-              <a:srgbClr val="7DD3FC">
-                <a:alpha val="0"/>
-              </a:srgbClr>
-            </a:solidFill>
-            <a:prstDash val="solid"/>
-          </a:ln>
-        </p:spPr>
-      </p:sp>
       <p:pic>
         <p:nvPicPr>
-          <p:cNvPr id="17" name="Image 0" descr="preencoded.png">    </p:cNvPr>
+          <p:cNvPr id="16" name="Image 0" descr="preencoded.png">    </p:cNvPr>
           <p:cNvPicPr>
             <a:picLocks noChangeAspect="1"/>
           </p:cNvPicPr>
@@ -20725,7 +19598,7 @@
       </p:pic>
       <p:sp>
         <p:nvSpPr>
-          <p:cNvPr id="18" name="Shape 15"/>
+          <p:cNvPr id="17" name="Shape 14"/>
           <p:cNvSpPr/>
           <p:nvPr/>
         </p:nvSpPr>
@@ -20766,7 +19639,7 @@
       </p:sp>
       <p:sp>
         <p:nvSpPr>
-          <p:cNvPr id="19" name="Shape 16"/>
+          <p:cNvPr id="18" name="Shape 15"/>
           <p:cNvSpPr/>
           <p:nvPr/>
         </p:nvSpPr>
@@ -20793,7 +19666,7 @@
       </p:sp>
       <p:sp>
         <p:nvSpPr>
-          <p:cNvPr id="20" name="mdpr:image-safe-frame-d4d6a4:title:__title:image-safe-frame-d4d6a4"/>
+          <p:cNvPr id="19" name="mdpr:image-safe-frame-d4d6a4:title:__title:image-safe-frame-d4d6a4"/>
           <p:cNvSpPr txBox="1"/>
           <p:nvPr/>
         </p:nvSpPr>
@@ -20835,7 +19708,7 @@
       </p:sp>
       <p:sp>
         <p:nvSpPr>
-          <p:cNvPr id="21" name="mdpr:image-safe-frame-d4d6a4:body:block-33-block-33-block-33"/>
+          <p:cNvPr id="20" name="mdpr:image-safe-frame-d4d6a4:body:block-33-block-33-block-33"/>
           <p:cNvSpPr txBox="1"/>
           <p:nvPr/>
         </p:nvSpPr>
@@ -20974,7 +19847,7 @@
       </p:sp>
       <p:pic>
         <p:nvPicPr>
-          <p:cNvPr id="22" name="mdpr:image-safe-frame-d4d6a4:image-1:block-34" descr="{&quot;mdpr&quot;:{&quot;slideId&quot;:&quot;image-safe-frame-d4d6a4&quot;,&quot;layoutSlideId&quot;:&quot;layout-image-safe-frame-d4d6a4&quot;,&quot;regionId&quot;:&quot;image-1&quot;,&quot;blockIds&quot;:[&quot;block-34&quot;],&quot;objectKind&quot;:&quot;native-image&quot;,&quot;role&quot;:&quot;image&quot;,&quot;editable&quot;:false}}">    </p:cNvPr>
+          <p:cNvPr id="21" name="mdpr:image-safe-frame-d4d6a4:image-1:block-34" descr="{&quot;mdpr&quot;:{&quot;slideId&quot;:&quot;image-safe-frame-d4d6a4&quot;,&quot;layoutSlideId&quot;:&quot;layout-image-safe-frame-d4d6a4&quot;,&quot;regionId&quot;:&quot;image-1&quot;,&quot;blockIds&quot;:[&quot;block-34&quot;],&quot;objectKind&quot;:&quot;native-image&quot;,&quot;role&quot;:&quot;image&quot;,&quot;editable&quot;:false}}">    </p:cNvPr>
           <p:cNvPicPr>
             <a:picLocks noChangeAspect="1"/>
           </p:cNvPicPr>
@@ -21468,36 +20341,9 @@
           </a:ln>
         </p:spPr>
       </p:sp>
-      <p:sp>
-        <p:nvSpPr>
-          <p:cNvPr id="16" name="Shape 14"/>
-          <p:cNvSpPr/>
-          <p:nvPr/>
-        </p:nvSpPr>
-        <p:spPr>
-          <a:xfrm>
-            <a:off x="731520" y="1207008"/>
-            <a:ext cx="1325880" cy="54864"/>
-          </a:xfrm>
-          <a:prstGeom prst="rect">
-            <a:avLst/>
-          </a:prstGeom>
-          <a:solidFill>
-            <a:srgbClr val="7DD3FC"/>
-          </a:solidFill>
-          <a:ln w="12700">
-            <a:solidFill>
-              <a:srgbClr val="7DD3FC">
-                <a:alpha val="0"/>
-              </a:srgbClr>
-            </a:solidFill>
-            <a:prstDash val="solid"/>
-          </a:ln>
-        </p:spPr>
-      </p:sp>
       <p:pic>
         <p:nvPicPr>
-          <p:cNvPr id="17" name="Image 0" descr="preencoded.png">    </p:cNvPr>
+          <p:cNvPr id="16" name="Image 0" descr="preencoded.png">    </p:cNvPr>
           <p:cNvPicPr>
             <a:picLocks noChangeAspect="1"/>
           </p:cNvPicPr>
@@ -21527,7 +20373,7 @@
       </p:pic>
       <p:sp>
         <p:nvSpPr>
-          <p:cNvPr id="18" name="Shape 15"/>
+          <p:cNvPr id="17" name="Shape 14"/>
           <p:cNvSpPr/>
           <p:nvPr/>
         </p:nvSpPr>
@@ -21568,7 +20414,7 @@
       </p:sp>
       <p:pic>
         <p:nvPicPr>
-          <p:cNvPr id="19" name="Image 1" descr="preencoded.png">    </p:cNvPr>
+          <p:cNvPr id="18" name="Image 1" descr="preencoded.png">    </p:cNvPr>
           <p:cNvPicPr>
             <a:picLocks noChangeAspect="1"/>
           </p:cNvPicPr>
@@ -21598,7 +20444,7 @@
       </p:pic>
       <p:sp>
         <p:nvSpPr>
-          <p:cNvPr id="20" name="Shape 16"/>
+          <p:cNvPr id="19" name="Shape 15"/>
           <p:cNvSpPr/>
           <p:nvPr/>
         </p:nvSpPr>
@@ -21639,7 +20485,7 @@
       </p:sp>
       <p:pic>
         <p:nvPicPr>
-          <p:cNvPr id="21" name="Image 2" descr="preencoded.png">    </p:cNvPr>
+          <p:cNvPr id="20" name="Image 2" descr="preencoded.png">    </p:cNvPr>
           <p:cNvPicPr>
             <a:picLocks noChangeAspect="1"/>
           </p:cNvPicPr>
@@ -21669,7 +20515,7 @@
       </p:pic>
       <p:sp>
         <p:nvSpPr>
-          <p:cNvPr id="22" name="Shape 17"/>
+          <p:cNvPr id="21" name="Shape 16"/>
           <p:cNvSpPr/>
           <p:nvPr/>
         </p:nvSpPr>
@@ -21710,7 +20556,7 @@
       </p:sp>
       <p:sp>
         <p:nvSpPr>
-          <p:cNvPr id="23" name="Shape 18"/>
+          <p:cNvPr id="22" name="Shape 17"/>
           <p:cNvSpPr/>
           <p:nvPr/>
         </p:nvSpPr>
@@ -21737,7 +20583,7 @@
       </p:sp>
       <p:sp>
         <p:nvSpPr>
-          <p:cNvPr id="24" name="mdpr:mixed-object-packing-438299:title:__title:mixed-object-packing-438299"/>
+          <p:cNvPr id="23" name="mdpr:mixed-object-packing-438299:title:__title:mixed-object-packing-438299"/>
           <p:cNvSpPr txBox="1"/>
           <p:nvPr/>
         </p:nvSpPr>
@@ -21779,7 +20625,7 @@
       </p:sp>
       <p:graphicFrame>
         <p:nvGraphicFramePr>
-          <p:cNvPr id="25" name="Chart 0" descr=""/>
+          <p:cNvPr id="24" name="Chart 0" descr=""/>
           <p:cNvGraphicFramePr/>
           <p:nvPr/>
         </p:nvGraphicFramePr>
@@ -22237,7 +21083,7 @@
       </p:graphicFrame>
       <p:sp>
         <p:nvSpPr>
-          <p:cNvPr id="27" name="mdpr:mixed-object-packing-438299:body:block-36"/>
+          <p:cNvPr id="26" name="mdpr:mixed-object-packing-438299:body:block-36"/>
           <p:cNvSpPr txBox="1"/>
           <p:nvPr/>
         </p:nvSpPr>
@@ -22336,7 +21182,7 @@
       </p:sp>
       <p:pic>
         <p:nvPicPr>
-          <p:cNvPr id="28" name="mdpr:mixed-object-packing-438299:image-1:block-39" descr="{&quot;mdpr&quot;:{&quot;slideId&quot;:&quot;mixed-object-packing-438299&quot;,&quot;layoutSlideId&quot;:&quot;layout-mixed-object-packing-438299&quot;,&quot;regionId&quot;:&quot;image-1&quot;,&quot;blockIds&quot;:[&quot;block-39&quot;],&quot;objectKind&quot;:&quot;native-image&quot;,&quot;role&quot;:&quot;image&quot;,&quot;editable&quot;:false}}">    </p:cNvPr>
+          <p:cNvPr id="27" name="mdpr:mixed-object-packing-438299:image-1:block-39" descr="{&quot;mdpr&quot;:{&quot;slideId&quot;:&quot;mixed-object-packing-438299&quot;,&quot;layoutSlideId&quot;:&quot;layout-mixed-object-packing-438299&quot;,&quot;regionId&quot;:&quot;image-1&quot;,&quot;blockIds&quot;:[&quot;block-39&quot;],&quot;objectKind&quot;:&quot;native-image&quot;,&quot;role&quot;:&quot;image&quot;,&quot;editable&quot;:false}}">    </p:cNvPr>
           <p:cNvPicPr>
             <a:picLocks noChangeAspect="1"/>
           </p:cNvPicPr>
@@ -22838,8 +21684,8 @@
         </p:nvSpPr>
         <p:spPr>
           <a:xfrm>
-            <a:off x="731520" y="1207008"/>
-            <a:ext cx="1325880" cy="54864"/>
+            <a:off x="822960" y="1938528"/>
+            <a:ext cx="73152" cy="2514600"/>
           </a:xfrm>
           <a:prstGeom prst="rect">
             <a:avLst/>
@@ -22857,237 +21703,22 @@
           </a:ln>
         </p:spPr>
       </p:sp>
-      <p:pic>
-        <p:nvPicPr>
-          <p:cNvPr id="17" name="Image 0" descr="preencoded.png">    </p:cNvPr>
-          <p:cNvPicPr>
-            <a:picLocks noChangeAspect="1"/>
-          </p:cNvPicPr>
-          <p:nvPr/>
-        </p:nvPicPr>
-        <p:blipFill>
-          <a:blip r:embed="rId1">
-            <a:extLst>
-              <a:ext uri="{96DAC541-7B7A-43D3-8B79-37D633B846F1}">
-                <asvg:svgBlip xmlns:asvg="http://schemas.microsoft.com/office/drawing/2016/SVG/main" r:embed="rId2"/>
-              </a:ext>
-            </a:extLst>
-          </a:blip>
-          <a:stretch>
-            <a:fillRect/>
-          </a:stretch>
-        </p:blipFill>
-        <p:spPr>
-          <a:xfrm>
-            <a:off x="914400" y="1865376"/>
-            <a:ext cx="10241280" cy="1024128"/>
-          </a:xfrm>
-          <a:prstGeom prst="rect">
-            <a:avLst/>
-          </a:prstGeom>
-        </p:spPr>
-      </p:pic>
-      <p:sp>
-        <p:nvSpPr>
-          <p:cNvPr id="18" name="Shape 15"/>
-          <p:cNvSpPr/>
-          <p:nvPr/>
-        </p:nvSpPr>
-        <p:spPr>
-          <a:xfrm>
-            <a:off x="914400" y="1865376"/>
-            <a:ext cx="10241280" cy="1024128"/>
-          </a:xfrm>
-          <a:prstGeom prst="rect">
-            <a:avLst/>
-          </a:prstGeom>
-          <a:solidFill>
-            <a:srgbClr val="132238">
-              <a:alpha val="0"/>
-            </a:srgbClr>
-          </a:solidFill>
-          <a:ln w="12700">
-            <a:solidFill>
-              <a:srgbClr val="BAE6FD">
-                <a:alpha val="0"/>
-              </a:srgbClr>
-            </a:solidFill>
-            <a:prstDash val="solid"/>
-          </a:ln>
-          <a:effectLst>
-            <a:outerShdw sx="100000" sy="100000" kx="0" ky="0" algn="bl" rotWithShape="0" blurRad="30480" dist="50800" dir="2700000">
-              <a:srgbClr val="CBD5E1">
-                <a:alpha val="20000"/>
-              </a:srgbClr>
-            </a:outerShdw>
-            <a:glow rad="63500">
-              <a:srgbClr val="7DD3FC">
-                <a:alpha val="23000"/>
-              </a:srgbClr>
-            </a:glow>
-          </a:effectLst>
-        </p:spPr>
-      </p:sp>
-      <p:pic>
-        <p:nvPicPr>
-          <p:cNvPr id="19" name="Image 1" descr="preencoded.png">    </p:cNvPr>
-          <p:cNvPicPr>
-            <a:picLocks noChangeAspect="1"/>
-          </p:cNvPicPr>
-          <p:nvPr/>
-        </p:nvPicPr>
-        <p:blipFill>
-          <a:blip r:embed="rId3">
-            <a:extLst>
-              <a:ext uri="{96DAC541-7B7A-43D3-8B79-37D633B846F1}">
-                <asvg:svgBlip xmlns:asvg="http://schemas.microsoft.com/office/drawing/2016/SVG/main" r:embed="rId4"/>
-              </a:ext>
-            </a:extLst>
-          </a:blip>
-          <a:stretch>
-            <a:fillRect/>
-          </a:stretch>
-        </p:blipFill>
-        <p:spPr>
-          <a:xfrm>
-            <a:off x="914400" y="3191256"/>
-            <a:ext cx="10241280" cy="1024128"/>
-          </a:xfrm>
-          <a:prstGeom prst="rect">
-            <a:avLst/>
-          </a:prstGeom>
-        </p:spPr>
-      </p:pic>
-      <p:sp>
-        <p:nvSpPr>
-          <p:cNvPr id="20" name="Shape 16"/>
-          <p:cNvSpPr/>
-          <p:nvPr/>
-        </p:nvSpPr>
-        <p:spPr>
-          <a:xfrm>
-            <a:off x="914400" y="3191256"/>
-            <a:ext cx="10241280" cy="1024128"/>
-          </a:xfrm>
-          <a:prstGeom prst="rect">
-            <a:avLst/>
-          </a:prstGeom>
-          <a:solidFill>
-            <a:srgbClr val="132238">
-              <a:alpha val="0"/>
-            </a:srgbClr>
-          </a:solidFill>
-          <a:ln w="12700">
-            <a:solidFill>
-              <a:srgbClr val="BAE6FD">
-                <a:alpha val="0"/>
-              </a:srgbClr>
-            </a:solidFill>
-            <a:prstDash val="solid"/>
-          </a:ln>
-          <a:effectLst>
-            <a:outerShdw sx="100000" sy="100000" kx="0" ky="0" algn="bl" rotWithShape="0" blurRad="30480" dist="50800" dir="2700000">
-              <a:srgbClr val="CBD5E1">
-                <a:alpha val="20000"/>
-              </a:srgbClr>
-            </a:outerShdw>
-            <a:glow rad="63500">
-              <a:srgbClr val="7DD3FC">
-                <a:alpha val="23000"/>
-              </a:srgbClr>
-            </a:glow>
-          </a:effectLst>
-        </p:spPr>
-      </p:sp>
-      <p:pic>
-        <p:nvPicPr>
-          <p:cNvPr id="21" name="Image 2" descr="preencoded.png">    </p:cNvPr>
-          <p:cNvPicPr>
-            <a:picLocks noChangeAspect="1"/>
-          </p:cNvPicPr>
-          <p:nvPr/>
-        </p:nvPicPr>
-        <p:blipFill>
-          <a:blip r:embed="rId5">
-            <a:extLst>
-              <a:ext uri="{96DAC541-7B7A-43D3-8B79-37D633B846F1}">
-                <asvg:svgBlip xmlns:asvg="http://schemas.microsoft.com/office/drawing/2016/SVG/main" r:embed="rId6"/>
-              </a:ext>
-            </a:extLst>
-          </a:blip>
-          <a:stretch>
-            <a:fillRect/>
-          </a:stretch>
-        </p:blipFill>
-        <p:spPr>
-          <a:xfrm>
-            <a:off x="914400" y="4507992"/>
-            <a:ext cx="10241280" cy="1024128"/>
-          </a:xfrm>
-          <a:prstGeom prst="rect">
-            <a:avLst/>
-          </a:prstGeom>
-        </p:spPr>
-      </p:pic>
-      <p:sp>
-        <p:nvSpPr>
-          <p:cNvPr id="22" name="Shape 17"/>
-          <p:cNvSpPr/>
-          <p:nvPr/>
-        </p:nvSpPr>
-        <p:spPr>
-          <a:xfrm>
-            <a:off x="914400" y="4507992"/>
-            <a:ext cx="10241280" cy="1024128"/>
-          </a:xfrm>
-          <a:prstGeom prst="rect">
-            <a:avLst/>
-          </a:prstGeom>
-          <a:solidFill>
-            <a:srgbClr val="132238">
-              <a:alpha val="0"/>
-            </a:srgbClr>
-          </a:solidFill>
-          <a:ln w="12700">
-            <a:solidFill>
-              <a:srgbClr val="BAE6FD">
-                <a:alpha val="0"/>
-              </a:srgbClr>
-            </a:solidFill>
-            <a:prstDash val="solid"/>
-          </a:ln>
-          <a:effectLst>
-            <a:outerShdw sx="100000" sy="100000" kx="0" ky="0" algn="bl" rotWithShape="0" blurRad="30480" dist="50800" dir="2700000">
-              <a:srgbClr val="CBD5E1">
-                <a:alpha val="20000"/>
-              </a:srgbClr>
-            </a:outerShdw>
-            <a:glow rad="63500">
-              <a:srgbClr val="7DD3FC">
-                <a:alpha val="23000"/>
-              </a:srgbClr>
-            </a:glow>
-          </a:effectLst>
-        </p:spPr>
-      </p:sp>
-      <p:sp>
-        <p:nvSpPr>
-          <p:cNvPr id="23" name="Shape 18"/>
-          <p:cNvSpPr/>
-          <p:nvPr/>
-        </p:nvSpPr>
-        <p:spPr>
-          <a:xfrm>
-            <a:off x="786384" y="1956816"/>
-            <a:ext cx="32004" cy="3483864"/>
-          </a:xfrm>
-          <a:prstGeom prst="rect">
-            <a:avLst/>
-          </a:prstGeom>
-          <a:solidFill>
-            <a:srgbClr val="A78BFA">
-              <a:alpha val="80000"/>
-            </a:srgbClr>
+      <p:sp>
+        <p:nvSpPr>
+          <p:cNvPr id="17" name="Shape 15"/>
+          <p:cNvSpPr/>
+          <p:nvPr/>
+        </p:nvSpPr>
+        <p:spPr>
+          <a:xfrm>
+            <a:off x="4343400" y="1938528"/>
+            <a:ext cx="73152" cy="2514600"/>
+          </a:xfrm>
+          <a:prstGeom prst="rect">
+            <a:avLst/>
+          </a:prstGeom>
+          <a:solidFill>
+            <a:srgbClr val="A78BFA"/>
           </a:solidFill>
           <a:ln w="12700">
             <a:solidFill>
@@ -23101,14 +21732,14 @@
       </p:sp>
       <p:sp>
         <p:nvSpPr>
-          <p:cNvPr id="24" name="Shape 19"/>
-          <p:cNvSpPr/>
-          <p:nvPr/>
-        </p:nvSpPr>
-        <p:spPr>
-          <a:xfrm>
-            <a:off x="914400" y="1865376"/>
-            <a:ext cx="73152" cy="1024128"/>
+          <p:cNvPr id="18" name="Shape 16"/>
+          <p:cNvSpPr/>
+          <p:nvPr/>
+        </p:nvSpPr>
+        <p:spPr>
+          <a:xfrm>
+            <a:off x="7863840" y="1938528"/>
+            <a:ext cx="73152" cy="2514600"/>
           </a:xfrm>
           <a:prstGeom prst="rect">
             <a:avLst/>
@@ -23128,61 +21759,7 @@
       </p:sp>
       <p:sp>
         <p:nvSpPr>
-          <p:cNvPr id="25" name="Shape 20"/>
-          <p:cNvSpPr/>
-          <p:nvPr/>
-        </p:nvSpPr>
-        <p:spPr>
-          <a:xfrm>
-            <a:off x="914400" y="3191256"/>
-            <a:ext cx="73152" cy="1024128"/>
-          </a:xfrm>
-          <a:prstGeom prst="rect">
-            <a:avLst/>
-          </a:prstGeom>
-          <a:solidFill>
-            <a:srgbClr val="A78BFA"/>
-          </a:solidFill>
-          <a:ln w="12700">
-            <a:solidFill>
-              <a:srgbClr val="A78BFA">
-                <a:alpha val="0"/>
-              </a:srgbClr>
-            </a:solidFill>
-            <a:prstDash val="solid"/>
-          </a:ln>
-        </p:spPr>
-      </p:sp>
-      <p:sp>
-        <p:nvSpPr>
-          <p:cNvPr id="26" name="Shape 21"/>
-          <p:cNvSpPr/>
-          <p:nvPr/>
-        </p:nvSpPr>
-        <p:spPr>
-          <a:xfrm>
-            <a:off x="914400" y="4507992"/>
-            <a:ext cx="73152" cy="1024128"/>
-          </a:xfrm>
-          <a:prstGeom prst="rect">
-            <a:avLst/>
-          </a:prstGeom>
-          <a:solidFill>
-            <a:srgbClr val="7DD3FC"/>
-          </a:solidFill>
-          <a:ln w="12700">
-            <a:solidFill>
-              <a:srgbClr val="7DD3FC">
-                <a:alpha val="0"/>
-              </a:srgbClr>
-            </a:solidFill>
-            <a:prstDash val="solid"/>
-          </a:ln>
-        </p:spPr>
-      </p:sp>
-      <p:sp>
-        <p:nvSpPr>
-          <p:cNvPr id="27" name="mdpr:actions-output-review-326e07:title:__title:actions-output-review-326e07"/>
+          <p:cNvPr id="19" name="mdpr:actions-output-review-326e07:title:__title:actions-output-review-326e07"/>
           <p:cNvSpPr txBox="1"/>
           <p:nvPr/>
         </p:nvSpPr>
@@ -23224,14 +21801,14 @@
       </p:sp>
       <p:sp>
         <p:nvSpPr>
-          <p:cNvPr id="28" name="mdpr:actions-output-review-326e07:item-1:block-41"/>
+          <p:cNvPr id="20" name="mdpr:actions-output-review-326e07:item-1:block-41"/>
           <p:cNvSpPr txBox="1"/>
           <p:nvPr/>
         </p:nvSpPr>
         <p:spPr>
           <a:xfrm>
-            <a:off x="1133856" y="1957548"/>
-            <a:ext cx="9820656" cy="839785"/>
+            <a:off x="1042416" y="2103120"/>
+            <a:ext cx="2825496" cy="2185416"/>
           </a:xfrm>
           <a:prstGeom prst="rect">
             <a:avLst/>
@@ -23283,14 +21860,14 @@
       </p:sp>
       <p:sp>
         <p:nvSpPr>
-          <p:cNvPr id="29" name="mdpr:actions-output-review-326e07:item-2:block-41"/>
+          <p:cNvPr id="21" name="mdpr:actions-output-review-326e07:item-2:block-41"/>
           <p:cNvSpPr txBox="1"/>
           <p:nvPr/>
         </p:nvSpPr>
         <p:spPr>
           <a:xfrm>
-            <a:off x="1133856" y="3283428"/>
-            <a:ext cx="9820656" cy="839785"/>
+            <a:off x="4562856" y="2103120"/>
+            <a:ext cx="2825496" cy="2185416"/>
           </a:xfrm>
           <a:prstGeom prst="rect">
             <a:avLst/>
@@ -23342,14 +21919,14 @@
       </p:sp>
       <p:sp>
         <p:nvSpPr>
-          <p:cNvPr id="30" name="mdpr:actions-output-review-326e07:item-3:block-41"/>
+          <p:cNvPr id="22" name="mdpr:actions-output-review-326e07:item-3:block-41"/>
           <p:cNvSpPr txBox="1"/>
           <p:nvPr/>
         </p:nvSpPr>
         <p:spPr>
           <a:xfrm>
-            <a:off x="1133856" y="4600164"/>
-            <a:ext cx="9820656" cy="839785"/>
+            <a:off x="8083296" y="2103120"/>
+            <a:ext cx="2825496" cy="2185416"/>
           </a:xfrm>
           <a:prstGeom prst="rect">
             <a:avLst/>
@@ -23873,8 +22450,8 @@
         </p:nvSpPr>
         <p:spPr>
           <a:xfrm>
-            <a:off x="731520" y="1207008"/>
-            <a:ext cx="1325880" cy="54864"/>
+            <a:off x="822960" y="1737360"/>
+            <a:ext cx="73152" cy="841248"/>
           </a:xfrm>
           <a:prstGeom prst="rect">
             <a:avLst/>
@@ -23900,8 +22477,35 @@
         </p:nvSpPr>
         <p:spPr>
           <a:xfrm>
-            <a:off x="822960" y="3099816"/>
-            <a:ext cx="10515600" cy="45720"/>
+            <a:off x="822960" y="2779776"/>
+            <a:ext cx="73152" cy="841248"/>
+          </a:xfrm>
+          <a:prstGeom prst="rect">
+            <a:avLst/>
+          </a:prstGeom>
+          <a:solidFill>
+            <a:srgbClr val="A78BFA"/>
+          </a:solidFill>
+          <a:ln w="12700">
+            <a:solidFill>
+              <a:srgbClr val="A78BFA">
+                <a:alpha val="0"/>
+              </a:srgbClr>
+            </a:solidFill>
+            <a:prstDash val="solid"/>
+          </a:ln>
+        </p:spPr>
+      </p:sp>
+      <p:sp>
+        <p:nvSpPr>
+          <p:cNvPr id="18" name="Shape 16"/>
+          <p:cNvSpPr/>
+          <p:nvPr/>
+        </p:nvSpPr>
+        <p:spPr>
+          <a:xfrm>
+            <a:off x="822960" y="3822192"/>
+            <a:ext cx="73152" cy="841248"/>
           </a:xfrm>
           <a:prstGeom prst="rect">
             <a:avLst/>
@@ -23921,14 +22525,14 @@
       </p:sp>
       <p:sp>
         <p:nvSpPr>
-          <p:cNvPr id="18" name="Shape 16"/>
-          <p:cNvSpPr/>
-          <p:nvPr/>
-        </p:nvSpPr>
-        <p:spPr>
-          <a:xfrm>
-            <a:off x="822960" y="4288536"/>
-            <a:ext cx="2011680" cy="45720"/>
+          <p:cNvPr id="19" name="Shape 17"/>
+          <p:cNvSpPr/>
+          <p:nvPr/>
+        </p:nvSpPr>
+        <p:spPr>
+          <a:xfrm>
+            <a:off x="822960" y="4864608"/>
+            <a:ext cx="73152" cy="841248"/>
           </a:xfrm>
           <a:prstGeom prst="rect">
             <a:avLst/>
@@ -23948,13 +22552,13 @@
       </p:sp>
       <p:sp>
         <p:nvSpPr>
-          <p:cNvPr id="19" name="Shape 17"/>
-          <p:cNvSpPr/>
-          <p:nvPr/>
-        </p:nvSpPr>
-        <p:spPr>
-          <a:xfrm>
-            <a:off x="822960" y="3300984"/>
+          <p:cNvPr id="20" name="Shape 18"/>
+          <p:cNvSpPr/>
+          <p:nvPr/>
+        </p:nvSpPr>
+        <p:spPr>
+          <a:xfrm>
+            <a:off x="6272784" y="1737360"/>
             <a:ext cx="73152" cy="841248"/>
           </a:xfrm>
           <a:prstGeom prst="rect">
@@ -23975,7 +22579,61 @@
       </p:sp>
       <p:sp>
         <p:nvSpPr>
-          <p:cNvPr id="20" name="mdpr:2-2-7bfb60:title:__title:2-2-7bfb60"/>
+          <p:cNvPr id="21" name="Shape 19"/>
+          <p:cNvSpPr/>
+          <p:nvPr/>
+        </p:nvSpPr>
+        <p:spPr>
+          <a:xfrm>
+            <a:off x="6272784" y="2779776"/>
+            <a:ext cx="73152" cy="841248"/>
+          </a:xfrm>
+          <a:prstGeom prst="rect">
+            <a:avLst/>
+          </a:prstGeom>
+          <a:solidFill>
+            <a:srgbClr val="A78BFA"/>
+          </a:solidFill>
+          <a:ln w="12700">
+            <a:solidFill>
+              <a:srgbClr val="A78BFA">
+                <a:alpha val="0"/>
+              </a:srgbClr>
+            </a:solidFill>
+            <a:prstDash val="solid"/>
+          </a:ln>
+        </p:spPr>
+      </p:sp>
+      <p:sp>
+        <p:nvSpPr>
+          <p:cNvPr id="22" name="Shape 20"/>
+          <p:cNvSpPr/>
+          <p:nvPr/>
+        </p:nvSpPr>
+        <p:spPr>
+          <a:xfrm>
+            <a:off x="6272784" y="3822192"/>
+            <a:ext cx="73152" cy="841248"/>
+          </a:xfrm>
+          <a:prstGeom prst="rect">
+            <a:avLst/>
+          </a:prstGeom>
+          <a:solidFill>
+            <a:srgbClr val="7DD3FC"/>
+          </a:solidFill>
+          <a:ln w="12700">
+            <a:solidFill>
+              <a:srgbClr val="7DD3FC">
+                <a:alpha val="0"/>
+              </a:srgbClr>
+            </a:solidFill>
+            <a:prstDash val="solid"/>
+          </a:ln>
+        </p:spPr>
+      </p:sp>
+      <p:sp>
+        <p:nvSpPr>
+          <p:cNvPr id="23" name="mdpr:2-2-7bfb60:title:__title:2-2-7bfb60"/>
           <p:cNvSpPr txBox="1"/>
           <p:nvPr/>
         </p:nvSpPr>
@@ -24009,7 +22667,24 @@
                 <a:ea typeface="Pretendard" pitchFamily="34" charset="-122"/>
                 <a:cs typeface="Pretendard" pitchFamily="34" charset="-120"/>
               </a:rPr>
-              <a:t>Agenda (Cont. 2/2)</a:t>
+              <a:t>Agenda</a:t>
+            </a:r>
+            <a:pPr algn="ctr" indent="0" marL="0">
+              <a:lnSpc>
+                <a:spcPct val="120000"/>
+              </a:lnSpc>
+              <a:buNone/>
+            </a:pPr>
+            <a:r>
+              <a:rPr lang="en-US" sz="2300" dirty="0">
+                <a:solidFill>
+                  <a:srgbClr val="6C6C6C"/>
+                </a:solidFill>
+                <a:latin typeface="Pretendard" pitchFamily="34" charset="0"/>
+                <a:ea typeface="Pretendard" pitchFamily="34" charset="-122"/>
+                <a:cs typeface="Pretendard" pitchFamily="34" charset="-120"/>
+              </a:rPr>
+              <a:t> (Cont. 2/2)</a:t>
             </a:r>
             <a:endParaRPr lang="en-US" sz="3800" dirty="0"/>
           </a:p>
@@ -24017,14 +22692,14 @@
       </p:sp>
       <p:sp>
         <p:nvSpPr>
-          <p:cNvPr id="21" name="mdpr:2-2-7bfb60:toc-item-1:toc-item-15"/>
+          <p:cNvPr id="24" name="mdpr:2-2-7bfb60:toc-item-1:toc-item-9"/>
           <p:cNvSpPr txBox="1"/>
           <p:nvPr/>
         </p:nvSpPr>
         <p:spPr>
           <a:xfrm>
-            <a:off x="1042416" y="3392424"/>
-            <a:ext cx="10094976" cy="658368"/>
+            <a:off x="1042416" y="1828800"/>
+            <a:ext cx="4645152" cy="658368"/>
           </a:xfrm>
           <a:prstGeom prst="rect">
             <a:avLst/>
@@ -24043,7 +22718,7 @@
               <a:buNone/>
             </a:pPr>
             <a:r>
-              <a:rPr lang="en-US" sz="2200" dirty="0">
+              <a:rPr lang="en-US" sz="1800" dirty="0">
                 <a:solidFill>
                   <a:srgbClr val="F8F8F8"/>
                 </a:solidFill>
@@ -24051,9 +22726,261 @@
                 <a:ea typeface="Pretendard" pitchFamily="34" charset="-122"/>
                 <a:cs typeface="Pretendard" pitchFamily="34" charset="-120"/>
               </a:rPr>
-              <a:t>01  Actions Output Review</a:t>
+              <a:t>09  Editable Proof Objects</a:t>
             </a:r>
-            <a:endParaRPr lang="en-US" sz="2200" dirty="0"/>
+            <a:endParaRPr lang="en-US" sz="1800" dirty="0"/>
+          </a:p>
+        </p:txBody>
+      </p:sp>
+      <p:sp>
+        <p:nvSpPr>
+          <p:cNvPr id="25" name="mdpr:2-2-7bfb60:toc-item-2:toc-item-10"/>
+          <p:cNvSpPr txBox="1"/>
+          <p:nvPr/>
+        </p:nvSpPr>
+        <p:spPr>
+          <a:xfrm>
+            <a:off x="1042416" y="2871216"/>
+            <a:ext cx="4645152" cy="658368"/>
+          </a:xfrm>
+          <a:prstGeom prst="rect">
+            <a:avLst/>
+          </a:prstGeom>
+          <a:noFill/>
+          <a:ln/>
+        </p:spPr>
+        <p:txBody>
+          <a:bodyPr wrap="square" lIns="0" tIns="25400" rIns="25400" bIns="0" rtlCol="0" anchor="ctr"/>
+          <a:lstStyle/>
+          <a:p>
+            <a:pPr algn="ctr" indent="0" marL="0">
+              <a:lnSpc>
+                <a:spcPct val="120000"/>
+              </a:lnSpc>
+              <a:buNone/>
+            </a:pPr>
+            <a:r>
+              <a:rPr lang="en-US" sz="1800" dirty="0">
+                <a:solidFill>
+                  <a:srgbClr val="F8F8F8"/>
+                </a:solidFill>
+                <a:latin typeface="Pretendard" pitchFamily="34" charset="0"/>
+                <a:ea typeface="Pretendard" pitchFamily="34" charset="-122"/>
+                <a:cs typeface="Pretendard" pitchFamily="34" charset="-120"/>
+              </a:rPr>
+              <a:t>10  Object Shape Grammar</a:t>
+            </a:r>
+            <a:endParaRPr lang="en-US" sz="1800" dirty="0"/>
+          </a:p>
+        </p:txBody>
+      </p:sp>
+      <p:sp>
+        <p:nvSpPr>
+          <p:cNvPr id="26" name="mdpr:2-2-7bfb60:toc-item-3:toc-item-11"/>
+          <p:cNvSpPr txBox="1"/>
+          <p:nvPr/>
+        </p:nvSpPr>
+        <p:spPr>
+          <a:xfrm>
+            <a:off x="1042416" y="3913632"/>
+            <a:ext cx="4645152" cy="658368"/>
+          </a:xfrm>
+          <a:prstGeom prst="rect">
+            <a:avLst/>
+          </a:prstGeom>
+          <a:noFill/>
+          <a:ln/>
+        </p:spPr>
+        <p:txBody>
+          <a:bodyPr wrap="square" lIns="0" tIns="25400" rIns="25400" bIns="0" rtlCol="0" anchor="ctr"/>
+          <a:lstStyle/>
+          <a:p>
+            <a:pPr algn="ctr" indent="0" marL="0">
+              <a:lnSpc>
+                <a:spcPct val="120000"/>
+              </a:lnSpc>
+              <a:buNone/>
+            </a:pPr>
+            <a:r>
+              <a:rPr lang="en-US" sz="1800" dirty="0">
+                <a:solidFill>
+                  <a:srgbClr val="F8F8F8"/>
+                </a:solidFill>
+                <a:latin typeface="Pretendard" pitchFamily="34" charset="0"/>
+                <a:ea typeface="Pretendard" pitchFamily="34" charset="-122"/>
+                <a:cs typeface="Pretendard" pitchFamily="34" charset="-120"/>
+              </a:rPr>
+              <a:t>11  Icon and Text Aside</a:t>
+            </a:r>
+            <a:endParaRPr lang="en-US" sz="1800" dirty="0"/>
+          </a:p>
+        </p:txBody>
+      </p:sp>
+      <p:sp>
+        <p:nvSpPr>
+          <p:cNvPr id="27" name="mdpr:2-2-7bfb60:toc-item-4:toc-item-12"/>
+          <p:cNvSpPr txBox="1"/>
+          <p:nvPr/>
+        </p:nvSpPr>
+        <p:spPr>
+          <a:xfrm>
+            <a:off x="1042416" y="4956048"/>
+            <a:ext cx="4645152" cy="658368"/>
+          </a:xfrm>
+          <a:prstGeom prst="rect">
+            <a:avLst/>
+          </a:prstGeom>
+          <a:noFill/>
+          <a:ln/>
+        </p:spPr>
+        <p:txBody>
+          <a:bodyPr wrap="square" lIns="0" tIns="25400" rIns="25400" bIns="0" rtlCol="0" anchor="ctr"/>
+          <a:lstStyle/>
+          <a:p>
+            <a:pPr algn="ctr" indent="0" marL="0">
+              <a:lnSpc>
+                <a:spcPct val="120000"/>
+              </a:lnSpc>
+              <a:buNone/>
+            </a:pPr>
+            <a:r>
+              <a:rPr lang="en-US" sz="1800" dirty="0">
+                <a:solidFill>
+                  <a:srgbClr val="F8F8F8"/>
+                </a:solidFill>
+                <a:latin typeface="Pretendard" pitchFamily="34" charset="0"/>
+                <a:ea typeface="Pretendard" pitchFamily="34" charset="-122"/>
+                <a:cs typeface="Pretendard" pitchFamily="34" charset="-120"/>
+              </a:rPr>
+              <a:t>12  Overflow Guard</a:t>
+            </a:r>
+            <a:endParaRPr lang="en-US" sz="1800" dirty="0"/>
+          </a:p>
+        </p:txBody>
+      </p:sp>
+      <p:sp>
+        <p:nvSpPr>
+          <p:cNvPr id="28" name="mdpr:2-2-7bfb60:toc-item-5:toc-item-13"/>
+          <p:cNvSpPr txBox="1"/>
+          <p:nvPr/>
+        </p:nvSpPr>
+        <p:spPr>
+          <a:xfrm>
+            <a:off x="6492240" y="1828800"/>
+            <a:ext cx="4645152" cy="658368"/>
+          </a:xfrm>
+          <a:prstGeom prst="rect">
+            <a:avLst/>
+          </a:prstGeom>
+          <a:noFill/>
+          <a:ln/>
+        </p:spPr>
+        <p:txBody>
+          <a:bodyPr wrap="square" lIns="0" tIns="25400" rIns="25400" bIns="0" rtlCol="0" anchor="ctr"/>
+          <a:lstStyle/>
+          <a:p>
+            <a:pPr algn="ctr" indent="0" marL="0">
+              <a:lnSpc>
+                <a:spcPct val="120000"/>
+              </a:lnSpc>
+              <a:buNone/>
+            </a:pPr>
+            <a:r>
+              <a:rPr lang="en-US" sz="1800" dirty="0">
+                <a:solidFill>
+                  <a:srgbClr val="F8F8F8"/>
+                </a:solidFill>
+                <a:latin typeface="Pretendard" pitchFamily="34" charset="0"/>
+                <a:ea typeface="Pretendard" pitchFamily="34" charset="-122"/>
+                <a:cs typeface="Pretendard" pitchFamily="34" charset="-120"/>
+              </a:rPr>
+              <a:t>13  Image Safe Frame</a:t>
+            </a:r>
+            <a:endParaRPr lang="en-US" sz="1800" dirty="0"/>
+          </a:p>
+        </p:txBody>
+      </p:sp>
+      <p:sp>
+        <p:nvSpPr>
+          <p:cNvPr id="29" name="mdpr:2-2-7bfb60:toc-item-6:toc-item-14"/>
+          <p:cNvSpPr txBox="1"/>
+          <p:nvPr/>
+        </p:nvSpPr>
+        <p:spPr>
+          <a:xfrm>
+            <a:off x="6492240" y="2871216"/>
+            <a:ext cx="4645152" cy="658368"/>
+          </a:xfrm>
+          <a:prstGeom prst="rect">
+            <a:avLst/>
+          </a:prstGeom>
+          <a:noFill/>
+          <a:ln/>
+        </p:spPr>
+        <p:txBody>
+          <a:bodyPr wrap="square" lIns="0" tIns="25400" rIns="25400" bIns="0" rtlCol="0" anchor="ctr"/>
+          <a:lstStyle/>
+          <a:p>
+            <a:pPr algn="ctr" indent="0" marL="0">
+              <a:lnSpc>
+                <a:spcPct val="120000"/>
+              </a:lnSpc>
+              <a:buNone/>
+            </a:pPr>
+            <a:r>
+              <a:rPr lang="en-US" sz="1800" dirty="0">
+                <a:solidFill>
+                  <a:srgbClr val="F8F8F8"/>
+                </a:solidFill>
+                <a:latin typeface="Pretendard" pitchFamily="34" charset="0"/>
+                <a:ea typeface="Pretendard" pitchFamily="34" charset="-122"/>
+                <a:cs typeface="Pretendard" pitchFamily="34" charset="-120"/>
+              </a:rPr>
+              <a:t>14  Mixed Object Packing</a:t>
+            </a:r>
+            <a:endParaRPr lang="en-US" sz="1800" dirty="0"/>
+          </a:p>
+        </p:txBody>
+      </p:sp>
+      <p:sp>
+        <p:nvSpPr>
+          <p:cNvPr id="30" name="mdpr:2-2-7bfb60:toc-item-7:toc-item-15"/>
+          <p:cNvSpPr txBox="1"/>
+          <p:nvPr/>
+        </p:nvSpPr>
+        <p:spPr>
+          <a:xfrm>
+            <a:off x="6492240" y="3913632"/>
+            <a:ext cx="4645152" cy="658368"/>
+          </a:xfrm>
+          <a:prstGeom prst="rect">
+            <a:avLst/>
+          </a:prstGeom>
+          <a:noFill/>
+          <a:ln/>
+        </p:spPr>
+        <p:txBody>
+          <a:bodyPr wrap="square" lIns="0" tIns="25400" rIns="25400" bIns="0" rtlCol="0" anchor="ctr"/>
+          <a:lstStyle/>
+          <a:p>
+            <a:pPr algn="ctr" indent="0" marL="0">
+              <a:lnSpc>
+                <a:spcPct val="120000"/>
+              </a:lnSpc>
+              <a:buNone/>
+            </a:pPr>
+            <a:r>
+              <a:rPr lang="en-US" sz="1800" dirty="0">
+                <a:solidFill>
+                  <a:srgbClr val="F8F8F8"/>
+                </a:solidFill>
+                <a:latin typeface="Pretendard" pitchFamily="34" charset="0"/>
+                <a:ea typeface="Pretendard" pitchFamily="34" charset="-122"/>
+                <a:cs typeface="Pretendard" pitchFamily="34" charset="-120"/>
+              </a:rPr>
+              <a:t>15  Actions Output Review</a:t>
+            </a:r>
+            <a:endParaRPr lang="en-US" sz="1800" dirty="0"/>
           </a:p>
         </p:txBody>
       </p:sp>
@@ -24523,36 +23450,9 @@
           </a:ln>
         </p:spPr>
       </p:sp>
-      <p:sp>
-        <p:nvSpPr>
-          <p:cNvPr id="16" name="Shape 14"/>
-          <p:cNvSpPr/>
-          <p:nvPr/>
-        </p:nvSpPr>
-        <p:spPr>
-          <a:xfrm>
-            <a:off x="731520" y="1207008"/>
-            <a:ext cx="1325880" cy="54864"/>
-          </a:xfrm>
-          <a:prstGeom prst="rect">
-            <a:avLst/>
-          </a:prstGeom>
-          <a:solidFill>
-            <a:srgbClr val="7DD3FC"/>
-          </a:solidFill>
-          <a:ln w="12700">
-            <a:solidFill>
-              <a:srgbClr val="7DD3FC">
-                <a:alpha val="0"/>
-              </a:srgbClr>
-            </a:solidFill>
-            <a:prstDash val="solid"/>
-          </a:ln>
-        </p:spPr>
-      </p:sp>
       <p:pic>
         <p:nvPicPr>
-          <p:cNvPr id="17" name="Image 0" descr="preencoded.png">    </p:cNvPr>
+          <p:cNvPr id="16" name="Image 0" descr="preencoded.png">    </p:cNvPr>
           <p:cNvPicPr>
             <a:picLocks noChangeAspect="1"/>
           </p:cNvPicPr>
@@ -24582,7 +23482,7 @@
       </p:pic>
       <p:sp>
         <p:nvSpPr>
-          <p:cNvPr id="18" name="Shape 15"/>
+          <p:cNvPr id="17" name="Shape 14"/>
           <p:cNvSpPr/>
           <p:nvPr/>
         </p:nvSpPr>
@@ -24623,7 +23523,7 @@
       </p:sp>
       <p:sp>
         <p:nvSpPr>
-          <p:cNvPr id="19" name="Shape 16"/>
+          <p:cNvPr id="18" name="Shape 15"/>
           <p:cNvSpPr/>
           <p:nvPr/>
         </p:nvSpPr>
@@ -24652,7 +23552,7 @@
       </p:sp>
       <p:sp>
         <p:nvSpPr>
-          <p:cNvPr id="20" name="Shape 17"/>
+          <p:cNvPr id="19" name="Shape 16"/>
           <p:cNvSpPr/>
           <p:nvPr/>
         </p:nvSpPr>
@@ -24679,7 +23579,7 @@
       </p:sp>
       <p:sp>
         <p:nvSpPr>
-          <p:cNvPr id="21" name="mdpr:teaser-summary-7731dc:title:__title:teaser-summary-7731dc"/>
+          <p:cNvPr id="20" name="mdpr:teaser-summary-7731dc:title:__title:teaser-summary-7731dc"/>
           <p:cNvSpPr txBox="1"/>
           <p:nvPr/>
         </p:nvSpPr>
@@ -24721,7 +23621,7 @@
       </p:sp>
       <p:sp>
         <p:nvSpPr>
-          <p:cNvPr id="22" name="mdpr:teaser-summary-7731dc:key-message:block-3"/>
+          <p:cNvPr id="21" name="mdpr:teaser-summary-7731dc:key-message:block-3"/>
           <p:cNvSpPr txBox="1"/>
           <p:nvPr/>
         </p:nvSpPr>
@@ -24763,7 +23663,7 @@
       </p:sp>
       <p:sp>
         <p:nvSpPr>
-          <p:cNvPr id="23" name="mdpr:teaser-summary-7731dc:body:block-4"/>
+          <p:cNvPr id="22" name="mdpr:teaser-summary-7731dc:body:block-4"/>
           <p:cNvSpPr txBox="1"/>
           <p:nvPr/>
         </p:nvSpPr>
@@ -25414,8 +24314,8 @@
         </p:nvSpPr>
         <p:spPr>
           <a:xfrm>
-            <a:off x="731520" y="1207008"/>
-            <a:ext cx="1325880" cy="54864"/>
+            <a:off x="822960" y="1938528"/>
+            <a:ext cx="73152" cy="2514600"/>
           </a:xfrm>
           <a:prstGeom prst="rect">
             <a:avLst/>
@@ -25433,237 +24333,22 @@
           </a:ln>
         </p:spPr>
       </p:sp>
-      <p:pic>
-        <p:nvPicPr>
-          <p:cNvPr id="17" name="Image 0" descr="preencoded.png">    </p:cNvPr>
-          <p:cNvPicPr>
-            <a:picLocks noChangeAspect="1"/>
-          </p:cNvPicPr>
-          <p:nvPr/>
-        </p:nvPicPr>
-        <p:blipFill>
-          <a:blip r:embed="rId1">
-            <a:extLst>
-              <a:ext uri="{96DAC541-7B7A-43D3-8B79-37D633B846F1}">
-                <asvg:svgBlip xmlns:asvg="http://schemas.microsoft.com/office/drawing/2016/SVG/main" r:embed="rId2"/>
-              </a:ext>
-            </a:extLst>
-          </a:blip>
-          <a:stretch>
-            <a:fillRect/>
-          </a:stretch>
-        </p:blipFill>
-        <p:spPr>
-          <a:xfrm>
-            <a:off x="914400" y="1865376"/>
-            <a:ext cx="10241280" cy="1024128"/>
-          </a:xfrm>
-          <a:prstGeom prst="rect">
-            <a:avLst/>
-          </a:prstGeom>
-        </p:spPr>
-      </p:pic>
-      <p:sp>
-        <p:nvSpPr>
-          <p:cNvPr id="18" name="Shape 15"/>
-          <p:cNvSpPr/>
-          <p:nvPr/>
-        </p:nvSpPr>
-        <p:spPr>
-          <a:xfrm>
-            <a:off x="914400" y="1865376"/>
-            <a:ext cx="10241280" cy="1024128"/>
-          </a:xfrm>
-          <a:prstGeom prst="rect">
-            <a:avLst/>
-          </a:prstGeom>
-          <a:solidFill>
-            <a:srgbClr val="132238">
-              <a:alpha val="0"/>
-            </a:srgbClr>
-          </a:solidFill>
-          <a:ln w="12700">
-            <a:solidFill>
-              <a:srgbClr val="BAE6FD">
-                <a:alpha val="0"/>
-              </a:srgbClr>
-            </a:solidFill>
-            <a:prstDash val="solid"/>
-          </a:ln>
-          <a:effectLst>
-            <a:outerShdw sx="100000" sy="100000" kx="0" ky="0" algn="bl" rotWithShape="0" blurRad="30480" dist="50800" dir="2700000">
-              <a:srgbClr val="CBD5E1">
-                <a:alpha val="20000"/>
-              </a:srgbClr>
-            </a:outerShdw>
-            <a:glow rad="63500">
-              <a:srgbClr val="7DD3FC">
-                <a:alpha val="23000"/>
-              </a:srgbClr>
-            </a:glow>
-          </a:effectLst>
-        </p:spPr>
-      </p:sp>
-      <p:pic>
-        <p:nvPicPr>
-          <p:cNvPr id="19" name="Image 1" descr="preencoded.png">    </p:cNvPr>
-          <p:cNvPicPr>
-            <a:picLocks noChangeAspect="1"/>
-          </p:cNvPicPr>
-          <p:nvPr/>
-        </p:nvPicPr>
-        <p:blipFill>
-          <a:blip r:embed="rId3">
-            <a:extLst>
-              <a:ext uri="{96DAC541-7B7A-43D3-8B79-37D633B846F1}">
-                <asvg:svgBlip xmlns:asvg="http://schemas.microsoft.com/office/drawing/2016/SVG/main" r:embed="rId4"/>
-              </a:ext>
-            </a:extLst>
-          </a:blip>
-          <a:stretch>
-            <a:fillRect/>
-          </a:stretch>
-        </p:blipFill>
-        <p:spPr>
-          <a:xfrm>
-            <a:off x="914400" y="3191256"/>
-            <a:ext cx="10241280" cy="1024128"/>
-          </a:xfrm>
-          <a:prstGeom prst="rect">
-            <a:avLst/>
-          </a:prstGeom>
-        </p:spPr>
-      </p:pic>
-      <p:sp>
-        <p:nvSpPr>
-          <p:cNvPr id="20" name="Shape 16"/>
-          <p:cNvSpPr/>
-          <p:nvPr/>
-        </p:nvSpPr>
-        <p:spPr>
-          <a:xfrm>
-            <a:off x="914400" y="3191256"/>
-            <a:ext cx="10241280" cy="1024128"/>
-          </a:xfrm>
-          <a:prstGeom prst="rect">
-            <a:avLst/>
-          </a:prstGeom>
-          <a:solidFill>
-            <a:srgbClr val="132238">
-              <a:alpha val="0"/>
-            </a:srgbClr>
-          </a:solidFill>
-          <a:ln w="12700">
-            <a:solidFill>
-              <a:srgbClr val="BAE6FD">
-                <a:alpha val="0"/>
-              </a:srgbClr>
-            </a:solidFill>
-            <a:prstDash val="solid"/>
-          </a:ln>
-          <a:effectLst>
-            <a:outerShdw sx="100000" sy="100000" kx="0" ky="0" algn="bl" rotWithShape="0" blurRad="30480" dist="50800" dir="2700000">
-              <a:srgbClr val="CBD5E1">
-                <a:alpha val="20000"/>
-              </a:srgbClr>
-            </a:outerShdw>
-            <a:glow rad="63500">
-              <a:srgbClr val="7DD3FC">
-                <a:alpha val="23000"/>
-              </a:srgbClr>
-            </a:glow>
-          </a:effectLst>
-        </p:spPr>
-      </p:sp>
-      <p:pic>
-        <p:nvPicPr>
-          <p:cNvPr id="21" name="Image 2" descr="preencoded.png">    </p:cNvPr>
-          <p:cNvPicPr>
-            <a:picLocks noChangeAspect="1"/>
-          </p:cNvPicPr>
-          <p:nvPr/>
-        </p:nvPicPr>
-        <p:blipFill>
-          <a:blip r:embed="rId5">
-            <a:extLst>
-              <a:ext uri="{96DAC541-7B7A-43D3-8B79-37D633B846F1}">
-                <asvg:svgBlip xmlns:asvg="http://schemas.microsoft.com/office/drawing/2016/SVG/main" r:embed="rId6"/>
-              </a:ext>
-            </a:extLst>
-          </a:blip>
-          <a:stretch>
-            <a:fillRect/>
-          </a:stretch>
-        </p:blipFill>
-        <p:spPr>
-          <a:xfrm>
-            <a:off x="914400" y="4507992"/>
-            <a:ext cx="10241280" cy="1024128"/>
-          </a:xfrm>
-          <a:prstGeom prst="rect">
-            <a:avLst/>
-          </a:prstGeom>
-        </p:spPr>
-      </p:pic>
-      <p:sp>
-        <p:nvSpPr>
-          <p:cNvPr id="22" name="Shape 17"/>
-          <p:cNvSpPr/>
-          <p:nvPr/>
-        </p:nvSpPr>
-        <p:spPr>
-          <a:xfrm>
-            <a:off x="914400" y="4507992"/>
-            <a:ext cx="10241280" cy="1024128"/>
-          </a:xfrm>
-          <a:prstGeom prst="rect">
-            <a:avLst/>
-          </a:prstGeom>
-          <a:solidFill>
-            <a:srgbClr val="132238">
-              <a:alpha val="0"/>
-            </a:srgbClr>
-          </a:solidFill>
-          <a:ln w="12700">
-            <a:solidFill>
-              <a:srgbClr val="BAE6FD">
-                <a:alpha val="0"/>
-              </a:srgbClr>
-            </a:solidFill>
-            <a:prstDash val="solid"/>
-          </a:ln>
-          <a:effectLst>
-            <a:outerShdw sx="100000" sy="100000" kx="0" ky="0" algn="bl" rotWithShape="0" blurRad="30480" dist="50800" dir="2700000">
-              <a:srgbClr val="CBD5E1">
-                <a:alpha val="20000"/>
-              </a:srgbClr>
-            </a:outerShdw>
-            <a:glow rad="63500">
-              <a:srgbClr val="7DD3FC">
-                <a:alpha val="23000"/>
-              </a:srgbClr>
-            </a:glow>
-          </a:effectLst>
-        </p:spPr>
-      </p:sp>
-      <p:sp>
-        <p:nvSpPr>
-          <p:cNvPr id="23" name="Shape 18"/>
-          <p:cNvSpPr/>
-          <p:nvPr/>
-        </p:nvSpPr>
-        <p:spPr>
-          <a:xfrm>
-            <a:off x="786384" y="1956816"/>
-            <a:ext cx="32004" cy="3483864"/>
-          </a:xfrm>
-          <a:prstGeom prst="rect">
-            <a:avLst/>
-          </a:prstGeom>
-          <a:solidFill>
-            <a:srgbClr val="A78BFA">
-              <a:alpha val="80000"/>
-            </a:srgbClr>
+      <p:sp>
+        <p:nvSpPr>
+          <p:cNvPr id="17" name="Shape 15"/>
+          <p:cNvSpPr/>
+          <p:nvPr/>
+        </p:nvSpPr>
+        <p:spPr>
+          <a:xfrm>
+            <a:off x="4343400" y="1938528"/>
+            <a:ext cx="73152" cy="2514600"/>
+          </a:xfrm>
+          <a:prstGeom prst="rect">
+            <a:avLst/>
+          </a:prstGeom>
+          <a:solidFill>
+            <a:srgbClr val="A78BFA"/>
           </a:solidFill>
           <a:ln w="12700">
             <a:solidFill>
@@ -25677,14 +24362,14 @@
       </p:sp>
       <p:sp>
         <p:nvSpPr>
-          <p:cNvPr id="24" name="Shape 19"/>
-          <p:cNvSpPr/>
-          <p:nvPr/>
-        </p:nvSpPr>
-        <p:spPr>
-          <a:xfrm>
-            <a:off x="914400" y="1865376"/>
-            <a:ext cx="73152" cy="1024128"/>
+          <p:cNvPr id="18" name="Shape 16"/>
+          <p:cNvSpPr/>
+          <p:nvPr/>
+        </p:nvSpPr>
+        <p:spPr>
+          <a:xfrm>
+            <a:off x="7863840" y="1938528"/>
+            <a:ext cx="73152" cy="2514600"/>
           </a:xfrm>
           <a:prstGeom prst="rect">
             <a:avLst/>
@@ -25704,61 +24389,7 @@
       </p:sp>
       <p:sp>
         <p:nvSpPr>
-          <p:cNvPr id="25" name="Shape 20"/>
-          <p:cNvSpPr/>
-          <p:nvPr/>
-        </p:nvSpPr>
-        <p:spPr>
-          <a:xfrm>
-            <a:off x="914400" y="3191256"/>
-            <a:ext cx="73152" cy="1024128"/>
-          </a:xfrm>
-          <a:prstGeom prst="rect">
-            <a:avLst/>
-          </a:prstGeom>
-          <a:solidFill>
-            <a:srgbClr val="A78BFA"/>
-          </a:solidFill>
-          <a:ln w="12700">
-            <a:solidFill>
-              <a:srgbClr val="A78BFA">
-                <a:alpha val="0"/>
-              </a:srgbClr>
-            </a:solidFill>
-            <a:prstDash val="solid"/>
-          </a:ln>
-        </p:spPr>
-      </p:sp>
-      <p:sp>
-        <p:nvSpPr>
-          <p:cNvPr id="26" name="Shape 21"/>
-          <p:cNvSpPr/>
-          <p:nvPr/>
-        </p:nvSpPr>
-        <p:spPr>
-          <a:xfrm>
-            <a:off x="914400" y="4507992"/>
-            <a:ext cx="73152" cy="1024128"/>
-          </a:xfrm>
-          <a:prstGeom prst="rect">
-            <a:avLst/>
-          </a:prstGeom>
-          <a:solidFill>
-            <a:srgbClr val="7DD3FC"/>
-          </a:solidFill>
-          <a:ln w="12700">
-            <a:solidFill>
-              <a:srgbClr val="7DD3FC">
-                <a:alpha val="0"/>
-              </a:srgbClr>
-            </a:solidFill>
-            <a:prstDash val="solid"/>
-          </a:ln>
-        </p:spPr>
-      </p:sp>
-      <p:sp>
-        <p:nvSpPr>
-          <p:cNvPr id="27" name="mdpr:1-2-32ac08:title:__title:1-2-32ac08"/>
+          <p:cNvPr id="19" name="mdpr:1-2-32ac08:title:__title:1-2-32ac08"/>
           <p:cNvSpPr txBox="1"/>
           <p:nvPr/>
         </p:nvSpPr>
@@ -25800,14 +24431,14 @@
       </p:sp>
       <p:sp>
         <p:nvSpPr>
-          <p:cNvPr id="28" name="mdpr:1-2-32ac08:item-1:block-6-chunk-1"/>
+          <p:cNvPr id="20" name="mdpr:1-2-32ac08:item-1:block-6-chunk-1"/>
           <p:cNvSpPr txBox="1"/>
           <p:nvPr/>
         </p:nvSpPr>
         <p:spPr>
           <a:xfrm>
-            <a:off x="1133856" y="1957548"/>
-            <a:ext cx="9820656" cy="839785"/>
+            <a:off x="1042416" y="2103120"/>
+            <a:ext cx="2825496" cy="2185416"/>
           </a:xfrm>
           <a:prstGeom prst="rect">
             <a:avLst/>
@@ -25859,14 +24490,14 @@
       </p:sp>
       <p:sp>
         <p:nvSpPr>
-          <p:cNvPr id="29" name="mdpr:1-2-32ac08:item-2:block-6-chunk-1"/>
+          <p:cNvPr id="21" name="mdpr:1-2-32ac08:item-2:block-6-chunk-1"/>
           <p:cNvSpPr txBox="1"/>
           <p:nvPr/>
         </p:nvSpPr>
         <p:spPr>
           <a:xfrm>
-            <a:off x="1133856" y="3283428"/>
-            <a:ext cx="9820656" cy="839785"/>
+            <a:off x="4562856" y="2103120"/>
+            <a:ext cx="2825496" cy="2185416"/>
           </a:xfrm>
           <a:prstGeom prst="rect">
             <a:avLst/>
@@ -25918,14 +24549,14 @@
       </p:sp>
       <p:sp>
         <p:nvSpPr>
-          <p:cNvPr id="30" name="mdpr:1-2-32ac08:item-3:block-6-chunk-1"/>
+          <p:cNvPr id="22" name="mdpr:1-2-32ac08:item-3:block-6-chunk-1"/>
           <p:cNvSpPr txBox="1"/>
           <p:nvPr/>
         </p:nvSpPr>
         <p:spPr>
           <a:xfrm>
-            <a:off x="1133856" y="4600164"/>
-            <a:ext cx="9820656" cy="839785"/>
+            <a:off x="8083296" y="2103120"/>
+            <a:ext cx="2825496" cy="2185416"/>
           </a:xfrm>
           <a:prstGeom prst="rect">
             <a:avLst/>
@@ -26443,88 +25074,7 @@
       </p:sp>
       <p:sp>
         <p:nvSpPr>
-          <p:cNvPr id="16" name="Shape 14"/>
-          <p:cNvSpPr/>
-          <p:nvPr/>
-        </p:nvSpPr>
-        <p:spPr>
-          <a:xfrm>
-            <a:off x="731520" y="1207008"/>
-            <a:ext cx="1325880" cy="54864"/>
-          </a:xfrm>
-          <a:prstGeom prst="rect">
-            <a:avLst/>
-          </a:prstGeom>
-          <a:solidFill>
-            <a:srgbClr val="7DD3FC"/>
-          </a:solidFill>
-          <a:ln w="12700">
-            <a:solidFill>
-              <a:srgbClr val="7DD3FC">
-                <a:alpha val="0"/>
-              </a:srgbClr>
-            </a:solidFill>
-            <a:prstDash val="solid"/>
-          </a:ln>
-        </p:spPr>
-      </p:sp>
-      <p:sp>
-        <p:nvSpPr>
-          <p:cNvPr id="17" name="Shape 15"/>
-          <p:cNvSpPr/>
-          <p:nvPr/>
-        </p:nvSpPr>
-        <p:spPr>
-          <a:xfrm>
-            <a:off x="822960" y="1554480"/>
-            <a:ext cx="4937760" cy="73152"/>
-          </a:xfrm>
-          <a:prstGeom prst="rect">
-            <a:avLst/>
-          </a:prstGeom>
-          <a:solidFill>
-            <a:srgbClr val="7DD3FC"/>
-          </a:solidFill>
-          <a:ln w="12700">
-            <a:solidFill>
-              <a:srgbClr val="7DD3FC">
-                <a:alpha val="0"/>
-              </a:srgbClr>
-            </a:solidFill>
-            <a:prstDash val="solid"/>
-          </a:ln>
-        </p:spPr>
-      </p:sp>
-      <p:sp>
-        <p:nvSpPr>
-          <p:cNvPr id="18" name="Shape 16"/>
-          <p:cNvSpPr/>
-          <p:nvPr/>
-        </p:nvSpPr>
-        <p:spPr>
-          <a:xfrm>
-            <a:off x="6400800" y="1554480"/>
-            <a:ext cx="4937760" cy="73152"/>
-          </a:xfrm>
-          <a:prstGeom prst="rect">
-            <a:avLst/>
-          </a:prstGeom>
-          <a:solidFill>
-            <a:srgbClr val="7DD3FC"/>
-          </a:solidFill>
-          <a:ln w="12700">
-            <a:solidFill>
-              <a:srgbClr val="7DD3FC">
-                <a:alpha val="0"/>
-              </a:srgbClr>
-            </a:solidFill>
-            <a:prstDash val="solid"/>
-          </a:ln>
-        </p:spPr>
-      </p:sp>
-      <p:sp>
-        <p:nvSpPr>
-          <p:cNvPr id="19" name="mdpr:2-2-14f8eb:title:__title:2-2-14f8eb"/>
+          <p:cNvPr id="16" name="mdpr:2-2-14f8eb:title:__title:2-2-14f8eb"/>
           <p:cNvSpPr txBox="1"/>
           <p:nvPr/>
         </p:nvSpPr>
@@ -26558,7 +25108,24 @@
                 <a:ea typeface="Pretendard" pitchFamily="34" charset="-122"/>
                 <a:cs typeface="Pretendard" pitchFamily="34" charset="-120"/>
               </a:rPr>
-              <a:t>Composition Contract (Cont. 2/2)</a:t>
+              <a:t>Composition Contract</a:t>
+            </a:r>
+            <a:pPr algn="ctr" indent="0" marL="0">
+              <a:lnSpc>
+                <a:spcPct val="120000"/>
+              </a:lnSpc>
+              <a:buNone/>
+            </a:pPr>
+            <a:r>
+              <a:rPr lang="en-US" sz="2000" dirty="0">
+                <a:solidFill>
+                  <a:srgbClr val="6C6C6C"/>
+                </a:solidFill>
+                <a:latin typeface="Pretendard" pitchFamily="34" charset="0"/>
+                <a:ea typeface="Pretendard" pitchFamily="34" charset="-122"/>
+                <a:cs typeface="Pretendard" pitchFamily="34" charset="-120"/>
+              </a:rPr>
+              <a:t> (Cont. 2/2)</a:t>
             </a:r>
             <a:endParaRPr lang="en-US" sz="3400" dirty="0"/>
           </a:p>
@@ -26566,14 +25133,14 @@
       </p:sp>
       <p:sp>
         <p:nvSpPr>
-          <p:cNvPr id="20" name="mdpr:2-2-14f8eb:left:block-6-chunk-2"/>
+          <p:cNvPr id="17" name="mdpr:2-2-14f8eb:left:block-6-chunk-2"/>
           <p:cNvSpPr txBox="1"/>
           <p:nvPr/>
         </p:nvSpPr>
         <p:spPr>
           <a:xfrm>
-            <a:off x="896112" y="1664208"/>
-            <a:ext cx="4791456" cy="4169664"/>
+            <a:off x="896112" y="1463040"/>
+            <a:ext cx="4791456" cy="4261104"/>
           </a:xfrm>
           <a:prstGeom prst="rect">
             <a:avLst/>
@@ -26625,14 +25192,14 @@
       </p:sp>
       <p:sp>
         <p:nvSpPr>
-          <p:cNvPr id="21" name="mdpr:2-2-14f8eb:right:block-6-chunk-2"/>
+          <p:cNvPr id="18" name="mdpr:2-2-14f8eb:right:block-6-chunk-2"/>
           <p:cNvSpPr txBox="1"/>
           <p:nvPr/>
         </p:nvSpPr>
         <p:spPr>
           <a:xfrm>
-            <a:off x="6473952" y="1664208"/>
-            <a:ext cx="4791456" cy="4169664"/>
+            <a:off x="6473952" y="1463040"/>
+            <a:ext cx="4791456" cy="4261104"/>
           </a:xfrm>
           <a:prstGeom prst="rect">
             <a:avLst/>
@@ -27156,8 +25723,8 @@
         </p:nvSpPr>
         <p:spPr>
           <a:xfrm>
-            <a:off x="731520" y="1207008"/>
-            <a:ext cx="1325880" cy="54864"/>
+            <a:off x="822960" y="1938528"/>
+            <a:ext cx="73152" cy="2514600"/>
           </a:xfrm>
           <a:prstGeom prst="rect">
             <a:avLst/>
@@ -27175,237 +25742,22 @@
           </a:ln>
         </p:spPr>
       </p:sp>
-      <p:pic>
-        <p:nvPicPr>
-          <p:cNvPr id="17" name="Image 0" descr="preencoded.png">    </p:cNvPr>
-          <p:cNvPicPr>
-            <a:picLocks noChangeAspect="1"/>
-          </p:cNvPicPr>
-          <p:nvPr/>
-        </p:nvPicPr>
-        <p:blipFill>
-          <a:blip r:embed="rId1">
-            <a:extLst>
-              <a:ext uri="{96DAC541-7B7A-43D3-8B79-37D633B846F1}">
-                <asvg:svgBlip xmlns:asvg="http://schemas.microsoft.com/office/drawing/2016/SVG/main" r:embed="rId2"/>
-              </a:ext>
-            </a:extLst>
-          </a:blip>
-          <a:stretch>
-            <a:fillRect/>
-          </a:stretch>
-        </p:blipFill>
-        <p:spPr>
-          <a:xfrm>
-            <a:off x="914400" y="1865376"/>
-            <a:ext cx="10241280" cy="1024128"/>
-          </a:xfrm>
-          <a:prstGeom prst="rect">
-            <a:avLst/>
-          </a:prstGeom>
-        </p:spPr>
-      </p:pic>
-      <p:sp>
-        <p:nvSpPr>
-          <p:cNvPr id="18" name="Shape 15"/>
-          <p:cNvSpPr/>
-          <p:nvPr/>
-        </p:nvSpPr>
-        <p:spPr>
-          <a:xfrm>
-            <a:off x="914400" y="1865376"/>
-            <a:ext cx="10241280" cy="1024128"/>
-          </a:xfrm>
-          <a:prstGeom prst="rect">
-            <a:avLst/>
-          </a:prstGeom>
-          <a:solidFill>
-            <a:srgbClr val="132238">
-              <a:alpha val="0"/>
-            </a:srgbClr>
-          </a:solidFill>
-          <a:ln w="12700">
-            <a:solidFill>
-              <a:srgbClr val="BAE6FD">
-                <a:alpha val="0"/>
-              </a:srgbClr>
-            </a:solidFill>
-            <a:prstDash val="solid"/>
-          </a:ln>
-          <a:effectLst>
-            <a:outerShdw sx="100000" sy="100000" kx="0" ky="0" algn="bl" rotWithShape="0" blurRad="30480" dist="50800" dir="2700000">
-              <a:srgbClr val="CBD5E1">
-                <a:alpha val="20000"/>
-              </a:srgbClr>
-            </a:outerShdw>
-            <a:glow rad="63500">
-              <a:srgbClr val="7DD3FC">
-                <a:alpha val="23000"/>
-              </a:srgbClr>
-            </a:glow>
-          </a:effectLst>
-        </p:spPr>
-      </p:sp>
-      <p:pic>
-        <p:nvPicPr>
-          <p:cNvPr id="19" name="Image 1" descr="preencoded.png">    </p:cNvPr>
-          <p:cNvPicPr>
-            <a:picLocks noChangeAspect="1"/>
-          </p:cNvPicPr>
-          <p:nvPr/>
-        </p:nvPicPr>
-        <p:blipFill>
-          <a:blip r:embed="rId3">
-            <a:extLst>
-              <a:ext uri="{96DAC541-7B7A-43D3-8B79-37D633B846F1}">
-                <asvg:svgBlip xmlns:asvg="http://schemas.microsoft.com/office/drawing/2016/SVG/main" r:embed="rId4"/>
-              </a:ext>
-            </a:extLst>
-          </a:blip>
-          <a:stretch>
-            <a:fillRect/>
-          </a:stretch>
-        </p:blipFill>
-        <p:spPr>
-          <a:xfrm>
-            <a:off x="914400" y="3191256"/>
-            <a:ext cx="10241280" cy="1024128"/>
-          </a:xfrm>
-          <a:prstGeom prst="rect">
-            <a:avLst/>
-          </a:prstGeom>
-        </p:spPr>
-      </p:pic>
-      <p:sp>
-        <p:nvSpPr>
-          <p:cNvPr id="20" name="Shape 16"/>
-          <p:cNvSpPr/>
-          <p:nvPr/>
-        </p:nvSpPr>
-        <p:spPr>
-          <a:xfrm>
-            <a:off x="914400" y="3191256"/>
-            <a:ext cx="10241280" cy="1024128"/>
-          </a:xfrm>
-          <a:prstGeom prst="rect">
-            <a:avLst/>
-          </a:prstGeom>
-          <a:solidFill>
-            <a:srgbClr val="132238">
-              <a:alpha val="0"/>
-            </a:srgbClr>
-          </a:solidFill>
-          <a:ln w="12700">
-            <a:solidFill>
-              <a:srgbClr val="BAE6FD">
-                <a:alpha val="0"/>
-              </a:srgbClr>
-            </a:solidFill>
-            <a:prstDash val="solid"/>
-          </a:ln>
-          <a:effectLst>
-            <a:outerShdw sx="100000" sy="100000" kx="0" ky="0" algn="bl" rotWithShape="0" blurRad="30480" dist="50800" dir="2700000">
-              <a:srgbClr val="CBD5E1">
-                <a:alpha val="20000"/>
-              </a:srgbClr>
-            </a:outerShdw>
-            <a:glow rad="63500">
-              <a:srgbClr val="7DD3FC">
-                <a:alpha val="23000"/>
-              </a:srgbClr>
-            </a:glow>
-          </a:effectLst>
-        </p:spPr>
-      </p:sp>
-      <p:pic>
-        <p:nvPicPr>
-          <p:cNvPr id="21" name="Image 2" descr="preencoded.png">    </p:cNvPr>
-          <p:cNvPicPr>
-            <a:picLocks noChangeAspect="1"/>
-          </p:cNvPicPr>
-          <p:nvPr/>
-        </p:nvPicPr>
-        <p:blipFill>
-          <a:blip r:embed="rId5">
-            <a:extLst>
-              <a:ext uri="{96DAC541-7B7A-43D3-8B79-37D633B846F1}">
-                <asvg:svgBlip xmlns:asvg="http://schemas.microsoft.com/office/drawing/2016/SVG/main" r:embed="rId6"/>
-              </a:ext>
-            </a:extLst>
-          </a:blip>
-          <a:stretch>
-            <a:fillRect/>
-          </a:stretch>
-        </p:blipFill>
-        <p:spPr>
-          <a:xfrm>
-            <a:off x="914400" y="4507992"/>
-            <a:ext cx="10241280" cy="1024128"/>
-          </a:xfrm>
-          <a:prstGeom prst="rect">
-            <a:avLst/>
-          </a:prstGeom>
-        </p:spPr>
-      </p:pic>
-      <p:sp>
-        <p:nvSpPr>
-          <p:cNvPr id="22" name="Shape 17"/>
-          <p:cNvSpPr/>
-          <p:nvPr/>
-        </p:nvSpPr>
-        <p:spPr>
-          <a:xfrm>
-            <a:off x="914400" y="4507992"/>
-            <a:ext cx="10241280" cy="1024128"/>
-          </a:xfrm>
-          <a:prstGeom prst="rect">
-            <a:avLst/>
-          </a:prstGeom>
-          <a:solidFill>
-            <a:srgbClr val="132238">
-              <a:alpha val="0"/>
-            </a:srgbClr>
-          </a:solidFill>
-          <a:ln w="12700">
-            <a:solidFill>
-              <a:srgbClr val="BAE6FD">
-                <a:alpha val="0"/>
-              </a:srgbClr>
-            </a:solidFill>
-            <a:prstDash val="solid"/>
-          </a:ln>
-          <a:effectLst>
-            <a:outerShdw sx="100000" sy="100000" kx="0" ky="0" algn="bl" rotWithShape="0" blurRad="30480" dist="50800" dir="2700000">
-              <a:srgbClr val="CBD5E1">
-                <a:alpha val="20000"/>
-              </a:srgbClr>
-            </a:outerShdw>
-            <a:glow rad="63500">
-              <a:srgbClr val="7DD3FC">
-                <a:alpha val="23000"/>
-              </a:srgbClr>
-            </a:glow>
-          </a:effectLst>
-        </p:spPr>
-      </p:sp>
-      <p:sp>
-        <p:nvSpPr>
-          <p:cNvPr id="23" name="Shape 18"/>
-          <p:cNvSpPr/>
-          <p:nvPr/>
-        </p:nvSpPr>
-        <p:spPr>
-          <a:xfrm>
-            <a:off x="786384" y="1956816"/>
-            <a:ext cx="32004" cy="3483864"/>
-          </a:xfrm>
-          <a:prstGeom prst="rect">
-            <a:avLst/>
-          </a:prstGeom>
-          <a:solidFill>
-            <a:srgbClr val="A78BFA">
-              <a:alpha val="80000"/>
-            </a:srgbClr>
+      <p:sp>
+        <p:nvSpPr>
+          <p:cNvPr id="17" name="Shape 15"/>
+          <p:cNvSpPr/>
+          <p:nvPr/>
+        </p:nvSpPr>
+        <p:spPr>
+          <a:xfrm>
+            <a:off x="4343400" y="1938528"/>
+            <a:ext cx="73152" cy="2514600"/>
+          </a:xfrm>
+          <a:prstGeom prst="rect">
+            <a:avLst/>
+          </a:prstGeom>
+          <a:solidFill>
+            <a:srgbClr val="A78BFA"/>
           </a:solidFill>
           <a:ln w="12700">
             <a:solidFill>
@@ -27419,14 +25771,14 @@
       </p:sp>
       <p:sp>
         <p:nvSpPr>
-          <p:cNvPr id="24" name="Shape 19"/>
-          <p:cNvSpPr/>
-          <p:nvPr/>
-        </p:nvSpPr>
-        <p:spPr>
-          <a:xfrm>
-            <a:off x="914400" y="1865376"/>
-            <a:ext cx="73152" cy="1024128"/>
+          <p:cNvPr id="18" name="Shape 16"/>
+          <p:cNvSpPr/>
+          <p:nvPr/>
+        </p:nvSpPr>
+        <p:spPr>
+          <a:xfrm>
+            <a:off x="7863840" y="1938528"/>
+            <a:ext cx="73152" cy="2514600"/>
           </a:xfrm>
           <a:prstGeom prst="rect">
             <a:avLst/>
@@ -27446,61 +25798,7 @@
       </p:sp>
       <p:sp>
         <p:nvSpPr>
-          <p:cNvPr id="25" name="Shape 20"/>
-          <p:cNvSpPr/>
-          <p:nvPr/>
-        </p:nvSpPr>
-        <p:spPr>
-          <a:xfrm>
-            <a:off x="914400" y="3191256"/>
-            <a:ext cx="73152" cy="1024128"/>
-          </a:xfrm>
-          <a:prstGeom prst="rect">
-            <a:avLst/>
-          </a:prstGeom>
-          <a:solidFill>
-            <a:srgbClr val="A78BFA"/>
-          </a:solidFill>
-          <a:ln w="12700">
-            <a:solidFill>
-              <a:srgbClr val="A78BFA">
-                <a:alpha val="0"/>
-              </a:srgbClr>
-            </a:solidFill>
-            <a:prstDash val="solid"/>
-          </a:ln>
-        </p:spPr>
-      </p:sp>
-      <p:sp>
-        <p:nvSpPr>
-          <p:cNvPr id="26" name="Shape 21"/>
-          <p:cNvSpPr/>
-          <p:nvPr/>
-        </p:nvSpPr>
-        <p:spPr>
-          <a:xfrm>
-            <a:off x="914400" y="4507992"/>
-            <a:ext cx="73152" cy="1024128"/>
-          </a:xfrm>
-          <a:prstGeom prst="rect">
-            <a:avLst/>
-          </a:prstGeom>
-          <a:solidFill>
-            <a:srgbClr val="7DD3FC"/>
-          </a:solidFill>
-          <a:ln w="12700">
-            <a:solidFill>
-              <a:srgbClr val="7DD3FC">
-                <a:alpha val="0"/>
-              </a:srgbClr>
-            </a:solidFill>
-            <a:prstDash val="solid"/>
-          </a:ln>
-        </p:spPr>
-      </p:sp>
-      <p:sp>
-        <p:nvSpPr>
-          <p:cNvPr id="27" name="mdpr:1-2-dfa474:title:__title:1-2-dfa474"/>
+          <p:cNvPr id="19" name="mdpr:1-2-dfa474:title:__title:1-2-dfa474"/>
           <p:cNvSpPr txBox="1"/>
           <p:nvPr/>
         </p:nvSpPr>
@@ -27542,14 +25840,14 @@
       </p:sp>
       <p:sp>
         <p:nvSpPr>
-          <p:cNvPr id="28" name="mdpr:1-2-dfa474:item-1:block-8-chunk-1"/>
+          <p:cNvPr id="20" name="mdpr:1-2-dfa474:item-1:block-8-chunk-1"/>
           <p:cNvSpPr txBox="1"/>
           <p:nvPr/>
         </p:nvSpPr>
         <p:spPr>
           <a:xfrm>
-            <a:off x="1133856" y="1957548"/>
-            <a:ext cx="9820656" cy="839785"/>
+            <a:off x="1042416" y="2103120"/>
+            <a:ext cx="2825496" cy="2185416"/>
           </a:xfrm>
           <a:prstGeom prst="rect">
             <a:avLst/>
@@ -27601,14 +25899,14 @@
       </p:sp>
       <p:sp>
         <p:nvSpPr>
-          <p:cNvPr id="29" name="mdpr:1-2-dfa474:item-2:block-8-chunk-1"/>
+          <p:cNvPr id="21" name="mdpr:1-2-dfa474:item-2:block-8-chunk-1"/>
           <p:cNvSpPr txBox="1"/>
           <p:nvPr/>
         </p:nvSpPr>
         <p:spPr>
           <a:xfrm>
-            <a:off x="1133856" y="3283428"/>
-            <a:ext cx="9820656" cy="839785"/>
+            <a:off x="4562856" y="2103120"/>
+            <a:ext cx="2825496" cy="2185416"/>
           </a:xfrm>
           <a:prstGeom prst="rect">
             <a:avLst/>
@@ -27660,14 +25958,14 @@
       </p:sp>
       <p:sp>
         <p:nvSpPr>
-          <p:cNvPr id="30" name="mdpr:1-2-dfa474:item-3:block-8-chunk-1"/>
+          <p:cNvPr id="22" name="mdpr:1-2-dfa474:item-3:block-8-chunk-1"/>
           <p:cNvSpPr txBox="1"/>
           <p:nvPr/>
         </p:nvSpPr>
         <p:spPr>
           <a:xfrm>
-            <a:off x="1133856" y="4600164"/>
-            <a:ext cx="9820656" cy="839785"/>
+            <a:off x="8083296" y="2103120"/>
+            <a:ext cx="2825496" cy="2185416"/>
           </a:xfrm>
           <a:prstGeom prst="rect">
             <a:avLst/>
@@ -28185,88 +26483,7 @@
       </p:sp>
       <p:sp>
         <p:nvSpPr>
-          <p:cNvPr id="16" name="Shape 14"/>
-          <p:cNvSpPr/>
-          <p:nvPr/>
-        </p:nvSpPr>
-        <p:spPr>
-          <a:xfrm>
-            <a:off x="731520" y="1207008"/>
-            <a:ext cx="1325880" cy="54864"/>
-          </a:xfrm>
-          <a:prstGeom prst="rect">
-            <a:avLst/>
-          </a:prstGeom>
-          <a:solidFill>
-            <a:srgbClr val="7DD3FC"/>
-          </a:solidFill>
-          <a:ln w="12700">
-            <a:solidFill>
-              <a:srgbClr val="7DD3FC">
-                <a:alpha val="0"/>
-              </a:srgbClr>
-            </a:solidFill>
-            <a:prstDash val="solid"/>
-          </a:ln>
-        </p:spPr>
-      </p:sp>
-      <p:sp>
-        <p:nvSpPr>
-          <p:cNvPr id="17" name="Shape 15"/>
-          <p:cNvSpPr/>
-          <p:nvPr/>
-        </p:nvSpPr>
-        <p:spPr>
-          <a:xfrm>
-            <a:off x="822960" y="1554480"/>
-            <a:ext cx="4937760" cy="73152"/>
-          </a:xfrm>
-          <a:prstGeom prst="rect">
-            <a:avLst/>
-          </a:prstGeom>
-          <a:solidFill>
-            <a:srgbClr val="7DD3FC"/>
-          </a:solidFill>
-          <a:ln w="12700">
-            <a:solidFill>
-              <a:srgbClr val="7DD3FC">
-                <a:alpha val="0"/>
-              </a:srgbClr>
-            </a:solidFill>
-            <a:prstDash val="solid"/>
-          </a:ln>
-        </p:spPr>
-      </p:sp>
-      <p:sp>
-        <p:nvSpPr>
-          <p:cNvPr id="18" name="Shape 16"/>
-          <p:cNvSpPr/>
-          <p:nvPr/>
-        </p:nvSpPr>
-        <p:spPr>
-          <a:xfrm>
-            <a:off x="6400800" y="1554480"/>
-            <a:ext cx="4937760" cy="73152"/>
-          </a:xfrm>
-          <a:prstGeom prst="rect">
-            <a:avLst/>
-          </a:prstGeom>
-          <a:solidFill>
-            <a:srgbClr val="7DD3FC"/>
-          </a:solidFill>
-          <a:ln w="12700">
-            <a:solidFill>
-              <a:srgbClr val="7DD3FC">
-                <a:alpha val="0"/>
-              </a:srgbClr>
-            </a:solidFill>
-            <a:prstDash val="solid"/>
-          </a:ln>
-        </p:spPr>
-      </p:sp>
-      <p:sp>
-        <p:nvSpPr>
-          <p:cNvPr id="19" name="mdpr:2-2-149bde:title:__title:2-2-149bde"/>
+          <p:cNvPr id="16" name="mdpr:2-2-149bde:title:__title:2-2-149bde"/>
           <p:cNvSpPr txBox="1"/>
           <p:nvPr/>
         </p:nvSpPr>
@@ -28300,7 +26517,24 @@
                 <a:ea typeface="Pretendard" pitchFamily="34" charset="-122"/>
                 <a:cs typeface="Pretendard" pitchFamily="34" charset="-120"/>
               </a:rPr>
-              <a:t>Pruned Style Families (Cont. 2/2)</a:t>
+              <a:t>Pruned Style Families</a:t>
+            </a:r>
+            <a:pPr algn="ctr" indent="0" marL="0">
+              <a:lnSpc>
+                <a:spcPct val="120000"/>
+              </a:lnSpc>
+              <a:buNone/>
+            </a:pPr>
+            <a:r>
+              <a:rPr lang="en-US" sz="2000" dirty="0">
+                <a:solidFill>
+                  <a:srgbClr val="6C6C6C"/>
+                </a:solidFill>
+                <a:latin typeface="Pretendard" pitchFamily="34" charset="0"/>
+                <a:ea typeface="Pretendard" pitchFamily="34" charset="-122"/>
+                <a:cs typeface="Pretendard" pitchFamily="34" charset="-120"/>
+              </a:rPr>
+              <a:t> (Cont. 2/2)</a:t>
             </a:r>
             <a:endParaRPr lang="en-US" sz="3400" dirty="0"/>
           </a:p>
@@ -28308,14 +26542,14 @@
       </p:sp>
       <p:sp>
         <p:nvSpPr>
-          <p:cNvPr id="20" name="mdpr:2-2-149bde:left:block-8-chunk-2"/>
+          <p:cNvPr id="17" name="mdpr:2-2-149bde:left:block-8-chunk-2"/>
           <p:cNvSpPr txBox="1"/>
           <p:nvPr/>
         </p:nvSpPr>
         <p:spPr>
           <a:xfrm>
-            <a:off x="896112" y="1664208"/>
-            <a:ext cx="4791456" cy="4169664"/>
+            <a:off x="896112" y="1463040"/>
+            <a:ext cx="4791456" cy="4261104"/>
           </a:xfrm>
           <a:prstGeom prst="rect">
             <a:avLst/>
@@ -28367,14 +26601,14 @@
       </p:sp>
       <p:sp>
         <p:nvSpPr>
-          <p:cNvPr id="21" name="mdpr:2-2-149bde:right:block-8-chunk-2"/>
+          <p:cNvPr id="18" name="mdpr:2-2-149bde:right:block-8-chunk-2"/>
           <p:cNvSpPr txBox="1"/>
           <p:nvPr/>
         </p:nvSpPr>
         <p:spPr>
           <a:xfrm>
-            <a:off x="6473952" y="1664208"/>
-            <a:ext cx="4791456" cy="4169664"/>
+            <a:off x="6473952" y="1463040"/>
+            <a:ext cx="4791456" cy="4261104"/>
           </a:xfrm>
           <a:prstGeom prst="rect">
             <a:avLst/>
@@ -28890,16 +27124,158 @@
           </a:ln>
         </p:spPr>
       </p:sp>
-      <p:sp>
-        <p:nvSpPr>
-          <p:cNvPr id="16" name="Shape 14"/>
-          <p:cNvSpPr/>
-          <p:nvPr/>
-        </p:nvSpPr>
-        <p:spPr>
-          <a:xfrm>
-            <a:off x="731520" y="1207008"/>
-            <a:ext cx="1325880" cy="54864"/>
+      <p:pic>
+        <p:nvPicPr>
+          <p:cNvPr id="16" name="Image 0" descr="preencoded.png">    </p:cNvPr>
+          <p:cNvPicPr>
+            <a:picLocks noChangeAspect="1"/>
+          </p:cNvPicPr>
+          <p:nvPr/>
+        </p:nvPicPr>
+        <p:blipFill>
+          <a:blip r:embed="rId1">
+            <a:extLst>
+              <a:ext uri="{96DAC541-7B7A-43D3-8B79-37D633B846F1}">
+                <asvg:svgBlip xmlns:asvg="http://schemas.microsoft.com/office/drawing/2016/SVG/main" r:embed="rId2"/>
+              </a:ext>
+            </a:extLst>
+          </a:blip>
+          <a:stretch>
+            <a:fillRect/>
+          </a:stretch>
+        </p:blipFill>
+        <p:spPr>
+          <a:xfrm>
+            <a:off x="914400" y="2523744"/>
+            <a:ext cx="10241280" cy="1024128"/>
+          </a:xfrm>
+          <a:prstGeom prst="rect">
+            <a:avLst/>
+          </a:prstGeom>
+        </p:spPr>
+      </p:pic>
+      <p:sp>
+        <p:nvSpPr>
+          <p:cNvPr id="17" name="Shape 14"/>
+          <p:cNvSpPr/>
+          <p:nvPr/>
+        </p:nvSpPr>
+        <p:spPr>
+          <a:xfrm>
+            <a:off x="914400" y="2523744"/>
+            <a:ext cx="10241280" cy="1024128"/>
+          </a:xfrm>
+          <a:prstGeom prst="rect">
+            <a:avLst/>
+          </a:prstGeom>
+          <a:solidFill>
+            <a:srgbClr val="132238">
+              <a:alpha val="0"/>
+            </a:srgbClr>
+          </a:solidFill>
+          <a:ln w="12700">
+            <a:solidFill>
+              <a:srgbClr val="BAE6FD">
+                <a:alpha val="0"/>
+              </a:srgbClr>
+            </a:solidFill>
+            <a:prstDash val="solid"/>
+          </a:ln>
+          <a:effectLst>
+            <a:outerShdw sx="100000" sy="100000" kx="0" ky="0" algn="bl" rotWithShape="0" blurRad="30480" dist="50800" dir="2700000">
+              <a:srgbClr val="CBD5E1">
+                <a:alpha val="20000"/>
+              </a:srgbClr>
+            </a:outerShdw>
+            <a:glow rad="63500">
+              <a:srgbClr val="7DD3FC">
+                <a:alpha val="23000"/>
+              </a:srgbClr>
+            </a:glow>
+          </a:effectLst>
+        </p:spPr>
+      </p:sp>
+      <p:pic>
+        <p:nvPicPr>
+          <p:cNvPr id="18" name="Image 1" descr="preencoded.png">    </p:cNvPr>
+          <p:cNvPicPr>
+            <a:picLocks noChangeAspect="1"/>
+          </p:cNvPicPr>
+          <p:nvPr/>
+        </p:nvPicPr>
+        <p:blipFill>
+          <a:blip r:embed="rId3">
+            <a:extLst>
+              <a:ext uri="{96DAC541-7B7A-43D3-8B79-37D633B846F1}">
+                <asvg:svgBlip xmlns:asvg="http://schemas.microsoft.com/office/drawing/2016/SVG/main" r:embed="rId4"/>
+              </a:ext>
+            </a:extLst>
+          </a:blip>
+          <a:stretch>
+            <a:fillRect/>
+          </a:stretch>
+        </p:blipFill>
+        <p:spPr>
+          <a:xfrm>
+            <a:off x="914400" y="3849624"/>
+            <a:ext cx="10241280" cy="1024128"/>
+          </a:xfrm>
+          <a:prstGeom prst="rect">
+            <a:avLst/>
+          </a:prstGeom>
+        </p:spPr>
+      </p:pic>
+      <p:sp>
+        <p:nvSpPr>
+          <p:cNvPr id="19" name="Shape 15"/>
+          <p:cNvSpPr/>
+          <p:nvPr/>
+        </p:nvSpPr>
+        <p:spPr>
+          <a:xfrm>
+            <a:off x="914400" y="3849624"/>
+            <a:ext cx="10241280" cy="1024128"/>
+          </a:xfrm>
+          <a:prstGeom prst="rect">
+            <a:avLst/>
+          </a:prstGeom>
+          <a:solidFill>
+            <a:srgbClr val="132238">
+              <a:alpha val="0"/>
+            </a:srgbClr>
+          </a:solidFill>
+          <a:ln w="12700">
+            <a:solidFill>
+              <a:srgbClr val="BAE6FD">
+                <a:alpha val="0"/>
+              </a:srgbClr>
+            </a:solidFill>
+            <a:prstDash val="solid"/>
+          </a:ln>
+          <a:effectLst>
+            <a:outerShdw sx="100000" sy="100000" kx="0" ky="0" algn="bl" rotWithShape="0" blurRad="30480" dist="50800" dir="2700000">
+              <a:srgbClr val="CBD5E1">
+                <a:alpha val="20000"/>
+              </a:srgbClr>
+            </a:outerShdw>
+            <a:glow rad="63500">
+              <a:srgbClr val="7DD3FC">
+                <a:alpha val="23000"/>
+              </a:srgbClr>
+            </a:glow>
+          </a:effectLst>
+        </p:spPr>
+      </p:sp>
+      <p:sp>
+        <p:nvSpPr>
+          <p:cNvPr id="20" name="Shape 16"/>
+          <p:cNvSpPr/>
+          <p:nvPr/>
+        </p:nvSpPr>
+        <p:spPr>
+          <a:xfrm>
+            <a:off x="914400" y="2523744"/>
+            <a:ext cx="73152" cy="1024128"/>
           </a:xfrm>
           <a:prstGeom prst="rect">
             <a:avLst/>
@@ -28919,24 +27295,24 @@
       </p:sp>
       <p:sp>
         <p:nvSpPr>
-          <p:cNvPr id="17" name="Shape 15"/>
-          <p:cNvSpPr/>
-          <p:nvPr/>
-        </p:nvSpPr>
-        <p:spPr>
-          <a:xfrm>
-            <a:off x="822960" y="1554480"/>
-            <a:ext cx="4937760" cy="73152"/>
-          </a:xfrm>
-          <a:prstGeom prst="rect">
-            <a:avLst/>
-          </a:prstGeom>
-          <a:solidFill>
-            <a:srgbClr val="7DD3FC"/>
-          </a:solidFill>
-          <a:ln w="12700">
-            <a:solidFill>
-              <a:srgbClr val="7DD3FC">
+          <p:cNvPr id="21" name="Shape 17"/>
+          <p:cNvSpPr/>
+          <p:nvPr/>
+        </p:nvSpPr>
+        <p:spPr>
+          <a:xfrm>
+            <a:off x="914400" y="3849624"/>
+            <a:ext cx="73152" cy="1024128"/>
+          </a:xfrm>
+          <a:prstGeom prst="rect">
+            <a:avLst/>
+          </a:prstGeom>
+          <a:solidFill>
+            <a:srgbClr val="A78BFA"/>
+          </a:solidFill>
+          <a:ln w="12700">
+            <a:solidFill>
+              <a:srgbClr val="A78BFA">
                 <a:alpha val="0"/>
               </a:srgbClr>
             </a:solidFill>
@@ -28946,34 +27322,7 @@
       </p:sp>
       <p:sp>
         <p:nvSpPr>
-          <p:cNvPr id="18" name="Shape 16"/>
-          <p:cNvSpPr/>
-          <p:nvPr/>
-        </p:nvSpPr>
-        <p:spPr>
-          <a:xfrm>
-            <a:off x="6400800" y="1554480"/>
-            <a:ext cx="4937760" cy="73152"/>
-          </a:xfrm>
-          <a:prstGeom prst="rect">
-            <a:avLst/>
-          </a:prstGeom>
-          <a:solidFill>
-            <a:srgbClr val="7DD3FC"/>
-          </a:solidFill>
-          <a:ln w="12700">
-            <a:solidFill>
-              <a:srgbClr val="7DD3FC">
-                <a:alpha val="0"/>
-              </a:srgbClr>
-            </a:solidFill>
-            <a:prstDash val="solid"/>
-          </a:ln>
-        </p:spPr>
-      </p:sp>
-      <p:sp>
-        <p:nvSpPr>
-          <p:cNvPr id="19" name="mdpr:1-2-5a84f1:title:__title:1-2-5a84f1"/>
+          <p:cNvPr id="22" name="mdpr:1-2-5a84f1:title:__title:1-2-5a84f1"/>
           <p:cNvSpPr txBox="1"/>
           <p:nvPr/>
         </p:nvSpPr>
@@ -29015,14 +27364,14 @@
       </p:sp>
       <p:sp>
         <p:nvSpPr>
-          <p:cNvPr id="20" name="mdpr:1-2-5a84f1:left:block-10-chunk-1"/>
+          <p:cNvPr id="23" name="mdpr:1-2-5a84f1:item-1:block-10-chunk-1"/>
           <p:cNvSpPr txBox="1"/>
           <p:nvPr/>
         </p:nvSpPr>
         <p:spPr>
           <a:xfrm>
-            <a:off x="896112" y="1664208"/>
-            <a:ext cx="4791456" cy="4169664"/>
+            <a:off x="1133856" y="2615916"/>
+            <a:ext cx="9820656" cy="839785"/>
           </a:xfrm>
           <a:prstGeom prst="rect">
             <a:avLst/>
@@ -29031,7 +27380,7 @@
           <a:ln/>
         </p:spPr>
         <p:txBody>
-          <a:bodyPr wrap="square" lIns="0" tIns="25400" rIns="25400" bIns="0" rtlCol="0" anchor="t"/>
+          <a:bodyPr wrap="square" lIns="0" tIns="25400" rIns="25400" bIns="0" rtlCol="0" anchor="ctr"/>
           <a:lstStyle/>
           <a:p>
             <a:pPr algn="l" indent="0" marL="0">
@@ -29049,7 +27398,7 @@
                 <a:ea typeface="Pretendard" pitchFamily="34" charset="-122"/>
                 <a:cs typeface="Pretendard" pitchFamily="34" charset="-120"/>
               </a:rPr>
-              <a:t>- Headings</a:t>
+              <a:t>Headings</a:t>
             </a:r>
             <a:pPr algn="l" indent="0" marL="0">
               <a:lnSpc>
@@ -29074,14 +27423,14 @@
       </p:sp>
       <p:sp>
         <p:nvSpPr>
-          <p:cNvPr id="21" name="mdpr:1-2-5a84f1:right:block-10-chunk-1"/>
+          <p:cNvPr id="24" name="mdpr:1-2-5a84f1:item-2:block-10-chunk-1"/>
           <p:cNvSpPr txBox="1"/>
           <p:nvPr/>
         </p:nvSpPr>
         <p:spPr>
           <a:xfrm>
-            <a:off x="6473952" y="1664208"/>
-            <a:ext cx="4791456" cy="4169664"/>
+            <a:off x="1133856" y="3941796"/>
+            <a:ext cx="9820656" cy="839785"/>
           </a:xfrm>
           <a:prstGeom prst="rect">
             <a:avLst/>
@@ -29090,7 +27439,7 @@
           <a:ln/>
         </p:spPr>
         <p:txBody>
-          <a:bodyPr wrap="square" lIns="0" tIns="25400" rIns="25400" bIns="0" rtlCol="0" anchor="t"/>
+          <a:bodyPr wrap="square" lIns="0" tIns="25400" rIns="25400" bIns="0" rtlCol="0" anchor="ctr"/>
           <a:lstStyle/>
           <a:p>
             <a:pPr algn="l" indent="0" marL="0">
@@ -29108,7 +27457,7 @@
                 <a:ea typeface="Pretendard" pitchFamily="34" charset="-122"/>
                 <a:cs typeface="Pretendard" pitchFamily="34" charset="-120"/>
               </a:rPr>
-              <a:t>- Lists</a:t>
+              <a:t>Lists</a:t>
             </a:r>
             <a:pPr algn="l" indent="0" marL="0">
               <a:lnSpc>
